--- a/03-inference-diagnostics-interpretation/slides.pptx
+++ b/03-inference-diagnostics-interpretation/slides.pptx
@@ -25,6 +25,14 @@
     <p:sldId id="273" r:id="rId19"/>
     <p:sldId id="274" r:id="rId20"/>
     <p:sldId id="275" r:id="rId21"/>
+    <p:sldId id="276" r:id="rId22"/>
+    <p:sldId id="277" r:id="rId23"/>
+    <p:sldId id="278" r:id="rId24"/>
+    <p:sldId id="279" r:id="rId25"/>
+    <p:sldId id="280" r:id="rId26"/>
+    <p:sldId id="281" r:id="rId27"/>
+    <p:sldId id="282" r:id="rId28"/>
+    <p:sldId id="283" r:id="rId29"/>
   </p:sldIdLst>
   <p:sldSz cx="9144000" cy="5143500" type="screen16x9"/>
   <p:notesSz cx="6858000" cy="9144000"/>
@@ -3222,6 +3230,1102 @@
           <a:chExt cx="0" cy="0"/>
         </a:xfrm>
       </p:grpSpPr>
+      <mc:AlternateContent xmlns:mc="http://schemas.openxmlformats.org/markup-compatibility/2006">
+        <mc:Choice xmlns:a14="http://schemas.microsoft.com/office/drawing/2010/main" Requires="a14">
+          <p:sp>
+            <p:nvSpPr>
+              <p:cNvPr id="2" name="Title 1"/>
+              <p:cNvSpPr>
+                <a:spLocks noGrp="1"/>
+              </p:cNvSpPr>
+              <p:nvPr>
+                <p:ph type="title"/>
+              </p:nvPr>
+            </p:nvSpPr>
+            <p:spPr/>
+            <p:txBody>
+              <a:bodyPr/>
+              <a:lstStyle/>
+              <a:p>
+                <a:pPr lvl="0" indent="0" marL="0">
+                  <a:buNone/>
+                </a:pPr>
+                <a:r>
+                  <a:rPr/>
+                  <a:t>What OLS assumes about </a:t>
+                </a:r>
+                <a14:m>
+                  <m:oMath xmlns:m="http://schemas.openxmlformats.org/officeDocument/2006/math">
+                    <m:r>
+                      <m:t>ε</m:t>
+                    </m:r>
+                  </m:oMath>
+                </a14:m>
+              </a:p>
+            </p:txBody>
+          </p:sp>
+        </mc:Choice>
+      </mc:AlternateContent>
+      <mc:AlternateContent xmlns:mc="http://schemas.openxmlformats.org/markup-compatibility/2006">
+        <mc:Choice xmlns:a14="http://schemas.microsoft.com/office/drawing/2010/main" Requires="a14">
+          <p:sp>
+            <p:nvSpPr>
+              <p:cNvPr id="3" name="Content Placeholder 2"/>
+              <p:cNvSpPr>
+                <a:spLocks noGrp="1"/>
+              </p:cNvSpPr>
+              <p:nvPr>
+                <p:ph idx="1"/>
+              </p:nvPr>
+            </p:nvSpPr>
+            <p:spPr/>
+            <p:txBody>
+              <a:bodyPr/>
+              <a:lstStyle/>
+              <a:p>
+                <a:pPr lvl="0" indent="0" marL="0">
+                  <a:buNone/>
+                </a:pPr>
+                <a:r>
+                  <a:rPr/>
+                  <a:t>Under </a:t>
+                </a:r>
+                <a14:m>
+                  <m:oMath xmlns:m="http://schemas.openxmlformats.org/officeDocument/2006/math">
+                    <m:r>
+                      <m:t>y</m:t>
+                    </m:r>
+                    <m:r>
+                      <m:rPr>
+                        <m:sty m:val="p"/>
+                      </m:rPr>
+                      <m:t>=</m:t>
+                    </m:r>
+                    <m:r>
+                      <m:t>X</m:t>
+                    </m:r>
+                    <m:r>
+                      <m:t>β</m:t>
+                    </m:r>
+                    <m:r>
+                      <m:rPr>
+                        <m:sty m:val="p"/>
+                      </m:rPr>
+                      <m:t>+</m:t>
+                    </m:r>
+                    <m:r>
+                      <m:t>ε</m:t>
+                    </m:r>
+                  </m:oMath>
+                </a14:m>
+                <a:r>
+                  <a:rPr/>
+                  <a:t>, the classical variance is</a:t>
+                </a:r>
+              </a:p>
+              <a:p>
+                <a:pPr lvl="0" indent="0" marL="0">
+                  <a:buNone/>
+                </a:pPr>
+                <a14:m>
+                  <m:oMathPara xmlns:m="http://schemas.openxmlformats.org/officeDocument/2006/math">
+                    <m:oMathParaPr>
+                      <m:jc m:val="center"/>
+                    </m:oMathParaPr>
+                    <m:oMath>
+                      <m:r>
+                        <m:rPr>
+                          <m:sty m:val="p"/>
+                        </m:rPr>
+                        <m:t>Var</m:t>
+                      </m:r>
+                      <m:d>
+                        <m:dPr>
+                          <m:begChr m:val="("/>
+                          <m:sepChr m:val=""/>
+                          <m:endChr m:val=")"/>
+                          <m:grow/>
+                        </m:dPr>
+                        <m:e>
+                          <m:acc>
+                            <m:accPr>
+                              <m:chr m:val="̂"/>
+                            </m:accPr>
+                            <m:e>
+                              <m:r>
+                                <m:t>β</m:t>
+                              </m:r>
+                            </m:e>
+                          </m:acc>
+                        </m:e>
+                      </m:d>
+                      <m:r>
+                        <m:rPr>
+                          <m:sty m:val="p"/>
+                        </m:rPr>
+                        <m:t>=</m:t>
+                      </m:r>
+                      <m:sSup>
+                        <m:e>
+                          <m:r>
+                            <m:t>σ</m:t>
+                          </m:r>
+                        </m:e>
+                        <m:sup>
+                          <m:r>
+                            <m:t>2</m:t>
+                          </m:r>
+                        </m:sup>
+                      </m:sSup>
+                      <m:sSup>
+                        <m:e>
+                          <m:d>
+                            <m:dPr>
+                              <m:begChr m:val="("/>
+                              <m:sepChr m:val=""/>
+                              <m:endChr m:val=")"/>
+                              <m:grow/>
+                            </m:dPr>
+                            <m:e>
+                              <m:r>
+                                <m:t>X</m:t>
+                              </m:r>
+                              <m:r>
+                                <m:rPr>
+                                  <m:sty m:val="p"/>
+                                </m:rPr>
+                                <m:t>′</m:t>
+                              </m:r>
+                              <m:r>
+                                <m:t>X</m:t>
+                              </m:r>
+                            </m:e>
+                          </m:d>
+                        </m:e>
+                        <m:sup>
+                          <m:r>
+                            <m:rPr>
+                              <m:sty m:val="p"/>
+                            </m:rPr>
+                            <m:t>−</m:t>
+                          </m:r>
+                          <m:r>
+                            <m:t>1</m:t>
+                          </m:r>
+                        </m:sup>
+                      </m:sSup>
+                    </m:oMath>
+                  </m:oMathPara>
+                </a14:m>
+              </a:p>
+              <a:p>
+                <a:pPr lvl="0" indent="0" marL="0">
+                  <a:buNone/>
+                </a:pPr>
+                <a:r>
+                  <a:rPr/>
+                  <a:t>which requires </a:t>
+                </a:r>
+                <a14:m>
+                  <m:oMath xmlns:m="http://schemas.openxmlformats.org/officeDocument/2006/math">
+                    <m:r>
+                      <m:rPr>
+                        <m:sty m:val="p"/>
+                      </m:rPr>
+                      <m:t>Var</m:t>
+                    </m:r>
+                    <m:d>
+                      <m:dPr>
+                        <m:begChr m:val="("/>
+                        <m:sepChr m:val=""/>
+                        <m:endChr m:val=")"/>
+                        <m:grow/>
+                      </m:dPr>
+                      <m:e>
+                        <m:r>
+                          <m:t>ε</m:t>
+                        </m:r>
+                        <m:r>
+                          <m:rPr>
+                            <m:sty m:val="p"/>
+                          </m:rPr>
+                          <m:t>∣</m:t>
+                        </m:r>
+                        <m:r>
+                          <m:t>X</m:t>
+                        </m:r>
+                      </m:e>
+                    </m:d>
+                    <m:r>
+                      <m:rPr>
+                        <m:sty m:val="p"/>
+                      </m:rPr>
+                      <m:t>=</m:t>
+                    </m:r>
+                    <m:sSup>
+                      <m:e>
+                        <m:r>
+                          <m:t>σ</m:t>
+                        </m:r>
+                      </m:e>
+                      <m:sup>
+                        <m:r>
+                          <m:t>2</m:t>
+                        </m:r>
+                      </m:sup>
+                    </m:sSup>
+                    <m:r>
+                      <m:t>I</m:t>
+                    </m:r>
+                  </m:oMath>
+                </a14:m>
+                <a:r>
+                  <a:rPr/>
+                  <a:t> — constant variance, zero correlation.</a:t>
+                </a:r>
+              </a:p>
+              <a:p>
+                <a:pPr lvl="0" indent="0" marL="0">
+                  <a:buNone/>
+                </a:pPr>
+                <a:r>
+                  <a:rPr/>
+                  <a:t>The general (sandwich) form makes no such promise:</a:t>
+                </a:r>
+              </a:p>
+              <a:p>
+                <a:pPr lvl="0" indent="0" marL="0">
+                  <a:buNone/>
+                </a:pPr>
+                <a14:m>
+                  <m:oMathPara xmlns:m="http://schemas.openxmlformats.org/officeDocument/2006/math">
+                    <m:oMathParaPr>
+                      <m:jc m:val="center"/>
+                    </m:oMathParaPr>
+                    <m:oMath>
+                      <m:r>
+                        <m:rPr>
+                          <m:sty m:val="p"/>
+                        </m:rPr>
+                        <m:t>Var</m:t>
+                      </m:r>
+                      <m:d>
+                        <m:dPr>
+                          <m:begChr m:val="("/>
+                          <m:sepChr m:val=""/>
+                          <m:endChr m:val=")"/>
+                          <m:grow/>
+                        </m:dPr>
+                        <m:e>
+                          <m:acc>
+                            <m:accPr>
+                              <m:chr m:val="̂"/>
+                            </m:accPr>
+                            <m:e>
+                              <m:r>
+                                <m:t>β</m:t>
+                              </m:r>
+                            </m:e>
+                          </m:acc>
+                        </m:e>
+                      </m:d>
+                      <m:r>
+                        <m:rPr>
+                          <m:sty m:val="p"/>
+                        </m:rPr>
+                        <m:t>=</m:t>
+                      </m:r>
+                      <m:sSup>
+                        <m:e>
+                          <m:d>
+                            <m:dPr>
+                              <m:begChr m:val="("/>
+                              <m:sepChr m:val=""/>
+                              <m:endChr m:val=")"/>
+                              <m:grow/>
+                            </m:dPr>
+                            <m:e>
+                              <m:r>
+                                <m:t>X</m:t>
+                              </m:r>
+                              <m:r>
+                                <m:rPr>
+                                  <m:sty m:val="p"/>
+                                </m:rPr>
+                                <m:t>′</m:t>
+                              </m:r>
+                              <m:r>
+                                <m:t>X</m:t>
+                              </m:r>
+                            </m:e>
+                          </m:d>
+                        </m:e>
+                        <m:sup>
+                          <m:r>
+                            <m:rPr>
+                              <m:sty m:val="p"/>
+                            </m:rPr>
+                            <m:t>−</m:t>
+                          </m:r>
+                          <m:r>
+                            <m:t>1</m:t>
+                          </m:r>
+                        </m:sup>
+                      </m:sSup>
+                      <m:r>
+                        <m:t> </m:t>
+                      </m:r>
+                      <m:r>
+                        <m:t>X</m:t>
+                      </m:r>
+                      <m:r>
+                        <m:rPr>
+                          <m:sty m:val="p"/>
+                        </m:rPr>
+                        <m:t>′</m:t>
+                      </m:r>
+                      <m:r>
+                        <m:t>Ω</m:t>
+                      </m:r>
+                      <m:r>
+                        <m:t>X</m:t>
+                      </m:r>
+                      <m:r>
+                        <m:t> </m:t>
+                      </m:r>
+                      <m:sSup>
+                        <m:e>
+                          <m:d>
+                            <m:dPr>
+                              <m:begChr m:val="("/>
+                              <m:sepChr m:val=""/>
+                              <m:endChr m:val=")"/>
+                              <m:grow/>
+                            </m:dPr>
+                            <m:e>
+                              <m:r>
+                                <m:t>X</m:t>
+                              </m:r>
+                              <m:r>
+                                <m:rPr>
+                                  <m:sty m:val="p"/>
+                                </m:rPr>
+                                <m:t>′</m:t>
+                              </m:r>
+                              <m:r>
+                                <m:t>X</m:t>
+                              </m:r>
+                            </m:e>
+                          </m:d>
+                        </m:e>
+                        <m:sup>
+                          <m:r>
+                            <m:rPr>
+                              <m:sty m:val="p"/>
+                            </m:rPr>
+                            <m:t>−</m:t>
+                          </m:r>
+                          <m:r>
+                            <m:t>1</m:t>
+                          </m:r>
+                        </m:sup>
+                      </m:sSup>
+                    </m:oMath>
+                  </m:oMathPara>
+                </a14:m>
+              </a:p>
+              <a:p>
+                <a:pPr lvl="0" indent="0" marL="0">
+                  <a:buNone/>
+                </a:pPr>
+                <a:r>
+                  <a:rPr/>
+                  <a:t>Everything below is a different guess at </a:t>
+                </a:r>
+                <a14:m>
+                  <m:oMath xmlns:m="http://schemas.openxmlformats.org/officeDocument/2006/math">
+                    <m:r>
+                      <m:t>Ω</m:t>
+                    </m:r>
+                  </m:oMath>
+                </a14:m>
+                <a:r>
+                  <a:rPr/>
+                  <a:t>. The estimate </a:t>
+                </a:r>
+                <a14:m>
+                  <m:oMath xmlns:m="http://schemas.openxmlformats.org/officeDocument/2006/math">
+                    <m:acc>
+                      <m:accPr>
+                        <m:chr m:val="̂"/>
+                      </m:accPr>
+                      <m:e>
+                        <m:r>
+                          <m:t>β</m:t>
+                        </m:r>
+                      </m:e>
+                    </m:acc>
+                  </m:oMath>
+                </a14:m>
+                <a:r>
+                  <a:rPr/>
+                  <a:t> never changes — only your claimed precision.</a:t>
+                </a:r>
+              </a:p>
+            </p:txBody>
+          </p:sp>
+        </mc:Choice>
+      </mc:AlternateContent>
+    </p:spTree>
+  </p:cSld>
+</p:sld>
+</file>
+
+<file path=ppt/slides/slide11.xml><?xml version="1.0" encoding="UTF-8"?><p:sld xmlns:a="http://schemas.openxmlformats.org/drawingml/2006/main" xmlns:r="http://schemas.openxmlformats.org/officeDocument/2006/relationships" xmlns:p="http://schemas.openxmlformats.org/presentationml/2006/main"><p:cSld><p:spTree><p:nvGrpSpPr><p:cNvPr id="1" name="" /><p:cNvGrpSpPr /><p:nvPr /></p:nvGrpSpPr><p:grpSpPr><a:xfrm><a:off x="0" y="0" /><a:ext cx="0" cy="0" /><a:chOff x="0" y="0" /><a:chExt cx="0" cy="0" /></a:xfrm></p:grpSpPr><mc:AlternateContent xmlns:mc="http://schemas.openxmlformats.org/markup-compatibility/2006"><mc:Choice xmlns:a14="http://schemas.microsoft.com/office/drawing/2010/main" Requires="a14"><p:sp><p:nvSpPr><p:cNvPr id="2" name="Title 1" /><p:cNvSpPr><a:spLocks noGrp="1" /></p:cNvSpPr><p:nvPr><p:ph type="title" /></p:nvPr></p:nvSpPr><p:spPr /><p:txBody><a:bodyPr /><a:lstStyle /><a:p><a:pPr lvl="0" indent="0" marL="0"><a:buNone /></a:pPr><a:r><a:rPr /><a:t>Three estimators of </a:t></a:r><a14:m><m:oMath xmlns:m="http://schemas.openxmlformats.org/officeDocument/2006/math"><m:r><m:t>Ω</m:t></m:r></m:oMath></a14:m></a:p></p:txBody></p:sp></mc:Choice></mc:AlternateContent><p:graphicFrame><p:nvGraphicFramePr><p:cNvPr id="6" name="Content Placeholder 5" /><p:cNvGraphicFramePr><a:graphicFrameLocks noGrp="1" /></p:cNvGraphicFramePr><p:nvPr><p:ph idx="1" /></p:nvPr></p:nvGraphicFramePr><p:xfrm><a:off x="457200" y="1193800" /><a:ext cx="8229600" cy="3390900" /></p:xfrm><a:graphic><a:graphicData uri="http://schemas.openxmlformats.org/drawingml/2006/table"><a:tbl><a:tblPr firstRow="1" bandRow="1"><a:tableStyleId>{5C22544A-7EE6-4342-B048-85BDC9FD1C3A}</a:tableStyleId></a:tblPr><a:tblGrid><a:gridCol w="2743200" /><a:gridCol w="2743200" /><a:gridCol w="2743200" /></a:tblGrid><a:tr h="0"><a:tc><a:txBody><a:bodyPr /><a:lstStyle /><a:p><a:pPr lvl="0" indent="0" marL="0"><a:buNone /></a:pPr><a:r><a:rPr /><a:t>Assumption</a:t></a:r></a:p></a:txBody><a:tcPr /></a:tc><a:tc><a:txBody><a:bodyPr /><a:lstStyle /><a:p><a:pPr lvl="0" indent="0" marL="0"><a:buNone /></a:pPr><a14:m><m:oMath xmlns:m="http://schemas.openxmlformats.org/officeDocument/2006/math"><m:r><m:t>Ω</m:t></m:r></m:oMath></a14:m></a:p></a:txBody><a:tcPr /></a:tc><a:tc><a:txBody><a:bodyPr /><a:lstStyle /><a:p><a:pPr lvl="0" indent="0" marL="0"><a:buNone /></a:pPr><a:r><a:rPr /><a:t>Use when</a:t></a:r></a:p></a:txBody><a:tcPr /></a:tc></a:tr><a:tr h="0"><a:tc><a:txBody><a:bodyPr /><a:lstStyle /><a:p><a:pPr lvl="0" indent="0" marL="0"><a:buNone /></a:pPr><a:r><a:rPr /><a:t>Classical</a:t></a:r></a:p></a:txBody></a:tc><a:tc><a:txBody><a:bodyPr /><a:lstStyle /><a:p><a:pPr lvl="0" indent="0" marL="0"><a:buNone /></a:pPr><a14:m><m:oMath xmlns:m="http://schemas.openxmlformats.org/officeDocument/2006/math"><m:sSup><m:e><m:r><m:t>σ</m:t></m:r></m:e><m:sup><m:r><m:t>2</m:t></m:r></m:sup></m:sSup><m:r><m:t>I</m:t></m:r></m:oMath></a14:m></a:p></a:txBody></a:tc><a:tc><a:txBody><a:bodyPr /><a:lstStyle /><a:p><a:pPr lvl="0" indent="0" marL="0"><a:buNone /></a:pPr><a:r><a:rPr /><a:t>Essentially never with real panels</a:t></a:r></a:p></a:txBody></a:tc></a:tr><a:tr h="0"><a:tc><a:txBody><a:bodyPr /><a:lstStyle /><a:p><a:pPr lvl="0" indent="0" marL="0"><a:buNone /></a:pPr><a:r><a:rPr b="1" /><a:t>HC (robust)</a:t></a:r></a:p></a:txBody></a:tc><a:tc><a:txBody><a:bodyPr /><a:lstStyle /><a:p><a:pPr lvl="0" indent="0" marL="0"><a:buNone /></a:pPr><a14:m><m:oMath xmlns:m="http://schemas.openxmlformats.org/officeDocument/2006/math"><m:r><m:rPr><m:sty m:val="p" /></m:rPr><m:t>diag</m:t></m:r><m:d><m:dPr><m:begChr m:val="(" /><m:sepChr m:val="" /><m:endChr m:val=")" /><m:grow /></m:dPr><m:e><m:sSubSup><m:e><m:r><m:t>e</m:t></m:r></m:e><m:sub><m:r><m:t>i</m:t></m:r></m:sub><m:sup><m:r><m:t>2</m:t></m:r></m:sup></m:sSubSup></m:e></m:d></m:oMath></a14:m></a:p></a:txBody></a:tc><a:tc><a:txBody><a:bodyPr /><a:lstStyle /><a:p><a:pPr lvl="0" indent="0" marL="0"><a:buNone /></a:pPr><a:r><a:rPr /><a:t>Variance differs across units</a:t></a:r></a:p></a:txBody></a:tc></a:tr><a:tr h="0"><a:tc><a:txBody><a:bodyPr /><a:lstStyle /><a:p><a:pPr lvl="0" indent="0" marL="0"><a:buNone /></a:pPr><a:r><a:rPr b="1" /><a:t>Clustered</a:t></a:r></a:p></a:txBody></a:tc><a:tc><a:txBody><a:bodyPr /><a:lstStyle /><a:p><a:pPr lvl="0" indent="0" marL="0"><a:buNone /></a:pPr><a:r><a:rPr /><a:t>Block-diagonal by group</a:t></a:r></a:p></a:txBody></a:tc><a:tc><a:txBody><a:bodyPr /><a:lstStyle /><a:p><a:pPr lvl="0" indent="0" marL="0"><a:buNone /></a:pPr><a:r><a:rPr /><a:t>Observations correlated within a unit</a:t></a:r></a:p></a:txBody></a:tc></a:tr></a:tbl></a:graphicData></a:graphic></p:graphicFrame></p:spTree></p:cSld></p:sld>
+</file>
+
+<file path=ppt/slides/slide12.xml><?xml version="1.0" encoding="utf-8"?>
+<p:sld xmlns:a="http://schemas.openxmlformats.org/drawingml/2006/main" xmlns:r="http://schemas.openxmlformats.org/officeDocument/2006/relationships" xmlns:p="http://schemas.openxmlformats.org/presentationml/2006/main">
+  <p:cSld>
+    <p:spTree>
+      <p:nvGrpSpPr>
+        <p:cNvPr id="1" name=""/>
+        <p:cNvGrpSpPr/>
+        <p:nvPr/>
+      </p:nvGrpSpPr>
+      <p:grpSpPr>
+        <a:xfrm>
+          <a:off x="0" y="0"/>
+          <a:ext cx="0" cy="0"/>
+          <a:chOff x="0" y="0"/>
+          <a:chExt cx="0" cy="0"/>
+        </a:xfrm>
+      </p:grpSpPr>
+      <mc:AlternateContent xmlns:mc="http://schemas.openxmlformats.org/markup-compatibility/2006">
+        <mc:Choice xmlns:a14="http://schemas.microsoft.com/office/drawing/2010/main" Requires="a14">
+          <p:sp>
+            <p:nvSpPr>
+              <p:cNvPr id="3" name="Content Placeholder 2"/>
+              <p:cNvSpPr>
+                <a:spLocks noGrp="1"/>
+              </p:cNvSpPr>
+              <p:nvPr>
+                <p:ph idx="1"/>
+              </p:nvPr>
+            </p:nvSpPr>
+            <p:spPr/>
+            <p:txBody>
+              <a:bodyPr/>
+              <a:lstStyle/>
+              <a:p>
+                <a:pPr lvl="0" indent="0" marL="0">
+                  <a:buNone/>
+                </a:pPr>
+                <a14:m>
+                  <m:oMathPara xmlns:m="http://schemas.openxmlformats.org/officeDocument/2006/math">
+                    <m:oMathParaPr>
+                      <m:jc m:val="center"/>
+                    </m:oMathParaPr>
+                    <m:oMath>
+                      <m:sSub>
+                        <m:e>
+                          <m:acc>
+                            <m:accPr>
+                              <m:chr m:val="̂"/>
+                            </m:accPr>
+                            <m:e>
+                              <m:r>
+                                <m:t>Ω</m:t>
+                              </m:r>
+                            </m:e>
+                          </m:acc>
+                        </m:e>
+                        <m:sub>
+                          <m:r>
+                            <m:rPr>
+                              <m:nor/>
+                              <m:sty m:val="p"/>
+                            </m:rPr>
+                            <m:t>cluster</m:t>
+                          </m:r>
+                        </m:sub>
+                      </m:sSub>
+                      <m:r>
+                        <m:rPr>
+                          <m:sty m:val="p"/>
+                        </m:rPr>
+                        <m:t>=</m:t>
+                      </m:r>
+                      <m:nary>
+                        <m:naryPr>
+                          <m:chr m:val="∑"/>
+                          <m:limLoc m:val="undOvr"/>
+                          <m:subHide m:val="off"/>
+                          <m:supHide m:val="off"/>
+                        </m:naryPr>
+                        <m:sub>
+                          <m:r>
+                            <m:t>g</m:t>
+                          </m:r>
+                          <m:r>
+                            <m:rPr>
+                              <m:sty m:val="p"/>
+                            </m:rPr>
+                            <m:t>=</m:t>
+                          </m:r>
+                          <m:r>
+                            <m:t>1</m:t>
+                          </m:r>
+                        </m:sub>
+                        <m:sup>
+                          <m:r>
+                            <m:t>G</m:t>
+                          </m:r>
+                        </m:sup>
+                        <m:e>
+                          <m:sSub>
+                            <m:e>
+                              <m:r>
+                                <m:t>X</m:t>
+                              </m:r>
+                            </m:e>
+                            <m:sub>
+                              <m:r>
+                                <m:t>g</m:t>
+                              </m:r>
+                            </m:sub>
+                          </m:sSub>
+                        </m:e>
+                      </m:nary>
+                      <m:r>
+                        <m:rPr>
+                          <m:sty m:val="p"/>
+                        </m:rPr>
+                        <m:t>′</m:t>
+                      </m:r>
+                      <m:sSub>
+                        <m:e>
+                          <m:r>
+                            <m:t>e</m:t>
+                          </m:r>
+                        </m:e>
+                        <m:sub>
+                          <m:r>
+                            <m:t>g</m:t>
+                          </m:r>
+                        </m:sub>
+                      </m:sSub>
+                      <m:sSub>
+                        <m:e>
+                          <m:r>
+                            <m:t>e</m:t>
+                          </m:r>
+                        </m:e>
+                        <m:sub>
+                          <m:r>
+                            <m:t>g</m:t>
+                          </m:r>
+                        </m:sub>
+                      </m:sSub>
+                      <m:r>
+                        <m:rPr>
+                          <m:sty m:val="p"/>
+                        </m:rPr>
+                        <m:t>′</m:t>
+                      </m:r>
+                      <m:sSub>
+                        <m:e>
+                          <m:r>
+                            <m:t>X</m:t>
+                          </m:r>
+                        </m:e>
+                        <m:sub>
+                          <m:r>
+                            <m:t>g</m:t>
+                          </m:r>
+                        </m:sub>
+                      </m:sSub>
+                    </m:oMath>
+                  </m:oMathPara>
+                </a14:m>
+              </a:p>
+              <a:p>
+                <a:pPr lvl="0" indent="0" marL="0">
+                  <a:buNone/>
+                </a:pPr>
+                <a:r>
+                  <a:rPr/>
+                  <a:t>Clustering by country lets errors correlate freely </a:t>
+                </a:r>
+                <a:r>
+                  <a:rPr b="1"/>
+                  <a:t>within</a:t>
+                </a:r>
+                <a:r>
+                  <a:rPr/>
+                  <a:t> a country and assumes independence </a:t>
+                </a:r>
+                <a:r>
+                  <a:rPr b="1"/>
+                  <a:t>across</a:t>
+                </a:r>
+                <a:r>
+                  <a:rPr/>
+                  <a:t> countries.</a:t>
+                </a:r>
+              </a:p>
+            </p:txBody>
+          </p:sp>
+        </mc:Choice>
+      </mc:AlternateContent>
+    </p:spTree>
+  </p:cSld>
+</p:sld>
+</file>
+
+<file path=ppt/slides/slide13.xml><?xml version="1.0" encoding="utf-8"?>
+<p:sld xmlns:a="http://schemas.openxmlformats.org/drawingml/2006/main" xmlns:r="http://schemas.openxmlformats.org/officeDocument/2006/relationships" xmlns:p="http://schemas.openxmlformats.org/presentationml/2006/main">
+  <p:cSld>
+    <p:spTree>
+      <p:nvGrpSpPr>
+        <p:cNvPr id="1" name=""/>
+        <p:cNvGrpSpPr/>
+        <p:nvPr/>
+      </p:nvGrpSpPr>
+      <p:grpSpPr>
+        <a:xfrm>
+          <a:off x="0" y="0"/>
+          <a:ext cx="0" cy="0"/>
+          <a:chOff x="0" y="0"/>
+          <a:chExt cx="0" cy="0"/>
+        </a:xfrm>
+      </p:grpSpPr>
+      <p:sp>
+        <p:nvSpPr>
+          <p:cNvPr id="2" name="Title 1"/>
+          <p:cNvSpPr>
+            <a:spLocks noGrp="1"/>
+          </p:cNvSpPr>
+          <p:nvPr>
+            <p:ph type="title"/>
+          </p:nvPr>
+        </p:nvSpPr>
+        <p:spPr/>
+        <p:txBody>
+          <a:bodyPr/>
+          <a:lstStyle/>
+          <a:p>
+            <a:pPr lvl="0" indent="0" marL="0">
+              <a:buNone/>
+            </a:pPr>
+            <a:r>
+              <a:rPr/>
+              <a:t>The omitted-variable formula</a:t>
+            </a:r>
+          </a:p>
+        </p:txBody>
+      </p:sp>
+      <mc:AlternateContent xmlns:mc="http://schemas.openxmlformats.org/markup-compatibility/2006">
+        <mc:Choice xmlns:a14="http://schemas.microsoft.com/office/drawing/2010/main" Requires="a14">
+          <p:sp>
+            <p:nvSpPr>
+              <p:cNvPr id="3" name="Content Placeholder 2"/>
+              <p:cNvSpPr>
+                <a:spLocks noGrp="1"/>
+              </p:cNvSpPr>
+              <p:nvPr>
+                <p:ph idx="1"/>
+              </p:nvPr>
+            </p:nvSpPr>
+            <p:spPr/>
+            <p:txBody>
+              <a:bodyPr/>
+              <a:lstStyle/>
+              <a:p>
+                <a:pPr lvl="0" indent="0" marL="0">
+                  <a:buNone/>
+                </a:pPr>
+                <a:r>
+                  <a:rPr/>
+                  <a:t>If the true model is </a:t>
+                </a:r>
+                <a14:m>
+                  <m:oMath xmlns:m="http://schemas.openxmlformats.org/officeDocument/2006/math">
+                    <m:r>
+                      <m:t>y</m:t>
+                    </m:r>
+                    <m:r>
+                      <m:rPr>
+                        <m:sty m:val="p"/>
+                      </m:rPr>
+                      <m:t>=</m:t>
+                    </m:r>
+                    <m:sSub>
+                      <m:e>
+                        <m:r>
+                          <m:t>X</m:t>
+                        </m:r>
+                      </m:e>
+                      <m:sub>
+                        <m:r>
+                          <m:t>1</m:t>
+                        </m:r>
+                      </m:sub>
+                    </m:sSub>
+                    <m:sSub>
+                      <m:e>
+                        <m:r>
+                          <m:t>β</m:t>
+                        </m:r>
+                      </m:e>
+                      <m:sub>
+                        <m:r>
+                          <m:t>1</m:t>
+                        </m:r>
+                      </m:sub>
+                    </m:sSub>
+                    <m:r>
+                      <m:rPr>
+                        <m:sty m:val="p"/>
+                      </m:rPr>
+                      <m:t>+</m:t>
+                    </m:r>
+                    <m:sSub>
+                      <m:e>
+                        <m:r>
+                          <m:t>X</m:t>
+                        </m:r>
+                      </m:e>
+                      <m:sub>
+                        <m:r>
+                          <m:t>2</m:t>
+                        </m:r>
+                      </m:sub>
+                    </m:sSub>
+                    <m:sSub>
+                      <m:e>
+                        <m:r>
+                          <m:t>β</m:t>
+                        </m:r>
+                      </m:e>
+                      <m:sub>
+                        <m:r>
+                          <m:t>2</m:t>
+                        </m:r>
+                      </m:sub>
+                    </m:sSub>
+                    <m:r>
+                      <m:rPr>
+                        <m:sty m:val="p"/>
+                      </m:rPr>
+                      <m:t>+</m:t>
+                    </m:r>
+                    <m:r>
+                      <m:t>ε</m:t>
+                    </m:r>
+                  </m:oMath>
+                </a14:m>
+                <a:r>
+                  <a:rPr/>
+                  <a:t> and you omit </a:t>
+                </a:r>
+                <a14:m>
+                  <m:oMath xmlns:m="http://schemas.openxmlformats.org/officeDocument/2006/math">
+                    <m:sSub>
+                      <m:e>
+                        <m:r>
+                          <m:t>X</m:t>
+                        </m:r>
+                      </m:e>
+                      <m:sub>
+                        <m:r>
+                          <m:t>2</m:t>
+                        </m:r>
+                      </m:sub>
+                    </m:sSub>
+                  </m:oMath>
+                </a14:m>
+                <a:r>
+                  <a:rPr/>
+                  <a:t>:</a:t>
+                </a:r>
+              </a:p>
+              <a:p>
+                <a:pPr lvl="0" indent="0" marL="0">
+                  <a:buNone/>
+                </a:pPr>
+                <a14:m>
+                  <m:oMathPara xmlns:m="http://schemas.openxmlformats.org/officeDocument/2006/math">
+                    <m:oMathParaPr>
+                      <m:jc m:val="center"/>
+                    </m:oMathParaPr>
+                    <m:oMath>
+                      <m:r>
+                        <m:rPr>
+                          <m:sty m:val="p"/>
+                        </m:rPr>
+                        <m:t>plim</m:t>
+                      </m:r>
+                      <m:sSub>
+                        <m:e>
+                          <m:acc>
+                            <m:accPr>
+                              <m:chr m:val="̂"/>
+                            </m:accPr>
+                            <m:e>
+                              <m:r>
+                                <m:t>β</m:t>
+                              </m:r>
+                            </m:e>
+                          </m:acc>
+                        </m:e>
+                        <m:sub>
+                          <m:r>
+                            <m:t>1</m:t>
+                          </m:r>
+                        </m:sub>
+                      </m:sSub>
+                      <m:r>
+                        <m:rPr>
+                          <m:sty m:val="p"/>
+                        </m:rPr>
+                        <m:t>=</m:t>
+                      </m:r>
+                      <m:sSub>
+                        <m:e>
+                          <m:r>
+                            <m:t>β</m:t>
+                          </m:r>
+                        </m:e>
+                        <m:sub>
+                          <m:r>
+                            <m:t>1</m:t>
+                          </m:r>
+                        </m:sub>
+                      </m:sSub>
+                      <m:r>
+                        <m:rPr>
+                          <m:sty m:val="p"/>
+                        </m:rPr>
+                        <m:t>+</m:t>
+                      </m:r>
+                      <m:limLow>
+                        <m:e>
+                          <m:limLow>
+                            <m:e>
+                              <m:r>
+                                <m:t>δ</m:t>
+                              </m:r>
+                            </m:e>
+                            <m:lim>
+                              <m:r>
+                                <m:rPr>
+                                  <m:sty m:val="p"/>
+                                </m:rPr>
+                                <m:t>⏟</m:t>
+                              </m:r>
+                            </m:lim>
+                          </m:limLow>
+                        </m:e>
+                        <m:lim>
+                          <m:m>
+                            <m:mPr>
+                              <m:baseJc m:val="center"/>
+                              <m:plcHide m:val="on"/>
+                              <m:mcs>
+                                <m:mc>
+                                  <m:mcPr>
+                                    <m:mcJc m:val="center"/>
+                                    <m:count m:val="1"/>
+                                  </m:mcPr>
+                                </m:mc>
+                              </m:mcs>
+                            </m:mPr>
+                            <m:mr>
+                              <m:e>
+                                <m:sSub>
+                                  <m:e>
+                                    <m:r>
+                                      <m:t>X</m:t>
+                                    </m:r>
+                                  </m:e>
+                                  <m:sub>
+                                    <m:r>
+                                      <m:t>2</m:t>
+                                    </m:r>
+                                  </m:sub>
+                                </m:sSub>
+                                <m:r>
+                                  <m:rPr>
+                                    <m:nor/>
+                                    <m:sty m:val="p"/>
+                                  </m:rPr>
+                                  <m:t> on </m:t>
+                                </m:r>
+                                <m:sSub>
+                                  <m:e>
+                                    <m:r>
+                                      <m:t>X</m:t>
+                                    </m:r>
+                                  </m:e>
+                                  <m:sub>
+                                    <m:r>
+                                      <m:t>1</m:t>
+                                    </m:r>
+                                  </m:sub>
+                                </m:sSub>
+                              </m:e>
+                            </m:mr>
+                          </m:m>
+                        </m:lim>
+                      </m:limLow>
+                      <m:r>
+                        <m:t>​</m:t>
+                      </m:r>
+                      <m:r>
+                        <m:rPr>
+                          <m:sty m:val="p"/>
+                        </m:rPr>
+                        <m:t>⋅</m:t>
+                      </m:r>
+                      <m:r>
+                        <m:t> </m:t>
+                      </m:r>
+                      <m:sSub>
+                        <m:e>
+                          <m:r>
+                            <m:t>β</m:t>
+                          </m:r>
+                        </m:e>
+                        <m:sub>
+                          <m:r>
+                            <m:t>2</m:t>
+                          </m:r>
+                        </m:sub>
+                      </m:sSub>
+                    </m:oMath>
+                  </m:oMathPara>
+                </a14:m>
+              </a:p>
+              <a:p>
+                <a:pPr lvl="0" indent="0" marL="0">
+                  <a:buNone/>
+                </a:pPr>
+                <a:r>
+                  <a:rPr/>
+                  <a:t>The bias has a </a:t>
+                </a:r>
+                <a:r>
+                  <a:rPr b="1"/>
+                  <a:t>sign you can reason about</a:t>
+                </a:r>
+                <a:r>
+                  <a:rPr/>
+                  <a:t> before you see any output:</a:t>
+                </a:r>
+              </a:p>
+              <a:p>
+                <a:pPr lvl="0"/>
+                <a14:m>
+                  <m:oMath xmlns:m="http://schemas.openxmlformats.org/officeDocument/2006/math">
+                    <m:r>
+                      <m:t>δ</m:t>
+                    </m:r>
+                    <m:r>
+                      <m:rPr>
+                        <m:sty m:val="p"/>
+                      </m:rPr>
+                      <m:t>&gt;</m:t>
+                    </m:r>
+                    <m:r>
+                      <m:t>0</m:t>
+                    </m:r>
+                  </m:oMath>
+                </a14:m>
+                <a:r>
+                  <a:rPr/>
+                  <a:t> and </a:t>
+                </a:r>
+                <a14:m>
+                  <m:oMath xmlns:m="http://schemas.openxmlformats.org/officeDocument/2006/math">
+                    <m:sSub>
+                      <m:e>
+                        <m:r>
+                          <m:t>β</m:t>
+                        </m:r>
+                      </m:e>
+                      <m:sub>
+                        <m:r>
+                          <m:t>2</m:t>
+                        </m:r>
+                      </m:sub>
+                    </m:sSub>
+                    <m:r>
+                      <m:rPr>
+                        <m:sty m:val="p"/>
+                      </m:rPr>
+                      <m:t>&gt;</m:t>
+                    </m:r>
+                    <m:r>
+                      <m:t>0</m:t>
+                    </m:r>
+                  </m:oMath>
+                </a14:m>
+                <a:r>
+                  <a:rPr/>
+                  <a:t> → upward bias</a:t>
+                </a:r>
+              </a:p>
+              <a:p>
+                <a:pPr lvl="0"/>
+                <a:r>
+                  <a:rPr/>
+                  <a:t>signs opposite → downward bias</a:t>
+                </a:r>
+              </a:p>
+              <a:p>
+                <a:pPr lvl="0" indent="0" marL="0">
+                  <a:buNone/>
+                </a:pPr>
+                <a:r>
+                  <a:rPr/>
+                  <a:t>State the expected direction in writing </a:t>
+                </a:r>
+                <a:r>
+                  <a:rPr i="1"/>
+                  <a:t>before</a:t>
+                </a:r>
+                <a:r>
+                  <a:rPr/>
+                  <a:t> estimating. This is the single most useful discipline in applied work.</a:t>
+                </a:r>
+              </a:p>
+            </p:txBody>
+          </p:sp>
+        </mc:Choice>
+      </mc:AlternateContent>
+    </p:spTree>
+  </p:cSld>
+</p:sld>
+</file>
+
+<file path=ppt/slides/slide14.xml><?xml version="1.0" encoding="utf-8"?>
+<p:sld xmlns:a="http://schemas.openxmlformats.org/drawingml/2006/main" xmlns:r="http://schemas.openxmlformats.org/officeDocument/2006/relationships" xmlns:p="http://schemas.openxmlformats.org/presentationml/2006/main">
+  <p:cSld>
+    <p:spTree>
+      <p:nvGrpSpPr>
+        <p:cNvPr id="1" name=""/>
+        <p:cNvGrpSpPr/>
+        <p:nvPr/>
+      </p:nvGrpSpPr>
+      <p:grpSpPr>
+        <a:xfrm>
+          <a:off x="0" y="0"/>
+          <a:ext cx="0" cy="0"/>
+          <a:chOff x="0" y="0"/>
+          <a:chExt cx="0" cy="0"/>
+        </a:xfrm>
+      </p:grpSpPr>
       <p:sp>
         <p:nvSpPr>
           <p:cNvPr id="2" name="Title 1"/>
@@ -3257,7 +4361,7 @@
 </p:sld>
 </file>
 
-<file path=ppt/slides/slide11.xml><?xml version="1.0" encoding="utf-8"?>
+<file path=ppt/slides/slide15.xml><?xml version="1.0" encoding="utf-8"?>
 <p:sld xmlns:a="http://schemas.openxmlformats.org/drawingml/2006/main" xmlns:r="http://schemas.openxmlformats.org/officeDocument/2006/relationships" xmlns:p="http://schemas.openxmlformats.org/presentationml/2006/main">
   <p:cSld>
     <p:spTree>
@@ -3793,7 +4897,7 @@
 </p:sld>
 </file>
 
-<file path=ppt/slides/slide12.xml><?xml version="1.0" encoding="utf-8"?>
+<file path=ppt/slides/slide16.xml><?xml version="1.0" encoding="utf-8"?>
 <p:sld xmlns:a="http://schemas.openxmlformats.org/drawingml/2006/main" xmlns:r="http://schemas.openxmlformats.org/officeDocument/2006/relationships" xmlns:p="http://schemas.openxmlformats.org/presentationml/2006/main">
   <p:cSld>
     <p:spTree>
@@ -3904,7 +5008,7 @@
 </p:sld>
 </file>
 
-<file path=ppt/slides/slide13.xml><?xml version="1.0" encoding="utf-8"?>
+<file path=ppt/slides/slide17.xml><?xml version="1.0" encoding="utf-8"?>
 <p:sld xmlns:a="http://schemas.openxmlformats.org/drawingml/2006/main" xmlns:r="http://schemas.openxmlformats.org/officeDocument/2006/relationships" xmlns:p="http://schemas.openxmlformats.org/presentationml/2006/main">
   <p:cSld>
     <p:spTree>
@@ -3956,7 +5060,7 @@
 </p:sld>
 </file>
 
-<file path=ppt/slides/slide14.xml><?xml version="1.0" encoding="utf-8"?>
+<file path=ppt/slides/slide18.xml><?xml version="1.0" encoding="utf-8"?>
 <p:sld xmlns:a="http://schemas.openxmlformats.org/drawingml/2006/main" xmlns:r="http://schemas.openxmlformats.org/officeDocument/2006/relationships" xmlns:p="http://schemas.openxmlformats.org/presentationml/2006/main">
   <p:cSld>
     <p:spTree>
@@ -4092,7 +5196,7 @@
                 </a:solidFill>
                 <a:latin typeface="Courier"/>
               </a:rPr>
-              <a:t>"+ np.log(gdp_pc_eur) + C(nace_r2)"</a:t>
+              <a:t>"+ C(nace_r2)"</a:t>
             </a:r>
             <a:r>
               <a:rPr>
@@ -4301,7 +5405,7 @@
 </p:sld>
 </file>
 
-<file path=ppt/slides/slide15.xml><?xml version="1.0" encoding="utf-8"?>
+<file path=ppt/slides/slide19.xml><?xml version="1.0" encoding="utf-8"?>
 <p:sld xmlns:a="http://schemas.openxmlformats.org/drawingml/2006/main" xmlns:r="http://schemas.openxmlformats.org/officeDocument/2006/relationships" xmlns:p="http://schemas.openxmlformats.org/presentationml/2006/main">
   <p:cSld>
     <p:spTree>
@@ -4514,6 +5618,58 @@
             <a:br/>
             <a:br/>
             <a:r>
+              <a:rPr>
+                <a:latin typeface="Courier"/>
+              </a:rPr>
+              <a:t>i </a:t>
+            </a:r>
+            <a:r>
+              <a:rPr>
+                <a:solidFill>
+                  <a:srgbClr val="666666"/>
+                </a:solidFill>
+                <a:latin typeface="Courier"/>
+              </a:rPr>
+              <a:t>=</a:t>
+            </a:r>
+            <a:r>
+              <a:rPr>
+                <a:latin typeface="Courier"/>
+              </a:rPr>
+              <a:t> </a:t>
+            </a:r>
+            <a:r>
+              <a:rPr>
+                <a:solidFill>
+                  <a:srgbClr val="008000"/>
+                </a:solidFill>
+                <a:latin typeface="Courier"/>
+              </a:rPr>
+              <a:t>list</a:t>
+            </a:r>
+            <a:r>
+              <a:rPr>
+                <a:latin typeface="Courier"/>
+              </a:rPr>
+              <a:t>(m.params.index).index(</a:t>
+            </a:r>
+            <a:r>
+              <a:rPr>
+                <a:solidFill>
+                  <a:srgbClr val="4070A0"/>
+                </a:solidFill>
+                <a:latin typeface="Courier"/>
+              </a:rPr>
+              <a:t>"tertiary_share"</a:t>
+            </a:r>
+            <a:r>
+              <a:rPr>
+                <a:latin typeface="Courier"/>
+              </a:rPr>
+              <a:t>)</a:t>
+            </a:r>
+            <a:br/>
+            <a:r>
               <a:rPr b="1">
                 <a:solidFill>
                   <a:srgbClr val="007020"/>
@@ -4650,7 +5806,7 @@
                 </a:solidFill>
                 <a:latin typeface="Courier"/>
               </a:rPr>
-              <a:t> se(tertiary_share) = </a:t>
+              <a:t> se = </a:t>
             </a:r>
             <a:r>
               <a:rPr>
@@ -4665,7 +5821,7 @@
               <a:rPr>
                 <a:latin typeface="Courier"/>
               </a:rPr>
-              <a:t>r</a:t>
+              <a:t>np</a:t>
             </a:r>
             <a:r>
               <a:rPr>
@@ -4680,22 +5836,7 @@
               <a:rPr>
                 <a:latin typeface="Courier"/>
               </a:rPr>
-              <a:t>bse[</a:t>
-            </a:r>
-            <a:r>
-              <a:rPr>
-                <a:solidFill>
-                  <a:srgbClr val="40A070"/>
-                </a:solidFill>
-                <a:latin typeface="Courier"/>
-              </a:rPr>
-              <a:t>1</a:t>
-            </a:r>
-            <a:r>
-              <a:rPr>
-                <a:latin typeface="Courier"/>
-              </a:rPr>
-              <a:t>]</a:t>
+              <a:t>asarray(r.bse)[i]</a:t>
             </a:r>
             <a:r>
               <a:rPr>
@@ -4728,15 +5869,52 @@
             </a:pPr>
             <a:r>
               <a:rPr/>
-              <a:t>The coefficient is identical in all three. Only the standard error moves — and clustered is typically </a:t>
+              <a:t>Index by </a:t>
             </a:r>
             <a:r>
               <a:rPr b="1"/>
-              <a:t>several times</a:t>
+              <a:t>name</a:t>
             </a:r>
             <a:r>
               <a:rPr/>
-              <a:t> the classical one.</a:t>
+              <a:t>, not position. </a:t>
+            </a:r>
+            <a:r>
+              <a:rPr>
+                <a:latin typeface="Courier"/>
+              </a:rPr>
+              <a:t>m.bse</a:t>
+            </a:r>
+            <a:r>
+              <a:rPr/>
+              <a:t> is a name-indexed Series while the robust results return a plain array, so </a:t>
+            </a:r>
+            <a:r>
+              <a:rPr>
+                <a:latin typeface="Courier"/>
+              </a:rPr>
+              <a:t>bse[1]</a:t>
+            </a:r>
+            <a:r>
+              <a:rPr/>
+              <a:t> means different things — or raises — depending on which object you hand it.</a:t>
+            </a:r>
+          </a:p>
+          <a:p>
+            <a:pPr lvl="0" indent="0" marL="0">
+              <a:buNone/>
+            </a:pPr>
+            <a:r>
+              <a:rPr/>
+              <a:t>The coefficient is identical in all three. Only the standard error moves. On this specification the clustered one is about </a:t>
+            </a:r>
+            <a:r>
+              <a:rPr b="1"/>
+              <a:t>3× the classical</a:t>
+            </a:r>
+            <a:r>
+              <a:rPr/>
+              <a:t> — so a t-statistic of 6 was really a t-statistic of 2.</a:t>
             </a:r>
           </a:p>
         </p:txBody>
@@ -4746,7 +5924,352 @@
 </p:sld>
 </file>
 
-<file path=ppt/slides/slide16.xml><?xml version="1.0" encoding="utf-8"?>
+<file path=ppt/slides/slide2.xml><?xml version="1.0" encoding="utf-8"?>
+<p:sld xmlns:a="http://schemas.openxmlformats.org/drawingml/2006/main" xmlns:r="http://schemas.openxmlformats.org/officeDocument/2006/relationships" xmlns:p="http://schemas.openxmlformats.org/presentationml/2006/main">
+  <p:cSld>
+    <p:spTree>
+      <p:nvGrpSpPr>
+        <p:cNvPr id="1" name=""/>
+        <p:cNvGrpSpPr/>
+        <p:nvPr/>
+      </p:nvGrpSpPr>
+      <p:grpSpPr>
+        <a:xfrm>
+          <a:off x="0" y="0"/>
+          <a:ext cx="0" cy="0"/>
+          <a:chOff x="0" y="0"/>
+          <a:chExt cx="0" cy="0"/>
+        </a:xfrm>
+      </p:grpSpPr>
+      <p:sp>
+        <p:nvSpPr>
+          <p:cNvPr id="2" name="Title 1"/>
+          <p:cNvSpPr>
+            <a:spLocks noGrp="1"/>
+          </p:cNvSpPr>
+          <p:nvPr>
+            <p:ph type="title"/>
+          </p:nvPr>
+        </p:nvSpPr>
+        <p:spPr>
+          <a:xfrm>
+            <a:off x="722313" y="3305176"/>
+            <a:ext cx="7772400" cy="1021556"/>
+          </a:xfrm>
+        </p:spPr>
+        <p:txBody>
+          <a:bodyPr/>
+          <a:lstStyle/>
+          <a:p>
+            <a:pPr lvl="0" indent="0" marL="0">
+              <a:buNone/>
+            </a:pPr>
+            <a:r>
+              <a:rPr/>
+              <a:t>Where we are</a:t>
+            </a:r>
+          </a:p>
+        </p:txBody>
+      </p:sp>
+    </p:spTree>
+  </p:cSld>
+</p:sld>
+</file>
+
+<file path=ppt/slides/slide20.xml><?xml version="1.0" encoding="utf-8"?>
+<p:sld xmlns:a="http://schemas.openxmlformats.org/drawingml/2006/main" xmlns:r="http://schemas.openxmlformats.org/officeDocument/2006/relationships" xmlns:p="http://schemas.openxmlformats.org/presentationml/2006/main">
+  <p:cSld>
+    <p:spTree>
+      <p:nvGrpSpPr>
+        <p:cNvPr id="1" name=""/>
+        <p:cNvGrpSpPr/>
+        <p:nvPr/>
+      </p:nvGrpSpPr>
+      <p:grpSpPr>
+        <a:xfrm>
+          <a:off x="0" y="0"/>
+          <a:ext cx="0" cy="0"/>
+          <a:chOff x="0" y="0"/>
+          <a:chExt cx="0" cy="0"/>
+        </a:xfrm>
+      </p:grpSpPr>
+      <p:sp>
+        <p:nvSpPr>
+          <p:cNvPr id="2" name="Title 1"/>
+          <p:cNvSpPr>
+            <a:spLocks noGrp="1"/>
+          </p:cNvSpPr>
+          <p:nvPr>
+            <p:ph type="title"/>
+          </p:nvPr>
+        </p:nvSpPr>
+        <p:spPr/>
+        <p:txBody>
+          <a:bodyPr/>
+          <a:lstStyle/>
+          <a:p>
+            <a:pPr lvl="0" indent="0" marL="0">
+              <a:buNone/>
+            </a:pPr>
+            <a:r>
+              <a:rPr/>
+              <a:t>Clustering stops mattering — watch</a:t>
+            </a:r>
+          </a:p>
+        </p:txBody>
+      </p:sp>
+      <p:sp>
+        <p:nvSpPr>
+          <p:cNvPr id="3" name="Content Placeholder 2"/>
+          <p:cNvSpPr>
+            <a:spLocks noGrp="1"/>
+          </p:cNvSpPr>
+          <p:nvPr>
+            <p:ph idx="1"/>
+          </p:nvPr>
+        </p:nvSpPr>
+        <p:spPr/>
+        <p:txBody>
+          <a:bodyPr/>
+          <a:lstStyle/>
+          <a:p>
+            <a:pPr lvl="0" indent="0" marL="0">
+              <a:buNone/>
+            </a:pPr>
+            <a:r>
+              <a:rPr/>
+              <a:t>Add a country-level control and re-run:</a:t>
+            </a:r>
+          </a:p>
+          <a:p>
+            <a:pPr lvl="0" indent="0">
+              <a:buNone/>
+            </a:pPr>
+            <a:r>
+              <a:rPr>
+                <a:latin typeface="Courier"/>
+              </a:rPr>
+              <a:t>m2 </a:t>
+            </a:r>
+            <a:r>
+              <a:rPr>
+                <a:solidFill>
+                  <a:srgbClr val="666666"/>
+                </a:solidFill>
+                <a:latin typeface="Courier"/>
+              </a:rPr>
+              <a:t>=</a:t>
+            </a:r>
+            <a:r>
+              <a:rPr>
+                <a:latin typeface="Courier"/>
+              </a:rPr>
+              <a:t> smf.ols(</a:t>
+            </a:r>
+            <a:r>
+              <a:rPr>
+                <a:solidFill>
+                  <a:srgbClr val="4070A0"/>
+                </a:solidFill>
+                <a:latin typeface="Courier"/>
+              </a:rPr>
+              <a:t>"np.log(annual_earnings_eur) ~ tertiary_share + vacancy_rate "</a:t>
+            </a:r>
+            <a:br/>
+            <a:r>
+              <a:rPr>
+                <a:latin typeface="Courier"/>
+              </a:rPr>
+              <a:t>             </a:t>
+            </a:r>
+            <a:r>
+              <a:rPr>
+                <a:solidFill>
+                  <a:srgbClr val="4070A0"/>
+                </a:solidFill>
+                <a:latin typeface="Courier"/>
+              </a:rPr>
+              <a:t>"+ np.log(gdp_pc_eur) + C(nace_r2)"</a:t>
+            </a:r>
+            <a:r>
+              <a:rPr>
+                <a:latin typeface="Courier"/>
+              </a:rPr>
+              <a:t>, data</a:t>
+            </a:r>
+            <a:r>
+              <a:rPr>
+                <a:solidFill>
+                  <a:srgbClr val="666666"/>
+                </a:solidFill>
+                <a:latin typeface="Courier"/>
+              </a:rPr>
+              <a:t>=</a:t>
+            </a:r>
+            <a:r>
+              <a:rPr>
+                <a:latin typeface="Courier"/>
+              </a:rPr>
+              <a:t>df).fit()</a:t>
+            </a:r>
+          </a:p>
+          <a:p>
+            <a:pPr lvl="0" indent="0" marL="0">
+              <a:buNone/>
+            </a:pPr>
+            <a:r>
+              <a:rPr/>
+              <a:t>Now classical and clustered standard errors are </a:t>
+            </a:r>
+            <a:r>
+              <a:rPr b="1"/>
+              <a:t>almost identical</a:t>
+            </a:r>
+            <a:r>
+              <a:rPr/>
+              <a:t> — the ratio falls to about 1.0.</a:t>
+            </a:r>
+          </a:p>
+        </p:txBody>
+      </p:sp>
+    </p:spTree>
+  </p:cSld>
+</p:sld>
+</file>
+
+<file path=ppt/slides/slide21.xml><?xml version="1.0" encoding="utf-8"?>
+<p:sld xmlns:a="http://schemas.openxmlformats.org/drawingml/2006/main" xmlns:r="http://schemas.openxmlformats.org/officeDocument/2006/relationships" xmlns:p="http://schemas.openxmlformats.org/presentationml/2006/main">
+  <p:cSld>
+    <p:spTree>
+      <p:nvGrpSpPr>
+        <p:cNvPr id="1" name=""/>
+        <p:cNvGrpSpPr/>
+        <p:nvPr/>
+      </p:nvGrpSpPr>
+      <p:grpSpPr>
+        <a:xfrm>
+          <a:off x="0" y="0"/>
+          <a:ext cx="0" cy="0"/>
+          <a:chOff x="0" y="0"/>
+          <a:chExt cx="0" cy="0"/>
+        </a:xfrm>
+      </p:grpSpPr>
+      <p:sp>
+        <p:nvSpPr>
+          <p:cNvPr id="2" name="Title 1"/>
+          <p:cNvSpPr>
+            <a:spLocks noGrp="1"/>
+          </p:cNvSpPr>
+          <p:nvPr>
+            <p:ph type="title"/>
+          </p:nvPr>
+        </p:nvSpPr>
+        <p:spPr/>
+        <p:txBody>
+          <a:bodyPr/>
+          <a:lstStyle/>
+          <a:p>
+            <a:pPr lvl="0" indent="0" marL="0">
+              <a:buNone/>
+            </a:pPr>
+            <a:r>
+              <a:rPr/>
+              <a:t>Why that happened</a:t>
+            </a:r>
+          </a:p>
+        </p:txBody>
+      </p:sp>
+      <p:sp>
+        <p:nvSpPr>
+          <p:cNvPr id="3" name="Content Placeholder 2"/>
+          <p:cNvSpPr>
+            <a:spLocks noGrp="1"/>
+          </p:cNvSpPr>
+          <p:nvPr>
+            <p:ph idx="1"/>
+          </p:nvPr>
+        </p:nvSpPr>
+        <p:spPr/>
+        <p:txBody>
+          <a:bodyPr/>
+          <a:lstStyle/>
+          <a:p>
+            <a:pPr lvl="0" indent="0" marL="0">
+              <a:buNone/>
+            </a:pPr>
+            <a:r>
+              <a:rPr>
+                <a:latin typeface="Courier"/>
+              </a:rPr>
+              <a:t>log(gdp_pc_eur)</a:t>
+            </a:r>
+            <a:r>
+              <a:rPr/>
+              <a:t> varies at the country-year level. Putting it in the model </a:t>
+            </a:r>
+            <a:r>
+              <a:rPr b="1"/>
+              <a:t>absorbs the common shock</a:t>
+            </a:r>
+            <a:r>
+              <a:rPr/>
+              <a:t> that was making residuals correlate within a country. There is little correlation left for clustering to correct.</a:t>
+            </a:r>
+          </a:p>
+          <a:p>
+            <a:pPr lvl="0"/>
+            <a:r>
+              <a:rPr/>
+              <a:t>Clustered SEs matter when a </a:t>
+            </a:r>
+            <a:r>
+              <a:rPr b="1"/>
+              <a:t>shared, unmodelled</a:t>
+            </a:r>
+            <a:r>
+              <a:rPr/>
+              <a:t> shock is in the residual</a:t>
+            </a:r>
+          </a:p>
+          <a:p>
+            <a:pPr lvl="0"/>
+            <a:r>
+              <a:rPr/>
+              <a:t>Model that shock explicitly and the correction shrinks</a:t>
+            </a:r>
+          </a:p>
+          <a:p>
+            <a:pPr lvl="0"/>
+            <a:r>
+              <a:rPr/>
+              <a:t>Neither route is cheating; they are the same fact handled in two places</a:t>
+            </a:r>
+          </a:p>
+          <a:p>
+            <a:pPr lvl="0" indent="0" marL="0">
+              <a:buNone/>
+            </a:pPr>
+            <a:r>
+              <a:rPr/>
+              <a:t>Do </a:t>
+            </a:r>
+            <a:r>
+              <a:rPr b="1"/>
+              <a:t>not</a:t>
+            </a:r>
+            <a:r>
+              <a:rPr/>
+              <a:t> conclude “clustering never matters, just add controls”. A control that absorbs the shock may also absorb the variation you wanted to study.</a:t>
+            </a:r>
+          </a:p>
+        </p:txBody>
+      </p:sp>
+    </p:spTree>
+  </p:cSld>
+</p:sld>
+</file>
+
+<file path=ppt/slides/slide22.xml><?xml version="1.0" encoding="utf-8"?>
 <p:sld xmlns:a="http://schemas.openxmlformats.org/drawingml/2006/main" xmlns:r="http://schemas.openxmlformats.org/officeDocument/2006/relationships" xmlns:p="http://schemas.openxmlformats.org/presentationml/2006/main">
   <p:cSld>
     <p:spTree>
@@ -4880,7 +6403,7 @@
 </p:sld>
 </file>
 
-<file path=ppt/slides/slide17.xml><?xml version="1.0" encoding="utf-8"?>
+<file path=ppt/slides/slide23.xml><?xml version="1.0" encoding="utf-8"?>
 <p:sld xmlns:a="http://schemas.openxmlformats.org/drawingml/2006/main" xmlns:r="http://schemas.openxmlformats.org/officeDocument/2006/relationships" xmlns:p="http://schemas.openxmlformats.org/presentationml/2006/main">
   <p:cSld>
     <p:spTree>
@@ -5237,7 +6760,7 @@
 </p:sld>
 </file>
 
-<file path=ppt/slides/slide18.xml><?xml version="1.0" encoding="utf-8"?>
+<file path=ppt/slides/slide24.xml><?xml version="1.0" encoding="utf-8"?>
 <p:sld xmlns:a="http://schemas.openxmlformats.org/drawingml/2006/main" xmlns:r="http://schemas.openxmlformats.org/officeDocument/2006/relationships" xmlns:p="http://schemas.openxmlformats.org/presentationml/2006/main">
   <p:cSld>
     <p:spTree>
@@ -5361,10 +6884,7 @@
 </p:sld>
 </file>
 
-<file path=ppt/slides/slide19.xml><?xml version="1.0" encoding="UTF-8"?><p:sld xmlns:a="http://schemas.openxmlformats.org/drawingml/2006/main" xmlns:r="http://schemas.openxmlformats.org/officeDocument/2006/relationships" xmlns:p="http://schemas.openxmlformats.org/presentationml/2006/main"><p:cSld><p:spTree><p:nvGrpSpPr><p:cNvPr id="1" name="" /><p:cNvGrpSpPr /><p:nvPr /></p:nvGrpSpPr><p:grpSpPr><a:xfrm><a:off x="0" y="0" /><a:ext cx="0" cy="0" /><a:chOff x="0" y="0" /><a:chExt cx="0" cy="0" /></a:xfrm></p:grpSpPr><p:sp><p:nvSpPr><p:cNvPr id="2" name="Title 1" /><p:cNvSpPr><a:spLocks noGrp="1" /></p:cNvSpPr><p:nvPr><p:ph type="title" /></p:nvPr></p:nvSpPr><p:spPr /><p:txBody><a:bodyPr /><a:lstStyle /><a:p><a:pPr lvl="0" indent="0" marL="0"><a:buNone /></a:pPr><a:r><a:rPr /><a:t>Common mistakes</a:t></a:r></a:p></p:txBody></p:sp><p:graphicFrame><p:nvGraphicFramePr><p:cNvPr id="6" name="Content Placeholder 5" /><p:cNvGraphicFramePr><a:graphicFrameLocks noGrp="1" /></p:cNvGraphicFramePr><p:nvPr><p:ph idx="1" /></p:nvPr></p:nvGraphicFramePr><p:xfrm><a:off x="457200" y="1193800" /><a:ext cx="8229600" cy="3390900" /></p:xfrm><a:graphic><a:graphicData uri="http://schemas.openxmlformats.org/drawingml/2006/table"><a:tbl><a:tblPr firstRow="1" bandRow="1"><a:tableStyleId>{5C22544A-7EE6-4342-B048-85BDC9FD1C3A}</a:tableStyleId></a:tblPr><a:tblGrid><a:gridCol w="4114800" /><a:gridCol w="4114800" /></a:tblGrid><a:tr h="0"><a:tc><a:txBody><a:bodyPr /><a:lstStyle /><a:p><a:pPr lvl="0" indent="0" marL="0"><a:buNone /></a:pPr><a:r><a:rPr /><a:t>Mistake</a:t></a:r></a:p></a:txBody><a:tcPr /></a:tc><a:tc><a:txBody><a:bodyPr /><a:lstStyle /><a:p><a:pPr lvl="0" indent="0" marL="0"><a:buNone /></a:pPr><a:r><a:rPr /><a:t>Consequence</a:t></a:r></a:p></a:txBody><a:tcPr /></a:tc></a:tr><a:tr h="0"><a:tc><a:txBody><a:bodyPr /><a:lstStyle /><a:p><a:pPr lvl="0" indent="0" marL="0"><a:buNone /></a:pPr><a:r><a:rPr /><a:t>Default standard errors on panel data</a:t></a:r></a:p></a:txBody></a:tc><a:tc><a:txBody><a:bodyPr /><a:lstStyle /><a:p><a:pPr lvl="0" indent="0" marL="0"><a:buNone /></a:pPr><a:r><a:rPr /><a:t>Intervals far too narrow</a:t></a:r></a:p></a:txBody></a:tc></a:tr><a:tr h="0"><a:tc><a:txBody><a:bodyPr /><a:lstStyle /><a:p><a:pPr lvl="0" indent="0" marL="0"><a:buNone /></a:pPr><a:r><a:rPr /><a:t>Clustering on the wrong level</a:t></a:r></a:p></a:txBody></a:tc><a:tc><a:txBody><a:bodyPr /><a:lstStyle /><a:p><a:pPr lvl="0" indent="0" marL="0"><a:buNone /></a:pPr><a:r><a:rPr /><a:t>Precision over- or under-stated</a:t></a:r></a:p></a:txBody></a:tc></a:tr><a:tr h="0"><a:tc><a:txBody><a:bodyPr /><a:lstStyle /><a:p><a:pPr lvl="0" indent="0" marL="0"><a:buNone /></a:pPr><a:r><a:rPr /><a:t>“Controlling for everything”</a:t></a:r></a:p></a:txBody></a:tc><a:tc><a:txBody><a:bodyPr /><a:lstStyle /><a:p><a:pPr lvl="0" indent="0" marL="0"><a:buNone /></a:pPr><a:r><a:rPr /><a:t>Post-treatment bias; uninterpretable coefficients</a:t></a:r></a:p></a:txBody></a:tc></a:tr><a:tr h="0"><a:tc><a:txBody><a:bodyPr /><a:lstStyle /><a:p><a:pPr lvl="0" indent="0" marL="0"><a:buNone /></a:pPr><a:r><a:rPr /><a:t>Reading significance from </a:t></a:r><a14:m><m:oMath xmlns:m="http://schemas.openxmlformats.org/officeDocument/2006/math"><m:r><m:t>n</m:t></m:r><m:r><m:rPr><m:sty m:val="p" /></m:rPr><m:t>=</m:t></m:r><m:r><m:t>3150</m:t></m:r></m:oMath></a14:m></a:p></a:txBody></a:tc><a:tc><a:txBody><a:bodyPr /><a:lstStyle /><a:p><a:pPr lvl="0" indent="0" marL="0"><a:buNone /></a:pPr><a:r><a:rPr /><a:t>You have 30 independent units</a:t></a:r></a:p></a:txBody></a:tc></a:tr><a:tr h="0"><a:tc><a:txBody><a:bodyPr /><a:lstStyle /><a:p><a:pPr lvl="0" indent="0" marL="0"><a:buNone /></a:pPr><a:r><a:rPr /><a:t>Dropping </a:t></a:r><a:r><a:rPr><a:latin typeface="Courier" /></a:rPr><a:t>flag == &quot;u&quot;</a:t></a:r><a:r><a:rPr /><a:t> rows</a:t></a:r></a:p></a:txBody></a:tc><a:tc><a:txBody><a:bodyPr /><a:lstStyle /><a:p><a:pPr lvl="0" indent="0" marL="0"><a:buNone /></a:pPr><a:r><a:rPr /><a:t>Coverage biased toward large economies</a:t></a:r></a:p></a:txBody></a:tc></a:tr></a:tbl></a:graphicData></a:graphic></p:graphicFrame></p:spTree></p:cSld></p:sld>
-</file>
-
-<file path=ppt/slides/slide2.xml><?xml version="1.0" encoding="utf-8"?>
+<file path=ppt/slides/slide25.xml><?xml version="1.0" encoding="utf-8"?>
 <p:sld xmlns:a="http://schemas.openxmlformats.org/drawingml/2006/main" xmlns:r="http://schemas.openxmlformats.org/officeDocument/2006/relationships" xmlns:p="http://schemas.openxmlformats.org/presentationml/2006/main">
   <p:cSld>
     <p:spTree>
@@ -5391,12 +6911,7 @@
             <p:ph type="title"/>
           </p:nvPr>
         </p:nvSpPr>
-        <p:spPr>
-          <a:xfrm>
-            <a:off x="722313" y="3305176"/>
-            <a:ext cx="7772400" cy="1021556"/>
-          </a:xfrm>
-        </p:spPr>
+        <p:spPr/>
         <p:txBody>
           <a:bodyPr/>
           <a:lstStyle/>
@@ -5406,937 +6921,11 @@
             </a:pPr>
             <a:r>
               <a:rPr/>
-              <a:t>The question</a:t>
-            </a:r>
-          </a:p>
-        </p:txBody>
-      </p:sp>
-    </p:spTree>
-  </p:cSld>
-</p:sld>
-</file>
-
-<file path=ppt/slides/slide20.xml><?xml version="1.0" encoding="utf-8"?>
-<p:sld xmlns:a="http://schemas.openxmlformats.org/drawingml/2006/main" xmlns:r="http://schemas.openxmlformats.org/officeDocument/2006/relationships" xmlns:p="http://schemas.openxmlformats.org/presentationml/2006/main">
-  <p:cSld>
-    <p:spTree>
-      <p:nvGrpSpPr>
-        <p:cNvPr id="1" name=""/>
-        <p:cNvGrpSpPr/>
-        <p:nvPr/>
-      </p:nvGrpSpPr>
-      <p:grpSpPr>
-        <a:xfrm>
-          <a:off x="0" y="0"/>
-          <a:ext cx="0" cy="0"/>
-          <a:chOff x="0" y="0"/>
-          <a:chExt cx="0" cy="0"/>
-        </a:xfrm>
-      </p:grpSpPr>
-      <p:sp>
-        <p:nvSpPr>
-          <p:cNvPr id="2" name="Title 1"/>
-          <p:cNvSpPr>
-            <a:spLocks noGrp="1"/>
-          </p:cNvSpPr>
-          <p:nvPr>
-            <p:ph type="title"/>
-          </p:nvPr>
-        </p:nvSpPr>
-        <p:spPr/>
-        <p:txBody>
-          <a:bodyPr/>
-          <a:lstStyle/>
-          <a:p>
-            <a:pPr lvl="0" indent="0" marL="0">
-              <a:buNone/>
-            </a:pPr>
-            <a:r>
-              <a:rPr/>
-              <a:t>In the lab</a:t>
-            </a:r>
-          </a:p>
-        </p:txBody>
-      </p:sp>
-      <p:sp>
-        <p:nvSpPr>
-          <p:cNvPr id="3" name="Content Placeholder 2"/>
-          <p:cNvSpPr>
-            <a:spLocks noGrp="1"/>
-          </p:cNvSpPr>
-          <p:nvPr>
-            <p:ph idx="1"/>
-          </p:nvPr>
-        </p:nvSpPr>
-        <p:spPr/>
-        <p:txBody>
-          <a:bodyPr/>
-          <a:lstStyle/>
-          <a:p>
-            <a:pPr lvl="0" indent="0" marL="0">
-              <a:buNone/>
-            </a:pPr>
-            <a:r>
-              <a:rPr/>
-              <a:t>Work through </a:t>
-            </a:r>
-            <a:r>
-              <a:rPr>
-                <a:hlinkClick r:id="rId2"/>
-                <a:latin typeface="Courier"/>
-              </a:rPr>
-              <a:t>02-lab/README.md</a:t>
-            </a:r>
-            <a:r>
-              <a:rPr/>
-              <a:t>.</a:t>
-            </a:r>
-          </a:p>
-          <a:p>
-            <a:pPr lvl="0" indent="-342900" marL="342900">
-              <a:buAutoNum type="arabicPeriod"/>
-            </a:pPr>
-            <a:r>
-              <a:rPr/>
-              <a:t>Fit the earnings model and inspect residuals against fitted values</a:t>
-            </a:r>
-          </a:p>
-          <a:p>
-            <a:pPr lvl="0" indent="-342900" marL="342900">
-              <a:buAutoNum type="arabicPeriod"/>
-            </a:pPr>
-            <a:r>
-              <a:rPr/>
-              <a:t>Compute classical, HC3 and clustered standard errors side by side</a:t>
-            </a:r>
-          </a:p>
-          <a:p>
-            <a:pPr lvl="0" indent="-342900" marL="342900">
-              <a:buAutoNum type="arabicPeriod"/>
-            </a:pPr>
-            <a:r>
-              <a:rPr/>
-              <a:t>Write down a confounder, sign its bias, then test your prediction</a:t>
-            </a:r>
-          </a:p>
-          <a:p>
-            <a:pPr lvl="0" indent="-342900" marL="342900">
-              <a:buAutoNum type="arabicPeriod"/>
-            </a:pPr>
-            <a:r>
-              <a:rPr/>
-              <a:t>Three sentences — with the cluster level named</a:t>
-            </a:r>
-          </a:p>
-        </p:txBody>
-      </p:sp>
-    </p:spTree>
-  </p:cSld>
-</p:sld>
-</file>
-
-<file path=ppt/slides/slide3.xml><?xml version="1.0" encoding="utf-8"?>
-<p:sld xmlns:a="http://schemas.openxmlformats.org/drawingml/2006/main" xmlns:r="http://schemas.openxmlformats.org/officeDocument/2006/relationships" xmlns:p="http://schemas.openxmlformats.org/presentationml/2006/main">
-  <p:cSld>
-    <p:spTree>
-      <p:nvGrpSpPr>
-        <p:cNvPr id="1" name=""/>
-        <p:cNvGrpSpPr/>
-        <p:nvPr/>
-      </p:nvGrpSpPr>
-      <p:grpSpPr>
-        <a:xfrm>
-          <a:off x="0" y="0"/>
-          <a:ext cx="0" cy="0"/>
-          <a:chOff x="0" y="0"/>
-          <a:chExt cx="0" cy="0"/>
-        </a:xfrm>
-      </p:grpSpPr>
-      <p:sp>
-        <p:nvSpPr>
-          <p:cNvPr id="2" name="Title 1"/>
-          <p:cNvSpPr>
-            <a:spLocks noGrp="1"/>
-          </p:cNvSpPr>
-          <p:nvPr>
-            <p:ph type="title"/>
-          </p:nvPr>
-        </p:nvSpPr>
-        <p:spPr/>
-        <p:txBody>
-          <a:bodyPr/>
-          <a:lstStyle/>
-          <a:p>
-            <a:pPr lvl="0" indent="0" marL="0">
-              <a:buNone/>
-            </a:pPr>
-            <a:r>
-              <a:rPr/>
-              <a:t>Earnings and education across Europe</a:t>
-            </a:r>
-          </a:p>
-        </p:txBody>
-      </p:sp>
-      <p:sp>
-        <p:nvSpPr>
-          <p:cNvPr id="3" name="Content Placeholder 2"/>
-          <p:cNvSpPr>
-            <a:spLocks noGrp="1"/>
-          </p:cNvSpPr>
-          <p:nvPr>
-            <p:ph idx="1"/>
-          </p:nvPr>
-        </p:nvSpPr>
-        <p:spPr/>
-        <p:txBody>
-          <a:bodyPr/>
-          <a:lstStyle/>
-          <a:p>
-            <a:pPr lvl="0" indent="0" marL="1270000">
-              <a:buNone/>
-            </a:pPr>
-            <a:r>
-              <a:rPr sz="2000" i="1"/>
-              <a:t>“A higher tertiary-education share is associated with higher annual earnings.”</a:t>
-            </a:r>
-          </a:p>
-          <a:p>
-            <a:pPr lvl="0" indent="0" marL="0">
-              <a:buNone/>
-            </a:pPr>
-            <a:r>
-              <a:rPr/>
-              <a:t>Estimating that coefficient is the easy part. The hard part:</a:t>
-            </a:r>
-          </a:p>
-          <a:p>
-            <a:pPr lvl="0"/>
-            <a:r>
-              <a:rPr/>
-              <a:t>How </a:t>
-            </a:r>
-            <a:r>
-              <a:rPr b="1"/>
-              <a:t>precise</a:t>
-            </a:r>
-            <a:r>
-              <a:rPr/>
-              <a:t> is it?</a:t>
-            </a:r>
-          </a:p>
-          <a:p>
-            <a:pPr lvl="0"/>
-            <a:r>
-              <a:rPr/>
-              <a:t>What is the </a:t>
-            </a:r>
-            <a:r>
-              <a:rPr b="1"/>
-              <a:t>p-value</a:t>
-            </a:r>
-            <a:r>
-              <a:rPr/>
-              <a:t> actually testing?</a:t>
-            </a:r>
-          </a:p>
-          <a:p>
-            <a:pPr lvl="0"/>
-            <a:r>
-              <a:rPr/>
-              <a:t>What would make the whole thing </a:t>
-            </a:r>
-            <a:r>
-              <a:rPr b="1"/>
-              <a:t>wrong</a:t>
-            </a:r>
-            <a:r>
-              <a:rPr/>
-              <a:t> rather than merely imprecise?</a:t>
-            </a:r>
-          </a:p>
-          <a:p>
-            <a:pPr lvl="0" indent="0" marL="0">
-              <a:buNone/>
-            </a:pPr>
-            <a:r>
-              <a:rPr/>
-              <a:t>Session 02 gave you the point estimate. This session is about whether you are entitled to any confidence in it.</a:t>
-            </a:r>
-          </a:p>
-        </p:txBody>
-      </p:sp>
-    </p:spTree>
-  </p:cSld>
-</p:sld>
-</file>
-
-<file path=ppt/slides/slide4.xml><?xml version="1.0" encoding="utf-8"?>
-<p:sld xmlns:a="http://schemas.openxmlformats.org/drawingml/2006/main" xmlns:r="http://schemas.openxmlformats.org/officeDocument/2006/relationships" xmlns:p="http://schemas.openxmlformats.org/presentationml/2006/main">
-  <p:cSld>
-    <p:spTree>
-      <p:nvGrpSpPr>
-        <p:cNvPr id="1" name=""/>
-        <p:cNvGrpSpPr/>
-        <p:nvPr/>
-      </p:nvGrpSpPr>
-      <p:grpSpPr>
-        <a:xfrm>
-          <a:off x="0" y="0"/>
-          <a:ext cx="0" cy="0"/>
-          <a:chOff x="0" y="0"/>
-          <a:chExt cx="0" cy="0"/>
-        </a:xfrm>
-      </p:grpSpPr>
-      <p:sp>
-        <p:nvSpPr>
-          <p:cNvPr id="2" name="Title 1"/>
-          <p:cNvSpPr>
-            <a:spLocks noGrp="1"/>
-          </p:cNvSpPr>
-          <p:nvPr>
-            <p:ph type="title"/>
-          </p:nvPr>
-        </p:nvSpPr>
-        <p:spPr/>
-        <p:txBody>
-          <a:bodyPr/>
-          <a:lstStyle/>
-          <a:p>
-            <a:pPr lvl="0" indent="0" marL="0">
-              <a:buNone/>
-            </a:pPr>
-            <a:r>
-              <a:rPr/>
-              <a:t>Three ways your standard errors lie</a:t>
-            </a:r>
-          </a:p>
-        </p:txBody>
-      </p:sp>
-      <p:sp>
-        <p:nvSpPr>
-          <p:cNvPr id="3" name="Content Placeholder 2"/>
-          <p:cNvSpPr>
-            <a:spLocks noGrp="1"/>
-          </p:cNvSpPr>
-          <p:nvPr>
-            <p:ph idx="1"/>
-          </p:nvPr>
-        </p:nvSpPr>
-        <p:spPr/>
-        <p:txBody>
-          <a:bodyPr/>
-          <a:lstStyle/>
-          <a:p>
-            <a:pPr lvl="0" indent="-342900" marL="342900">
-              <a:buAutoNum type="arabicPeriod"/>
-            </a:pPr>
-            <a:r>
-              <a:rPr b="1"/>
-              <a:t>Heteroskedasticity</a:t>
-            </a:r>
-            <a:r>
-              <a:rPr/>
-              <a:t> — the error variance is not constant. In this panel it scales with country size.</a:t>
-            </a:r>
-          </a:p>
-          <a:p>
-            <a:pPr lvl="0" indent="-342900" marL="342900">
-              <a:buAutoNum type="arabicPeriod"/>
-            </a:pPr>
-            <a:r>
-              <a:rPr b="1"/>
-              <a:t>Within-country correlation</a:t>
-            </a:r>
-            <a:r>
-              <a:rPr/>
-              <a:t> — Germany in 2019 and Germany in 2020 are not independent draws.</a:t>
-            </a:r>
-          </a:p>
-          <a:p>
-            <a:pPr lvl="0" indent="-342900" marL="342900">
-              <a:buAutoNum type="arabicPeriod"/>
-            </a:pPr>
-            <a:r>
-              <a:rPr b="1"/>
-              <a:t>Omitted variables</a:t>
-            </a:r>
-            <a:r>
-              <a:rPr/>
-              <a:t> — no standard error can rescue you from a missing confounder. That is a bias, not a variance.</a:t>
-            </a:r>
-          </a:p>
-          <a:p>
-            <a:pPr lvl="0" indent="0" marL="0">
-              <a:buNone/>
-            </a:pPr>
-            <a:r>
-              <a:rPr/>
-              <a:t>The first two make your intervals </a:t>
-            </a:r>
-            <a:r>
-              <a:rPr b="1"/>
-              <a:t>too narrow</a:t>
-            </a:r>
-            <a:r>
-              <a:rPr/>
-              <a:t>. The third makes the estimate </a:t>
-            </a:r>
-            <a:r>
-              <a:rPr b="1"/>
-              <a:t>wrong</a:t>
-            </a:r>
-            <a:r>
-              <a:rPr/>
-              <a:t>. They require different responses.</a:t>
-            </a:r>
-          </a:p>
-        </p:txBody>
-      </p:sp>
-    </p:spTree>
-  </p:cSld>
-</p:sld>
-</file>
-
-<file path=ppt/slides/slide5.xml><?xml version="1.0" encoding="utf-8"?>
-<p:sld xmlns:a="http://schemas.openxmlformats.org/drawingml/2006/main" xmlns:r="http://schemas.openxmlformats.org/officeDocument/2006/relationships" xmlns:p="http://schemas.openxmlformats.org/presentationml/2006/main">
-  <p:cSld>
-    <p:spTree>
-      <p:nvGrpSpPr>
-        <p:cNvPr id="1" name=""/>
-        <p:cNvGrpSpPr/>
-        <p:nvPr/>
-      </p:nvGrpSpPr>
-      <p:grpSpPr>
-        <a:xfrm>
-          <a:off x="0" y="0"/>
-          <a:ext cx="0" cy="0"/>
-          <a:chOff x="0" y="0"/>
-          <a:chExt cx="0" cy="0"/>
-        </a:xfrm>
-      </p:grpSpPr>
-      <p:sp>
-        <p:nvSpPr>
-          <p:cNvPr id="2" name="Title 1"/>
-          <p:cNvSpPr>
-            <a:spLocks noGrp="1"/>
-          </p:cNvSpPr>
-          <p:nvPr>
-            <p:ph type="title"/>
-          </p:nvPr>
-        </p:nvSpPr>
-        <p:spPr>
-          <a:xfrm>
-            <a:off x="722313" y="3305176"/>
-            <a:ext cx="7772400" cy="1021556"/>
-          </a:xfrm>
-        </p:spPr>
-        <p:txBody>
-          <a:bodyPr/>
-          <a:lstStyle/>
-          <a:p>
-            <a:pPr lvl="0" indent="0" marL="0">
-              <a:buNone/>
-            </a:pPr>
-            <a:r>
-              <a:rPr/>
-              <a:t>The method</a:t>
-            </a:r>
-          </a:p>
-        </p:txBody>
-      </p:sp>
-    </p:spTree>
-  </p:cSld>
-</p:sld>
-</file>
-
-<file path=ppt/slides/slide6.xml><?xml version="1.0" encoding="utf-8"?>
-<p:sld xmlns:a="http://schemas.openxmlformats.org/drawingml/2006/main" xmlns:r="http://schemas.openxmlformats.org/officeDocument/2006/relationships" xmlns:p="http://schemas.openxmlformats.org/presentationml/2006/main">
-  <p:cSld>
-    <p:spTree>
-      <p:nvGrpSpPr>
-        <p:cNvPr id="1" name=""/>
-        <p:cNvGrpSpPr/>
-        <p:nvPr/>
-      </p:nvGrpSpPr>
-      <p:grpSpPr>
-        <a:xfrm>
-          <a:off x="0" y="0"/>
-          <a:ext cx="0" cy="0"/>
-          <a:chOff x="0" y="0"/>
-          <a:chExt cx="0" cy="0"/>
-        </a:xfrm>
-      </p:grpSpPr>
-      <mc:AlternateContent xmlns:mc="http://schemas.openxmlformats.org/markup-compatibility/2006">
-        <mc:Choice xmlns:a14="http://schemas.microsoft.com/office/drawing/2010/main" Requires="a14">
-          <p:sp>
-            <p:nvSpPr>
-              <p:cNvPr id="2" name="Title 1"/>
-              <p:cNvSpPr>
-                <a:spLocks noGrp="1"/>
-              </p:cNvSpPr>
-              <p:nvPr>
-                <p:ph type="title"/>
-              </p:nvPr>
-            </p:nvSpPr>
-            <p:spPr/>
-            <p:txBody>
-              <a:bodyPr/>
-              <a:lstStyle/>
-              <a:p>
-                <a:pPr lvl="0" indent="0" marL="0">
-                  <a:buNone/>
-                </a:pPr>
-                <a:r>
-                  <a:rPr/>
-                  <a:t>What OLS assumes about </a:t>
-                </a:r>
-                <a14:m>
-                  <m:oMath xmlns:m="http://schemas.openxmlformats.org/officeDocument/2006/math">
-                    <m:r>
-                      <m:t>ε</m:t>
-                    </m:r>
-                  </m:oMath>
-                </a14:m>
-              </a:p>
-            </p:txBody>
-          </p:sp>
-        </mc:Choice>
-      </mc:AlternateContent>
-      <mc:AlternateContent xmlns:mc="http://schemas.openxmlformats.org/markup-compatibility/2006">
-        <mc:Choice xmlns:a14="http://schemas.microsoft.com/office/drawing/2010/main" Requires="a14">
-          <p:sp>
-            <p:nvSpPr>
-              <p:cNvPr id="3" name="Content Placeholder 2"/>
-              <p:cNvSpPr>
-                <a:spLocks noGrp="1"/>
-              </p:cNvSpPr>
-              <p:nvPr>
-                <p:ph idx="1"/>
-              </p:nvPr>
-            </p:nvSpPr>
-            <p:spPr/>
-            <p:txBody>
-              <a:bodyPr/>
-              <a:lstStyle/>
-              <a:p>
-                <a:pPr lvl="0" indent="0" marL="0">
-                  <a:buNone/>
-                </a:pPr>
-                <a:r>
-                  <a:rPr/>
-                  <a:t>Under </a:t>
-                </a:r>
-                <a14:m>
-                  <m:oMath xmlns:m="http://schemas.openxmlformats.org/officeDocument/2006/math">
-                    <m:r>
-                      <m:t>y</m:t>
-                    </m:r>
-                    <m:r>
-                      <m:rPr>
-                        <m:sty m:val="p"/>
-                      </m:rPr>
-                      <m:t>=</m:t>
-                    </m:r>
-                    <m:r>
-                      <m:t>X</m:t>
-                    </m:r>
-                    <m:r>
-                      <m:t>β</m:t>
-                    </m:r>
-                    <m:r>
-                      <m:rPr>
-                        <m:sty m:val="p"/>
-                      </m:rPr>
-                      <m:t>+</m:t>
-                    </m:r>
-                    <m:r>
-                      <m:t>ε</m:t>
-                    </m:r>
-                  </m:oMath>
-                </a14:m>
-                <a:r>
-                  <a:rPr/>
-                  <a:t>, the classical variance is</a:t>
-                </a:r>
-              </a:p>
-              <a:p>
-                <a:pPr lvl="0" indent="0" marL="0">
-                  <a:buNone/>
-                </a:pPr>
-                <a14:m>
-                  <m:oMathPara xmlns:m="http://schemas.openxmlformats.org/officeDocument/2006/math">
-                    <m:oMathParaPr>
-                      <m:jc m:val="center"/>
-                    </m:oMathParaPr>
-                    <m:oMath>
-                      <m:r>
-                        <m:rPr>
-                          <m:sty m:val="p"/>
-                        </m:rPr>
-                        <m:t>Var</m:t>
-                      </m:r>
-                      <m:d>
-                        <m:dPr>
-                          <m:begChr m:val="("/>
-                          <m:sepChr m:val=""/>
-                          <m:endChr m:val=")"/>
-                          <m:grow/>
-                        </m:dPr>
-                        <m:e>
-                          <m:acc>
-                            <m:accPr>
-                              <m:chr m:val="̂"/>
-                            </m:accPr>
-                            <m:e>
-                              <m:r>
-                                <m:t>β</m:t>
-                              </m:r>
-                            </m:e>
-                          </m:acc>
-                        </m:e>
-                      </m:d>
-                      <m:r>
-                        <m:rPr>
-                          <m:sty m:val="p"/>
-                        </m:rPr>
-                        <m:t>=</m:t>
-                      </m:r>
-                      <m:sSup>
-                        <m:e>
-                          <m:r>
-                            <m:t>σ</m:t>
-                          </m:r>
-                        </m:e>
-                        <m:sup>
-                          <m:r>
-                            <m:t>2</m:t>
-                          </m:r>
-                        </m:sup>
-                      </m:sSup>
-                      <m:sSup>
-                        <m:e>
-                          <m:d>
-                            <m:dPr>
-                              <m:begChr m:val="("/>
-                              <m:sepChr m:val=""/>
-                              <m:endChr m:val=")"/>
-                              <m:grow/>
-                            </m:dPr>
-                            <m:e>
-                              <m:r>
-                                <m:t>X</m:t>
-                              </m:r>
-                              <m:r>
-                                <m:rPr>
-                                  <m:sty m:val="p"/>
-                                </m:rPr>
-                                <m:t>′</m:t>
-                              </m:r>
-                              <m:r>
-                                <m:t>X</m:t>
-                              </m:r>
-                            </m:e>
-                          </m:d>
-                        </m:e>
-                        <m:sup>
-                          <m:r>
-                            <m:rPr>
-                              <m:sty m:val="p"/>
-                            </m:rPr>
-                            <m:t>−</m:t>
-                          </m:r>
-                          <m:r>
-                            <m:t>1</m:t>
-                          </m:r>
-                        </m:sup>
-                      </m:sSup>
-                    </m:oMath>
-                  </m:oMathPara>
-                </a14:m>
-              </a:p>
-              <a:p>
-                <a:pPr lvl="0" indent="0" marL="0">
-                  <a:buNone/>
-                </a:pPr>
-                <a:r>
-                  <a:rPr/>
-                  <a:t>which requires </a:t>
-                </a:r>
-                <a14:m>
-                  <m:oMath xmlns:m="http://schemas.openxmlformats.org/officeDocument/2006/math">
-                    <m:r>
-                      <m:rPr>
-                        <m:sty m:val="p"/>
-                      </m:rPr>
-                      <m:t>Var</m:t>
-                    </m:r>
-                    <m:d>
-                      <m:dPr>
-                        <m:begChr m:val="("/>
-                        <m:sepChr m:val=""/>
-                        <m:endChr m:val=")"/>
-                        <m:grow/>
-                      </m:dPr>
-                      <m:e>
-                        <m:r>
-                          <m:t>ε</m:t>
-                        </m:r>
-                        <m:r>
-                          <m:rPr>
-                            <m:sty m:val="p"/>
-                          </m:rPr>
-                          <m:t>∣</m:t>
-                        </m:r>
-                        <m:r>
-                          <m:t>X</m:t>
-                        </m:r>
-                      </m:e>
-                    </m:d>
-                    <m:r>
-                      <m:rPr>
-                        <m:sty m:val="p"/>
-                      </m:rPr>
-                      <m:t>=</m:t>
-                    </m:r>
-                    <m:sSup>
-                      <m:e>
-                        <m:r>
-                          <m:t>σ</m:t>
-                        </m:r>
-                      </m:e>
-                      <m:sup>
-                        <m:r>
-                          <m:t>2</m:t>
-                        </m:r>
-                      </m:sup>
-                    </m:sSup>
-                    <m:r>
-                      <m:t>I</m:t>
-                    </m:r>
-                  </m:oMath>
-                </a14:m>
-                <a:r>
-                  <a:rPr/>
-                  <a:t> — constant variance, zero correlation.</a:t>
-                </a:r>
-              </a:p>
-              <a:p>
-                <a:pPr lvl="0" indent="0" marL="0">
-                  <a:buNone/>
-                </a:pPr>
-                <a:r>
-                  <a:rPr/>
-                  <a:t>The general (sandwich) form makes no such promise:</a:t>
-                </a:r>
-              </a:p>
-              <a:p>
-                <a:pPr lvl="0" indent="0" marL="0">
-                  <a:buNone/>
-                </a:pPr>
-                <a14:m>
-                  <m:oMathPara xmlns:m="http://schemas.openxmlformats.org/officeDocument/2006/math">
-                    <m:oMathParaPr>
-                      <m:jc m:val="center"/>
-                    </m:oMathParaPr>
-                    <m:oMath>
-                      <m:r>
-                        <m:rPr>
-                          <m:sty m:val="p"/>
-                        </m:rPr>
-                        <m:t>Var</m:t>
-                      </m:r>
-                      <m:d>
-                        <m:dPr>
-                          <m:begChr m:val="("/>
-                          <m:sepChr m:val=""/>
-                          <m:endChr m:val=")"/>
-                          <m:grow/>
-                        </m:dPr>
-                        <m:e>
-                          <m:acc>
-                            <m:accPr>
-                              <m:chr m:val="̂"/>
-                            </m:accPr>
-                            <m:e>
-                              <m:r>
-                                <m:t>β</m:t>
-                              </m:r>
-                            </m:e>
-                          </m:acc>
-                        </m:e>
-                      </m:d>
-                      <m:r>
-                        <m:rPr>
-                          <m:sty m:val="p"/>
-                        </m:rPr>
-                        <m:t>=</m:t>
-                      </m:r>
-                      <m:sSup>
-                        <m:e>
-                          <m:d>
-                            <m:dPr>
-                              <m:begChr m:val="("/>
-                              <m:sepChr m:val=""/>
-                              <m:endChr m:val=")"/>
-                              <m:grow/>
-                            </m:dPr>
-                            <m:e>
-                              <m:r>
-                                <m:t>X</m:t>
-                              </m:r>
-                              <m:r>
-                                <m:rPr>
-                                  <m:sty m:val="p"/>
-                                </m:rPr>
-                                <m:t>′</m:t>
-                              </m:r>
-                              <m:r>
-                                <m:t>X</m:t>
-                              </m:r>
-                            </m:e>
-                          </m:d>
-                        </m:e>
-                        <m:sup>
-                          <m:r>
-                            <m:rPr>
-                              <m:sty m:val="p"/>
-                            </m:rPr>
-                            <m:t>−</m:t>
-                          </m:r>
-                          <m:r>
-                            <m:t>1</m:t>
-                          </m:r>
-                        </m:sup>
-                      </m:sSup>
-                      <m:r>
-                        <m:t> </m:t>
-                      </m:r>
-                      <m:r>
-                        <m:t>X</m:t>
-                      </m:r>
-                      <m:r>
-                        <m:rPr>
-                          <m:sty m:val="p"/>
-                        </m:rPr>
-                        <m:t>′</m:t>
-                      </m:r>
-                      <m:r>
-                        <m:t>Ω</m:t>
-                      </m:r>
-                      <m:r>
-                        <m:t>X</m:t>
-                      </m:r>
-                      <m:r>
-                        <m:t> </m:t>
-                      </m:r>
-                      <m:sSup>
-                        <m:e>
-                          <m:d>
-                            <m:dPr>
-                              <m:begChr m:val="("/>
-                              <m:sepChr m:val=""/>
-                              <m:endChr m:val=")"/>
-                              <m:grow/>
-                            </m:dPr>
-                            <m:e>
-                              <m:r>
-                                <m:t>X</m:t>
-                              </m:r>
-                              <m:r>
-                                <m:rPr>
-                                  <m:sty m:val="p"/>
-                                </m:rPr>
-                                <m:t>′</m:t>
-                              </m:r>
-                              <m:r>
-                                <m:t>X</m:t>
-                              </m:r>
-                            </m:e>
-                          </m:d>
-                        </m:e>
-                        <m:sup>
-                          <m:r>
-                            <m:rPr>
-                              <m:sty m:val="p"/>
-                            </m:rPr>
-                            <m:t>−</m:t>
-                          </m:r>
-                          <m:r>
-                            <m:t>1</m:t>
-                          </m:r>
-                        </m:sup>
-                      </m:sSup>
-                    </m:oMath>
-                  </m:oMathPara>
-                </a14:m>
-              </a:p>
-              <a:p>
-                <a:pPr lvl="0" indent="0" marL="0">
-                  <a:buNone/>
-                </a:pPr>
-                <a:r>
-                  <a:rPr/>
-                  <a:t>Everything below is a different guess at </a:t>
-                </a:r>
-                <a14:m>
-                  <m:oMath xmlns:m="http://schemas.openxmlformats.org/officeDocument/2006/math">
-                    <m:r>
-                      <m:t>Ω</m:t>
-                    </m:r>
-                  </m:oMath>
-                </a14:m>
-                <a:r>
-                  <a:rPr/>
-                  <a:t>. The estimate </a:t>
-                </a:r>
-                <a14:m>
-                  <m:oMath xmlns:m="http://schemas.openxmlformats.org/officeDocument/2006/math">
-                    <m:acc>
-                      <m:accPr>
-                        <m:chr m:val="̂"/>
-                      </m:accPr>
-                      <m:e>
-                        <m:r>
-                          <m:t>β</m:t>
-                        </m:r>
-                      </m:e>
-                    </m:acc>
-                  </m:oMath>
-                </a14:m>
-                <a:r>
-                  <a:rPr/>
-                  <a:t> never changes — only your claimed precision.</a:t>
-                </a:r>
-              </a:p>
-            </p:txBody>
-          </p:sp>
-        </mc:Choice>
-      </mc:AlternateContent>
-    </p:spTree>
-  </p:cSld>
-</p:sld>
-</file>
-
-<file path=ppt/slides/slide7.xml><?xml version="1.0" encoding="UTF-8"?><p:sld xmlns:a="http://schemas.openxmlformats.org/drawingml/2006/main" xmlns:r="http://schemas.openxmlformats.org/officeDocument/2006/relationships" xmlns:p="http://schemas.openxmlformats.org/presentationml/2006/main"><p:cSld><p:spTree><p:nvGrpSpPr><p:cNvPr id="1" name="" /><p:cNvGrpSpPr /><p:nvPr /></p:nvGrpSpPr><p:grpSpPr><a:xfrm><a:off x="0" y="0" /><a:ext cx="0" cy="0" /><a:chOff x="0" y="0" /><a:chExt cx="0" cy="0" /></a:xfrm></p:grpSpPr><mc:AlternateContent xmlns:mc="http://schemas.openxmlformats.org/markup-compatibility/2006"><mc:Choice xmlns:a14="http://schemas.microsoft.com/office/drawing/2010/main" Requires="a14"><p:sp><p:nvSpPr><p:cNvPr id="2" name="Title 1" /><p:cNvSpPr><a:spLocks noGrp="1" /></p:cNvSpPr><p:nvPr><p:ph type="title" /></p:nvPr></p:nvSpPr><p:spPr /><p:txBody><a:bodyPr /><a:lstStyle /><a:p><a:pPr lvl="0" indent="0" marL="0"><a:buNone /></a:pPr><a:r><a:rPr /><a:t>Three estimators of </a:t></a:r><a14:m><m:oMath xmlns:m="http://schemas.openxmlformats.org/officeDocument/2006/math"><m:r><m:t>Ω</m:t></m:r></m:oMath></a14:m></a:p></p:txBody></p:sp></mc:Choice></mc:AlternateContent><p:graphicFrame><p:nvGraphicFramePr><p:cNvPr id="6" name="Content Placeholder 5" /><p:cNvGraphicFramePr><a:graphicFrameLocks noGrp="1" /></p:cNvGraphicFramePr><p:nvPr><p:ph idx="1" /></p:nvPr></p:nvGraphicFramePr><p:xfrm><a:off x="457200" y="1193800" /><a:ext cx="8229600" cy="3390900" /></p:xfrm><a:graphic><a:graphicData uri="http://schemas.openxmlformats.org/drawingml/2006/table"><a:tbl><a:tblPr firstRow="1" bandRow="1"><a:tableStyleId>{5C22544A-7EE6-4342-B048-85BDC9FD1C3A}</a:tableStyleId></a:tblPr><a:tblGrid><a:gridCol w="2743200" /><a:gridCol w="2743200" /><a:gridCol w="2743200" /></a:tblGrid><a:tr h="0"><a:tc><a:txBody><a:bodyPr /><a:lstStyle /><a:p><a:pPr lvl="0" indent="0" marL="0"><a:buNone /></a:pPr><a:r><a:rPr /><a:t>Assumption</a:t></a:r></a:p></a:txBody><a:tcPr /></a:tc><a:tc><a:txBody><a:bodyPr /><a:lstStyle /><a:p><a:pPr lvl="0" indent="0" marL="0"><a:buNone /></a:pPr><a14:m><m:oMath xmlns:m="http://schemas.openxmlformats.org/officeDocument/2006/math"><m:r><m:t>Ω</m:t></m:r></m:oMath></a14:m></a:p></a:txBody><a:tcPr /></a:tc><a:tc><a:txBody><a:bodyPr /><a:lstStyle /><a:p><a:pPr lvl="0" indent="0" marL="0"><a:buNone /></a:pPr><a:r><a:rPr /><a:t>Use when</a:t></a:r></a:p></a:txBody><a:tcPr /></a:tc></a:tr><a:tr h="0"><a:tc><a:txBody><a:bodyPr /><a:lstStyle /><a:p><a:pPr lvl="0" indent="0" marL="0"><a:buNone /></a:pPr><a:r><a:rPr /><a:t>Classical</a:t></a:r></a:p></a:txBody></a:tc><a:tc><a:txBody><a:bodyPr /><a:lstStyle /><a:p><a:pPr lvl="0" indent="0" marL="0"><a:buNone /></a:pPr><a14:m><m:oMath xmlns:m="http://schemas.openxmlformats.org/officeDocument/2006/math"><m:sSup><m:e><m:r><m:t>σ</m:t></m:r></m:e><m:sup><m:r><m:t>2</m:t></m:r></m:sup></m:sSup><m:r><m:t>I</m:t></m:r></m:oMath></a14:m></a:p></a:txBody></a:tc><a:tc><a:txBody><a:bodyPr /><a:lstStyle /><a:p><a:pPr lvl="0" indent="0" marL="0"><a:buNone /></a:pPr><a:r><a:rPr /><a:t>Essentially never with real panels</a:t></a:r></a:p></a:txBody></a:tc></a:tr><a:tr h="0"><a:tc><a:txBody><a:bodyPr /><a:lstStyle /><a:p><a:pPr lvl="0" indent="0" marL="0"><a:buNone /></a:pPr><a:r><a:rPr b="1" /><a:t>HC (robust)</a:t></a:r></a:p></a:txBody></a:tc><a:tc><a:txBody><a:bodyPr /><a:lstStyle /><a:p><a:pPr lvl="0" indent="0" marL="0"><a:buNone /></a:pPr><a14:m><m:oMath xmlns:m="http://schemas.openxmlformats.org/officeDocument/2006/math"><m:r><m:rPr><m:sty m:val="p" /></m:rPr><m:t>diag</m:t></m:r><m:d><m:dPr><m:begChr m:val="(" /><m:sepChr m:val="" /><m:endChr m:val=")" /><m:grow /></m:dPr><m:e><m:sSubSup><m:e><m:r><m:t>e</m:t></m:r></m:e><m:sub><m:r><m:t>i</m:t></m:r></m:sub><m:sup><m:r><m:t>2</m:t></m:r></m:sup></m:sSubSup></m:e></m:d></m:oMath></a14:m></a:p></a:txBody></a:tc><a:tc><a:txBody><a:bodyPr /><a:lstStyle /><a:p><a:pPr lvl="0" indent="0" marL="0"><a:buNone /></a:pPr><a:r><a:rPr /><a:t>Variance differs across units</a:t></a:r></a:p></a:txBody></a:tc></a:tr><a:tr h="0"><a:tc><a:txBody><a:bodyPr /><a:lstStyle /><a:p><a:pPr lvl="0" indent="0" marL="0"><a:buNone /></a:pPr><a:r><a:rPr b="1" /><a:t>Clustered</a:t></a:r></a:p></a:txBody></a:tc><a:tc><a:txBody><a:bodyPr /><a:lstStyle /><a:p><a:pPr lvl="0" indent="0" marL="0"><a:buNone /></a:pPr><a:r><a:rPr /><a:t>Block-diagonal by group</a:t></a:r></a:p></a:txBody></a:tc><a:tc><a:txBody><a:bodyPr /><a:lstStyle /><a:p><a:pPr lvl="0" indent="0" marL="0"><a:buNone /></a:pPr><a:r><a:rPr /><a:t>Observations correlated within a unit</a:t></a:r></a:p></a:txBody></a:tc></a:tr></a:tbl></a:graphicData></a:graphic></p:graphicFrame></p:spTree></p:cSld></p:sld>
-</file>
-
-<file path=ppt/slides/slide8.xml><?xml version="1.0" encoding="utf-8"?>
-<p:sld xmlns:a="http://schemas.openxmlformats.org/drawingml/2006/main" xmlns:r="http://schemas.openxmlformats.org/officeDocument/2006/relationships" xmlns:p="http://schemas.openxmlformats.org/presentationml/2006/main">
-  <p:cSld>
-    <p:spTree>
-      <p:nvGrpSpPr>
-        <p:cNvPr id="1" name=""/>
-        <p:cNvGrpSpPr/>
-        <p:nvPr/>
-      </p:nvGrpSpPr>
-      <p:grpSpPr>
-        <a:xfrm>
-          <a:off x="0" y="0"/>
-          <a:ext cx="0" cy="0"/>
-          <a:chOff x="0" y="0"/>
-          <a:chExt cx="0" cy="0"/>
-        </a:xfrm>
-      </p:grpSpPr>
+              <a:t>What a p-value is</a:t>
+            </a:r>
+          </a:p>
+        </p:txBody>
+      </p:sp>
       <mc:AlternateContent xmlns:mc="http://schemas.openxmlformats.org/markup-compatibility/2006">
         <mc:Choice xmlns:a14="http://schemas.microsoft.com/office/drawing/2010/main" Requires="a14">
           <p:sp>
@@ -6363,157 +6952,959 @@
                       <m:jc m:val="center"/>
                     </m:oMathParaPr>
                     <m:oMath>
-                      <m:sSub>
-                        <m:e>
-                          <m:acc>
-                            <m:accPr>
-                              <m:chr m:val="̂"/>
-                            </m:accPr>
-                            <m:e>
-                              <m:r>
-                                <m:t>Ω</m:t>
-                              </m:r>
-                            </m:e>
-                          </m:acc>
-                        </m:e>
-                        <m:sub>
-                          <m:r>
-                            <m:rPr>
-                              <m:nor/>
-                              <m:sty m:val="p"/>
-                            </m:rPr>
-                            <m:t>cluster</m:t>
-                          </m:r>
-                        </m:sub>
-                      </m:sSub>
+                      <m:r>
+                        <m:t>p</m:t>
+                      </m:r>
                       <m:r>
                         <m:rPr>
                           <m:sty m:val="p"/>
                         </m:rPr>
                         <m:t>=</m:t>
                       </m:r>
-                      <m:nary>
-                        <m:naryPr>
-                          <m:chr m:val="∑"/>
-                          <m:limLoc m:val="undOvr"/>
-                          <m:subHide m:val="off"/>
-                          <m:supHide m:val="off"/>
-                        </m:naryPr>
-                        <m:sub>
+                      <m:r>
+                        <m:rPr>
+                          <m:sty m:val="p"/>
+                        </m:rPr>
+                        <m:t>Pr</m:t>
+                      </m:r>
+                      <m:r>
+                        <m:rPr>
+                          <m:sty m:val="p"/>
+                        </m:rPr>
+                        <m:t>(</m:t>
+                      </m:r>
+                      <m:r>
+                        <m:t> </m:t>
+                      </m:r>
+                      <m:d>
+                        <m:dPr>
+                          <m:begChr m:val="|"/>
+                          <m:sepChr m:val=""/>
+                          <m:endChr m:val="|"/>
+                          <m:grow/>
+                        </m:dPr>
+                        <m:e>
                           <m:r>
-                            <m:t>g</m:t>
+                            <m:t>T</m:t>
                           </m:r>
-                          <m:r>
-                            <m:rPr>
-                              <m:sty m:val="p"/>
-                            </m:rPr>
-                            <m:t>=</m:t>
-                          </m:r>
-                          <m:r>
-                            <m:t>1</m:t>
-                          </m:r>
-                        </m:sub>
-                        <m:sup>
-                          <m:r>
-                            <m:t>G</m:t>
-                          </m:r>
-                        </m:sup>
+                        </m:e>
+                      </m:d>
+                      <m:r>
+                        <m:rPr>
+                          <m:sty m:val="p"/>
+                        </m:rPr>
+                        <m:t>≥</m:t>
+                      </m:r>
+                      <m:d>
+                        <m:dPr>
+                          <m:begChr m:val="|"/>
+                          <m:sepChr m:val=""/>
+                          <m:endChr m:val="|"/>
+                          <m:grow/>
+                        </m:dPr>
                         <m:e>
                           <m:sSub>
                             <m:e>
                               <m:r>
-                                <m:t>X</m:t>
+                                <m:t>t</m:t>
                               </m:r>
                             </m:e>
                             <m:sub>
                               <m:r>
-                                <m:t>g</m:t>
+                                <m:rPr>
+                                  <m:nor/>
+                                  <m:sty m:val="p"/>
+                                </m:rPr>
+                                <m:t>obs</m:t>
                               </m:r>
                             </m:sub>
                           </m:sSub>
                         </m:e>
-                      </m:nary>
+                      </m:d>
                       <m:r>
-                        <m:rPr>
-                          <m:sty m:val="p"/>
-                        </m:rPr>
-                        <m:t>′</m:t>
+                        <m:t> </m:t>
                       </m:r>
-                      <m:sSub>
+                      <m:d>
+                        <m:dPr>
+                          <m:begChr m:val="|"/>
+                          <m:sepChr m:val=""/>
+                          <m:endChr m:val=")"/>
+                          <m:grow/>
+                        </m:dPr>
                         <m:e>
                           <m:r>
-                            <m:t>e</m:t>
+                            <m:t> </m:t>
+                          </m:r>
+                          <m:sSub>
+                            <m:e>
+                              <m:r>
+                                <m:t>H</m:t>
+                              </m:r>
+                            </m:e>
+                            <m:sub>
+                              <m:r>
+                                <m:t>0</m:t>
+                              </m:r>
+                            </m:sub>
+                          </m:sSub>
+                          <m:r>
+                            <m:rPr>
+                              <m:nor/>
+                              <m:sty m:val="p"/>
+                            </m:rPr>
+                            <m:t> true</m:t>
+                          </m:r>
+                          <m:r>
+                            <m:t> </m:t>
                           </m:r>
                         </m:e>
-                        <m:sub>
-                          <m:r>
-                            <m:t>g</m:t>
-                          </m:r>
-                        </m:sub>
-                      </m:sSub>
-                      <m:sSub>
-                        <m:e>
-                          <m:r>
-                            <m:t>e</m:t>
-                          </m:r>
-                        </m:e>
-                        <m:sub>
-                          <m:r>
-                            <m:t>g</m:t>
-                          </m:r>
-                        </m:sub>
-                      </m:sSub>
-                      <m:r>
-                        <m:rPr>
-                          <m:sty m:val="p"/>
-                        </m:rPr>
-                        <m:t>′</m:t>
-                      </m:r>
-                      <m:sSub>
-                        <m:e>
-                          <m:r>
-                            <m:t>X</m:t>
-                          </m:r>
-                        </m:e>
-                        <m:sub>
-                          <m:r>
-                            <m:t>g</m:t>
-                          </m:r>
-                        </m:sub>
-                      </m:sSub>
+                      </m:d>
                     </m:oMath>
                   </m:oMathPara>
                 </a14:m>
               </a:p>
               <a:p>
+                <a:pPr lvl="0"/>
+                <a:r>
+                  <a:rPr/>
+                  <a:t>✅ “If there were no effect, data this extreme would arise 3% of the time.”</a:t>
+                </a:r>
+              </a:p>
+              <a:p>
+                <a:pPr lvl="0"/>
+                <a:r>
+                  <a:rPr/>
+                  <a:t>❌ “There is a 97% chance the effect is real.”</a:t>
+                </a:r>
+              </a:p>
+              <a:p>
+                <a:pPr lvl="0"/>
+                <a:r>
+                  <a:rPr/>
+                  <a:t>❌ “The effect is large.”</a:t>
+                </a:r>
+              </a:p>
+              <a:p>
+                <a:pPr lvl="0"/>
+                <a:r>
+                  <a:rPr/>
+                  <a:t>❌ “The model is correct.”</a:t>
+                </a:r>
+              </a:p>
+              <a:p>
                 <a:pPr lvl="0" indent="0" marL="0">
                   <a:buNone/>
                 </a:pPr>
                 <a:r>
                   <a:rPr/>
-                  <a:t>Clustering by country lets errors correlate freely </a:t>
+                  <a:t>It is a statement about </a:t>
                 </a:r>
                 <a:r>
                   <a:rPr b="1"/>
-                  <a:t>within</a:t>
+                  <a:t>data under an assumed null</a:t>
                 </a:r>
                 <a:r>
                   <a:rPr/>
-                  <a:t> a country and assumes independence </a:t>
-                </a:r>
-                <a:r>
-                  <a:rPr b="1"/>
-                  <a:t>across</a:t>
-                </a:r>
-                <a:r>
-                  <a:rPr/>
-                  <a:t> countries.</a:t>
+                  <a:t> — not about the hypothesis, and not about magnitude.</a:t>
                 </a:r>
               </a:p>
             </p:txBody>
           </p:sp>
         </mc:Choice>
       </mc:AlternateContent>
+    </p:spTree>
+  </p:cSld>
+</p:sld>
+</file>
+
+<file path=ppt/slides/slide26.xml><?xml version="1.0" encoding="utf-8"?>
+<p:sld xmlns:a="http://schemas.openxmlformats.org/drawingml/2006/main" xmlns:r="http://schemas.openxmlformats.org/officeDocument/2006/relationships" xmlns:p="http://schemas.openxmlformats.org/presentationml/2006/main">
+  <p:cSld>
+    <p:spTree>
+      <p:nvGrpSpPr>
+        <p:cNvPr id="1" name=""/>
+        <p:cNvGrpSpPr/>
+        <p:nvPr/>
+      </p:nvGrpSpPr>
+      <p:grpSpPr>
+        <a:xfrm>
+          <a:off x="0" y="0"/>
+          <a:ext cx="0" cy="0"/>
+          <a:chOff x="0" y="0"/>
+          <a:chExt cx="0" cy="0"/>
+        </a:xfrm>
+      </p:grpSpPr>
+      <p:sp>
+        <p:nvSpPr>
+          <p:cNvPr id="2" name="Title 1"/>
+          <p:cNvSpPr>
+            <a:spLocks noGrp="1"/>
+          </p:cNvSpPr>
+          <p:nvPr>
+            <p:ph type="title"/>
+          </p:nvPr>
+        </p:nvSpPr>
+        <p:spPr/>
+        <p:txBody>
+          <a:bodyPr/>
+          <a:lstStyle/>
+          <a:p>
+            <a:pPr lvl="0" indent="0" marL="0">
+              <a:buNone/>
+            </a:pPr>
+            <a:r>
+              <a:rPr/>
+              <a:t>How many clusters is enough?</a:t>
+            </a:r>
+          </a:p>
+        </p:txBody>
+      </p:sp>
+      <mc:AlternateContent xmlns:mc="http://schemas.openxmlformats.org/markup-compatibility/2006">
+        <mc:Choice xmlns:a14="http://schemas.microsoft.com/office/drawing/2010/main" Requires="a14">
+          <p:sp>
+            <p:nvSpPr>
+              <p:cNvPr id="3" name="Content Placeholder 2"/>
+              <p:cNvSpPr>
+                <a:spLocks noGrp="1"/>
+              </p:cNvSpPr>
+              <p:nvPr>
+                <p:ph idx="1"/>
+              </p:nvPr>
+            </p:nvSpPr>
+            <p:spPr/>
+            <p:txBody>
+              <a:bodyPr/>
+              <a:lstStyle/>
+              <a:p>
+                <a:pPr lvl="0" indent="0" marL="0">
+                  <a:buNone/>
+                </a:pPr>
+                <a:r>
+                  <a:rPr/>
+                  <a:t>The cluster-robust estimator is consistent as the number of </a:t>
+                </a:r>
+                <a:r>
+                  <a:rPr b="1"/>
+                  <a:t>clusters</a:t>
+                </a:r>
+                <a:r>
+                  <a:rPr/>
+                  <a:t> grows, not as the number of rows grows.</a:t>
+                </a:r>
+              </a:p>
+              <a:p>
+                <a:pPr lvl="0"/>
+                <a:r>
+                  <a:rPr/>
+                  <a:t>30 countries is on the edge — often cited as a rough minimum</a:t>
+                </a:r>
+              </a:p>
+              <a:p>
+                <a:pPr lvl="0"/>
+                <a:r>
+                  <a:rPr/>
+                  <a:t>Below that, intervals are too narrow again, for a new reason</a:t>
+                </a:r>
+              </a:p>
+              <a:p>
+                <a:pPr lvl="0"/>
+                <a:r>
+                  <a:rPr/>
+                  <a:t>The wild cluster bootstrap is the standard remedy</a:t>
+                </a:r>
+              </a:p>
+              <a:p>
+                <a:pPr lvl="0" indent="0" marL="0">
+                  <a:buNone/>
+                </a:pPr>
+                <a:r>
+                  <a:rPr/>
+                  <a:t>Report your number of clusters next to </a:t>
+                </a:r>
+                <a14:m>
+                  <m:oMath xmlns:m="http://schemas.openxmlformats.org/officeDocument/2006/math">
+                    <m:r>
+                      <m:t>n</m:t>
+                    </m:r>
+                  </m:oMath>
+                </a14:m>
+                <a:r>
+                  <a:rPr/>
+                  <a:t>. A reader cannot judge your inference without it, and almost nobody prints it.</a:t>
+                </a:r>
+              </a:p>
+            </p:txBody>
+          </p:sp>
+        </mc:Choice>
+      </mc:AlternateContent>
+    </p:spTree>
+  </p:cSld>
+</p:sld>
+</file>
+
+<file path=ppt/slides/slide27.xml><?xml version="1.0" encoding="UTF-8"?><p:sld xmlns:a="http://schemas.openxmlformats.org/drawingml/2006/main" xmlns:r="http://schemas.openxmlformats.org/officeDocument/2006/relationships" xmlns:p="http://schemas.openxmlformats.org/presentationml/2006/main"><p:cSld><p:spTree><p:nvGrpSpPr><p:cNvPr id="1" name="" /><p:cNvGrpSpPr /><p:nvPr /></p:nvGrpSpPr><p:grpSpPr><a:xfrm><a:off x="0" y="0" /><a:ext cx="0" cy="0" /><a:chOff x="0" y="0" /><a:chExt cx="0" cy="0" /></a:xfrm></p:grpSpPr><p:sp><p:nvSpPr><p:cNvPr id="2" name="Title 1" /><p:cNvSpPr><a:spLocks noGrp="1" /></p:cNvSpPr><p:nvPr><p:ph type="title" /></p:nvPr></p:nvSpPr><p:spPr /><p:txBody><a:bodyPr /><a:lstStyle /><a:p><a:pPr lvl="0" indent="0" marL="0"><a:buNone /></a:pPr><a:r><a:rPr /><a:t>Common mistakes</a:t></a:r></a:p></p:txBody></p:sp><p:graphicFrame><p:nvGraphicFramePr><p:cNvPr id="6" name="Content Placeholder 5" /><p:cNvGraphicFramePr><a:graphicFrameLocks noGrp="1" /></p:cNvGraphicFramePr><p:nvPr><p:ph idx="1" /></p:nvPr></p:nvGraphicFramePr><p:xfrm><a:off x="457200" y="1193800" /><a:ext cx="8229600" cy="3390900" /></p:xfrm><a:graphic><a:graphicData uri="http://schemas.openxmlformats.org/drawingml/2006/table"><a:tbl><a:tblPr firstRow="1" bandRow="1"><a:tableStyleId>{5C22544A-7EE6-4342-B048-85BDC9FD1C3A}</a:tableStyleId></a:tblPr><a:tblGrid><a:gridCol w="4114800" /><a:gridCol w="4114800" /></a:tblGrid><a:tr h="0"><a:tc><a:txBody><a:bodyPr /><a:lstStyle /><a:p><a:pPr lvl="0" indent="0" marL="0"><a:buNone /></a:pPr><a:r><a:rPr /><a:t>Mistake</a:t></a:r></a:p></a:txBody><a:tcPr /></a:tc><a:tc><a:txBody><a:bodyPr /><a:lstStyle /><a:p><a:pPr lvl="0" indent="0" marL="0"><a:buNone /></a:pPr><a:r><a:rPr /><a:t>Consequence</a:t></a:r></a:p></a:txBody><a:tcPr /></a:tc></a:tr><a:tr h="0"><a:tc><a:txBody><a:bodyPr /><a:lstStyle /><a:p><a:pPr lvl="0" indent="0" marL="0"><a:buNone /></a:pPr><a:r><a:rPr /><a:t>Default standard errors on panel data</a:t></a:r></a:p></a:txBody></a:tc><a:tc><a:txBody><a:bodyPr /><a:lstStyle /><a:p><a:pPr lvl="0" indent="0" marL="0"><a:buNone /></a:pPr><a:r><a:rPr /><a:t>Intervals far too narrow</a:t></a:r></a:p></a:txBody></a:tc></a:tr><a:tr h="0"><a:tc><a:txBody><a:bodyPr /><a:lstStyle /><a:p><a:pPr lvl="0" indent="0" marL="0"><a:buNone /></a:pPr><a:r><a:rPr /><a:t>Clustering on the wrong level</a:t></a:r></a:p></a:txBody></a:tc><a:tc><a:txBody><a:bodyPr /><a:lstStyle /><a:p><a:pPr lvl="0" indent="0" marL="0"><a:buNone /></a:pPr><a:r><a:rPr /><a:t>Precision over- or under-stated</a:t></a:r></a:p></a:txBody></a:tc></a:tr><a:tr h="0"><a:tc><a:txBody><a:bodyPr /><a:lstStyle /><a:p><a:pPr lvl="0" indent="0" marL="0"><a:buNone /></a:pPr><a:r><a:rPr /><a:t>“Controlling for everything”</a:t></a:r></a:p></a:txBody></a:tc><a:tc><a:txBody><a:bodyPr /><a:lstStyle /><a:p><a:pPr lvl="0" indent="0" marL="0"><a:buNone /></a:pPr><a:r><a:rPr /><a:t>Post-treatment bias; uninterpretable coefficients</a:t></a:r></a:p></a:txBody></a:tc></a:tr><a:tr h="0"><a:tc><a:txBody><a:bodyPr /><a:lstStyle /><a:p><a:pPr lvl="0" indent="0" marL="0"><a:buNone /></a:pPr><a:r><a:rPr /><a:t>Reading significance from </a:t></a:r><a14:m><m:oMath xmlns:m="http://schemas.openxmlformats.org/officeDocument/2006/math"><m:r><m:t>n</m:t></m:r><m:r><m:rPr><m:sty m:val="p" /></m:rPr><m:t>=</m:t></m:r><m:r><m:t>3150</m:t></m:r></m:oMath></a14:m></a:p></a:txBody></a:tc><a:tc><a:txBody><a:bodyPr /><a:lstStyle /><a:p><a:pPr lvl="0" indent="0" marL="0"><a:buNone /></a:pPr><a:r><a:rPr /><a:t>You have 30 independent units</a:t></a:r></a:p></a:txBody></a:tc></a:tr><a:tr h="0"><a:tc><a:txBody><a:bodyPr /><a:lstStyle /><a:p><a:pPr lvl="0" indent="0" marL="0"><a:buNone /></a:pPr><a:r><a:rPr /><a:t>Dropping </a:t></a:r><a:r><a:rPr><a:latin typeface="Courier" /></a:rPr><a:t>flag == &quot;u&quot;</a:t></a:r><a:r><a:rPr /><a:t> rows</a:t></a:r></a:p></a:txBody></a:tc><a:tc><a:txBody><a:bodyPr /><a:lstStyle /><a:p><a:pPr lvl="0" indent="0" marL="0"><a:buNone /></a:pPr><a:r><a:rPr /><a:t>Coverage biased toward large economies</a:t></a:r></a:p></a:txBody></a:tc></a:tr></a:tbl></a:graphicData></a:graphic></p:graphicFrame></p:spTree></p:cSld></p:sld>
+</file>
+
+<file path=ppt/slides/slide28.xml><?xml version="1.0" encoding="utf-8"?>
+<p:sld xmlns:a="http://schemas.openxmlformats.org/drawingml/2006/main" xmlns:r="http://schemas.openxmlformats.org/officeDocument/2006/relationships" xmlns:p="http://schemas.openxmlformats.org/presentationml/2006/main">
+  <p:cSld>
+    <p:spTree>
+      <p:nvGrpSpPr>
+        <p:cNvPr id="1" name=""/>
+        <p:cNvGrpSpPr/>
+        <p:nvPr/>
+      </p:nvGrpSpPr>
+      <p:grpSpPr>
+        <a:xfrm>
+          <a:off x="0" y="0"/>
+          <a:ext cx="0" cy="0"/>
+          <a:chOff x="0" y="0"/>
+          <a:chExt cx="0" cy="0"/>
+        </a:xfrm>
+      </p:grpSpPr>
+      <p:sp>
+        <p:nvSpPr>
+          <p:cNvPr id="2" name="Title 1"/>
+          <p:cNvSpPr>
+            <a:spLocks noGrp="1"/>
+          </p:cNvSpPr>
+          <p:nvPr>
+            <p:ph type="title"/>
+          </p:nvPr>
+        </p:nvSpPr>
+        <p:spPr/>
+        <p:txBody>
+          <a:bodyPr/>
+          <a:lstStyle/>
+          <a:p>
+            <a:pPr lvl="0" indent="0" marL="0">
+              <a:buNone/>
+            </a:pPr>
+            <a:r>
+              <a:rPr/>
+              <a:t>In the lab</a:t>
+            </a:r>
+          </a:p>
+        </p:txBody>
+      </p:sp>
+      <p:sp>
+        <p:nvSpPr>
+          <p:cNvPr id="3" name="Content Placeholder 2"/>
+          <p:cNvSpPr>
+            <a:spLocks noGrp="1"/>
+          </p:cNvSpPr>
+          <p:nvPr>
+            <p:ph idx="1"/>
+          </p:nvPr>
+        </p:nvSpPr>
+        <p:spPr/>
+        <p:txBody>
+          <a:bodyPr/>
+          <a:lstStyle/>
+          <a:p>
+            <a:pPr lvl="0" indent="0" marL="0">
+              <a:buNone/>
+            </a:pPr>
+            <a:r>
+              <a:rPr/>
+              <a:t>Work through </a:t>
+            </a:r>
+            <a:r>
+              <a:rPr>
+                <a:hlinkClick r:id="rId2"/>
+                <a:latin typeface="Courier"/>
+              </a:rPr>
+              <a:t>02-lab/README.md</a:t>
+            </a:r>
+            <a:r>
+              <a:rPr/>
+              <a:t>.</a:t>
+            </a:r>
+          </a:p>
+          <a:p>
+            <a:pPr lvl="0" indent="-342900" marL="342900">
+              <a:buAutoNum type="arabicPeriod"/>
+            </a:pPr>
+            <a:r>
+              <a:rPr/>
+              <a:t>Fit the earnings model and inspect residuals against fitted values</a:t>
+            </a:r>
+          </a:p>
+          <a:p>
+            <a:pPr lvl="0" indent="-342900" marL="342900">
+              <a:buAutoNum type="arabicPeriod"/>
+            </a:pPr>
+            <a:r>
+              <a:rPr/>
+              <a:t>Compute classical, HC3 and clustered standard errors side by side</a:t>
+            </a:r>
+          </a:p>
+          <a:p>
+            <a:pPr lvl="0" indent="-342900" marL="342900">
+              <a:buAutoNum type="arabicPeriod"/>
+            </a:pPr>
+            <a:r>
+              <a:rPr/>
+              <a:t>Write down a confounder, sign its bias, then test your prediction</a:t>
+            </a:r>
+          </a:p>
+          <a:p>
+            <a:pPr lvl="0" indent="-342900" marL="342900">
+              <a:buAutoNum type="arabicPeriod"/>
+            </a:pPr>
+            <a:r>
+              <a:rPr/>
+              <a:t>Three sentences — with the cluster level named</a:t>
+            </a:r>
+          </a:p>
+        </p:txBody>
+      </p:sp>
+    </p:spTree>
+  </p:cSld>
+</p:sld>
+</file>
+
+<file path=ppt/slides/slide3.xml><?xml version="1.0" encoding="UTF-8"?><p:sld xmlns:a="http://schemas.openxmlformats.org/drawingml/2006/main" xmlns:r="http://schemas.openxmlformats.org/officeDocument/2006/relationships" xmlns:p="http://schemas.openxmlformats.org/presentationml/2006/main"><p:cSld><p:spTree><p:nvGrpSpPr><p:cNvPr id="1" name="" /><p:cNvGrpSpPr /><p:nvPr /></p:nvGrpSpPr><p:grpSpPr><a:xfrm><a:off x="0" y="0" /><a:ext cx="0" cy="0" /><a:chOff x="0" y="0" /><a:chExt cx="0" cy="0" /></a:xfrm></p:grpSpPr><p:sp><p:nvSpPr><p:cNvPr id="2" name="Title 1" /><p:cNvSpPr><a:spLocks noGrp="1" /></p:cNvSpPr><p:nvPr><p:ph type="title" /></p:nvPr></p:nvSpPr><p:spPr /><p:txBody><a:bodyPr /><a:lstStyle /><a:p><a:pPr lvl="0" indent="0" marL="0"><a:buNone /></a:pPr><a:r><a:rPr /><a:t>The 90 minutes ahead</a:t></a:r></a:p></p:txBody></p:sp><p:graphicFrame><p:nvGraphicFramePr><p:cNvPr id="6" name="Content Placeholder 5" /><p:cNvGraphicFramePr><a:graphicFrameLocks noGrp="1" /></p:cNvGraphicFramePr><p:nvPr><p:ph idx="1" /></p:nvPr></p:nvGraphicFramePr><p:xfrm><a:off x="457200" y="1193800" /><a:ext cx="8229600" cy="3390900" /></p:xfrm><a:graphic><a:graphicData uri="http://schemas.openxmlformats.org/drawingml/2006/table"><a:tbl><a:tblPr firstRow="0" bandRow="1"><a:tableStyleId>{5C22544A-7EE6-4342-B048-85BDC9FD1C3A}</a:tableStyleId></a:tblPr><a:tblGrid><a:gridCol w="4114800" /><a:gridCol w="4114800" /></a:tblGrid><a:tr h="0"><a:tc><a:txBody><a:bodyPr /><a:lstStyle /><a:p><a:pPr lvl="0" indent="0" marL="0"><a:buNone /></a:pPr><a:r><a:rPr b="1" /><a:t>0–10</a:t></a:r></a:p></a:txBody></a:tc><a:tc><a:txBody><a:bodyPr /><a:lstStyle /><a:p><a:pPr lvl="0" indent="0" marL="0"><a:buNone /></a:pPr><a:r><a:rPr /><a:t>Three ways a standard error lies</a:t></a:r></a:p></a:txBody></a:tc></a:tr><a:tr h="0"><a:tc><a:txBody><a:bodyPr /><a:lstStyle /><a:p><a:pPr lvl="0" indent="0" marL="0"><a:buNone /></a:pPr><a:r><a:rPr b="1" /><a:t>10–30</a:t></a:r></a:p></a:txBody></a:tc><a:tc><a:txBody><a:bodyPr /><a:lstStyle /><a:p><a:pPr lvl="0" indent="0" marL="0"><a:buNone /></a:pPr><a:r><a:rPr /><a:t>The sandwich, and three guesses at </a:t></a:r><a14:m><m:oMath xmlns:m="http://schemas.openxmlformats.org/officeDocument/2006/math"><m:r><m:t>Ω</m:t></m:r></m:oMath></a14:m></a:p></a:txBody></a:tc></a:tr><a:tr h="0"><a:tc><a:txBody><a:bodyPr /><a:lstStyle /><a:p><a:pPr lvl="0" indent="0" marL="0"><a:buNone /></a:pPr><a:r><a:rPr b="1" /><a:t>30–45</a:t></a:r></a:p></a:txBody></a:tc><a:tc><a:txBody><a:bodyPr /><a:lstStyle /><a:p><a:pPr lvl="0" indent="0" marL="0"><a:buNone /></a:pPr><a:r><a:rPr /><a:t>Omitted variables, and signing the bias</a:t></a:r></a:p></a:txBody></a:tc></a:tr><a:tr h="0"><a:tc><a:txBody><a:bodyPr /><a:lstStyle /><a:p><a:pPr lvl="0" indent="0" marL="0"><a:buNone /></a:pPr><a:r><a:rPr b="1" /><a:t>45–70</a:t></a:r></a:p></a:txBody></a:tc><a:tc><a:txBody><a:bodyPr /><a:lstStyle /><a:p><a:pPr lvl="0" indent="0" marL="0"><a:buNone /></a:pPr><a:r><a:rPr /><a:t>Doing it: three standard errors, one coefficient</a:t></a:r></a:p></a:txBody></a:tc></a:tr><a:tr h="0"><a:tc><a:txBody><a:bodyPr /><a:lstStyle /><a:p><a:pPr lvl="0" indent="0" marL="0"><a:buNone /></a:pPr><a:r><a:rPr b="1" /><a:t>70–85</a:t></a:r></a:p></a:txBody></a:tc><a:tc><a:txBody><a:bodyPr /><a:lstStyle /><a:p><a:pPr lvl="0" indent="0" marL="0"><a:buNone /></a:pPr><a:r><a:rPr /><a:t>What a p-value is and is not</a:t></a:r></a:p></a:txBody></a:tc></a:tr><a:tr h="0"><a:tc><a:txBody><a:bodyPr /><a:lstStyle /><a:p><a:pPr lvl="0" indent="0" marL="0"><a:buNone /></a:pPr><a:r><a:rPr b="1" /><a:t>85–90</a:t></a:r></a:p></a:txBody></a:tc><a:tc><a:txBody><a:bodyPr /><a:lstStyle /><a:p><a:pPr lvl="0" indent="0" marL="0"><a:buNone /></a:pPr><a:r><a:rPr /><a:t>Handoff to the lab</a:t></a:r></a:p></a:txBody></a:tc></a:tr></a:tbl></a:graphicData></a:graphic></p:graphicFrame></p:spTree></p:cSld></p:sld>
+</file>
+
+<file path=ppt/slides/slide4.xml><?xml version="1.0" encoding="utf-8"?>
+<p:sld xmlns:a="http://schemas.openxmlformats.org/drawingml/2006/main" xmlns:r="http://schemas.openxmlformats.org/officeDocument/2006/relationships" xmlns:p="http://schemas.openxmlformats.org/presentationml/2006/main">
+  <p:cSld>
+    <p:spTree>
+      <p:nvGrpSpPr>
+        <p:cNvPr id="1" name=""/>
+        <p:cNvGrpSpPr/>
+        <p:nvPr/>
+      </p:nvGrpSpPr>
+      <p:grpSpPr>
+        <a:xfrm>
+          <a:off x="0" y="0"/>
+          <a:ext cx="0" cy="0"/>
+          <a:chOff x="0" y="0"/>
+          <a:chExt cx="0" cy="0"/>
+        </a:xfrm>
+      </p:grpSpPr>
+      <p:sp>
+        <p:nvSpPr>
+          <p:cNvPr id="2" name="Title 1"/>
+          <p:cNvSpPr>
+            <a:spLocks noGrp="1"/>
+          </p:cNvSpPr>
+          <p:nvPr>
+            <p:ph type="title"/>
+          </p:nvPr>
+        </p:nvSpPr>
+        <p:spPr/>
+        <p:txBody>
+          <a:bodyPr/>
+          <a:lstStyle/>
+          <a:p>
+            <a:pPr lvl="0" indent="0" marL="0">
+              <a:buNone/>
+            </a:pPr>
+            <a:r>
+              <a:rPr/>
+              <a:t>Before class you read</a:t>
+            </a:r>
+          </a:p>
+        </p:txBody>
+      </p:sp>
+      <p:sp>
+        <p:nvSpPr>
+          <p:cNvPr id="3" name="Content Placeholder 2"/>
+          <p:cNvSpPr>
+            <a:spLocks noGrp="1"/>
+          </p:cNvSpPr>
+          <p:nvPr>
+            <p:ph idx="1"/>
+          </p:nvPr>
+        </p:nvSpPr>
+        <p:spPr/>
+        <p:txBody>
+          <a:bodyPr/>
+          <a:lstStyle/>
+          <a:p>
+            <a:pPr lvl="0" indent="0" marL="0">
+              <a:buNone/>
+            </a:pPr>
+            <a:r>
+              <a:rPr b="1"/>
+              <a:t>Bertrand, Duflo &amp; Mullainathan</a:t>
+            </a:r>
+            <a:r>
+              <a:rPr/>
+              <a:t>, </a:t>
+            </a:r>
+            <a:r>
+              <a:rPr i="1"/>
+              <a:t>How Much Should We Trust Differences-in-Differences Estimates?</a:t>
+            </a:r>
+            <a:r>
+              <a:rPr/>
+              <a:t>, </a:t>
+            </a:r>
+            <a:r>
+              <a:rPr b="1"/>
+              <a:t>QJE</a:t>
+            </a:r>
+            <a:r>
+              <a:rPr/>
+              <a:t> 2004.</a:t>
+            </a:r>
+          </a:p>
+          <a:p>
+            <a:pPr lvl="0" indent="0" marL="0">
+              <a:buNone/>
+            </a:pPr>
+            <a:r>
+              <a:rPr/>
+              <a:t>DOI: 10.1162/003355304772839588</a:t>
+            </a:r>
+          </a:p>
+          <a:p>
+            <a:pPr lvl="0" indent="0" marL="0">
+              <a:buNone/>
+            </a:pPr>
+            <a:r>
+              <a:rPr/>
+              <a:t>Their result, which should alarm you:</a:t>
+            </a:r>
+          </a:p>
+          <a:p>
+            <a:pPr lvl="0" indent="0" marL="1270000">
+              <a:buNone/>
+            </a:pPr>
+            <a:r>
+              <a:rPr sz="2000"/>
+              <a:t>Using placebo “treatments” that could have no effect, conventional standard errors rejected the true null in </a:t>
+            </a:r>
+            <a:r>
+              <a:rPr sz="2000" b="1"/>
+              <a:t>up to 45%</a:t>
+            </a:r>
+            <a:r>
+              <a:rPr sz="2000"/>
+              <a:t> of cases — at a nominal 5% level.</a:t>
+            </a:r>
+          </a:p>
+          <a:p>
+            <a:pPr lvl="0" indent="0" marL="0">
+              <a:buNone/>
+            </a:pPr>
+            <a:r>
+              <a:rPr/>
+              <a:t>Not a modelling subtlety. An error rate nine times what was claimed, in a literature that was already published.</a:t>
+            </a:r>
+          </a:p>
+        </p:txBody>
+      </p:sp>
+    </p:spTree>
+  </p:cSld>
+</p:sld>
+</file>
+
+<file path=ppt/slides/slide5.xml><?xml version="1.0" encoding="utf-8"?>
+<p:sld xmlns:a="http://schemas.openxmlformats.org/drawingml/2006/main" xmlns:r="http://schemas.openxmlformats.org/officeDocument/2006/relationships" xmlns:p="http://schemas.openxmlformats.org/presentationml/2006/main">
+  <p:cSld>
+    <p:spTree>
+      <p:nvGrpSpPr>
+        <p:cNvPr id="1" name=""/>
+        <p:cNvGrpSpPr/>
+        <p:nvPr/>
+      </p:nvGrpSpPr>
+      <p:grpSpPr>
+        <a:xfrm>
+          <a:off x="0" y="0"/>
+          <a:ext cx="0" cy="0"/>
+          <a:chOff x="0" y="0"/>
+          <a:chExt cx="0" cy="0"/>
+        </a:xfrm>
+      </p:grpSpPr>
+      <p:sp>
+        <p:nvSpPr>
+          <p:cNvPr id="2" name="Title 1"/>
+          <p:cNvSpPr>
+            <a:spLocks noGrp="1"/>
+          </p:cNvSpPr>
+          <p:nvPr>
+            <p:ph type="title"/>
+          </p:nvPr>
+        </p:nvSpPr>
+        <p:spPr/>
+        <p:txBody>
+          <a:bodyPr/>
+          <a:lstStyle/>
+          <a:p>
+            <a:pPr lvl="0" indent="0" marL="0">
+              <a:buNone/>
+            </a:pPr>
+            <a:r>
+              <a:rPr/>
+              <a:t>Where that came from</a:t>
+            </a:r>
+          </a:p>
+        </p:txBody>
+      </p:sp>
+      <p:sp>
+        <p:nvSpPr>
+          <p:cNvPr id="3" name="Content Placeholder 2"/>
+          <p:cNvSpPr>
+            <a:spLocks noGrp="1"/>
+          </p:cNvSpPr>
+          <p:nvPr>
+            <p:ph idx="1"/>
+          </p:nvPr>
+        </p:nvSpPr>
+        <p:spPr/>
+        <p:txBody>
+          <a:bodyPr/>
+          <a:lstStyle/>
+          <a:p>
+            <a:pPr lvl="0"/>
+            <a:r>
+              <a:rPr/>
+              <a:t>Serially correlated outcomes</a:t>
+            </a:r>
+          </a:p>
+          <a:p>
+            <a:pPr lvl="0"/>
+            <a:r>
+              <a:rPr/>
+              <a:t>Repeated observations on the same unit</a:t>
+            </a:r>
+          </a:p>
+          <a:p>
+            <a:pPr lvl="0"/>
+            <a:r>
+              <a:rPr/>
+              <a:t>Standard errors computed as though each row were an independent draw</a:t>
+            </a:r>
+          </a:p>
+          <a:p>
+            <a:pPr lvl="0" indent="0" marL="0">
+              <a:buNone/>
+            </a:pPr>
+            <a:r>
+              <a:rPr/>
+              <a:t>Our panel has all three. 3,150 rows, 30 countries. Today is about not making their mistake.</a:t>
+            </a:r>
+          </a:p>
+        </p:txBody>
+      </p:sp>
+    </p:spTree>
+  </p:cSld>
+</p:sld>
+</file>
+
+<file path=ppt/slides/slide6.xml><?xml version="1.0" encoding="utf-8"?>
+<p:sld xmlns:a="http://schemas.openxmlformats.org/drawingml/2006/main" xmlns:r="http://schemas.openxmlformats.org/officeDocument/2006/relationships" xmlns:p="http://schemas.openxmlformats.org/presentationml/2006/main">
+  <p:cSld>
+    <p:spTree>
+      <p:nvGrpSpPr>
+        <p:cNvPr id="1" name=""/>
+        <p:cNvGrpSpPr/>
+        <p:nvPr/>
+      </p:nvGrpSpPr>
+      <p:grpSpPr>
+        <a:xfrm>
+          <a:off x="0" y="0"/>
+          <a:ext cx="0" cy="0"/>
+          <a:chOff x="0" y="0"/>
+          <a:chExt cx="0" cy="0"/>
+        </a:xfrm>
+      </p:grpSpPr>
+      <p:sp>
+        <p:nvSpPr>
+          <p:cNvPr id="2" name="Title 1"/>
+          <p:cNvSpPr>
+            <a:spLocks noGrp="1"/>
+          </p:cNvSpPr>
+          <p:nvPr>
+            <p:ph type="title"/>
+          </p:nvPr>
+        </p:nvSpPr>
+        <p:spPr>
+          <a:xfrm>
+            <a:off x="722313" y="3305176"/>
+            <a:ext cx="7772400" cy="1021556"/>
+          </a:xfrm>
+        </p:spPr>
+        <p:txBody>
+          <a:bodyPr/>
+          <a:lstStyle/>
+          <a:p>
+            <a:pPr lvl="0" indent="0" marL="0">
+              <a:buNone/>
+            </a:pPr>
+            <a:r>
+              <a:rPr/>
+              <a:t>The question</a:t>
+            </a:r>
+          </a:p>
+        </p:txBody>
+      </p:sp>
+    </p:spTree>
+  </p:cSld>
+</p:sld>
+</file>
+
+<file path=ppt/slides/slide7.xml><?xml version="1.0" encoding="utf-8"?>
+<p:sld xmlns:a="http://schemas.openxmlformats.org/drawingml/2006/main" xmlns:r="http://schemas.openxmlformats.org/officeDocument/2006/relationships" xmlns:p="http://schemas.openxmlformats.org/presentationml/2006/main">
+  <p:cSld>
+    <p:spTree>
+      <p:nvGrpSpPr>
+        <p:cNvPr id="1" name=""/>
+        <p:cNvGrpSpPr/>
+        <p:nvPr/>
+      </p:nvGrpSpPr>
+      <p:grpSpPr>
+        <a:xfrm>
+          <a:off x="0" y="0"/>
+          <a:ext cx="0" cy="0"/>
+          <a:chOff x="0" y="0"/>
+          <a:chExt cx="0" cy="0"/>
+        </a:xfrm>
+      </p:grpSpPr>
+      <p:sp>
+        <p:nvSpPr>
+          <p:cNvPr id="2" name="Title 1"/>
+          <p:cNvSpPr>
+            <a:spLocks noGrp="1"/>
+          </p:cNvSpPr>
+          <p:nvPr>
+            <p:ph type="title"/>
+          </p:nvPr>
+        </p:nvSpPr>
+        <p:spPr/>
+        <p:txBody>
+          <a:bodyPr/>
+          <a:lstStyle/>
+          <a:p>
+            <a:pPr lvl="0" indent="0" marL="0">
+              <a:buNone/>
+            </a:pPr>
+            <a:r>
+              <a:rPr/>
+              <a:t>Earnings and education across Europe</a:t>
+            </a:r>
+          </a:p>
+        </p:txBody>
+      </p:sp>
+      <p:sp>
+        <p:nvSpPr>
+          <p:cNvPr id="3" name="Content Placeholder 2"/>
+          <p:cNvSpPr>
+            <a:spLocks noGrp="1"/>
+          </p:cNvSpPr>
+          <p:nvPr>
+            <p:ph idx="1"/>
+          </p:nvPr>
+        </p:nvSpPr>
+        <p:spPr/>
+        <p:txBody>
+          <a:bodyPr/>
+          <a:lstStyle/>
+          <a:p>
+            <a:pPr lvl="0" indent="0" marL="1270000">
+              <a:buNone/>
+            </a:pPr>
+            <a:r>
+              <a:rPr sz="2000" i="1"/>
+              <a:t>“A higher tertiary-education share is associated with higher annual earnings.”</a:t>
+            </a:r>
+          </a:p>
+          <a:p>
+            <a:pPr lvl="0" indent="0" marL="0">
+              <a:buNone/>
+            </a:pPr>
+            <a:r>
+              <a:rPr/>
+              <a:t>Estimating that coefficient is the easy part. The hard part:</a:t>
+            </a:r>
+          </a:p>
+          <a:p>
+            <a:pPr lvl="0"/>
+            <a:r>
+              <a:rPr/>
+              <a:t>How </a:t>
+            </a:r>
+            <a:r>
+              <a:rPr b="1"/>
+              <a:t>precise</a:t>
+            </a:r>
+            <a:r>
+              <a:rPr/>
+              <a:t> is it?</a:t>
+            </a:r>
+          </a:p>
+          <a:p>
+            <a:pPr lvl="0"/>
+            <a:r>
+              <a:rPr/>
+              <a:t>What is the </a:t>
+            </a:r>
+            <a:r>
+              <a:rPr b="1"/>
+              <a:t>p-value</a:t>
+            </a:r>
+            <a:r>
+              <a:rPr/>
+              <a:t> actually testing?</a:t>
+            </a:r>
+          </a:p>
+          <a:p>
+            <a:pPr lvl="0"/>
+            <a:r>
+              <a:rPr/>
+              <a:t>What would make the whole thing </a:t>
+            </a:r>
+            <a:r>
+              <a:rPr b="1"/>
+              <a:t>wrong</a:t>
+            </a:r>
+            <a:r>
+              <a:rPr/>
+              <a:t> rather than merely imprecise?</a:t>
+            </a:r>
+          </a:p>
+          <a:p>
+            <a:pPr lvl="0" indent="0" marL="0">
+              <a:buNone/>
+            </a:pPr>
+            <a:r>
+              <a:rPr/>
+              <a:t>Session 02 gave you the point estimate. This session is about whether you are entitled to any confidence in it.</a:t>
+            </a:r>
+          </a:p>
+        </p:txBody>
+      </p:sp>
+    </p:spTree>
+  </p:cSld>
+</p:sld>
+</file>
+
+<file path=ppt/slides/slide8.xml><?xml version="1.0" encoding="utf-8"?>
+<p:sld xmlns:a="http://schemas.openxmlformats.org/drawingml/2006/main" xmlns:r="http://schemas.openxmlformats.org/officeDocument/2006/relationships" xmlns:p="http://schemas.openxmlformats.org/presentationml/2006/main">
+  <p:cSld>
+    <p:spTree>
+      <p:nvGrpSpPr>
+        <p:cNvPr id="1" name=""/>
+        <p:cNvGrpSpPr/>
+        <p:nvPr/>
+      </p:nvGrpSpPr>
+      <p:grpSpPr>
+        <a:xfrm>
+          <a:off x="0" y="0"/>
+          <a:ext cx="0" cy="0"/>
+          <a:chOff x="0" y="0"/>
+          <a:chExt cx="0" cy="0"/>
+        </a:xfrm>
+      </p:grpSpPr>
+      <p:sp>
+        <p:nvSpPr>
+          <p:cNvPr id="2" name="Title 1"/>
+          <p:cNvSpPr>
+            <a:spLocks noGrp="1"/>
+          </p:cNvSpPr>
+          <p:nvPr>
+            <p:ph type="title"/>
+          </p:nvPr>
+        </p:nvSpPr>
+        <p:spPr/>
+        <p:txBody>
+          <a:bodyPr/>
+          <a:lstStyle/>
+          <a:p>
+            <a:pPr lvl="0" indent="0" marL="0">
+              <a:buNone/>
+            </a:pPr>
+            <a:r>
+              <a:rPr/>
+              <a:t>Three ways your standard errors lie</a:t>
+            </a:r>
+          </a:p>
+        </p:txBody>
+      </p:sp>
+      <p:sp>
+        <p:nvSpPr>
+          <p:cNvPr id="3" name="Content Placeholder 2"/>
+          <p:cNvSpPr>
+            <a:spLocks noGrp="1"/>
+          </p:cNvSpPr>
+          <p:nvPr>
+            <p:ph idx="1"/>
+          </p:nvPr>
+        </p:nvSpPr>
+        <p:spPr/>
+        <p:txBody>
+          <a:bodyPr/>
+          <a:lstStyle/>
+          <a:p>
+            <a:pPr lvl="0" indent="-342900" marL="342900">
+              <a:buAutoNum type="arabicPeriod"/>
+            </a:pPr>
+            <a:r>
+              <a:rPr b="1"/>
+              <a:t>Heteroskedasticity</a:t>
+            </a:r>
+            <a:r>
+              <a:rPr/>
+              <a:t> — the error variance is not constant. In this panel it scales with country size.</a:t>
+            </a:r>
+          </a:p>
+          <a:p>
+            <a:pPr lvl="0" indent="-342900" marL="342900">
+              <a:buAutoNum type="arabicPeriod"/>
+            </a:pPr>
+            <a:r>
+              <a:rPr b="1"/>
+              <a:t>Within-country correlation</a:t>
+            </a:r>
+            <a:r>
+              <a:rPr/>
+              <a:t> — Germany in 2019 and Germany in 2020 are not independent draws.</a:t>
+            </a:r>
+          </a:p>
+          <a:p>
+            <a:pPr lvl="0" indent="-342900" marL="342900">
+              <a:buAutoNum type="arabicPeriod"/>
+            </a:pPr>
+            <a:r>
+              <a:rPr b="1"/>
+              <a:t>Omitted variables</a:t>
+            </a:r>
+            <a:r>
+              <a:rPr/>
+              <a:t> — no standard error can rescue you from a missing confounder. That is a bias, not a variance.</a:t>
+            </a:r>
+          </a:p>
+          <a:p>
+            <a:pPr lvl="0" indent="0" marL="0">
+              <a:buNone/>
+            </a:pPr>
+            <a:r>
+              <a:rPr/>
+              <a:t>The first two make your intervals </a:t>
+            </a:r>
+            <a:r>
+              <a:rPr b="1"/>
+              <a:t>too narrow</a:t>
+            </a:r>
+            <a:r>
+              <a:rPr/>
+              <a:t>. The third makes the estimate </a:t>
+            </a:r>
+            <a:r>
+              <a:rPr b="1"/>
+              <a:t>wrong</a:t>
+            </a:r>
+            <a:r>
+              <a:rPr/>
+              <a:t>. They require different responses.</a:t>
+            </a:r>
+          </a:p>
+        </p:txBody>
+      </p:sp>
     </p:spTree>
   </p:cSld>
 </p:sld>
@@ -6546,7 +7937,12 @@
             <p:ph type="title"/>
           </p:nvPr>
         </p:nvSpPr>
-        <p:spPr/>
+        <p:spPr>
+          <a:xfrm>
+            <a:off x="722313" y="3305176"/>
+            <a:ext cx="7772400" cy="1021556"/>
+          </a:xfrm>
+        </p:spPr>
         <p:txBody>
           <a:bodyPr/>
           <a:lstStyle/>
@@ -6556,390 +7952,11 @@
             </a:pPr>
             <a:r>
               <a:rPr/>
-              <a:t>The omitted-variable formula</a:t>
-            </a:r>
-          </a:p>
-        </p:txBody>
-      </p:sp>
-      <mc:AlternateContent xmlns:mc="http://schemas.openxmlformats.org/markup-compatibility/2006">
-        <mc:Choice xmlns:a14="http://schemas.microsoft.com/office/drawing/2010/main" Requires="a14">
-          <p:sp>
-            <p:nvSpPr>
-              <p:cNvPr id="3" name="Content Placeholder 2"/>
-              <p:cNvSpPr>
-                <a:spLocks noGrp="1"/>
-              </p:cNvSpPr>
-              <p:nvPr>
-                <p:ph idx="1"/>
-              </p:nvPr>
-            </p:nvSpPr>
-            <p:spPr/>
-            <p:txBody>
-              <a:bodyPr/>
-              <a:lstStyle/>
-              <a:p>
-                <a:pPr lvl="0" indent="0" marL="0">
-                  <a:buNone/>
-                </a:pPr>
-                <a:r>
-                  <a:rPr/>
-                  <a:t>If the true model is </a:t>
-                </a:r>
-                <a14:m>
-                  <m:oMath xmlns:m="http://schemas.openxmlformats.org/officeDocument/2006/math">
-                    <m:r>
-                      <m:t>y</m:t>
-                    </m:r>
-                    <m:r>
-                      <m:rPr>
-                        <m:sty m:val="p"/>
-                      </m:rPr>
-                      <m:t>=</m:t>
-                    </m:r>
-                    <m:sSub>
-                      <m:e>
-                        <m:r>
-                          <m:t>X</m:t>
-                        </m:r>
-                      </m:e>
-                      <m:sub>
-                        <m:r>
-                          <m:t>1</m:t>
-                        </m:r>
-                      </m:sub>
-                    </m:sSub>
-                    <m:sSub>
-                      <m:e>
-                        <m:r>
-                          <m:t>β</m:t>
-                        </m:r>
-                      </m:e>
-                      <m:sub>
-                        <m:r>
-                          <m:t>1</m:t>
-                        </m:r>
-                      </m:sub>
-                    </m:sSub>
-                    <m:r>
-                      <m:rPr>
-                        <m:sty m:val="p"/>
-                      </m:rPr>
-                      <m:t>+</m:t>
-                    </m:r>
-                    <m:sSub>
-                      <m:e>
-                        <m:r>
-                          <m:t>X</m:t>
-                        </m:r>
-                      </m:e>
-                      <m:sub>
-                        <m:r>
-                          <m:t>2</m:t>
-                        </m:r>
-                      </m:sub>
-                    </m:sSub>
-                    <m:sSub>
-                      <m:e>
-                        <m:r>
-                          <m:t>β</m:t>
-                        </m:r>
-                      </m:e>
-                      <m:sub>
-                        <m:r>
-                          <m:t>2</m:t>
-                        </m:r>
-                      </m:sub>
-                    </m:sSub>
-                    <m:r>
-                      <m:rPr>
-                        <m:sty m:val="p"/>
-                      </m:rPr>
-                      <m:t>+</m:t>
-                    </m:r>
-                    <m:r>
-                      <m:t>ε</m:t>
-                    </m:r>
-                  </m:oMath>
-                </a14:m>
-                <a:r>
-                  <a:rPr/>
-                  <a:t> and you omit </a:t>
-                </a:r>
-                <a14:m>
-                  <m:oMath xmlns:m="http://schemas.openxmlformats.org/officeDocument/2006/math">
-                    <m:sSub>
-                      <m:e>
-                        <m:r>
-                          <m:t>X</m:t>
-                        </m:r>
-                      </m:e>
-                      <m:sub>
-                        <m:r>
-                          <m:t>2</m:t>
-                        </m:r>
-                      </m:sub>
-                    </m:sSub>
-                  </m:oMath>
-                </a14:m>
-                <a:r>
-                  <a:rPr/>
-                  <a:t>:</a:t>
-                </a:r>
-              </a:p>
-              <a:p>
-                <a:pPr lvl="0" indent="0" marL="0">
-                  <a:buNone/>
-                </a:pPr>
-                <a14:m>
-                  <m:oMathPara xmlns:m="http://schemas.openxmlformats.org/officeDocument/2006/math">
-                    <m:oMathParaPr>
-                      <m:jc m:val="center"/>
-                    </m:oMathParaPr>
-                    <m:oMath>
-                      <m:r>
-                        <m:rPr>
-                          <m:sty m:val="p"/>
-                        </m:rPr>
-                        <m:t>plim</m:t>
-                      </m:r>
-                      <m:sSub>
-                        <m:e>
-                          <m:acc>
-                            <m:accPr>
-                              <m:chr m:val="̂"/>
-                            </m:accPr>
-                            <m:e>
-                              <m:r>
-                                <m:t>β</m:t>
-                              </m:r>
-                            </m:e>
-                          </m:acc>
-                        </m:e>
-                        <m:sub>
-                          <m:r>
-                            <m:t>1</m:t>
-                          </m:r>
-                        </m:sub>
-                      </m:sSub>
-                      <m:r>
-                        <m:rPr>
-                          <m:sty m:val="p"/>
-                        </m:rPr>
-                        <m:t>=</m:t>
-                      </m:r>
-                      <m:sSub>
-                        <m:e>
-                          <m:r>
-                            <m:t>β</m:t>
-                          </m:r>
-                        </m:e>
-                        <m:sub>
-                          <m:r>
-                            <m:t>1</m:t>
-                          </m:r>
-                        </m:sub>
-                      </m:sSub>
-                      <m:r>
-                        <m:rPr>
-                          <m:sty m:val="p"/>
-                        </m:rPr>
-                        <m:t>+</m:t>
-                      </m:r>
-                      <m:limLow>
-                        <m:e>
-                          <m:limLow>
-                            <m:e>
-                              <m:r>
-                                <m:t>δ</m:t>
-                              </m:r>
-                            </m:e>
-                            <m:lim>
-                              <m:r>
-                                <m:rPr>
-                                  <m:sty m:val="p"/>
-                                </m:rPr>
-                                <m:t>⏟</m:t>
-                              </m:r>
-                            </m:lim>
-                          </m:limLow>
-                        </m:e>
-                        <m:lim>
-                          <m:m>
-                            <m:mPr>
-                              <m:baseJc m:val="center"/>
-                              <m:plcHide m:val="on"/>
-                              <m:mcs>
-                                <m:mc>
-                                  <m:mcPr>
-                                    <m:mcJc m:val="center"/>
-                                    <m:count m:val="1"/>
-                                  </m:mcPr>
-                                </m:mc>
-                              </m:mcs>
-                            </m:mPr>
-                            <m:mr>
-                              <m:e>
-                                <m:sSub>
-                                  <m:e>
-                                    <m:r>
-                                      <m:t>X</m:t>
-                                    </m:r>
-                                  </m:e>
-                                  <m:sub>
-                                    <m:r>
-                                      <m:t>2</m:t>
-                                    </m:r>
-                                  </m:sub>
-                                </m:sSub>
-                                <m:r>
-                                  <m:rPr>
-                                    <m:nor/>
-                                    <m:sty m:val="p"/>
-                                  </m:rPr>
-                                  <m:t> on </m:t>
-                                </m:r>
-                                <m:sSub>
-                                  <m:e>
-                                    <m:r>
-                                      <m:t>X</m:t>
-                                    </m:r>
-                                  </m:e>
-                                  <m:sub>
-                                    <m:r>
-                                      <m:t>1</m:t>
-                                    </m:r>
-                                  </m:sub>
-                                </m:sSub>
-                              </m:e>
-                            </m:mr>
-                          </m:m>
-                        </m:lim>
-                      </m:limLow>
-                      <m:r>
-                        <m:t>​</m:t>
-                      </m:r>
-                      <m:r>
-                        <m:rPr>
-                          <m:sty m:val="p"/>
-                        </m:rPr>
-                        <m:t>⋅</m:t>
-                      </m:r>
-                      <m:r>
-                        <m:t> </m:t>
-                      </m:r>
-                      <m:sSub>
-                        <m:e>
-                          <m:r>
-                            <m:t>β</m:t>
-                          </m:r>
-                        </m:e>
-                        <m:sub>
-                          <m:r>
-                            <m:t>2</m:t>
-                          </m:r>
-                        </m:sub>
-                      </m:sSub>
-                    </m:oMath>
-                  </m:oMathPara>
-                </a14:m>
-              </a:p>
-              <a:p>
-                <a:pPr lvl="0" indent="0" marL="0">
-                  <a:buNone/>
-                </a:pPr>
-                <a:r>
-                  <a:rPr/>
-                  <a:t>The bias has a </a:t>
-                </a:r>
-                <a:r>
-                  <a:rPr b="1"/>
-                  <a:t>sign you can reason about</a:t>
-                </a:r>
-                <a:r>
-                  <a:rPr/>
-                  <a:t> before you see any output:</a:t>
-                </a:r>
-              </a:p>
-              <a:p>
-                <a:pPr lvl="0"/>
-                <a14:m>
-                  <m:oMath xmlns:m="http://schemas.openxmlformats.org/officeDocument/2006/math">
-                    <m:r>
-                      <m:t>δ</m:t>
-                    </m:r>
-                    <m:r>
-                      <m:rPr>
-                        <m:sty m:val="p"/>
-                      </m:rPr>
-                      <m:t>&gt;</m:t>
-                    </m:r>
-                    <m:r>
-                      <m:t>0</m:t>
-                    </m:r>
-                  </m:oMath>
-                </a14:m>
-                <a:r>
-                  <a:rPr/>
-                  <a:t> and </a:t>
-                </a:r>
-                <a14:m>
-                  <m:oMath xmlns:m="http://schemas.openxmlformats.org/officeDocument/2006/math">
-                    <m:sSub>
-                      <m:e>
-                        <m:r>
-                          <m:t>β</m:t>
-                        </m:r>
-                      </m:e>
-                      <m:sub>
-                        <m:r>
-                          <m:t>2</m:t>
-                        </m:r>
-                      </m:sub>
-                    </m:sSub>
-                    <m:r>
-                      <m:rPr>
-                        <m:sty m:val="p"/>
-                      </m:rPr>
-                      <m:t>&gt;</m:t>
-                    </m:r>
-                    <m:r>
-                      <m:t>0</m:t>
-                    </m:r>
-                  </m:oMath>
-                </a14:m>
-                <a:r>
-                  <a:rPr/>
-                  <a:t> → upward bias</a:t>
-                </a:r>
-              </a:p>
-              <a:p>
-                <a:pPr lvl="0"/>
-                <a:r>
-                  <a:rPr/>
-                  <a:t>signs opposite → downward bias</a:t>
-                </a:r>
-              </a:p>
-              <a:p>
-                <a:pPr lvl="0" indent="0" marL="0">
-                  <a:buNone/>
-                </a:pPr>
-                <a:r>
-                  <a:rPr/>
-                  <a:t>State the expected direction in writing </a:t>
-                </a:r>
-                <a:r>
-                  <a:rPr i="1"/>
-                  <a:t>before</a:t>
-                </a:r>
-                <a:r>
-                  <a:rPr/>
-                  <a:t> estimating. This is the single most useful discipline in applied work.</a:t>
-                </a:r>
-              </a:p>
-            </p:txBody>
-          </p:sp>
-        </mc:Choice>
-      </mc:AlternateContent>
+              <a:t>The method</a:t>
+            </a:r>
+          </a:p>
+        </p:txBody>
+      </p:sp>
     </p:spTree>
   </p:cSld>
 </p:sld>

--- a/03-inference-diagnostics-interpretation/slides.pptx
+++ b/03-inference-diagnostics-interpretation/slides.pptx
@@ -941,7 +941,7 @@
           <a:bodyPr anchor="t"/>
           <a:lstStyle>
             <a:lvl1pPr algn="l">
-              <a:defRPr sz="3000" b="1" cap="all"/>
+              <a:defRPr sz="2350" b="1" cap="all"/>
             </a:lvl1pPr>
           </a:lstStyle>
           <a:p>
@@ -973,7 +973,7 @@
           <a:lstStyle>
             <a:lvl1pPr marL="0" indent="0">
               <a:buNone/>
-              <a:defRPr sz="1500">
+              <a:defRPr sz="1150">
                 <a:solidFill>
                   <a:schemeClr val="tx1">
                     <a:tint val="75000"/>
@@ -983,7 +983,7 @@
             </a:lvl1pPr>
             <a:lvl2pPr marL="342900" indent="0">
               <a:buNone/>
-              <a:defRPr sz="1350">
+              <a:defRPr sz="1050">
                 <a:solidFill>
                   <a:schemeClr val="tx1">
                     <a:tint val="75000"/>
@@ -993,7 +993,7 @@
             </a:lvl2pPr>
             <a:lvl3pPr marL="685800" indent="0">
               <a:buNone/>
-              <a:defRPr sz="1200">
+              <a:defRPr sz="950">
                 <a:solidFill>
                   <a:schemeClr val="tx1">
                     <a:tint val="75000"/>
@@ -1003,7 +1003,7 @@
             </a:lvl3pPr>
             <a:lvl4pPr marL="1028700" indent="0">
               <a:buNone/>
-              <a:defRPr sz="1050">
+              <a:defRPr sz="800">
                 <a:solidFill>
                   <a:schemeClr val="tx1">
                     <a:tint val="75000"/>
@@ -1013,7 +1013,7 @@
             </a:lvl4pPr>
             <a:lvl5pPr marL="1371600" indent="0">
               <a:buNone/>
-              <a:defRPr sz="1050">
+              <a:defRPr sz="800">
                 <a:solidFill>
                   <a:schemeClr val="tx1">
                     <a:tint val="75000"/>
@@ -1023,7 +1023,7 @@
             </a:lvl5pPr>
             <a:lvl6pPr marL="1714500" indent="0">
               <a:buNone/>
-              <a:defRPr sz="1050">
+              <a:defRPr sz="800">
                 <a:solidFill>
                   <a:schemeClr val="tx1">
                     <a:tint val="75000"/>
@@ -1033,7 +1033,7 @@
             </a:lvl6pPr>
             <a:lvl7pPr marL="2057400" indent="0">
               <a:buNone/>
-              <a:defRPr sz="1050">
+              <a:defRPr sz="800">
                 <a:solidFill>
                   <a:schemeClr val="tx1">
                     <a:tint val="75000"/>
@@ -1043,7 +1043,7 @@
             </a:lvl7pPr>
             <a:lvl8pPr marL="2400300" indent="0">
               <a:buNone/>
-              <a:defRPr sz="1050">
+              <a:defRPr sz="800">
                 <a:solidFill>
                   <a:schemeClr val="tx1">
                     <a:tint val="75000"/>
@@ -1053,7 +1053,7 @@
             </a:lvl8pPr>
             <a:lvl9pPr marL="2743200" indent="0">
               <a:buNone/>
-              <a:defRPr sz="1050">
+              <a:defRPr sz="800">
                 <a:solidFill>
                   <a:schemeClr val="tx1">
                     <a:tint val="75000"/>
@@ -1208,31 +1208,31 @@
           <a:bodyPr/>
           <a:lstStyle>
             <a:lvl1pPr>
-              <a:defRPr sz="2100"/>
+              <a:defRPr sz="1650"/>
             </a:lvl1pPr>
             <a:lvl2pPr>
-              <a:defRPr sz="1800"/>
+              <a:defRPr sz="1400"/>
             </a:lvl2pPr>
             <a:lvl3pPr>
-              <a:defRPr sz="1500"/>
+              <a:defRPr sz="1150"/>
             </a:lvl3pPr>
             <a:lvl4pPr>
-              <a:defRPr sz="1350"/>
+              <a:defRPr sz="1050"/>
             </a:lvl4pPr>
             <a:lvl5pPr>
-              <a:defRPr sz="1350"/>
+              <a:defRPr sz="1050"/>
             </a:lvl5pPr>
             <a:lvl6pPr>
-              <a:defRPr sz="1350"/>
+              <a:defRPr sz="1050"/>
             </a:lvl6pPr>
             <a:lvl7pPr>
-              <a:defRPr sz="1350"/>
+              <a:defRPr sz="1050"/>
             </a:lvl7pPr>
             <a:lvl8pPr>
-              <a:defRPr sz="1350"/>
+              <a:defRPr sz="1050"/>
             </a:lvl8pPr>
             <a:lvl9pPr>
-              <a:defRPr sz="1350"/>
+              <a:defRPr sz="1050"/>
             </a:lvl9pPr>
           </a:lstStyle>
           <a:p>
@@ -1292,31 +1292,31 @@
           <a:bodyPr/>
           <a:lstStyle>
             <a:lvl1pPr>
-              <a:defRPr sz="2100"/>
+              <a:defRPr sz="1650"/>
             </a:lvl1pPr>
             <a:lvl2pPr>
-              <a:defRPr sz="1800"/>
+              <a:defRPr sz="1400"/>
             </a:lvl2pPr>
             <a:lvl3pPr>
-              <a:defRPr sz="1500"/>
+              <a:defRPr sz="1150"/>
             </a:lvl3pPr>
             <a:lvl4pPr>
-              <a:defRPr sz="1350"/>
+              <a:defRPr sz="1050"/>
             </a:lvl4pPr>
             <a:lvl5pPr>
-              <a:defRPr sz="1350"/>
+              <a:defRPr sz="1050"/>
             </a:lvl5pPr>
             <a:lvl6pPr>
-              <a:defRPr sz="1350"/>
+              <a:defRPr sz="1050"/>
             </a:lvl6pPr>
             <a:lvl7pPr>
-              <a:defRPr sz="1350"/>
+              <a:defRPr sz="1050"/>
             </a:lvl7pPr>
             <a:lvl8pPr>
-              <a:defRPr sz="1350"/>
+              <a:defRPr sz="1050"/>
             </a:lvl8pPr>
             <a:lvl9pPr>
-              <a:defRPr sz="1350"/>
+              <a:defRPr sz="1050"/>
             </a:lvl9pPr>
           </a:lstStyle>
           <a:p>
@@ -1498,39 +1498,39 @@
           <a:lstStyle>
             <a:lvl1pPr marL="0" indent="0">
               <a:buNone/>
-              <a:defRPr sz="1800" b="1"/>
+              <a:defRPr sz="1400" b="1"/>
             </a:lvl1pPr>
             <a:lvl2pPr marL="342900" indent="0">
               <a:buNone/>
-              <a:defRPr sz="1500" b="1"/>
+              <a:defRPr sz="1150" b="1"/>
             </a:lvl2pPr>
             <a:lvl3pPr marL="685800" indent="0">
               <a:buNone/>
-              <a:defRPr sz="1350" b="1"/>
+              <a:defRPr sz="1050" b="1"/>
             </a:lvl3pPr>
             <a:lvl4pPr marL="1028700" indent="0">
               <a:buNone/>
-              <a:defRPr sz="1200" b="1"/>
+              <a:defRPr sz="950" b="1"/>
             </a:lvl4pPr>
             <a:lvl5pPr marL="1371600" indent="0">
               <a:buNone/>
-              <a:defRPr sz="1200" b="1"/>
+              <a:defRPr sz="950" b="1"/>
             </a:lvl5pPr>
             <a:lvl6pPr marL="1714500" indent="0">
               <a:buNone/>
-              <a:defRPr sz="1200" b="1"/>
+              <a:defRPr sz="950" b="1"/>
             </a:lvl6pPr>
             <a:lvl7pPr marL="2057400" indent="0">
               <a:buNone/>
-              <a:defRPr sz="1200" b="1"/>
+              <a:defRPr sz="950" b="1"/>
             </a:lvl7pPr>
             <a:lvl8pPr marL="2400300" indent="0">
               <a:buNone/>
-              <a:defRPr sz="1200" b="1"/>
+              <a:defRPr sz="950" b="1"/>
             </a:lvl8pPr>
             <a:lvl9pPr marL="2743200" indent="0">
               <a:buNone/>
-              <a:defRPr sz="1200" b="1"/>
+              <a:defRPr sz="950" b="1"/>
             </a:lvl9pPr>
           </a:lstStyle>
           <a:p>
@@ -1562,31 +1562,31 @@
           <a:bodyPr/>
           <a:lstStyle>
             <a:lvl1pPr>
-              <a:defRPr sz="1800"/>
+              <a:defRPr sz="1400"/>
             </a:lvl1pPr>
             <a:lvl2pPr>
-              <a:defRPr sz="1500"/>
+              <a:defRPr sz="1150"/>
             </a:lvl2pPr>
             <a:lvl3pPr>
-              <a:defRPr sz="1350"/>
+              <a:defRPr sz="1050"/>
             </a:lvl3pPr>
             <a:lvl4pPr>
-              <a:defRPr sz="1200"/>
+              <a:defRPr sz="950"/>
             </a:lvl4pPr>
             <a:lvl5pPr>
-              <a:defRPr sz="1200"/>
+              <a:defRPr sz="950"/>
             </a:lvl5pPr>
             <a:lvl6pPr>
-              <a:defRPr sz="1200"/>
+              <a:defRPr sz="950"/>
             </a:lvl6pPr>
             <a:lvl7pPr>
-              <a:defRPr sz="1200"/>
+              <a:defRPr sz="950"/>
             </a:lvl7pPr>
             <a:lvl8pPr>
-              <a:defRPr sz="1200"/>
+              <a:defRPr sz="950"/>
             </a:lvl8pPr>
             <a:lvl9pPr>
-              <a:defRPr sz="1200"/>
+              <a:defRPr sz="950"/>
             </a:lvl9pPr>
           </a:lstStyle>
           <a:p>
@@ -1647,39 +1647,39 @@
           <a:lstStyle>
             <a:lvl1pPr marL="0" indent="0">
               <a:buNone/>
-              <a:defRPr sz="1800" b="1"/>
+              <a:defRPr sz="1400" b="1"/>
             </a:lvl1pPr>
             <a:lvl2pPr marL="342900" indent="0">
               <a:buNone/>
-              <a:defRPr sz="1500" b="1"/>
+              <a:defRPr sz="1150" b="1"/>
             </a:lvl2pPr>
             <a:lvl3pPr marL="685800" indent="0">
               <a:buNone/>
-              <a:defRPr sz="1350" b="1"/>
+              <a:defRPr sz="1050" b="1"/>
             </a:lvl3pPr>
             <a:lvl4pPr marL="1028700" indent="0">
               <a:buNone/>
-              <a:defRPr sz="1200" b="1"/>
+              <a:defRPr sz="950" b="1"/>
             </a:lvl4pPr>
             <a:lvl5pPr marL="1371600" indent="0">
               <a:buNone/>
-              <a:defRPr sz="1200" b="1"/>
+              <a:defRPr sz="950" b="1"/>
             </a:lvl5pPr>
             <a:lvl6pPr marL="1714500" indent="0">
               <a:buNone/>
-              <a:defRPr sz="1200" b="1"/>
+              <a:defRPr sz="950" b="1"/>
             </a:lvl6pPr>
             <a:lvl7pPr marL="2057400" indent="0">
               <a:buNone/>
-              <a:defRPr sz="1200" b="1"/>
+              <a:defRPr sz="950" b="1"/>
             </a:lvl7pPr>
             <a:lvl8pPr marL="2400300" indent="0">
               <a:buNone/>
-              <a:defRPr sz="1200" b="1"/>
+              <a:defRPr sz="950" b="1"/>
             </a:lvl8pPr>
             <a:lvl9pPr marL="2743200" indent="0">
               <a:buNone/>
-              <a:defRPr sz="1200" b="1"/>
+              <a:defRPr sz="950" b="1"/>
             </a:lvl9pPr>
           </a:lstStyle>
           <a:p>
@@ -1711,31 +1711,31 @@
           <a:bodyPr/>
           <a:lstStyle>
             <a:lvl1pPr>
-              <a:defRPr sz="1800"/>
+              <a:defRPr sz="1400"/>
             </a:lvl1pPr>
             <a:lvl2pPr>
-              <a:defRPr sz="1500"/>
+              <a:defRPr sz="1150"/>
             </a:lvl2pPr>
             <a:lvl3pPr>
-              <a:defRPr sz="1350"/>
+              <a:defRPr sz="1050"/>
             </a:lvl3pPr>
             <a:lvl4pPr>
-              <a:defRPr sz="1200"/>
+              <a:defRPr sz="950"/>
             </a:lvl4pPr>
             <a:lvl5pPr>
-              <a:defRPr sz="1200"/>
+              <a:defRPr sz="950"/>
             </a:lvl5pPr>
             <a:lvl6pPr>
-              <a:defRPr sz="1200"/>
+              <a:defRPr sz="950"/>
             </a:lvl6pPr>
             <a:lvl7pPr>
-              <a:defRPr sz="1200"/>
+              <a:defRPr sz="950"/>
             </a:lvl7pPr>
             <a:lvl8pPr>
-              <a:defRPr sz="1200"/>
+              <a:defRPr sz="950"/>
             </a:lvl8pPr>
             <a:lvl9pPr>
-              <a:defRPr sz="1200"/>
+              <a:defRPr sz="950"/>
             </a:lvl9pPr>
           </a:lstStyle>
           <a:p>
@@ -2102,7 +2102,7 @@
           <a:bodyPr anchor="b"/>
           <a:lstStyle>
             <a:lvl1pPr algn="l">
-              <a:defRPr sz="1500" b="1"/>
+              <a:defRPr sz="1150" b="1"/>
             </a:lvl1pPr>
           </a:lstStyle>
           <a:p>
@@ -2133,31 +2133,31 @@
           <a:bodyPr/>
           <a:lstStyle>
             <a:lvl1pPr>
-              <a:defRPr sz="2400"/>
+              <a:defRPr sz="1850"/>
             </a:lvl1pPr>
             <a:lvl2pPr>
-              <a:defRPr sz="2100"/>
+              <a:defRPr sz="1650"/>
             </a:lvl2pPr>
             <a:lvl3pPr>
-              <a:defRPr sz="1800"/>
+              <a:defRPr sz="1400"/>
             </a:lvl3pPr>
             <a:lvl4pPr>
-              <a:defRPr sz="1500"/>
+              <a:defRPr sz="1150"/>
             </a:lvl4pPr>
             <a:lvl5pPr>
-              <a:defRPr sz="1500"/>
+              <a:defRPr sz="1150"/>
             </a:lvl5pPr>
             <a:lvl6pPr>
-              <a:defRPr sz="1500"/>
+              <a:defRPr sz="1150"/>
             </a:lvl6pPr>
             <a:lvl7pPr>
-              <a:defRPr sz="1500"/>
+              <a:defRPr sz="1150"/>
             </a:lvl7pPr>
             <a:lvl8pPr>
-              <a:defRPr sz="1500"/>
+              <a:defRPr sz="1150"/>
             </a:lvl8pPr>
             <a:lvl9pPr>
-              <a:defRPr sz="1500"/>
+              <a:defRPr sz="1150"/>
             </a:lvl9pPr>
           </a:lstStyle>
           <a:p>
@@ -2218,39 +2218,39 @@
           <a:lstStyle>
             <a:lvl1pPr marL="0" indent="0">
               <a:buNone/>
-              <a:defRPr sz="1050"/>
+              <a:defRPr sz="800"/>
             </a:lvl1pPr>
             <a:lvl2pPr marL="342900" indent="0">
               <a:buNone/>
-              <a:defRPr sz="900"/>
+              <a:defRPr sz="700"/>
             </a:lvl2pPr>
             <a:lvl3pPr marL="685800" indent="0">
               <a:buNone/>
-              <a:defRPr sz="750"/>
+              <a:defRPr sz="700"/>
             </a:lvl3pPr>
             <a:lvl4pPr marL="1028700" indent="0">
               <a:buNone/>
-              <a:defRPr sz="675"/>
+              <a:defRPr sz="700"/>
             </a:lvl4pPr>
             <a:lvl5pPr marL="1371600" indent="0">
               <a:buNone/>
-              <a:defRPr sz="675"/>
+              <a:defRPr sz="700"/>
             </a:lvl5pPr>
             <a:lvl6pPr marL="1714500" indent="0">
               <a:buNone/>
-              <a:defRPr sz="675"/>
+              <a:defRPr sz="700"/>
             </a:lvl6pPr>
             <a:lvl7pPr marL="2057400" indent="0">
               <a:buNone/>
-              <a:defRPr sz="675"/>
+              <a:defRPr sz="700"/>
             </a:lvl7pPr>
             <a:lvl8pPr marL="2400300" indent="0">
               <a:buNone/>
-              <a:defRPr sz="675"/>
+              <a:defRPr sz="700"/>
             </a:lvl8pPr>
             <a:lvl9pPr marL="2743200" indent="0">
               <a:buNone/>
-              <a:defRPr sz="675"/>
+              <a:defRPr sz="700"/>
             </a:lvl9pPr>
           </a:lstStyle>
           <a:p>
@@ -2377,7 +2377,7 @@
           <a:bodyPr anchor="b"/>
           <a:lstStyle>
             <a:lvl1pPr algn="l">
-              <a:defRPr sz="1500" b="1"/>
+              <a:defRPr sz="1150" b="1"/>
             </a:lvl1pPr>
           </a:lstStyle>
           <a:p>
@@ -2409,39 +2409,39 @@
           <a:lstStyle>
             <a:lvl1pPr marL="0" indent="0">
               <a:buNone/>
-              <a:defRPr sz="2400"/>
+              <a:defRPr sz="1850"/>
             </a:lvl1pPr>
             <a:lvl2pPr marL="342900" indent="0">
               <a:buNone/>
-              <a:defRPr sz="2100"/>
+              <a:defRPr sz="1650"/>
             </a:lvl2pPr>
             <a:lvl3pPr marL="685800" indent="0">
               <a:buNone/>
-              <a:defRPr sz="1800"/>
+              <a:defRPr sz="1400"/>
             </a:lvl3pPr>
             <a:lvl4pPr marL="1028700" indent="0">
               <a:buNone/>
-              <a:defRPr sz="1500"/>
+              <a:defRPr sz="1150"/>
             </a:lvl4pPr>
             <a:lvl5pPr marL="1371600" indent="0">
               <a:buNone/>
-              <a:defRPr sz="1500"/>
+              <a:defRPr sz="1150"/>
             </a:lvl5pPr>
             <a:lvl6pPr marL="1714500" indent="0">
               <a:buNone/>
-              <a:defRPr sz="1500"/>
+              <a:defRPr sz="1150"/>
             </a:lvl6pPr>
             <a:lvl7pPr marL="2057400" indent="0">
               <a:buNone/>
-              <a:defRPr sz="1500"/>
+              <a:defRPr sz="1150"/>
             </a:lvl7pPr>
             <a:lvl8pPr marL="2400300" indent="0">
               <a:buNone/>
-              <a:defRPr sz="1500"/>
+              <a:defRPr sz="1150"/>
             </a:lvl8pPr>
             <a:lvl9pPr marL="2743200" indent="0">
               <a:buNone/>
-              <a:defRPr sz="1500"/>
+              <a:defRPr sz="1150"/>
             </a:lvl9pPr>
           </a:lstStyle>
           <a:p>
@@ -2470,39 +2470,39 @@
           <a:lstStyle>
             <a:lvl1pPr marL="0" indent="0">
               <a:buNone/>
-              <a:defRPr sz="1050"/>
+              <a:defRPr sz="800"/>
             </a:lvl1pPr>
             <a:lvl2pPr marL="342900" indent="0">
               <a:buNone/>
-              <a:defRPr sz="900"/>
+              <a:defRPr sz="700"/>
             </a:lvl2pPr>
             <a:lvl3pPr marL="685800" indent="0">
               <a:buNone/>
-              <a:defRPr sz="750"/>
+              <a:defRPr sz="700"/>
             </a:lvl3pPr>
             <a:lvl4pPr marL="1028700" indent="0">
               <a:buNone/>
-              <a:defRPr sz="675"/>
+              <a:defRPr sz="700"/>
             </a:lvl4pPr>
             <a:lvl5pPr marL="1371600" indent="0">
               <a:buNone/>
-              <a:defRPr sz="675"/>
+              <a:defRPr sz="700"/>
             </a:lvl5pPr>
             <a:lvl6pPr marL="1714500" indent="0">
               <a:buNone/>
-              <a:defRPr sz="675"/>
+              <a:defRPr sz="700"/>
             </a:lvl6pPr>
             <a:lvl7pPr marL="2057400" indent="0">
               <a:buNone/>
-              <a:defRPr sz="675"/>
+              <a:defRPr sz="700"/>
             </a:lvl7pPr>
             <a:lvl8pPr marL="2400300" indent="0">
               <a:buNone/>
-              <a:defRPr sz="675"/>
+              <a:defRPr sz="700"/>
             </a:lvl8pPr>
             <a:lvl9pPr marL="2743200" indent="0">
               <a:buNone/>
-              <a:defRPr sz="675"/>
+              <a:defRPr sz="700"/>
             </a:lvl9pPr>
           </a:lstStyle>
           <a:p>
@@ -2730,7 +2730,7 @@
           <a:bodyPr anchor="ctr" bIns="45720" lIns="91440" rIns="91440" rtlCol="0" tIns="45720" vert="horz"/>
           <a:lstStyle>
             <a:lvl1pPr algn="l">
-              <a:defRPr sz="900">
+              <a:defRPr sz="700">
                 <a:solidFill>
                   <a:schemeClr val="tx1">
                     <a:tint val="75000"/>
@@ -2771,7 +2771,7 @@
           <a:bodyPr anchor="ctr" bIns="45720" lIns="91440" rIns="91440" rtlCol="0" tIns="45720" vert="horz"/>
           <a:lstStyle>
             <a:lvl1pPr algn="ctr">
-              <a:defRPr sz="900">
+              <a:defRPr sz="700">
                 <a:solidFill>
                   <a:schemeClr val="tx1">
                     <a:tint val="75000"/>
@@ -2808,7 +2808,7 @@
           <a:bodyPr anchor="ctr" bIns="45720" lIns="91440" rIns="91440" rtlCol="0" tIns="45720" vert="horz"/>
           <a:lstStyle>
             <a:lvl1pPr algn="r">
-              <a:defRPr sz="900">
+              <a:defRPr sz="700">
                 <a:solidFill>
                   <a:schemeClr val="tx1">
                     <a:tint val="75000"/>
@@ -2854,7 +2854,7 @@
           <a:spcPct val="0"/>
         </a:spcBef>
         <a:buNone/>
-        <a:defRPr kern="1200" sz="3300">
+        <a:defRPr kern="1200" sz="2550">
           <a:solidFill>
             <a:schemeClr val="tx1"/>
           </a:solidFill>
@@ -2871,7 +2871,7 @@
         </a:spcBef>
         <a:buFont typeface="Arial"/>
         <a:buChar char="•"/>
-        <a:defRPr kern="1200" sz="2400">
+        <a:defRPr kern="1200" sz="1850">
           <a:solidFill>
             <a:schemeClr val="tx1"/>
           </a:solidFill>
@@ -2886,7 +2886,7 @@
         </a:spcBef>
         <a:buFont typeface="Arial"/>
         <a:buChar char="–"/>
-        <a:defRPr kern="1200" sz="2100">
+        <a:defRPr kern="1200" sz="1650">
           <a:solidFill>
             <a:schemeClr val="tx1"/>
           </a:solidFill>
@@ -2901,7 +2901,7 @@
         </a:spcBef>
         <a:buFont typeface="Arial"/>
         <a:buChar char="•"/>
-        <a:defRPr kern="1200" sz="1800">
+        <a:defRPr kern="1200" sz="1400">
           <a:solidFill>
             <a:schemeClr val="tx1"/>
           </a:solidFill>
@@ -2916,7 +2916,7 @@
         </a:spcBef>
         <a:buFont typeface="Arial"/>
         <a:buChar char="–"/>
-        <a:defRPr kern="1200" sz="1500">
+        <a:defRPr kern="1200" sz="1150">
           <a:solidFill>
             <a:schemeClr val="tx1"/>
           </a:solidFill>
@@ -2931,7 +2931,7 @@
         </a:spcBef>
         <a:buFont typeface="Arial"/>
         <a:buChar char="»"/>
-        <a:defRPr kern="1200" sz="1500">
+        <a:defRPr kern="1200" sz="1150">
           <a:solidFill>
             <a:schemeClr val="tx1"/>
           </a:solidFill>
@@ -2946,7 +2946,7 @@
         </a:spcBef>
         <a:buFont typeface="Arial"/>
         <a:buChar char="•"/>
-        <a:defRPr kern="1200" sz="1500">
+        <a:defRPr kern="1200" sz="1150">
           <a:solidFill>
             <a:schemeClr val="tx1"/>
           </a:solidFill>
@@ -2961,7 +2961,7 @@
         </a:spcBef>
         <a:buFont typeface="Arial"/>
         <a:buChar char="•"/>
-        <a:defRPr kern="1200" sz="1500">
+        <a:defRPr kern="1200" sz="1150">
           <a:solidFill>
             <a:schemeClr val="tx1"/>
           </a:solidFill>
@@ -2976,7 +2976,7 @@
         </a:spcBef>
         <a:buFont typeface="Arial"/>
         <a:buChar char="•"/>
-        <a:defRPr kern="1200" sz="1500">
+        <a:defRPr kern="1200" sz="1150">
           <a:solidFill>
             <a:schemeClr val="tx1"/>
           </a:solidFill>
@@ -2991,7 +2991,7 @@
         </a:spcBef>
         <a:buFont typeface="Arial"/>
         <a:buChar char="•"/>
-        <a:defRPr kern="1200" sz="1500">
+        <a:defRPr kern="1200" sz="1150">
           <a:solidFill>
             <a:schemeClr val="tx1"/>
           </a:solidFill>
@@ -3006,7 +3006,7 @@
         <a:defRPr lang="en-US"/>
       </a:defPPr>
       <a:lvl1pPr algn="l" defTabSz="342900" eaLnBrk="1" hangingPunct="1" latinLnBrk="0" marL="0" rtl="0">
-        <a:defRPr kern="1200" sz="1350">
+        <a:defRPr kern="1200" sz="1050">
           <a:solidFill>
             <a:schemeClr val="tx1"/>
           </a:solidFill>
@@ -3016,7 +3016,7 @@
         </a:defRPr>
       </a:lvl1pPr>
       <a:lvl2pPr algn="l" defTabSz="342900" eaLnBrk="1" hangingPunct="1" latinLnBrk="0" marL="342900" rtl="0">
-        <a:defRPr kern="1200" sz="1350">
+        <a:defRPr kern="1200" sz="1050">
           <a:solidFill>
             <a:schemeClr val="tx1"/>
           </a:solidFill>
@@ -3026,7 +3026,7 @@
         </a:defRPr>
       </a:lvl2pPr>
       <a:lvl3pPr algn="l" defTabSz="342900" eaLnBrk="1" hangingPunct="1" latinLnBrk="0" marL="685800" rtl="0">
-        <a:defRPr kern="1200" sz="1350">
+        <a:defRPr kern="1200" sz="1050">
           <a:solidFill>
             <a:schemeClr val="tx1"/>
           </a:solidFill>
@@ -3036,7 +3036,7 @@
         </a:defRPr>
       </a:lvl3pPr>
       <a:lvl4pPr algn="l" defTabSz="342900" eaLnBrk="1" hangingPunct="1" latinLnBrk="0" marL="1028700" rtl="0">
-        <a:defRPr kern="1200" sz="1350">
+        <a:defRPr kern="1200" sz="1050">
           <a:solidFill>
             <a:schemeClr val="tx1"/>
           </a:solidFill>
@@ -3046,7 +3046,7 @@
         </a:defRPr>
       </a:lvl4pPr>
       <a:lvl5pPr algn="l" defTabSz="342900" eaLnBrk="1" hangingPunct="1" latinLnBrk="0" marL="1371600" rtl="0">
-        <a:defRPr kern="1200" sz="1350">
+        <a:defRPr kern="1200" sz="1050">
           <a:solidFill>
             <a:schemeClr val="tx1"/>
           </a:solidFill>
@@ -3056,7 +3056,7 @@
         </a:defRPr>
       </a:lvl5pPr>
       <a:lvl6pPr algn="l" defTabSz="342900" eaLnBrk="1" hangingPunct="1" latinLnBrk="0" marL="1714500" rtl="0">
-        <a:defRPr kern="1200" sz="1350">
+        <a:defRPr kern="1200" sz="1050">
           <a:solidFill>
             <a:schemeClr val="tx1"/>
           </a:solidFill>
@@ -3066,7 +3066,7 @@
         </a:defRPr>
       </a:lvl6pPr>
       <a:lvl7pPr algn="l" defTabSz="342900" eaLnBrk="1" hangingPunct="1" latinLnBrk="0" marL="2057400" rtl="0">
-        <a:defRPr kern="1200" sz="1350">
+        <a:defRPr kern="1200" sz="1050">
           <a:solidFill>
             <a:schemeClr val="tx1"/>
           </a:solidFill>
@@ -3076,7 +3076,7 @@
         </a:defRPr>
       </a:lvl7pPr>
       <a:lvl8pPr algn="l" defTabSz="342900" eaLnBrk="1" hangingPunct="1" latinLnBrk="0" marL="2400300" rtl="0">
-        <a:defRPr kern="1200" sz="1350">
+        <a:defRPr kern="1200" sz="1050">
           <a:solidFill>
             <a:schemeClr val="tx1"/>
           </a:solidFill>
@@ -3086,7 +3086,7 @@
         </a:defRPr>
       </a:lvl8pPr>
       <a:lvl9pPr algn="l" defTabSz="342900" eaLnBrk="1" hangingPunct="1" latinLnBrk="0" marL="2743200" rtl="0">
-        <a:defRPr kern="1200" sz="1350">
+        <a:defRPr kern="1200" sz="1050">
           <a:solidFill>
             <a:schemeClr val="tx1"/>
           </a:solidFill>

--- a/03-inference-diagnostics-interpretation/slides.pptx
+++ b/03-inference-diagnostics-interpretation/slides.pptx
@@ -941,7 +941,7 @@
           <a:bodyPr anchor="t"/>
           <a:lstStyle>
             <a:lvl1pPr algn="l">
-              <a:defRPr sz="2350" b="1" cap="all"/>
+              <a:defRPr sz="1850" b="1" cap="all"/>
             </a:lvl1pPr>
           </a:lstStyle>
           <a:p>
@@ -973,7 +973,7 @@
           <a:lstStyle>
             <a:lvl1pPr marL="0" indent="0">
               <a:buNone/>
-              <a:defRPr sz="1150">
+              <a:defRPr sz="950">
                 <a:solidFill>
                   <a:schemeClr val="tx1">
                     <a:tint val="75000"/>
@@ -983,7 +983,7 @@
             </a:lvl1pPr>
             <a:lvl2pPr marL="342900" indent="0">
               <a:buNone/>
-              <a:defRPr sz="1050">
+              <a:defRPr sz="850">
                 <a:solidFill>
                   <a:schemeClr val="tx1">
                     <a:tint val="75000"/>
@@ -993,7 +993,7 @@
             </a:lvl2pPr>
             <a:lvl3pPr marL="685800" indent="0">
               <a:buNone/>
-              <a:defRPr sz="950">
+              <a:defRPr sz="750">
                 <a:solidFill>
                   <a:schemeClr val="tx1">
                     <a:tint val="75000"/>
@@ -1003,7 +1003,7 @@
             </a:lvl3pPr>
             <a:lvl4pPr marL="1028700" indent="0">
               <a:buNone/>
-              <a:defRPr sz="800">
+              <a:defRPr sz="650">
                 <a:solidFill>
                   <a:schemeClr val="tx1">
                     <a:tint val="75000"/>
@@ -1013,7 +1013,7 @@
             </a:lvl4pPr>
             <a:lvl5pPr marL="1371600" indent="0">
               <a:buNone/>
-              <a:defRPr sz="800">
+              <a:defRPr sz="650">
                 <a:solidFill>
                   <a:schemeClr val="tx1">
                     <a:tint val="75000"/>
@@ -1023,7 +1023,7 @@
             </a:lvl5pPr>
             <a:lvl6pPr marL="1714500" indent="0">
               <a:buNone/>
-              <a:defRPr sz="800">
+              <a:defRPr sz="650">
                 <a:solidFill>
                   <a:schemeClr val="tx1">
                     <a:tint val="75000"/>
@@ -1033,7 +1033,7 @@
             </a:lvl6pPr>
             <a:lvl7pPr marL="2057400" indent="0">
               <a:buNone/>
-              <a:defRPr sz="800">
+              <a:defRPr sz="650">
                 <a:solidFill>
                   <a:schemeClr val="tx1">
                     <a:tint val="75000"/>
@@ -1043,7 +1043,7 @@
             </a:lvl7pPr>
             <a:lvl8pPr marL="2400300" indent="0">
               <a:buNone/>
-              <a:defRPr sz="800">
+              <a:defRPr sz="650">
                 <a:solidFill>
                   <a:schemeClr val="tx1">
                     <a:tint val="75000"/>
@@ -1053,7 +1053,7 @@
             </a:lvl8pPr>
             <a:lvl9pPr marL="2743200" indent="0">
               <a:buNone/>
-              <a:defRPr sz="800">
+              <a:defRPr sz="650">
                 <a:solidFill>
                   <a:schemeClr val="tx1">
                     <a:tint val="75000"/>
@@ -1208,31 +1208,31 @@
           <a:bodyPr/>
           <a:lstStyle>
             <a:lvl1pPr>
-              <a:defRPr sz="1650"/>
+              <a:defRPr sz="1300"/>
             </a:lvl1pPr>
             <a:lvl2pPr>
-              <a:defRPr sz="1400"/>
+              <a:defRPr sz="1100"/>
             </a:lvl2pPr>
             <a:lvl3pPr>
-              <a:defRPr sz="1150"/>
+              <a:defRPr sz="950"/>
             </a:lvl3pPr>
             <a:lvl4pPr>
-              <a:defRPr sz="1050"/>
+              <a:defRPr sz="850"/>
             </a:lvl4pPr>
             <a:lvl5pPr>
-              <a:defRPr sz="1050"/>
+              <a:defRPr sz="850"/>
             </a:lvl5pPr>
             <a:lvl6pPr>
-              <a:defRPr sz="1050"/>
+              <a:defRPr sz="850"/>
             </a:lvl6pPr>
             <a:lvl7pPr>
-              <a:defRPr sz="1050"/>
+              <a:defRPr sz="850"/>
             </a:lvl7pPr>
             <a:lvl8pPr>
-              <a:defRPr sz="1050"/>
+              <a:defRPr sz="850"/>
             </a:lvl8pPr>
             <a:lvl9pPr>
-              <a:defRPr sz="1050"/>
+              <a:defRPr sz="850"/>
             </a:lvl9pPr>
           </a:lstStyle>
           <a:p>
@@ -1292,31 +1292,31 @@
           <a:bodyPr/>
           <a:lstStyle>
             <a:lvl1pPr>
-              <a:defRPr sz="1650"/>
+              <a:defRPr sz="1300"/>
             </a:lvl1pPr>
             <a:lvl2pPr>
-              <a:defRPr sz="1400"/>
+              <a:defRPr sz="1100"/>
             </a:lvl2pPr>
             <a:lvl3pPr>
-              <a:defRPr sz="1150"/>
+              <a:defRPr sz="950"/>
             </a:lvl3pPr>
             <a:lvl4pPr>
-              <a:defRPr sz="1050"/>
+              <a:defRPr sz="850"/>
             </a:lvl4pPr>
             <a:lvl5pPr>
-              <a:defRPr sz="1050"/>
+              <a:defRPr sz="850"/>
             </a:lvl5pPr>
             <a:lvl6pPr>
-              <a:defRPr sz="1050"/>
+              <a:defRPr sz="850"/>
             </a:lvl6pPr>
             <a:lvl7pPr>
-              <a:defRPr sz="1050"/>
+              <a:defRPr sz="850"/>
             </a:lvl7pPr>
             <a:lvl8pPr>
-              <a:defRPr sz="1050"/>
+              <a:defRPr sz="850"/>
             </a:lvl8pPr>
             <a:lvl9pPr>
-              <a:defRPr sz="1050"/>
+              <a:defRPr sz="850"/>
             </a:lvl9pPr>
           </a:lstStyle>
           <a:p>
@@ -1498,39 +1498,39 @@
           <a:lstStyle>
             <a:lvl1pPr marL="0" indent="0">
               <a:buNone/>
-              <a:defRPr sz="1400" b="1"/>
+              <a:defRPr sz="1100" b="1"/>
             </a:lvl1pPr>
             <a:lvl2pPr marL="342900" indent="0">
               <a:buNone/>
-              <a:defRPr sz="1150" b="1"/>
+              <a:defRPr sz="950" b="1"/>
             </a:lvl2pPr>
             <a:lvl3pPr marL="685800" indent="0">
               <a:buNone/>
-              <a:defRPr sz="1050" b="1"/>
+              <a:defRPr sz="850" b="1"/>
             </a:lvl3pPr>
             <a:lvl4pPr marL="1028700" indent="0">
               <a:buNone/>
-              <a:defRPr sz="950" b="1"/>
+              <a:defRPr sz="750" b="1"/>
             </a:lvl4pPr>
             <a:lvl5pPr marL="1371600" indent="0">
               <a:buNone/>
-              <a:defRPr sz="950" b="1"/>
+              <a:defRPr sz="750" b="1"/>
             </a:lvl5pPr>
             <a:lvl6pPr marL="1714500" indent="0">
               <a:buNone/>
-              <a:defRPr sz="950" b="1"/>
+              <a:defRPr sz="750" b="1"/>
             </a:lvl6pPr>
             <a:lvl7pPr marL="2057400" indent="0">
               <a:buNone/>
-              <a:defRPr sz="950" b="1"/>
+              <a:defRPr sz="750" b="1"/>
             </a:lvl7pPr>
             <a:lvl8pPr marL="2400300" indent="0">
               <a:buNone/>
-              <a:defRPr sz="950" b="1"/>
+              <a:defRPr sz="750" b="1"/>
             </a:lvl8pPr>
             <a:lvl9pPr marL="2743200" indent="0">
               <a:buNone/>
-              <a:defRPr sz="950" b="1"/>
+              <a:defRPr sz="750" b="1"/>
             </a:lvl9pPr>
           </a:lstStyle>
           <a:p>
@@ -1562,31 +1562,31 @@
           <a:bodyPr/>
           <a:lstStyle>
             <a:lvl1pPr>
-              <a:defRPr sz="1400"/>
+              <a:defRPr sz="1100"/>
             </a:lvl1pPr>
             <a:lvl2pPr>
-              <a:defRPr sz="1150"/>
+              <a:defRPr sz="950"/>
             </a:lvl2pPr>
             <a:lvl3pPr>
-              <a:defRPr sz="1050"/>
+              <a:defRPr sz="850"/>
             </a:lvl3pPr>
             <a:lvl4pPr>
-              <a:defRPr sz="950"/>
+              <a:defRPr sz="750"/>
             </a:lvl4pPr>
             <a:lvl5pPr>
-              <a:defRPr sz="950"/>
+              <a:defRPr sz="750"/>
             </a:lvl5pPr>
             <a:lvl6pPr>
-              <a:defRPr sz="950"/>
+              <a:defRPr sz="750"/>
             </a:lvl6pPr>
             <a:lvl7pPr>
-              <a:defRPr sz="950"/>
+              <a:defRPr sz="750"/>
             </a:lvl7pPr>
             <a:lvl8pPr>
-              <a:defRPr sz="950"/>
+              <a:defRPr sz="750"/>
             </a:lvl8pPr>
             <a:lvl9pPr>
-              <a:defRPr sz="950"/>
+              <a:defRPr sz="750"/>
             </a:lvl9pPr>
           </a:lstStyle>
           <a:p>
@@ -1647,39 +1647,39 @@
           <a:lstStyle>
             <a:lvl1pPr marL="0" indent="0">
               <a:buNone/>
-              <a:defRPr sz="1400" b="1"/>
+              <a:defRPr sz="1100" b="1"/>
             </a:lvl1pPr>
             <a:lvl2pPr marL="342900" indent="0">
               <a:buNone/>
-              <a:defRPr sz="1150" b="1"/>
+              <a:defRPr sz="950" b="1"/>
             </a:lvl2pPr>
             <a:lvl3pPr marL="685800" indent="0">
               <a:buNone/>
-              <a:defRPr sz="1050" b="1"/>
+              <a:defRPr sz="850" b="1"/>
             </a:lvl3pPr>
             <a:lvl4pPr marL="1028700" indent="0">
               <a:buNone/>
-              <a:defRPr sz="950" b="1"/>
+              <a:defRPr sz="750" b="1"/>
             </a:lvl4pPr>
             <a:lvl5pPr marL="1371600" indent="0">
               <a:buNone/>
-              <a:defRPr sz="950" b="1"/>
+              <a:defRPr sz="750" b="1"/>
             </a:lvl5pPr>
             <a:lvl6pPr marL="1714500" indent="0">
               <a:buNone/>
-              <a:defRPr sz="950" b="1"/>
+              <a:defRPr sz="750" b="1"/>
             </a:lvl6pPr>
             <a:lvl7pPr marL="2057400" indent="0">
               <a:buNone/>
-              <a:defRPr sz="950" b="1"/>
+              <a:defRPr sz="750" b="1"/>
             </a:lvl7pPr>
             <a:lvl8pPr marL="2400300" indent="0">
               <a:buNone/>
-              <a:defRPr sz="950" b="1"/>
+              <a:defRPr sz="750" b="1"/>
             </a:lvl8pPr>
             <a:lvl9pPr marL="2743200" indent="0">
               <a:buNone/>
-              <a:defRPr sz="950" b="1"/>
+              <a:defRPr sz="750" b="1"/>
             </a:lvl9pPr>
           </a:lstStyle>
           <a:p>
@@ -1711,31 +1711,31 @@
           <a:bodyPr/>
           <a:lstStyle>
             <a:lvl1pPr>
-              <a:defRPr sz="1400"/>
+              <a:defRPr sz="1100"/>
             </a:lvl1pPr>
             <a:lvl2pPr>
-              <a:defRPr sz="1150"/>
+              <a:defRPr sz="950"/>
             </a:lvl2pPr>
             <a:lvl3pPr>
-              <a:defRPr sz="1050"/>
+              <a:defRPr sz="850"/>
             </a:lvl3pPr>
             <a:lvl4pPr>
-              <a:defRPr sz="950"/>
+              <a:defRPr sz="750"/>
             </a:lvl4pPr>
             <a:lvl5pPr>
-              <a:defRPr sz="950"/>
+              <a:defRPr sz="750"/>
             </a:lvl5pPr>
             <a:lvl6pPr>
-              <a:defRPr sz="950"/>
+              <a:defRPr sz="750"/>
             </a:lvl6pPr>
             <a:lvl7pPr>
-              <a:defRPr sz="950"/>
+              <a:defRPr sz="750"/>
             </a:lvl7pPr>
             <a:lvl8pPr>
-              <a:defRPr sz="950"/>
+              <a:defRPr sz="750"/>
             </a:lvl8pPr>
             <a:lvl9pPr>
-              <a:defRPr sz="950"/>
+              <a:defRPr sz="750"/>
             </a:lvl9pPr>
           </a:lstStyle>
           <a:p>
@@ -2102,7 +2102,7 @@
           <a:bodyPr anchor="b"/>
           <a:lstStyle>
             <a:lvl1pPr algn="l">
-              <a:defRPr sz="1150" b="1"/>
+              <a:defRPr sz="950" b="1"/>
             </a:lvl1pPr>
           </a:lstStyle>
           <a:p>
@@ -2133,31 +2133,31 @@
           <a:bodyPr/>
           <a:lstStyle>
             <a:lvl1pPr>
-              <a:defRPr sz="1850"/>
+              <a:defRPr sz="1500"/>
             </a:lvl1pPr>
             <a:lvl2pPr>
-              <a:defRPr sz="1650"/>
+              <a:defRPr sz="1300"/>
             </a:lvl2pPr>
             <a:lvl3pPr>
-              <a:defRPr sz="1400"/>
+              <a:defRPr sz="1100"/>
             </a:lvl3pPr>
             <a:lvl4pPr>
-              <a:defRPr sz="1150"/>
+              <a:defRPr sz="950"/>
             </a:lvl4pPr>
             <a:lvl5pPr>
-              <a:defRPr sz="1150"/>
+              <a:defRPr sz="950"/>
             </a:lvl5pPr>
             <a:lvl6pPr>
-              <a:defRPr sz="1150"/>
+              <a:defRPr sz="950"/>
             </a:lvl6pPr>
             <a:lvl7pPr>
-              <a:defRPr sz="1150"/>
+              <a:defRPr sz="950"/>
             </a:lvl7pPr>
             <a:lvl8pPr>
-              <a:defRPr sz="1150"/>
+              <a:defRPr sz="950"/>
             </a:lvl8pPr>
             <a:lvl9pPr>
-              <a:defRPr sz="1150"/>
+              <a:defRPr sz="950"/>
             </a:lvl9pPr>
           </a:lstStyle>
           <a:p>
@@ -2218,39 +2218,39 @@
           <a:lstStyle>
             <a:lvl1pPr marL="0" indent="0">
               <a:buNone/>
-              <a:defRPr sz="800"/>
+              <a:defRPr sz="650"/>
             </a:lvl1pPr>
             <a:lvl2pPr marL="342900" indent="0">
               <a:buNone/>
-              <a:defRPr sz="700"/>
+              <a:defRPr sz="550"/>
             </a:lvl2pPr>
             <a:lvl3pPr marL="685800" indent="0">
               <a:buNone/>
-              <a:defRPr sz="700"/>
+              <a:defRPr sz="550"/>
             </a:lvl3pPr>
             <a:lvl4pPr marL="1028700" indent="0">
               <a:buNone/>
-              <a:defRPr sz="700"/>
+              <a:defRPr sz="550"/>
             </a:lvl4pPr>
             <a:lvl5pPr marL="1371600" indent="0">
               <a:buNone/>
-              <a:defRPr sz="700"/>
+              <a:defRPr sz="550"/>
             </a:lvl5pPr>
             <a:lvl6pPr marL="1714500" indent="0">
               <a:buNone/>
-              <a:defRPr sz="700"/>
+              <a:defRPr sz="550"/>
             </a:lvl6pPr>
             <a:lvl7pPr marL="2057400" indent="0">
               <a:buNone/>
-              <a:defRPr sz="700"/>
+              <a:defRPr sz="550"/>
             </a:lvl7pPr>
             <a:lvl8pPr marL="2400300" indent="0">
               <a:buNone/>
-              <a:defRPr sz="700"/>
+              <a:defRPr sz="550"/>
             </a:lvl8pPr>
             <a:lvl9pPr marL="2743200" indent="0">
               <a:buNone/>
-              <a:defRPr sz="700"/>
+              <a:defRPr sz="550"/>
             </a:lvl9pPr>
           </a:lstStyle>
           <a:p>
@@ -2377,7 +2377,7 @@
           <a:bodyPr anchor="b"/>
           <a:lstStyle>
             <a:lvl1pPr algn="l">
-              <a:defRPr sz="1150" b="1"/>
+              <a:defRPr sz="950" b="1"/>
             </a:lvl1pPr>
           </a:lstStyle>
           <a:p>
@@ -2409,39 +2409,39 @@
           <a:lstStyle>
             <a:lvl1pPr marL="0" indent="0">
               <a:buNone/>
-              <a:defRPr sz="1850"/>
+              <a:defRPr sz="1500"/>
             </a:lvl1pPr>
             <a:lvl2pPr marL="342900" indent="0">
               <a:buNone/>
-              <a:defRPr sz="1650"/>
+              <a:defRPr sz="1300"/>
             </a:lvl2pPr>
             <a:lvl3pPr marL="685800" indent="0">
               <a:buNone/>
-              <a:defRPr sz="1400"/>
+              <a:defRPr sz="1100"/>
             </a:lvl3pPr>
             <a:lvl4pPr marL="1028700" indent="0">
               <a:buNone/>
-              <a:defRPr sz="1150"/>
+              <a:defRPr sz="950"/>
             </a:lvl4pPr>
             <a:lvl5pPr marL="1371600" indent="0">
               <a:buNone/>
-              <a:defRPr sz="1150"/>
+              <a:defRPr sz="950"/>
             </a:lvl5pPr>
             <a:lvl6pPr marL="1714500" indent="0">
               <a:buNone/>
-              <a:defRPr sz="1150"/>
+              <a:defRPr sz="950"/>
             </a:lvl6pPr>
             <a:lvl7pPr marL="2057400" indent="0">
               <a:buNone/>
-              <a:defRPr sz="1150"/>
+              <a:defRPr sz="950"/>
             </a:lvl7pPr>
             <a:lvl8pPr marL="2400300" indent="0">
               <a:buNone/>
-              <a:defRPr sz="1150"/>
+              <a:defRPr sz="950"/>
             </a:lvl8pPr>
             <a:lvl9pPr marL="2743200" indent="0">
               <a:buNone/>
-              <a:defRPr sz="1150"/>
+              <a:defRPr sz="950"/>
             </a:lvl9pPr>
           </a:lstStyle>
           <a:p>
@@ -2470,39 +2470,39 @@
           <a:lstStyle>
             <a:lvl1pPr marL="0" indent="0">
               <a:buNone/>
-              <a:defRPr sz="800"/>
+              <a:defRPr sz="650"/>
             </a:lvl1pPr>
             <a:lvl2pPr marL="342900" indent="0">
               <a:buNone/>
-              <a:defRPr sz="700"/>
+              <a:defRPr sz="550"/>
             </a:lvl2pPr>
             <a:lvl3pPr marL="685800" indent="0">
               <a:buNone/>
-              <a:defRPr sz="700"/>
+              <a:defRPr sz="550"/>
             </a:lvl3pPr>
             <a:lvl4pPr marL="1028700" indent="0">
               <a:buNone/>
-              <a:defRPr sz="700"/>
+              <a:defRPr sz="550"/>
             </a:lvl4pPr>
             <a:lvl5pPr marL="1371600" indent="0">
               <a:buNone/>
-              <a:defRPr sz="700"/>
+              <a:defRPr sz="550"/>
             </a:lvl5pPr>
             <a:lvl6pPr marL="1714500" indent="0">
               <a:buNone/>
-              <a:defRPr sz="700"/>
+              <a:defRPr sz="550"/>
             </a:lvl6pPr>
             <a:lvl7pPr marL="2057400" indent="0">
               <a:buNone/>
-              <a:defRPr sz="700"/>
+              <a:defRPr sz="550"/>
             </a:lvl7pPr>
             <a:lvl8pPr marL="2400300" indent="0">
               <a:buNone/>
-              <a:defRPr sz="700"/>
+              <a:defRPr sz="550"/>
             </a:lvl8pPr>
             <a:lvl9pPr marL="2743200" indent="0">
               <a:buNone/>
-              <a:defRPr sz="700"/>
+              <a:defRPr sz="550"/>
             </a:lvl9pPr>
           </a:lstStyle>
           <a:p>
@@ -2730,7 +2730,7 @@
           <a:bodyPr anchor="ctr" bIns="45720" lIns="91440" rIns="91440" rtlCol="0" tIns="45720" vert="horz"/>
           <a:lstStyle>
             <a:lvl1pPr algn="l">
-              <a:defRPr sz="700">
+              <a:defRPr sz="550">
                 <a:solidFill>
                   <a:schemeClr val="tx1">
                     <a:tint val="75000"/>
@@ -2771,7 +2771,7 @@
           <a:bodyPr anchor="ctr" bIns="45720" lIns="91440" rIns="91440" rtlCol="0" tIns="45720" vert="horz"/>
           <a:lstStyle>
             <a:lvl1pPr algn="ctr">
-              <a:defRPr sz="700">
+              <a:defRPr sz="550">
                 <a:solidFill>
                   <a:schemeClr val="tx1">
                     <a:tint val="75000"/>
@@ -2808,7 +2808,7 @@
           <a:bodyPr anchor="ctr" bIns="45720" lIns="91440" rIns="91440" rtlCol="0" tIns="45720" vert="horz"/>
           <a:lstStyle>
             <a:lvl1pPr algn="r">
-              <a:defRPr sz="700">
+              <a:defRPr sz="550">
                 <a:solidFill>
                   <a:schemeClr val="tx1">
                     <a:tint val="75000"/>
@@ -2854,7 +2854,7 @@
           <a:spcPct val="0"/>
         </a:spcBef>
         <a:buNone/>
-        <a:defRPr kern="1200" sz="2550">
+        <a:defRPr kern="1200" sz="2050">
           <a:solidFill>
             <a:schemeClr val="tx1"/>
           </a:solidFill>
@@ -2871,7 +2871,7 @@
         </a:spcBef>
         <a:buFont typeface="Arial"/>
         <a:buChar char="•"/>
-        <a:defRPr kern="1200" sz="1850">
+        <a:defRPr kern="1200" sz="1500">
           <a:solidFill>
             <a:schemeClr val="tx1"/>
           </a:solidFill>
@@ -2886,7 +2886,7 @@
         </a:spcBef>
         <a:buFont typeface="Arial"/>
         <a:buChar char="–"/>
-        <a:defRPr kern="1200" sz="1650">
+        <a:defRPr kern="1200" sz="1300">
           <a:solidFill>
             <a:schemeClr val="tx1"/>
           </a:solidFill>
@@ -2901,7 +2901,7 @@
         </a:spcBef>
         <a:buFont typeface="Arial"/>
         <a:buChar char="•"/>
-        <a:defRPr kern="1200" sz="1400">
+        <a:defRPr kern="1200" sz="1100">
           <a:solidFill>
             <a:schemeClr val="tx1"/>
           </a:solidFill>
@@ -2916,7 +2916,7 @@
         </a:spcBef>
         <a:buFont typeface="Arial"/>
         <a:buChar char="–"/>
-        <a:defRPr kern="1200" sz="1150">
+        <a:defRPr kern="1200" sz="950">
           <a:solidFill>
             <a:schemeClr val="tx1"/>
           </a:solidFill>
@@ -2931,7 +2931,7 @@
         </a:spcBef>
         <a:buFont typeface="Arial"/>
         <a:buChar char="»"/>
-        <a:defRPr kern="1200" sz="1150">
+        <a:defRPr kern="1200" sz="950">
           <a:solidFill>
             <a:schemeClr val="tx1"/>
           </a:solidFill>
@@ -2946,7 +2946,7 @@
         </a:spcBef>
         <a:buFont typeface="Arial"/>
         <a:buChar char="•"/>
-        <a:defRPr kern="1200" sz="1150">
+        <a:defRPr kern="1200" sz="950">
           <a:solidFill>
             <a:schemeClr val="tx1"/>
           </a:solidFill>
@@ -2961,7 +2961,7 @@
         </a:spcBef>
         <a:buFont typeface="Arial"/>
         <a:buChar char="•"/>
-        <a:defRPr kern="1200" sz="1150">
+        <a:defRPr kern="1200" sz="950">
           <a:solidFill>
             <a:schemeClr val="tx1"/>
           </a:solidFill>
@@ -2976,7 +2976,7 @@
         </a:spcBef>
         <a:buFont typeface="Arial"/>
         <a:buChar char="•"/>
-        <a:defRPr kern="1200" sz="1150">
+        <a:defRPr kern="1200" sz="950">
           <a:solidFill>
             <a:schemeClr val="tx1"/>
           </a:solidFill>
@@ -2991,7 +2991,7 @@
         </a:spcBef>
         <a:buFont typeface="Arial"/>
         <a:buChar char="•"/>
-        <a:defRPr kern="1200" sz="1150">
+        <a:defRPr kern="1200" sz="950">
           <a:solidFill>
             <a:schemeClr val="tx1"/>
           </a:solidFill>
@@ -3006,7 +3006,7 @@
         <a:defRPr lang="en-US"/>
       </a:defPPr>
       <a:lvl1pPr algn="l" defTabSz="342900" eaLnBrk="1" hangingPunct="1" latinLnBrk="0" marL="0" rtl="0">
-        <a:defRPr kern="1200" sz="1050">
+        <a:defRPr kern="1200" sz="850">
           <a:solidFill>
             <a:schemeClr val="tx1"/>
           </a:solidFill>
@@ -3016,7 +3016,7 @@
         </a:defRPr>
       </a:lvl1pPr>
       <a:lvl2pPr algn="l" defTabSz="342900" eaLnBrk="1" hangingPunct="1" latinLnBrk="0" marL="342900" rtl="0">
-        <a:defRPr kern="1200" sz="1050">
+        <a:defRPr kern="1200" sz="850">
           <a:solidFill>
             <a:schemeClr val="tx1"/>
           </a:solidFill>
@@ -3026,7 +3026,7 @@
         </a:defRPr>
       </a:lvl2pPr>
       <a:lvl3pPr algn="l" defTabSz="342900" eaLnBrk="1" hangingPunct="1" latinLnBrk="0" marL="685800" rtl="0">
-        <a:defRPr kern="1200" sz="1050">
+        <a:defRPr kern="1200" sz="850">
           <a:solidFill>
             <a:schemeClr val="tx1"/>
           </a:solidFill>
@@ -3036,7 +3036,7 @@
         </a:defRPr>
       </a:lvl3pPr>
       <a:lvl4pPr algn="l" defTabSz="342900" eaLnBrk="1" hangingPunct="1" latinLnBrk="0" marL="1028700" rtl="0">
-        <a:defRPr kern="1200" sz="1050">
+        <a:defRPr kern="1200" sz="850">
           <a:solidFill>
             <a:schemeClr val="tx1"/>
           </a:solidFill>
@@ -3046,7 +3046,7 @@
         </a:defRPr>
       </a:lvl4pPr>
       <a:lvl5pPr algn="l" defTabSz="342900" eaLnBrk="1" hangingPunct="1" latinLnBrk="0" marL="1371600" rtl="0">
-        <a:defRPr kern="1200" sz="1050">
+        <a:defRPr kern="1200" sz="850">
           <a:solidFill>
             <a:schemeClr val="tx1"/>
           </a:solidFill>
@@ -3056,7 +3056,7 @@
         </a:defRPr>
       </a:lvl5pPr>
       <a:lvl6pPr algn="l" defTabSz="342900" eaLnBrk="1" hangingPunct="1" latinLnBrk="0" marL="1714500" rtl="0">
-        <a:defRPr kern="1200" sz="1050">
+        <a:defRPr kern="1200" sz="850">
           <a:solidFill>
             <a:schemeClr val="tx1"/>
           </a:solidFill>
@@ -3066,7 +3066,7 @@
         </a:defRPr>
       </a:lvl6pPr>
       <a:lvl7pPr algn="l" defTabSz="342900" eaLnBrk="1" hangingPunct="1" latinLnBrk="0" marL="2057400" rtl="0">
-        <a:defRPr kern="1200" sz="1050">
+        <a:defRPr kern="1200" sz="850">
           <a:solidFill>
             <a:schemeClr val="tx1"/>
           </a:solidFill>
@@ -3076,7 +3076,7 @@
         </a:defRPr>
       </a:lvl7pPr>
       <a:lvl8pPr algn="l" defTabSz="342900" eaLnBrk="1" hangingPunct="1" latinLnBrk="0" marL="2400300" rtl="0">
-        <a:defRPr kern="1200" sz="1050">
+        <a:defRPr kern="1200" sz="850">
           <a:solidFill>
             <a:schemeClr val="tx1"/>
           </a:solidFill>
@@ -3086,7 +3086,7 @@
         </a:defRPr>
       </a:lvl8pPr>
       <a:lvl9pPr algn="l" defTabSz="342900" eaLnBrk="1" hangingPunct="1" latinLnBrk="0" marL="2743200" rtl="0">
-        <a:defRPr kern="1200" sz="1050">
+        <a:defRPr kern="1200" sz="850">
           <a:solidFill>
             <a:schemeClr val="tx1"/>
           </a:solidFill>

--- a/03-inference-diagnostics-interpretation/slides.pptx
+++ b/03-inference-diagnostics-interpretation/slides.pptx
@@ -2823,6 +2823,72 @@
               <a:t>‹#›</a:t>
             </a:fld>
             <a:endParaRPr lang="en-US"/>
+          </a:p>
+        </p:txBody>
+      </p:sp>
+      <p:sp>
+        <p:nvSpPr>
+          <p:cNvPr id="7" name="Author Footer"/>
+          <p:cNvSpPr txBox="1"/>
+          <p:nvPr/>
+        </p:nvSpPr>
+        <p:spPr>
+          <a:xfrm>
+            <a:off x="457200" y="4735000"/>
+            <a:ext cx="5000000" cy="260000"/>
+          </a:xfrm>
+          <a:prstGeom prst="rect">
+            <a:avLst/>
+          </a:prstGeom>
+          <a:noFill/>
+        </p:spPr>
+        <p:txBody>
+          <a:bodyPr anchor="ctr" bIns="0" lIns="0" rIns="0" tIns="0" wrap="square"/>
+          <a:lstStyle/>
+          <a:p>
+            <a:pPr algn="l"/>
+            <a:r>
+              <a:rPr dirty="0" lang="en-US" sz="900">
+                <a:solidFill>
+                  <a:srgbClr val="6E7275"/>
+                </a:solidFill>
+                <a:latin typeface="+mn-lt"/>
+              </a:rPr>
+              <a:t>Thierry Warin, PhD</a:t>
+            </a:r>
+          </a:p>
+        </p:txBody>
+      </p:sp>
+      <p:sp>
+        <p:nvSpPr>
+          <p:cNvPr id="8" name="Slide Number Footer"/>
+          <p:cNvSpPr txBox="1"/>
+          <p:nvPr/>
+        </p:nvSpPr>
+        <p:spPr>
+          <a:xfrm>
+            <a:off x="7200000" y="4735000"/>
+            <a:ext cx="1486800" cy="260000"/>
+          </a:xfrm>
+          <a:prstGeom prst="rect">
+            <a:avLst/>
+          </a:prstGeom>
+          <a:noFill/>
+        </p:spPr>
+        <p:txBody>
+          <a:bodyPr anchor="ctr" bIns="0" lIns="0" rIns="0" tIns="0" wrap="square"/>
+          <a:lstStyle/>
+          <a:p>
+            <a:pPr algn="r"/>
+            <a:fld id="{9B1A2C3D-4E5F-6A7B-8C9D-0E1F2A3B4C5D}" type="slidenum">
+              <a:rPr dirty="0" lang="en-US" sz="900">
+                <a:solidFill>
+                  <a:srgbClr val="6E7275"/>
+                </a:solidFill>
+                <a:latin typeface="+mn-lt"/>
+              </a:rPr>
+              <a:t>2</a:t>
+            </a:fld>
           </a:p>
         </p:txBody>
       </p:sp>
@@ -3203,7 +3269,7 @@
             </a:pPr>
             <a:r>
               <a:rPr/>
-              <a:t>18 August 2026</a:t>
+              <a:t>19 August 2026</a:t>
             </a:r>
           </a:p>
         </p:txBody>

--- a/03-inference-diagnostics-interpretation/slides.pptx
+++ b/03-inference-diagnostics-interpretation/slides.pptx
@@ -3208,7 +3208,7 @@
             </a:pPr>
             <a:r>
               <a:rPr/>
-              <a:t>Inference, Diagnostics, Interpretation</a:t>
+              <a:t>Linear Regression: Inference, Diagnostics, Interpretation</a:t>
             </a:r>
           </a:p>
         </p:txBody>
@@ -3238,7 +3238,7 @@
             </a:pPr>
             <a:r>
               <a:rPr/>
-              <a:t>Session 03 · Standard errors that survive contact with panel data</a:t>
+              <a:t>Session 03 · Lecture, first half</a:t>
             </a:r>
             <a:br/>
             <a:br/>
@@ -3269,7 +3269,7 @@
             </a:pPr>
             <a:r>
               <a:rPr/>
-              <a:t>19 August 2026</a:t>
+              <a:t>20 August 2026</a:t>
             </a:r>
           </a:p>
         </p:txBody>
@@ -3296,16 +3296,41 @@
           <a:chExt cx="0" cy="0"/>
         </a:xfrm>
       </p:grpSpPr>
+      <p:sp>
+        <p:nvSpPr>
+          <p:cNvPr id="2" name="Title 1"/>
+          <p:cNvSpPr>
+            <a:spLocks noGrp="1"/>
+          </p:cNvSpPr>
+          <p:nvPr>
+            <p:ph type="title"/>
+          </p:nvPr>
+        </p:nvSpPr>
+        <p:spPr/>
+        <p:txBody>
+          <a:bodyPr/>
+          <a:lstStyle/>
+          <a:p>
+            <a:pPr lvl="0" indent="0" marL="0">
+              <a:buNone/>
+            </a:pPr>
+            <a:r>
+              <a:rPr/>
+              <a:t>Four levers</a:t>
+            </a:r>
+          </a:p>
+        </p:txBody>
+      </p:sp>
       <mc:AlternateContent xmlns:mc="http://schemas.openxmlformats.org/markup-compatibility/2006">
         <mc:Choice xmlns:a14="http://schemas.microsoft.com/office/drawing/2010/main" Requires="a14">
           <p:sp>
             <p:nvSpPr>
-              <p:cNvPr id="2" name="Title 1"/>
+              <p:cNvPr id="3" name="Content Placeholder 2"/>
               <p:cNvSpPr>
                 <a:spLocks noGrp="1"/>
               </p:cNvSpPr>
               <p:nvPr>
-                <p:ph type="title"/>
+                <p:ph idx="1"/>
               </p:nvPr>
             </p:nvSpPr>
             <p:spPr/>
@@ -3313,25 +3338,386 @@
               <a:bodyPr/>
               <a:lstStyle/>
               <a:p>
+                <a:pPr lvl="0"/>
+                <a14:m>
+                  <m:oMath xmlns:m="http://schemas.openxmlformats.org/officeDocument/2006/math">
+                    <m:sSup>
+                      <m:e>
+                        <m:r>
+                          <m:t>σ</m:t>
+                        </m:r>
+                      </m:e>
+                      <m:sup>
+                        <m:r>
+                          <m:t>2</m:t>
+                        </m:r>
+                      </m:sup>
+                    </m:sSup>
+                  </m:oMath>
+                </a14:m>
+                <a:r>
+                  <a:rPr/>
+                  <a:t> — </a:t>
+                </a:r>
+                <a:r>
+                  <a:rPr b="1"/>
+                  <a:t>noise</a:t>
+                </a:r>
+              </a:p>
+              <a:p>
+                <a:pPr lvl="0"/>
+                <a14:m>
+                  <m:oMath xmlns:m="http://schemas.openxmlformats.org/officeDocument/2006/math">
+                    <m:r>
+                      <m:t>n</m:t>
+                    </m:r>
+                  </m:oMath>
+                </a14:m>
+                <a:r>
+                  <a:rPr/>
+                  <a:t> — </a:t>
+                </a:r>
+                <a:r>
+                  <a:rPr b="1"/>
+                  <a:t>sample size</a:t>
+                </a:r>
+              </a:p>
+              <a:p>
+                <a:pPr lvl="0"/>
+                <a14:m>
+                  <m:oMath xmlns:m="http://schemas.openxmlformats.org/officeDocument/2006/math">
+                    <m:r>
+                      <m:rPr>
+                        <m:sty m:val="p"/>
+                      </m:rPr>
+                      <m:t>Var</m:t>
+                    </m:r>
+                    <m:d>
+                      <m:dPr>
+                        <m:begChr m:val="("/>
+                        <m:sepChr m:val=""/>
+                        <m:endChr m:val=")"/>
+                        <m:grow/>
+                      </m:dPr>
+                      <m:e>
+                        <m:sSub>
+                          <m:e>
+                            <m:r>
+                              <m:t>x</m:t>
+                            </m:r>
+                          </m:e>
+                          <m:sub>
+                            <m:r>
+                              <m:t>j</m:t>
+                            </m:r>
+                          </m:sub>
+                        </m:sSub>
+                      </m:e>
+                    </m:d>
+                  </m:oMath>
+                </a14:m>
+                <a:r>
+                  <a:rPr/>
+                  <a:t> — </a:t>
+                </a:r>
+                <a:r>
+                  <a:rPr b="1"/>
+                  <a:t>variation in the regressor</a:t>
+                </a:r>
+              </a:p>
+              <a:p>
+                <a:pPr lvl="0"/>
+                <a14:m>
+                  <m:oMath xmlns:m="http://schemas.openxmlformats.org/officeDocument/2006/math">
+                    <m:r>
+                      <m:t>1</m:t>
+                    </m:r>
+                    <m:r>
+                      <m:rPr>
+                        <m:sty m:val="p"/>
+                      </m:rPr>
+                      <m:t>/</m:t>
+                    </m:r>
+                    <m:d>
+                      <m:dPr>
+                        <m:begChr m:val="("/>
+                        <m:sepChr m:val=""/>
+                        <m:endChr m:val=")"/>
+                        <m:grow/>
+                      </m:dPr>
+                      <m:e>
+                        <m:r>
+                          <m:t>1</m:t>
+                        </m:r>
+                        <m:r>
+                          <m:rPr>
+                            <m:sty m:val="p"/>
+                          </m:rPr>
+                          <m:t>−</m:t>
+                        </m:r>
+                        <m:sSubSup>
+                          <m:e>
+                            <m:r>
+                              <m:t>R</m:t>
+                            </m:r>
+                          </m:e>
+                          <m:sub>
+                            <m:r>
+                              <m:t>j</m:t>
+                            </m:r>
+                          </m:sub>
+                          <m:sup>
+                            <m:r>
+                              <m:t>2</m:t>
+                            </m:r>
+                          </m:sup>
+                        </m:sSubSup>
+                      </m:e>
+                    </m:d>
+                  </m:oMath>
+                </a14:m>
+                <a:r>
+                  <a:rPr/>
+                  <a:t> — </a:t>
+                </a:r>
+                <a:r>
+                  <a:rPr b="1"/>
+                  <a:t>redundancy</a:t>
+                </a:r>
+                <a:r>
+                  <a:rPr/>
+                  <a:t>: the variance inflation factor</a:t>
+                </a:r>
+              </a:p>
+              <a:p>
                 <a:pPr lvl="0" indent="0" marL="0">
                   <a:buNone/>
                 </a:pPr>
                 <a:r>
                   <a:rPr/>
-                  <a:t>What OLS assumes about </a:t>
+                  <a:t>That last factor is the price of collinearity — and precisely what regularisation in Session 05 proposes to pay differently.</a:t>
                 </a:r>
-                <a14:m>
-                  <m:oMath xmlns:m="http://schemas.openxmlformats.org/officeDocument/2006/math">
-                    <m:r>
-                      <m:t>ε</m:t>
-                    </m:r>
-                  </m:oMath>
-                </a14:m>
               </a:p>
             </p:txBody>
           </p:sp>
         </mc:Choice>
       </mc:AlternateContent>
+    </p:spTree>
+  </p:cSld>
+</p:sld>
+</file>
+
+<file path=ppt/slides/slide11.xml><?xml version="1.0" encoding="utf-8"?>
+<p:sld xmlns:a="http://schemas.openxmlformats.org/drawingml/2006/main" xmlns:r="http://schemas.openxmlformats.org/officeDocument/2006/relationships" xmlns:p="http://schemas.openxmlformats.org/presentationml/2006/main">
+  <p:cSld>
+    <p:spTree>
+      <p:nvGrpSpPr>
+        <p:cNvPr id="1" name=""/>
+        <p:cNvGrpSpPr/>
+        <p:nvPr/>
+      </p:nvGrpSpPr>
+      <p:grpSpPr>
+        <a:xfrm>
+          <a:off x="0" y="0"/>
+          <a:ext cx="0" cy="0"/>
+          <a:chOff x="0" y="0"/>
+          <a:chExt cx="0" cy="0"/>
+        </a:xfrm>
+      </p:grpSpPr>
+      <p:sp>
+        <p:nvSpPr>
+          <p:cNvPr id="2" name="Title 1"/>
+          <p:cNvSpPr>
+            <a:spLocks noGrp="1"/>
+          </p:cNvSpPr>
+          <p:nvPr>
+            <p:ph type="title"/>
+          </p:nvPr>
+        </p:nvSpPr>
+        <p:spPr>
+          <a:xfrm>
+            <a:off x="722313" y="3305176"/>
+            <a:ext cx="7772400" cy="1021556"/>
+          </a:xfrm>
+        </p:spPr>
+        <p:txBody>
+          <a:bodyPr/>
+          <a:lstStyle/>
+          <a:p>
+            <a:pPr lvl="0" indent="0" marL="0">
+              <a:buNone/>
+            </a:pPr>
+            <a:r>
+              <a:rPr/>
+              <a:t>3.2 Gauss–Markov</a:t>
+            </a:r>
+          </a:p>
+        </p:txBody>
+      </p:sp>
+    </p:spTree>
+  </p:cSld>
+</p:sld>
+</file>
+
+<file path=ppt/slides/slide12.xml><?xml version="1.0" encoding="utf-8"?>
+<p:sld xmlns:a="http://schemas.openxmlformats.org/drawingml/2006/main" xmlns:r="http://schemas.openxmlformats.org/officeDocument/2006/relationships" xmlns:p="http://schemas.openxmlformats.org/presentationml/2006/main">
+  <p:cSld>
+    <p:spTree>
+      <p:nvGrpSpPr>
+        <p:cNvPr id="1" name=""/>
+        <p:cNvGrpSpPr/>
+        <p:nvPr/>
+      </p:nvGrpSpPr>
+      <p:grpSpPr>
+        <a:xfrm>
+          <a:off x="0" y="0"/>
+          <a:ext cx="0" cy="0"/>
+          <a:chOff x="0" y="0"/>
+          <a:chExt cx="0" cy="0"/>
+        </a:xfrm>
+      </p:grpSpPr>
+      <p:sp>
+        <p:nvSpPr>
+          <p:cNvPr id="2" name="Title 1"/>
+          <p:cNvSpPr>
+            <a:spLocks noGrp="1"/>
+          </p:cNvSpPr>
+          <p:nvPr>
+            <p:ph type="title"/>
+          </p:nvPr>
+        </p:nvSpPr>
+        <p:spPr/>
+        <p:txBody>
+          <a:bodyPr/>
+          <a:lstStyle/>
+          <a:p>
+            <a:pPr lvl="0" indent="0" marL="0">
+              <a:buNone/>
+            </a:pPr>
+            <a:r>
+              <a:rPr/>
+              <a:t>The theorem</a:t>
+            </a:r>
+          </a:p>
+        </p:txBody>
+      </p:sp>
+      <mc:AlternateContent xmlns:mc="http://schemas.openxmlformats.org/markup-compatibility/2006">
+        <mc:Choice xmlns:a14="http://schemas.microsoft.com/office/drawing/2010/main" Requires="a14">
+          <p:sp>
+            <p:nvSpPr>
+              <p:cNvPr id="3" name="Content Placeholder 2"/>
+              <p:cNvSpPr>
+                <a:spLocks noGrp="1"/>
+              </p:cNvSpPr>
+              <p:nvPr>
+                <p:ph idx="1"/>
+              </p:nvPr>
+            </p:nvSpPr>
+            <p:spPr/>
+            <p:txBody>
+              <a:bodyPr/>
+              <a:lstStyle/>
+              <a:p>
+                <a:pPr lvl="0" indent="0" marL="1270000">
+                  <a:buNone/>
+                </a:pPr>
+                <a:r>
+                  <a:rPr sz="2000"/>
+                  <a:t>Under assumptions 1–4, </a:t>
+                </a:r>
+                <a14:m>
+                  <m:oMath xmlns:m="http://schemas.openxmlformats.org/officeDocument/2006/math">
+                    <m:sSub>
+                      <m:e>
+                        <m:acc>
+                          <m:accPr>
+                            <m:chr m:val="̂"/>
+                          </m:accPr>
+                          <m:e>
+                            <m:r>
+                              <m:t>β</m:t>
+                            </m:r>
+                          </m:e>
+                        </m:acc>
+                      </m:e>
+                      <m:sub>
+                        <m:r>
+                          <m:t>O</m:t>
+                        </m:r>
+                        <m:r>
+                          <m:t>L</m:t>
+                        </m:r>
+                        <m:r>
+                          <m:t>S</m:t>
+                        </m:r>
+                      </m:sub>
+                    </m:sSub>
+                  </m:oMath>
+                </a14:m>
+                <a:r>
+                  <a:rPr sz="2000"/>
+                  <a:t> has the </a:t>
+                </a:r>
+                <a:r>
+                  <a:rPr sz="2000" b="1"/>
+                  <a:t>smallest variance in the class of linear unbiased estimators</a:t>
+                </a:r>
+                <a:r>
+                  <a:rPr sz="2000"/>
+                  <a:t>.</a:t>
+                </a:r>
+              </a:p>
+            </p:txBody>
+          </p:sp>
+        </mc:Choice>
+      </mc:AlternateContent>
+    </p:spTree>
+  </p:cSld>
+</p:sld>
+</file>
+
+<file path=ppt/slides/slide13.xml><?xml version="1.0" encoding="utf-8"?>
+<p:sld xmlns:a="http://schemas.openxmlformats.org/drawingml/2006/main" xmlns:r="http://schemas.openxmlformats.org/officeDocument/2006/relationships" xmlns:p="http://schemas.openxmlformats.org/presentationml/2006/main">
+  <p:cSld>
+    <p:spTree>
+      <p:nvGrpSpPr>
+        <p:cNvPr id="1" name=""/>
+        <p:cNvGrpSpPr/>
+        <p:nvPr/>
+      </p:nvGrpSpPr>
+      <p:grpSpPr>
+        <a:xfrm>
+          <a:off x="0" y="0"/>
+          <a:ext cx="0" cy="0"/>
+          <a:chOff x="0" y="0"/>
+          <a:chExt cx="0" cy="0"/>
+        </a:xfrm>
+      </p:grpSpPr>
+      <p:sp>
+        <p:nvSpPr>
+          <p:cNvPr id="2" name="Title 1"/>
+          <p:cNvSpPr>
+            <a:spLocks noGrp="1"/>
+          </p:cNvSpPr>
+          <p:nvPr>
+            <p:ph type="title"/>
+          </p:nvPr>
+        </p:nvSpPr>
+        <p:spPr/>
+        <p:txBody>
+          <a:bodyPr/>
+          <a:lstStyle/>
+          <a:p>
+            <a:pPr lvl="0" indent="0" marL="0">
+              <a:buNone/>
+            </a:pPr>
+            <a:r>
+              <a:rPr/>
+              <a:t>Proof sketch</a:t>
+            </a:r>
+          </a:p>
+        </p:txBody>
+      </p:sp>
       <mc:AlternateContent xmlns:mc="http://schemas.openxmlformats.org/markup-compatibility/2006">
         <mc:Choice xmlns:a14="http://schemas.microsoft.com/office/drawing/2010/main" Requires="a14">
           <p:sp>
@@ -3354,12 +3740,144 @@
                 </a:pPr>
                 <a:r>
                   <a:rPr/>
-                  <a:t>Under </a:t>
+                  <a:t>Let </a:t>
+                </a:r>
+                <a14:m>
+                  <m:oMath xmlns:m="http://schemas.openxmlformats.org/officeDocument/2006/math">
+                    <m:acc>
+                      <m:accPr>
+                        <m:chr m:val="̃"/>
+                      </m:accPr>
+                      <m:e>
+                        <m:r>
+                          <m:t>β</m:t>
+                        </m:r>
+                      </m:e>
+                    </m:acc>
+                    <m:r>
+                      <m:rPr>
+                        <m:sty m:val="p"/>
+                      </m:rPr>
+                      <m:t>=</m:t>
+                    </m:r>
+                    <m:r>
+                      <m:t>C</m:t>
+                    </m:r>
+                    <m:r>
+                      <m:t>y</m:t>
+                    </m:r>
+                  </m:oMath>
+                </a14:m>
+                <a:r>
+                  <a:rPr/>
+                  <a:t> be any linear unbiased estimator; write</a:t>
+                </a:r>
+              </a:p>
+              <a:p>
+                <a:pPr lvl="0" indent="0" marL="0">
+                  <a:buNone/>
+                </a:pPr>
+                <a14:m>
+                  <m:oMathPara xmlns:m="http://schemas.openxmlformats.org/officeDocument/2006/math">
+                    <m:oMathParaPr>
+                      <m:jc m:val="center"/>
+                    </m:oMathParaPr>
+                    <m:oMath>
+                      <m:r>
+                        <m:t>C</m:t>
+                      </m:r>
+                      <m:r>
+                        <m:rPr>
+                          <m:sty m:val="p"/>
+                        </m:rPr>
+                        <m:t>=</m:t>
+                      </m:r>
+                      <m:sSup>
+                        <m:e>
+                          <m:d>
+                            <m:dPr>
+                              <m:begChr m:val="("/>
+                              <m:sepChr m:val=""/>
+                              <m:endChr m:val=")"/>
+                              <m:grow/>
+                            </m:dPr>
+                            <m:e>
+                              <m:sSup>
+                                <m:e>
+                                  <m:r>
+                                    <m:t>X</m:t>
+                                  </m:r>
+                                </m:e>
+                                <m:sup>
+                                  <m:r>
+                                    <m:rPr>
+                                      <m:sty m:val="p"/>
+                                    </m:rPr>
+                                    <m:t>⊤</m:t>
+                                  </m:r>
+                                </m:sup>
+                              </m:sSup>
+                              <m:r>
+                                <m:t>X</m:t>
+                              </m:r>
+                            </m:e>
+                          </m:d>
+                        </m:e>
+                        <m:sup>
+                          <m:r>
+                            <m:rPr>
+                              <m:sty m:val="p"/>
+                            </m:rPr>
+                            <m:t>−</m:t>
+                          </m:r>
+                          <m:r>
+                            <m:t>1</m:t>
+                          </m:r>
+                        </m:sup>
+                      </m:sSup>
+                      <m:sSup>
+                        <m:e>
+                          <m:r>
+                            <m:t>X</m:t>
+                          </m:r>
+                        </m:e>
+                        <m:sup>
+                          <m:r>
+                            <m:rPr>
+                              <m:sty m:val="p"/>
+                            </m:rPr>
+                            <m:t>⊤</m:t>
+                          </m:r>
+                        </m:sup>
+                      </m:sSup>
+                      <m:r>
+                        <m:rPr>
+                          <m:sty m:val="p"/>
+                        </m:rPr>
+                        <m:t>+</m:t>
+                      </m:r>
+                      <m:r>
+                        <m:t>D</m:t>
+                      </m:r>
+                    </m:oMath>
+                  </m:oMathPara>
+                </a14:m>
+              </a:p>
+              <a:p>
+                <a:pPr lvl="0" indent="0" marL="0">
+                  <a:buNone/>
+                </a:pPr>
+                <a:r>
+                  <a:rPr/>
+                  <a:t>Unbiasedness forces </a:t>
                 </a:r>
                 <a14:m>
                   <m:oMath xmlns:m="http://schemas.openxmlformats.org/officeDocument/2006/math">
                     <m:r>
-                      <m:t>y</m:t>
+                      <m:t>D</m:t>
+                    </m:r>
+                    <m:r>
+                      <m:t>X</m:t>
                     </m:r>
                     <m:r>
                       <m:rPr>
@@ -3368,27 +3886,444 @@
                       <m:t>=</m:t>
                     </m:r>
                     <m:r>
-                      <m:t>X</m:t>
-                    </m:r>
-                    <m:r>
-                      <m:t>β</m:t>
-                    </m:r>
-                    <m:r>
-                      <m:rPr>
-                        <m:sty m:val="p"/>
-                      </m:rPr>
-                      <m:t>+</m:t>
-                    </m:r>
-                    <m:r>
-                      <m:t>ε</m:t>
+                      <m:t>0</m:t>
                     </m:r>
                   </m:oMath>
                 </a14:m>
                 <a:r>
                   <a:rPr/>
-                  <a:t>, the classical variance is</a:t>
+                  <a:t>. Then</a:t>
                 </a:r>
               </a:p>
+              <a:p>
+                <a:pPr lvl="0" indent="0" marL="0">
+                  <a:buNone/>
+                </a:pPr>
+                <a14:m>
+                  <m:oMathPara xmlns:m="http://schemas.openxmlformats.org/officeDocument/2006/math">
+                    <m:oMathParaPr>
+                      <m:jc m:val="center"/>
+                    </m:oMathParaPr>
+                    <m:oMath>
+                      <m:r>
+                        <m:rPr>
+                          <m:sty m:val="p"/>
+                        </m:rPr>
+                        <m:t>Var</m:t>
+                      </m:r>
+                      <m:d>
+                        <m:dPr>
+                          <m:begChr m:val="("/>
+                          <m:sepChr m:val=""/>
+                          <m:endChr m:val=")"/>
+                          <m:grow/>
+                        </m:dPr>
+                        <m:e>
+                          <m:acc>
+                            <m:accPr>
+                              <m:chr m:val="̃"/>
+                            </m:accPr>
+                            <m:e>
+                              <m:r>
+                                <m:t>β</m:t>
+                              </m:r>
+                            </m:e>
+                          </m:acc>
+                        </m:e>
+                      </m:d>
+                      <m:r>
+                        <m:rPr>
+                          <m:sty m:val="p"/>
+                        </m:rPr>
+                        <m:t>=</m:t>
+                      </m:r>
+                      <m:sSup>
+                        <m:e>
+                          <m:r>
+                            <m:t>σ</m:t>
+                          </m:r>
+                        </m:e>
+                        <m:sup>
+                          <m:r>
+                            <m:t>2</m:t>
+                          </m:r>
+                        </m:sup>
+                      </m:sSup>
+                      <m:d>
+                        <m:dPr>
+                          <m:begChr m:val="["/>
+                          <m:sepChr m:val=""/>
+                          <m:endChr m:val="]"/>
+                          <m:grow/>
+                        </m:dPr>
+                        <m:e>
+                          <m:sSup>
+                            <m:e>
+                              <m:d>
+                                <m:dPr>
+                                  <m:begChr m:val="("/>
+                                  <m:sepChr m:val=""/>
+                                  <m:endChr m:val=")"/>
+                                  <m:grow/>
+                                </m:dPr>
+                                <m:e>
+                                  <m:sSup>
+                                    <m:e>
+                                      <m:r>
+                                        <m:t>X</m:t>
+                                      </m:r>
+                                    </m:e>
+                                    <m:sup>
+                                      <m:r>
+                                        <m:rPr>
+                                          <m:sty m:val="p"/>
+                                        </m:rPr>
+                                        <m:t>⊤</m:t>
+                                      </m:r>
+                                    </m:sup>
+                                  </m:sSup>
+                                  <m:r>
+                                    <m:t>X</m:t>
+                                  </m:r>
+                                </m:e>
+                              </m:d>
+                            </m:e>
+                            <m:sup>
+                              <m:r>
+                                <m:rPr>
+                                  <m:sty m:val="p"/>
+                                </m:rPr>
+                                <m:t>−</m:t>
+                              </m:r>
+                              <m:r>
+                                <m:t>1</m:t>
+                              </m:r>
+                            </m:sup>
+                          </m:sSup>
+                          <m:r>
+                            <m:rPr>
+                              <m:sty m:val="p"/>
+                            </m:rPr>
+                            <m:t>+</m:t>
+                          </m:r>
+                          <m:r>
+                            <m:t>D</m:t>
+                          </m:r>
+                          <m:sSup>
+                            <m:e>
+                              <m:r>
+                                <m:t>D</m:t>
+                              </m:r>
+                            </m:e>
+                            <m:sup>
+                              <m:r>
+                                <m:rPr>
+                                  <m:sty m:val="p"/>
+                                </m:rPr>
+                                <m:t>⊤</m:t>
+                              </m:r>
+                            </m:sup>
+                          </m:sSup>
+                        </m:e>
+                      </m:d>
+                      <m:r>
+                        <m:rPr>
+                          <m:sty m:val="p"/>
+                        </m:rPr>
+                        <m:t>≽</m:t>
+                      </m:r>
+                      <m:r>
+                        <m:rPr>
+                          <m:sty m:val="p"/>
+                        </m:rPr>
+                        <m:t>Var</m:t>
+                      </m:r>
+                      <m:d>
+                        <m:dPr>
+                          <m:begChr m:val="("/>
+                          <m:sepChr m:val=""/>
+                          <m:endChr m:val=")"/>
+                          <m:grow/>
+                        </m:dPr>
+                        <m:e>
+                          <m:acc>
+                            <m:accPr>
+                              <m:chr m:val="̂"/>
+                            </m:accPr>
+                            <m:e>
+                              <m:r>
+                                <m:t>β</m:t>
+                              </m:r>
+                            </m:e>
+                          </m:acc>
+                        </m:e>
+                      </m:d>
+                    </m:oMath>
+                  </m:oMathPara>
+                </a14:m>
+              </a:p>
+              <a:p>
+                <a:pPr lvl="0" indent="0" marL="0">
+                  <a:buNone/>
+                </a:pPr>
+                <a:r>
+                  <a:rPr/>
+                  <a:t>since </a:t>
+                </a:r>
+                <a14:m>
+                  <m:oMath xmlns:m="http://schemas.openxmlformats.org/officeDocument/2006/math">
+                    <m:r>
+                      <m:t>D</m:t>
+                    </m:r>
+                    <m:sSup>
+                      <m:e>
+                        <m:r>
+                          <m:t>D</m:t>
+                        </m:r>
+                      </m:e>
+                      <m:sup>
+                        <m:r>
+                          <m:rPr>
+                            <m:sty m:val="p"/>
+                          </m:rPr>
+                          <m:t>⊤</m:t>
+                        </m:r>
+                      </m:sup>
+                    </m:sSup>
+                    <m:r>
+                      <m:rPr>
+                        <m:sty m:val="p"/>
+                      </m:rPr>
+                      <m:t>≽</m:t>
+                    </m:r>
+                    <m:r>
+                      <m:t>0</m:t>
+                    </m:r>
+                  </m:oMath>
+                </a14:m>
+                <a:r>
+                  <a:rPr/>
+                  <a:t>. </a:t>
+                </a:r>
+                <a14:m>
+                  <m:oMath xmlns:m="http://schemas.openxmlformats.org/officeDocument/2006/math">
+                    <m:r>
+                      <m:rPr>
+                        <m:sty m:val="p"/>
+                      </m:rPr>
+                      <m:t>◼</m:t>
+                    </m:r>
+                  </m:oMath>
+                </a14:m>
+              </a:p>
+            </p:txBody>
+          </p:sp>
+        </mc:Choice>
+      </mc:AlternateContent>
+    </p:spTree>
+  </p:cSld>
+</p:sld>
+</file>
+
+<file path=ppt/slides/slide14.xml><?xml version="1.0" encoding="utf-8"?>
+<p:sld xmlns:a="http://schemas.openxmlformats.org/drawingml/2006/main" xmlns:r="http://schemas.openxmlformats.org/officeDocument/2006/relationships" xmlns:p="http://schemas.openxmlformats.org/presentationml/2006/main">
+  <p:cSld>
+    <p:spTree>
+      <p:nvGrpSpPr>
+        <p:cNvPr id="1" name=""/>
+        <p:cNvGrpSpPr/>
+        <p:nvPr/>
+      </p:nvGrpSpPr>
+      <p:grpSpPr>
+        <a:xfrm>
+          <a:off x="0" y="0"/>
+          <a:ext cx="0" cy="0"/>
+          <a:chOff x="0" y="0"/>
+          <a:chExt cx="0" cy="0"/>
+        </a:xfrm>
+      </p:grpSpPr>
+      <p:sp>
+        <p:nvSpPr>
+          <p:cNvPr id="2" name="Title 1"/>
+          <p:cNvSpPr>
+            <a:spLocks noGrp="1"/>
+          </p:cNvSpPr>
+          <p:nvPr>
+            <p:ph type="title"/>
+          </p:nvPr>
+        </p:nvSpPr>
+        <p:spPr/>
+        <p:txBody>
+          <a:bodyPr/>
+          <a:lstStyle/>
+          <a:p>
+            <a:pPr lvl="0" indent="0" marL="0">
+              <a:buNone/>
+            </a:pPr>
+            <a:r>
+              <a:rPr/>
+              <a:t>The crucial caveat</a:t>
+            </a:r>
+          </a:p>
+        </p:txBody>
+      </p:sp>
+      <p:sp>
+        <p:nvSpPr>
+          <p:cNvPr id="3" name="Content Placeholder 2"/>
+          <p:cNvSpPr>
+            <a:spLocks noGrp="1"/>
+          </p:cNvSpPr>
+          <p:nvPr>
+            <p:ph idx="1"/>
+          </p:nvPr>
+        </p:nvSpPr>
+        <p:spPr/>
+        <p:txBody>
+          <a:bodyPr/>
+          <a:lstStyle/>
+          <a:p>
+            <a:pPr lvl="0" indent="0" marL="0">
+              <a:buNone/>
+            </a:pPr>
+            <a:r>
+              <a:rPr/>
+              <a:t>BLUE is a guarantee </a:t>
+            </a:r>
+            <a:r>
+              <a:rPr b="1"/>
+              <a:t>within the class of unbiased estimators</a:t>
+            </a:r>
+            <a:r>
+              <a:rPr/>
+              <a:t>.</a:t>
+            </a:r>
+          </a:p>
+          <a:p>
+            <a:pPr lvl="0" indent="0" marL="0">
+              <a:buNone/>
+            </a:pPr>
+            <a:r>
+              <a:rPr/>
+              <a:t>Sessions 04 and 05 show that deliberately accepting bias can lower total error. Gauss–Markov does not forbid this. It simply does not apply.</a:t>
+            </a:r>
+          </a:p>
+        </p:txBody>
+      </p:sp>
+    </p:spTree>
+  </p:cSld>
+</p:sld>
+</file>
+
+<file path=ppt/slides/slide15.xml><?xml version="1.0" encoding="utf-8"?>
+<p:sld xmlns:a="http://schemas.openxmlformats.org/drawingml/2006/main" xmlns:r="http://schemas.openxmlformats.org/officeDocument/2006/relationships" xmlns:p="http://schemas.openxmlformats.org/presentationml/2006/main">
+  <p:cSld>
+    <p:spTree>
+      <p:nvGrpSpPr>
+        <p:cNvPr id="1" name=""/>
+        <p:cNvGrpSpPr/>
+        <p:nvPr/>
+      </p:nvGrpSpPr>
+      <p:grpSpPr>
+        <a:xfrm>
+          <a:off x="0" y="0"/>
+          <a:ext cx="0" cy="0"/>
+          <a:chOff x="0" y="0"/>
+          <a:chExt cx="0" cy="0"/>
+        </a:xfrm>
+      </p:grpSpPr>
+      <p:sp>
+        <p:nvSpPr>
+          <p:cNvPr id="2" name="Title 1"/>
+          <p:cNvSpPr>
+            <a:spLocks noGrp="1"/>
+          </p:cNvSpPr>
+          <p:nvPr>
+            <p:ph type="title"/>
+          </p:nvPr>
+        </p:nvSpPr>
+        <p:spPr>
+          <a:xfrm>
+            <a:off x="722313" y="3305176"/>
+            <a:ext cx="7772400" cy="1021556"/>
+          </a:xfrm>
+        </p:spPr>
+        <p:txBody>
+          <a:bodyPr/>
+          <a:lstStyle/>
+          <a:p>
+            <a:pPr lvl="0" indent="0" marL="0">
+              <a:buNone/>
+            </a:pPr>
+            <a:r>
+              <a:rPr/>
+              <a:t>3.3 When assumption 4 fails</a:t>
+            </a:r>
+          </a:p>
+        </p:txBody>
+      </p:sp>
+    </p:spTree>
+  </p:cSld>
+</p:sld>
+</file>
+
+<file path=ppt/slides/slide16.xml><?xml version="1.0" encoding="utf-8"?>
+<p:sld xmlns:a="http://schemas.openxmlformats.org/drawingml/2006/main" xmlns:r="http://schemas.openxmlformats.org/officeDocument/2006/relationships" xmlns:p="http://schemas.openxmlformats.org/presentationml/2006/main">
+  <p:cSld>
+    <p:spTree>
+      <p:nvGrpSpPr>
+        <p:cNvPr id="1" name=""/>
+        <p:cNvGrpSpPr/>
+        <p:nvPr/>
+      </p:nvGrpSpPr>
+      <p:grpSpPr>
+        <a:xfrm>
+          <a:off x="0" y="0"/>
+          <a:ext cx="0" cy="0"/>
+          <a:chOff x="0" y="0"/>
+          <a:chExt cx="0" cy="0"/>
+        </a:xfrm>
+      </p:grpSpPr>
+      <p:sp>
+        <p:nvSpPr>
+          <p:cNvPr id="2" name="Title 1"/>
+          <p:cNvSpPr>
+            <a:spLocks noGrp="1"/>
+          </p:cNvSpPr>
+          <p:nvPr>
+            <p:ph type="title"/>
+          </p:nvPr>
+        </p:nvSpPr>
+        <p:spPr/>
+        <p:txBody>
+          <a:bodyPr/>
+          <a:lstStyle/>
+          <a:p>
+            <a:pPr lvl="0" indent="0" marL="0">
+              <a:buNone/>
+            </a:pPr>
+            <a:r>
+              <a:rPr/>
+              <a:t>The sandwich is always correct</a:t>
+            </a:r>
+          </a:p>
+        </p:txBody>
+      </p:sp>
+      <mc:AlternateContent xmlns:mc="http://schemas.openxmlformats.org/markup-compatibility/2006">
+        <mc:Choice xmlns:a14="http://schemas.microsoft.com/office/drawing/2010/main" Requires="a14">
+          <p:sp>
+            <p:nvSpPr>
+              <p:cNvPr id="3" name="Content Placeholder 2"/>
+              <p:cNvSpPr>
+                <a:spLocks noGrp="1"/>
+              </p:cNvSpPr>
+              <p:nvPr>
+                <p:ph idx="1"/>
+              </p:nvPr>
+            </p:nvSpPr>
+            <p:spPr/>
+            <p:txBody>
+              <a:bodyPr/>
+              <a:lstStyle/>
               <a:p>
                 <a:pPr lvl="0" indent="0" marL="0">
                   <a:buNone/>
@@ -3423,6 +4358,15 @@
                               </m:r>
                             </m:e>
                           </m:acc>
+                          <m:r>
+                            <m:rPr>
+                              <m:sty m:val="p"/>
+                            </m:rPr>
+                            <m:t>∣</m:t>
+                          </m:r>
+                          <m:r>
+                            <m:t>X</m:t>
+                          </m:r>
                         </m:e>
                       </m:d>
                       <m:r>
@@ -3433,16 +4377,78 @@
                       </m:r>
                       <m:sSup>
                         <m:e>
-                          <m:r>
-                            <m:t>σ</m:t>
-                          </m:r>
+                          <m:d>
+                            <m:dPr>
+                              <m:begChr m:val="("/>
+                              <m:sepChr m:val=""/>
+                              <m:endChr m:val=")"/>
+                              <m:grow/>
+                            </m:dPr>
+                            <m:e>
+                              <m:sSup>
+                                <m:e>
+                                  <m:r>
+                                    <m:t>X</m:t>
+                                  </m:r>
+                                </m:e>
+                                <m:sup>
+                                  <m:r>
+                                    <m:rPr>
+                                      <m:sty m:val="p"/>
+                                    </m:rPr>
+                                    <m:t>⊤</m:t>
+                                  </m:r>
+                                </m:sup>
+                              </m:sSup>
+                              <m:r>
+                                <m:t>X</m:t>
+                              </m:r>
+                            </m:e>
+                          </m:d>
                         </m:e>
                         <m:sup>
                           <m:r>
-                            <m:t>2</m:t>
+                            <m:rPr>
+                              <m:sty m:val="p"/>
+                            </m:rPr>
+                            <m:t>−</m:t>
+                          </m:r>
+                          <m:r>
+                            <m:t>1</m:t>
                           </m:r>
                         </m:sup>
                       </m:sSup>
+                      <m:d>
+                        <m:dPr>
+                          <m:begChr m:val="("/>
+                          <m:sepChr m:val=""/>
+                          <m:endChr m:val=")"/>
+                          <m:grow/>
+                        </m:dPr>
+                        <m:e>
+                          <m:sSup>
+                            <m:e>
+                              <m:r>
+                                <m:t>X</m:t>
+                              </m:r>
+                            </m:e>
+                            <m:sup>
+                              <m:r>
+                                <m:rPr>
+                                  <m:sty m:val="p"/>
+                                </m:rPr>
+                                <m:t>⊤</m:t>
+                              </m:r>
+                            </m:sup>
+                          </m:sSup>
+                          <m:r>
+                            <m:t>Ω</m:t>
+                          </m:r>
+                          <m:r>
+                            <m:t>X</m:t>
+                          </m:r>
+                        </m:e>
+                      </m:d>
                       <m:sSup>
                         <m:e>
                           <m:d>
@@ -3453,15 +4459,21 @@
                               <m:grow/>
                             </m:dPr>
                             <m:e>
-                              <m:r>
-                                <m:t>X</m:t>
-                              </m:r>
-                              <m:r>
-                                <m:rPr>
-                                  <m:sty m:val="p"/>
-                                </m:rPr>
-                                <m:t>′</m:t>
-                              </m:r>
+                              <m:sSup>
+                                <m:e>
+                                  <m:r>
+                                    <m:t>X</m:t>
+                                  </m:r>
+                                </m:e>
+                                <m:sup>
+                                  <m:r>
+                                    <m:rPr>
+                                      <m:sty m:val="p"/>
+                                    </m:rPr>
+                                    <m:t>⊤</m:t>
+                                  </m:r>
+                                </m:sup>
+                              </m:sSup>
                               <m:r>
                                 <m:t>X</m:t>
                               </m:r>
@@ -3490,10 +4502,19 @@
                 </a:pPr>
                 <a:r>
                   <a:rPr/>
-                  <a:t>which requires </a:t>
+                  <a:t>with </a:t>
                 </a:r>
                 <a14:m>
                   <m:oMath xmlns:m="http://schemas.openxmlformats.org/officeDocument/2006/math">
+                    <m:r>
+                      <m:t>Ω</m:t>
+                    </m:r>
+                    <m:r>
+                      <m:rPr>
+                        <m:sty m:val="p"/>
+                      </m:rPr>
+                      <m:t>=</m:t>
+                    </m:r>
                     <m:r>
                       <m:rPr>
                         <m:sty m:val="p"/>
@@ -3522,203 +4543,17 @@
                         </m:r>
                       </m:e>
                     </m:d>
-                    <m:r>
-                      <m:rPr>
-                        <m:sty m:val="p"/>
-                      </m:rPr>
-                      <m:t>=</m:t>
-                    </m:r>
-                    <m:sSup>
-                      <m:e>
-                        <m:r>
-                          <m:t>σ</m:t>
-                        </m:r>
-                      </m:e>
-                      <m:sup>
-                        <m:r>
-                          <m:t>2</m:t>
-                        </m:r>
-                      </m:sup>
-                    </m:sSup>
-                    <m:r>
-                      <m:t>I</m:t>
-                    </m:r>
                   </m:oMath>
                 </a14:m>
                 <a:r>
                   <a:rPr/>
-                  <a:t> — constant variance, zero correlation.</a:t>
+                  <a:t>.</a:t>
                 </a:r>
               </a:p>
               <a:p>
                 <a:pPr lvl="0" indent="0" marL="0">
                   <a:buNone/>
                 </a:pPr>
-                <a:r>
-                  <a:rPr/>
-                  <a:t>The general (sandwich) form makes no such promise:</a:t>
-                </a:r>
-              </a:p>
-              <a:p>
-                <a:pPr lvl="0" indent="0" marL="0">
-                  <a:buNone/>
-                </a:pPr>
-                <a14:m>
-                  <m:oMathPara xmlns:m="http://schemas.openxmlformats.org/officeDocument/2006/math">
-                    <m:oMathParaPr>
-                      <m:jc m:val="center"/>
-                    </m:oMathParaPr>
-                    <m:oMath>
-                      <m:r>
-                        <m:rPr>
-                          <m:sty m:val="p"/>
-                        </m:rPr>
-                        <m:t>Var</m:t>
-                      </m:r>
-                      <m:d>
-                        <m:dPr>
-                          <m:begChr m:val="("/>
-                          <m:sepChr m:val=""/>
-                          <m:endChr m:val=")"/>
-                          <m:grow/>
-                        </m:dPr>
-                        <m:e>
-                          <m:acc>
-                            <m:accPr>
-                              <m:chr m:val="̂"/>
-                            </m:accPr>
-                            <m:e>
-                              <m:r>
-                                <m:t>β</m:t>
-                              </m:r>
-                            </m:e>
-                          </m:acc>
-                        </m:e>
-                      </m:d>
-                      <m:r>
-                        <m:rPr>
-                          <m:sty m:val="p"/>
-                        </m:rPr>
-                        <m:t>=</m:t>
-                      </m:r>
-                      <m:sSup>
-                        <m:e>
-                          <m:d>
-                            <m:dPr>
-                              <m:begChr m:val="("/>
-                              <m:sepChr m:val=""/>
-                              <m:endChr m:val=")"/>
-                              <m:grow/>
-                            </m:dPr>
-                            <m:e>
-                              <m:r>
-                                <m:t>X</m:t>
-                              </m:r>
-                              <m:r>
-                                <m:rPr>
-                                  <m:sty m:val="p"/>
-                                </m:rPr>
-                                <m:t>′</m:t>
-                              </m:r>
-                              <m:r>
-                                <m:t>X</m:t>
-                              </m:r>
-                            </m:e>
-                          </m:d>
-                        </m:e>
-                        <m:sup>
-                          <m:r>
-                            <m:rPr>
-                              <m:sty m:val="p"/>
-                            </m:rPr>
-                            <m:t>−</m:t>
-                          </m:r>
-                          <m:r>
-                            <m:t>1</m:t>
-                          </m:r>
-                        </m:sup>
-                      </m:sSup>
-                      <m:r>
-                        <m:t> </m:t>
-                      </m:r>
-                      <m:r>
-                        <m:t>X</m:t>
-                      </m:r>
-                      <m:r>
-                        <m:rPr>
-                          <m:sty m:val="p"/>
-                        </m:rPr>
-                        <m:t>′</m:t>
-                      </m:r>
-                      <m:r>
-                        <m:t>Ω</m:t>
-                      </m:r>
-                      <m:r>
-                        <m:t>X</m:t>
-                      </m:r>
-                      <m:r>
-                        <m:t> </m:t>
-                      </m:r>
-                      <m:sSup>
-                        <m:e>
-                          <m:d>
-                            <m:dPr>
-                              <m:begChr m:val="("/>
-                              <m:sepChr m:val=""/>
-                              <m:endChr m:val=")"/>
-                              <m:grow/>
-                            </m:dPr>
-                            <m:e>
-                              <m:r>
-                                <m:t>X</m:t>
-                              </m:r>
-                              <m:r>
-                                <m:rPr>
-                                  <m:sty m:val="p"/>
-                                </m:rPr>
-                                <m:t>′</m:t>
-                              </m:r>
-                              <m:r>
-                                <m:t>X</m:t>
-                              </m:r>
-                            </m:e>
-                          </m:d>
-                        </m:e>
-                        <m:sup>
-                          <m:r>
-                            <m:rPr>
-                              <m:sty m:val="p"/>
-                            </m:rPr>
-                            <m:t>−</m:t>
-                          </m:r>
-                          <m:r>
-                            <m:t>1</m:t>
-                          </m:r>
-                        </m:sup>
-                      </m:sSup>
-                    </m:oMath>
-                  </m:oMathPara>
-                </a14:m>
-              </a:p>
-              <a:p>
-                <a:pPr lvl="0" indent="0" marL="0">
-                  <a:buNone/>
-                </a:pPr>
-                <a:r>
-                  <a:rPr/>
-                  <a:t>Everything below is a different guess at </a:t>
-                </a:r>
-                <a14:m>
-                  <m:oMath xmlns:m="http://schemas.openxmlformats.org/officeDocument/2006/math">
-                    <m:r>
-                      <m:t>Ω</m:t>
-                    </m:r>
-                  </m:oMath>
-                </a14:m>
-                <a:r>
-                  <a:rPr/>
-                  <a:t>. The estimate </a:t>
-                </a:r>
                 <a14:m>
                   <m:oMath xmlns:m="http://schemas.openxmlformats.org/officeDocument/2006/math">
                     <m:acc>
@@ -3735,7 +4570,7 @@
                 </a14:m>
                 <a:r>
                   <a:rPr/>
-                  <a:t> never changes — only your claimed precision.</a:t>
+                  <a:t> never changes. Only your claimed precision does.</a:t>
                 </a:r>
               </a:p>
             </p:txBody>
@@ -3747,10 +4582,7 @@
 </p:sld>
 </file>
 
-<file path=ppt/slides/slide11.xml><?xml version="1.0" encoding="UTF-8"?><p:sld xmlns:a="http://schemas.openxmlformats.org/drawingml/2006/main" xmlns:r="http://schemas.openxmlformats.org/officeDocument/2006/relationships" xmlns:p="http://schemas.openxmlformats.org/presentationml/2006/main"><p:cSld><p:spTree><p:nvGrpSpPr><p:cNvPr id="1" name="" /><p:cNvGrpSpPr /><p:nvPr /></p:nvGrpSpPr><p:grpSpPr><a:xfrm><a:off x="0" y="0" /><a:ext cx="0" cy="0" /><a:chOff x="0" y="0" /><a:chExt cx="0" cy="0" /></a:xfrm></p:grpSpPr><mc:AlternateContent xmlns:mc="http://schemas.openxmlformats.org/markup-compatibility/2006"><mc:Choice xmlns:a14="http://schemas.microsoft.com/office/drawing/2010/main" Requires="a14"><p:sp><p:nvSpPr><p:cNvPr id="2" name="Title 1" /><p:cNvSpPr><a:spLocks noGrp="1" /></p:cNvSpPr><p:nvPr><p:ph type="title" /></p:nvPr></p:nvSpPr><p:spPr /><p:txBody><a:bodyPr /><a:lstStyle /><a:p><a:pPr lvl="0" indent="0" marL="0"><a:buNone /></a:pPr><a:r><a:rPr /><a:t>Three estimators of </a:t></a:r><a14:m><m:oMath xmlns:m="http://schemas.openxmlformats.org/officeDocument/2006/math"><m:r><m:t>Ω</m:t></m:r></m:oMath></a14:m></a:p></p:txBody></p:sp></mc:Choice></mc:AlternateContent><p:graphicFrame><p:nvGraphicFramePr><p:cNvPr id="6" name="Content Placeholder 5" /><p:cNvGraphicFramePr><a:graphicFrameLocks noGrp="1" /></p:cNvGraphicFramePr><p:nvPr><p:ph idx="1" /></p:nvPr></p:nvGraphicFramePr><p:xfrm><a:off x="457200" y="1193800" /><a:ext cx="8229600" cy="3390900" /></p:xfrm><a:graphic><a:graphicData uri="http://schemas.openxmlformats.org/drawingml/2006/table"><a:tbl><a:tblPr firstRow="1" bandRow="1"><a:tableStyleId>{5C22544A-7EE6-4342-B048-85BDC9FD1C3A}</a:tableStyleId></a:tblPr><a:tblGrid><a:gridCol w="2743200" /><a:gridCol w="2743200" /><a:gridCol w="2743200" /></a:tblGrid><a:tr h="0"><a:tc><a:txBody><a:bodyPr /><a:lstStyle /><a:p><a:pPr lvl="0" indent="0" marL="0"><a:buNone /></a:pPr><a:r><a:rPr /><a:t>Assumption</a:t></a:r></a:p></a:txBody><a:tcPr /></a:tc><a:tc><a:txBody><a:bodyPr /><a:lstStyle /><a:p><a:pPr lvl="0" indent="0" marL="0"><a:buNone /></a:pPr><a14:m><m:oMath xmlns:m="http://schemas.openxmlformats.org/officeDocument/2006/math"><m:r><m:t>Ω</m:t></m:r></m:oMath></a14:m></a:p></a:txBody><a:tcPr /></a:tc><a:tc><a:txBody><a:bodyPr /><a:lstStyle /><a:p><a:pPr lvl="0" indent="0" marL="0"><a:buNone /></a:pPr><a:r><a:rPr /><a:t>Use when</a:t></a:r></a:p></a:txBody><a:tcPr /></a:tc></a:tr><a:tr h="0"><a:tc><a:txBody><a:bodyPr /><a:lstStyle /><a:p><a:pPr lvl="0" indent="0" marL="0"><a:buNone /></a:pPr><a:r><a:rPr /><a:t>Classical</a:t></a:r></a:p></a:txBody></a:tc><a:tc><a:txBody><a:bodyPr /><a:lstStyle /><a:p><a:pPr lvl="0" indent="0" marL="0"><a:buNone /></a:pPr><a14:m><m:oMath xmlns:m="http://schemas.openxmlformats.org/officeDocument/2006/math"><m:sSup><m:e><m:r><m:t>σ</m:t></m:r></m:e><m:sup><m:r><m:t>2</m:t></m:r></m:sup></m:sSup><m:r><m:t>I</m:t></m:r></m:oMath></a14:m></a:p></a:txBody></a:tc><a:tc><a:txBody><a:bodyPr /><a:lstStyle /><a:p><a:pPr lvl="0" indent="0" marL="0"><a:buNone /></a:pPr><a:r><a:rPr /><a:t>Essentially never with real panels</a:t></a:r></a:p></a:txBody></a:tc></a:tr><a:tr h="0"><a:tc><a:txBody><a:bodyPr /><a:lstStyle /><a:p><a:pPr lvl="0" indent="0" marL="0"><a:buNone /></a:pPr><a:r><a:rPr b="1" /><a:t>HC (robust)</a:t></a:r></a:p></a:txBody></a:tc><a:tc><a:txBody><a:bodyPr /><a:lstStyle /><a:p><a:pPr lvl="0" indent="0" marL="0"><a:buNone /></a:pPr><a14:m><m:oMath xmlns:m="http://schemas.openxmlformats.org/officeDocument/2006/math"><m:r><m:rPr><m:sty m:val="p" /></m:rPr><m:t>diag</m:t></m:r><m:d><m:dPr><m:begChr m:val="(" /><m:sepChr m:val="" /><m:endChr m:val=")" /><m:grow /></m:dPr><m:e><m:sSubSup><m:e><m:r><m:t>e</m:t></m:r></m:e><m:sub><m:r><m:t>i</m:t></m:r></m:sub><m:sup><m:r><m:t>2</m:t></m:r></m:sup></m:sSubSup></m:e></m:d></m:oMath></a14:m></a:p></a:txBody></a:tc><a:tc><a:txBody><a:bodyPr /><a:lstStyle /><a:p><a:pPr lvl="0" indent="0" marL="0"><a:buNone /></a:pPr><a:r><a:rPr /><a:t>Variance differs across units</a:t></a:r></a:p></a:txBody></a:tc></a:tr><a:tr h="0"><a:tc><a:txBody><a:bodyPr /><a:lstStyle /><a:p><a:pPr lvl="0" indent="0" marL="0"><a:buNone /></a:pPr><a:r><a:rPr b="1" /><a:t>Clustered</a:t></a:r></a:p></a:txBody></a:tc><a:tc><a:txBody><a:bodyPr /><a:lstStyle /><a:p><a:pPr lvl="0" indent="0" marL="0"><a:buNone /></a:pPr><a:r><a:rPr /><a:t>Block-diagonal by group</a:t></a:r></a:p></a:txBody></a:tc><a:tc><a:txBody><a:bodyPr /><a:lstStyle /><a:p><a:pPr lvl="0" indent="0" marL="0"><a:buNone /></a:pPr><a:r><a:rPr /><a:t>Observations correlated within a unit</a:t></a:r></a:p></a:txBody></a:tc></a:tr></a:tbl></a:graphicData></a:graphic></p:graphicFrame></p:spTree></p:cSld></p:sld>
-</file>
-
-<file path=ppt/slides/slide12.xml><?xml version="1.0" encoding="utf-8"?>
+<file path=ppt/slides/slide17.xml><?xml version="1.0" encoding="utf-8"?>
 <p:sld xmlns:a="http://schemas.openxmlformats.org/drawingml/2006/main" xmlns:r="http://schemas.openxmlformats.org/officeDocument/2006/relationships" xmlns:p="http://schemas.openxmlformats.org/presentationml/2006/main">
   <p:cSld>
     <p:spTree>
@@ -3767,205 +4599,6 @@
           <a:chExt cx="0" cy="0"/>
         </a:xfrm>
       </p:grpSpPr>
-      <mc:AlternateContent xmlns:mc="http://schemas.openxmlformats.org/markup-compatibility/2006">
-        <mc:Choice xmlns:a14="http://schemas.microsoft.com/office/drawing/2010/main" Requires="a14">
-          <p:sp>
-            <p:nvSpPr>
-              <p:cNvPr id="3" name="Content Placeholder 2"/>
-              <p:cNvSpPr>
-                <a:spLocks noGrp="1"/>
-              </p:cNvSpPr>
-              <p:nvPr>
-                <p:ph idx="1"/>
-              </p:nvPr>
-            </p:nvSpPr>
-            <p:spPr/>
-            <p:txBody>
-              <a:bodyPr/>
-              <a:lstStyle/>
-              <a:p>
-                <a:pPr lvl="0" indent="0" marL="0">
-                  <a:buNone/>
-                </a:pPr>
-                <a14:m>
-                  <m:oMathPara xmlns:m="http://schemas.openxmlformats.org/officeDocument/2006/math">
-                    <m:oMathParaPr>
-                      <m:jc m:val="center"/>
-                    </m:oMathParaPr>
-                    <m:oMath>
-                      <m:sSub>
-                        <m:e>
-                          <m:acc>
-                            <m:accPr>
-                              <m:chr m:val="̂"/>
-                            </m:accPr>
-                            <m:e>
-                              <m:r>
-                                <m:t>Ω</m:t>
-                              </m:r>
-                            </m:e>
-                          </m:acc>
-                        </m:e>
-                        <m:sub>
-                          <m:r>
-                            <m:rPr>
-                              <m:nor/>
-                              <m:sty m:val="p"/>
-                            </m:rPr>
-                            <m:t>cluster</m:t>
-                          </m:r>
-                        </m:sub>
-                      </m:sSub>
-                      <m:r>
-                        <m:rPr>
-                          <m:sty m:val="p"/>
-                        </m:rPr>
-                        <m:t>=</m:t>
-                      </m:r>
-                      <m:nary>
-                        <m:naryPr>
-                          <m:chr m:val="∑"/>
-                          <m:limLoc m:val="undOvr"/>
-                          <m:subHide m:val="off"/>
-                          <m:supHide m:val="off"/>
-                        </m:naryPr>
-                        <m:sub>
-                          <m:r>
-                            <m:t>g</m:t>
-                          </m:r>
-                          <m:r>
-                            <m:rPr>
-                              <m:sty m:val="p"/>
-                            </m:rPr>
-                            <m:t>=</m:t>
-                          </m:r>
-                          <m:r>
-                            <m:t>1</m:t>
-                          </m:r>
-                        </m:sub>
-                        <m:sup>
-                          <m:r>
-                            <m:t>G</m:t>
-                          </m:r>
-                        </m:sup>
-                        <m:e>
-                          <m:sSub>
-                            <m:e>
-                              <m:r>
-                                <m:t>X</m:t>
-                              </m:r>
-                            </m:e>
-                            <m:sub>
-                              <m:r>
-                                <m:t>g</m:t>
-                              </m:r>
-                            </m:sub>
-                          </m:sSub>
-                        </m:e>
-                      </m:nary>
-                      <m:r>
-                        <m:rPr>
-                          <m:sty m:val="p"/>
-                        </m:rPr>
-                        <m:t>′</m:t>
-                      </m:r>
-                      <m:sSub>
-                        <m:e>
-                          <m:r>
-                            <m:t>e</m:t>
-                          </m:r>
-                        </m:e>
-                        <m:sub>
-                          <m:r>
-                            <m:t>g</m:t>
-                          </m:r>
-                        </m:sub>
-                      </m:sSub>
-                      <m:sSub>
-                        <m:e>
-                          <m:r>
-                            <m:t>e</m:t>
-                          </m:r>
-                        </m:e>
-                        <m:sub>
-                          <m:r>
-                            <m:t>g</m:t>
-                          </m:r>
-                        </m:sub>
-                      </m:sSub>
-                      <m:r>
-                        <m:rPr>
-                          <m:sty m:val="p"/>
-                        </m:rPr>
-                        <m:t>′</m:t>
-                      </m:r>
-                      <m:sSub>
-                        <m:e>
-                          <m:r>
-                            <m:t>X</m:t>
-                          </m:r>
-                        </m:e>
-                        <m:sub>
-                          <m:r>
-                            <m:t>g</m:t>
-                          </m:r>
-                        </m:sub>
-                      </m:sSub>
-                    </m:oMath>
-                  </m:oMathPara>
-                </a14:m>
-              </a:p>
-              <a:p>
-                <a:pPr lvl="0" indent="0" marL="0">
-                  <a:buNone/>
-                </a:pPr>
-                <a:r>
-                  <a:rPr/>
-                  <a:t>Clustering by country lets errors correlate freely </a:t>
-                </a:r>
-                <a:r>
-                  <a:rPr b="1"/>
-                  <a:t>within</a:t>
-                </a:r>
-                <a:r>
-                  <a:rPr/>
-                  <a:t> a country and assumes independence </a:t>
-                </a:r>
-                <a:r>
-                  <a:rPr b="1"/>
-                  <a:t>across</a:t>
-                </a:r>
-                <a:r>
-                  <a:rPr/>
-                  <a:t> countries.</a:t>
-                </a:r>
-              </a:p>
-            </p:txBody>
-          </p:sp>
-        </mc:Choice>
-      </mc:AlternateContent>
-    </p:spTree>
-  </p:cSld>
-</p:sld>
-</file>
-
-<file path=ppt/slides/slide13.xml><?xml version="1.0" encoding="utf-8"?>
-<p:sld xmlns:a="http://schemas.openxmlformats.org/drawingml/2006/main" xmlns:r="http://schemas.openxmlformats.org/officeDocument/2006/relationships" xmlns:p="http://schemas.openxmlformats.org/presentationml/2006/main">
-  <p:cSld>
-    <p:spTree>
-      <p:nvGrpSpPr>
-        <p:cNvPr id="1" name=""/>
-        <p:cNvGrpSpPr/>
-        <p:nvPr/>
-      </p:nvGrpSpPr>
-      <p:grpSpPr>
-        <a:xfrm>
-          <a:off x="0" y="0"/>
-          <a:ext cx="0" cy="0"/>
-          <a:chOff x="0" y="0"/>
-          <a:chExt cx="0" cy="0"/>
-        </a:xfrm>
-      </p:grpSpPr>
       <p:sp>
         <p:nvSpPr>
           <p:cNvPr id="2" name="Title 1"/>
@@ -3986,7 +4619,7 @@
             </a:pPr>
             <a:r>
               <a:rPr/>
-              <a:t>The omitted-variable formula</a:t>
+              <a:t>Heteroskedasticity-robust — White / HC1</a:t>
             </a:r>
           </a:p>
         </p:txBody>
@@ -4013,7 +4646,587 @@
                 </a:pPr>
                 <a:r>
                   <a:rPr/>
-                  <a:t>If the true model is </a:t>
+                  <a:t>Estimate </a:t>
+                </a:r>
+                <a14:m>
+                  <m:oMath xmlns:m="http://schemas.openxmlformats.org/officeDocument/2006/math">
+                    <m:r>
+                      <m:t>Ω</m:t>
+                    </m:r>
+                  </m:oMath>
+                </a14:m>
+                <a:r>
+                  <a:rPr/>
+                  <a:t> by</a:t>
+                </a:r>
+              </a:p>
+              <a:p>
+                <a:pPr lvl="0" indent="0" marL="0">
+                  <a:buNone/>
+                </a:pPr>
+                <a14:m>
+                  <m:oMathPara xmlns:m="http://schemas.openxmlformats.org/officeDocument/2006/math">
+                    <m:oMathParaPr>
+                      <m:jc m:val="center"/>
+                    </m:oMathParaPr>
+                    <m:oMath>
+                      <m:r>
+                        <m:rPr>
+                          <m:sty m:val="p"/>
+                        </m:rPr>
+                        <m:t>diag</m:t>
+                      </m:r>
+                      <m:d>
+                        <m:dPr>
+                          <m:begChr m:val="("/>
+                          <m:sepChr m:val=""/>
+                          <m:endChr m:val=")"/>
+                          <m:grow/>
+                        </m:dPr>
+                        <m:e>
+                          <m:sSubSup>
+                            <m:e>
+                              <m:acc>
+                                <m:accPr>
+                                  <m:chr m:val="̂"/>
+                                </m:accPr>
+                                <m:e>
+                                  <m:r>
+                                    <m:t>ε</m:t>
+                                  </m:r>
+                                </m:e>
+                              </m:acc>
+                            </m:e>
+                            <m:sub>
+                              <m:r>
+                                <m:t>i</m:t>
+                              </m:r>
+                            </m:sub>
+                            <m:sup>
+                              <m:r>
+                                <m:t>2</m:t>
+                              </m:r>
+                            </m:sup>
+                          </m:sSubSup>
+                        </m:e>
+                      </m:d>
+                    </m:oMath>
+                  </m:oMathPara>
+                </a14:m>
+              </a:p>
+              <a:p>
+                <a:pPr lvl="0" indent="0" marL="0">
+                  <a:buNone/>
+                </a:pPr>
+                <a:r>
+                  <a:rPr/>
+                  <a:t>with a small-sample correction </a:t>
+                </a:r>
+                <a14:m>
+                  <m:oMath xmlns:m="http://schemas.openxmlformats.org/officeDocument/2006/math">
+                    <m:r>
+                      <m:t>n</m:t>
+                    </m:r>
+                    <m:r>
+                      <m:rPr>
+                        <m:sty m:val="p"/>
+                      </m:rPr>
+                      <m:t>/</m:t>
+                    </m:r>
+                    <m:d>
+                      <m:dPr>
+                        <m:begChr m:val="("/>
+                        <m:sepChr m:val=""/>
+                        <m:endChr m:val=")"/>
+                        <m:grow/>
+                      </m:dPr>
+                      <m:e>
+                        <m:r>
+                          <m:t>n</m:t>
+                        </m:r>
+                        <m:r>
+                          <m:rPr>
+                            <m:sty m:val="p"/>
+                          </m:rPr>
+                          <m:t>−</m:t>
+                        </m:r>
+                        <m:r>
+                          <m:t>p</m:t>
+                        </m:r>
+                      </m:e>
+                    </m:d>
+                  </m:oMath>
+                </a14:m>
+                <a:r>
+                  <a:rPr/>
+                  <a:t>.</a:t>
+                </a:r>
+              </a:p>
+            </p:txBody>
+          </p:sp>
+        </mc:Choice>
+      </mc:AlternateContent>
+    </p:spTree>
+  </p:cSld>
+</p:sld>
+</file>
+
+<file path=ppt/slides/slide18.xml><?xml version="1.0" encoding="utf-8"?>
+<p:sld xmlns:a="http://schemas.openxmlformats.org/drawingml/2006/main" xmlns:r="http://schemas.openxmlformats.org/officeDocument/2006/relationships" xmlns:p="http://schemas.openxmlformats.org/presentationml/2006/main">
+  <p:cSld>
+    <p:spTree>
+      <p:nvGrpSpPr>
+        <p:cNvPr id="1" name=""/>
+        <p:cNvGrpSpPr/>
+        <p:nvPr/>
+      </p:nvGrpSpPr>
+      <p:grpSpPr>
+        <a:xfrm>
+          <a:off x="0" y="0"/>
+          <a:ext cx="0" cy="0"/>
+          <a:chOff x="0" y="0"/>
+          <a:chExt cx="0" cy="0"/>
+        </a:xfrm>
+      </p:grpSpPr>
+      <p:sp>
+        <p:nvSpPr>
+          <p:cNvPr id="2" name="Title 1"/>
+          <p:cNvSpPr>
+            <a:spLocks noGrp="1"/>
+          </p:cNvSpPr>
+          <p:nvPr>
+            <p:ph type="title"/>
+          </p:nvPr>
+        </p:nvSpPr>
+        <p:spPr/>
+        <p:txBody>
+          <a:bodyPr/>
+          <a:lstStyle/>
+          <a:p>
+            <a:pPr lvl="0" indent="0" marL="0">
+              <a:buNone/>
+            </a:pPr>
+            <a:r>
+              <a:rPr/>
+              <a:t>Cluster-robust</a:t>
+            </a:r>
+          </a:p>
+        </p:txBody>
+      </p:sp>
+      <mc:AlternateContent xmlns:mc="http://schemas.openxmlformats.org/markup-compatibility/2006">
+        <mc:Choice xmlns:a14="http://schemas.microsoft.com/office/drawing/2010/main" Requires="a14">
+          <p:sp>
+            <p:nvSpPr>
+              <p:cNvPr id="3" name="Content Placeholder 2"/>
+              <p:cNvSpPr>
+                <a:spLocks noGrp="1"/>
+              </p:cNvSpPr>
+              <p:nvPr>
+                <p:ph idx="1"/>
+              </p:nvPr>
+            </p:nvSpPr>
+            <p:spPr/>
+            <p:txBody>
+              <a:bodyPr/>
+              <a:lstStyle/>
+              <a:p>
+                <a:pPr lvl="0" indent="0" marL="0">
+                  <a:buNone/>
+                </a:pPr>
+                <a:r>
+                  <a:rPr/>
+                  <a:t>If errors are correlated within groups </a:t>
+                </a:r>
+                <a14:m>
+                  <m:oMath xmlns:m="http://schemas.openxmlformats.org/officeDocument/2006/math">
+                    <m:r>
+                      <m:t>g</m:t>
+                    </m:r>
+                  </m:oMath>
+                </a14:m>
+                <a:r>
+                  <a:rPr/>
+                  <a:t> — firms, regions, countries:</a:t>
+                </a:r>
+              </a:p>
+              <a:p>
+                <a:pPr lvl="0" indent="0" marL="0">
+                  <a:buNone/>
+                </a:pPr>
+                <a14:m>
+                  <m:oMathPara xmlns:m="http://schemas.openxmlformats.org/officeDocument/2006/math">
+                    <m:oMathParaPr>
+                      <m:jc m:val="center"/>
+                    </m:oMathParaPr>
+                    <m:oMath>
+                      <m:acc>
+                        <m:accPr>
+                          <m:chr m:val="̂"/>
+                        </m:accPr>
+                        <m:e>
+                          <m:r>
+                            <m:t>Ω</m:t>
+                          </m:r>
+                        </m:e>
+                      </m:acc>
+                      <m:r>
+                        <m:rPr>
+                          <m:sty m:val="p"/>
+                        </m:rPr>
+                        <m:t>=</m:t>
+                      </m:r>
+                      <m:nary>
+                        <m:naryPr>
+                          <m:chr m:val="∑"/>
+                          <m:limLoc m:val="undOvr"/>
+                          <m:subHide m:val="off"/>
+                          <m:supHide m:val="on"/>
+                        </m:naryPr>
+                        <m:sub>
+                          <m:r>
+                            <m:t>g</m:t>
+                          </m:r>
+                        </m:sub>
+                        <m:sup>
+                          <m:r>
+                            <m:t>​</m:t>
+                          </m:r>
+                        </m:sup>
+                        <m:e>
+                          <m:sSub>
+                            <m:e>
+                              <m:acc>
+                                <m:accPr>
+                                  <m:chr m:val="̂"/>
+                                </m:accPr>
+                                <m:e>
+                                  <m:r>
+                                    <m:t>ε</m:t>
+                                  </m:r>
+                                </m:e>
+                              </m:acc>
+                            </m:e>
+                            <m:sub>
+                              <m:r>
+                                <m:t>g</m:t>
+                              </m:r>
+                            </m:sub>
+                          </m:sSub>
+                        </m:e>
+                      </m:nary>
+                      <m:sSubSup>
+                        <m:e>
+                          <m:acc>
+                            <m:accPr>
+                              <m:chr m:val="̂"/>
+                            </m:accPr>
+                            <m:e>
+                              <m:r>
+                                <m:t>ε</m:t>
+                              </m:r>
+                            </m:e>
+                          </m:acc>
+                        </m:e>
+                        <m:sub>
+                          <m:r>
+                            <m:t>g</m:t>
+                          </m:r>
+                        </m:sub>
+                        <m:sup>
+                          <m:r>
+                            <m:rPr>
+                              <m:sty m:val="p"/>
+                            </m:rPr>
+                            <m:t>⊤</m:t>
+                          </m:r>
+                        </m:sup>
+                      </m:sSubSup>
+                    </m:oMath>
+                  </m:oMathPara>
+                </a14:m>
+              </a:p>
+              <a:p>
+                <a:pPr lvl="0" indent="0" marL="0">
+                  <a:buNone/>
+                </a:pPr>
+                <a:r>
+                  <a:rPr/>
+                  <a:t>Requires </a:t>
+                </a:r>
+                <a:r>
+                  <a:rPr b="1"/>
+                  <a:t>many</a:t>
+                </a:r>
+                <a:r>
+                  <a:rPr/>
+                  <a:t> clusters. With fewer than roughly </a:t>
+                </a:r>
+                <a:r>
+                  <a:rPr b="1"/>
+                  <a:t>40</a:t>
+                </a:r>
+                <a:r>
+                  <a:rPr/>
+                  <a:t>, inference is unreliable — and a 30-country panel sits below that line.</a:t>
+                </a:r>
+              </a:p>
+            </p:txBody>
+          </p:sp>
+        </mc:Choice>
+      </mc:AlternateContent>
+    </p:spTree>
+  </p:cSld>
+</p:sld>
+</file>
+
+<file path=ppt/slides/slide19.xml><?xml version="1.0" encoding="utf-8"?>
+<p:sld xmlns:a="http://schemas.openxmlformats.org/drawingml/2006/main" xmlns:r="http://schemas.openxmlformats.org/officeDocument/2006/relationships" xmlns:p="http://schemas.openxmlformats.org/presentationml/2006/main">
+  <p:cSld>
+    <p:spTree>
+      <p:nvGrpSpPr>
+        <p:cNvPr id="1" name=""/>
+        <p:cNvGrpSpPr/>
+        <p:nvPr/>
+      </p:nvGrpSpPr>
+      <p:grpSpPr>
+        <a:xfrm>
+          <a:off x="0" y="0"/>
+          <a:ext cx="0" cy="0"/>
+          <a:chOff x="0" y="0"/>
+          <a:chExt cx="0" cy="0"/>
+        </a:xfrm>
+      </p:grpSpPr>
+      <p:sp>
+        <p:nvSpPr>
+          <p:cNvPr id="2" name="Title 1"/>
+          <p:cNvSpPr>
+            <a:spLocks noGrp="1"/>
+          </p:cNvSpPr>
+          <p:nvPr>
+            <p:ph type="title"/>
+          </p:nvPr>
+        </p:nvSpPr>
+        <p:spPr/>
+        <p:txBody>
+          <a:bodyPr/>
+          <a:lstStyle/>
+          <a:p>
+            <a:pPr lvl="0" indent="0" marL="0">
+              <a:buNone/>
+            </a:pPr>
+            <a:r>
+              <a:rPr/>
+              <a:t>The practical rule</a:t>
+            </a:r>
+          </a:p>
+        </p:txBody>
+      </p:sp>
+      <p:sp>
+        <p:nvSpPr>
+          <p:cNvPr id="3" name="Content Placeholder 2"/>
+          <p:cNvSpPr>
+            <a:spLocks noGrp="1"/>
+          </p:cNvSpPr>
+          <p:nvPr>
+            <p:ph idx="1"/>
+          </p:nvPr>
+        </p:nvSpPr>
+        <p:spPr/>
+        <p:txBody>
+          <a:bodyPr/>
+          <a:lstStyle/>
+          <a:p>
+            <a:pPr lvl="0" indent="0" marL="1270000">
+              <a:buNone/>
+            </a:pPr>
+            <a:r>
+              <a:rPr sz="2000" b="1"/>
+              <a:t>Cluster at the level at which treatment is assigned.</a:t>
+            </a:r>
+          </a:p>
+          <a:p>
+            <a:pPr lvl="0" indent="0" marL="0">
+              <a:buNone/>
+            </a:pPr>
+            <a:r>
+              <a:rPr/>
+              <a:t>Not at the level that gives the smallest standard error. State the level in your table note: two papers can both write “robust standard errors” and mean different things.</a:t>
+            </a:r>
+          </a:p>
+        </p:txBody>
+      </p:sp>
+    </p:spTree>
+  </p:cSld>
+</p:sld>
+</file>
+
+<file path=ppt/slides/slide2.xml><?xml version="1.0" encoding="utf-8"?>
+<p:sld xmlns:a="http://schemas.openxmlformats.org/drawingml/2006/main" xmlns:r="http://schemas.openxmlformats.org/officeDocument/2006/relationships" xmlns:p="http://schemas.openxmlformats.org/presentationml/2006/main">
+  <p:cSld>
+    <p:spTree>
+      <p:nvGrpSpPr>
+        <p:cNvPr id="1" name=""/>
+        <p:cNvGrpSpPr/>
+        <p:nvPr/>
+      </p:nvGrpSpPr>
+      <p:grpSpPr>
+        <a:xfrm>
+          <a:off x="0" y="0"/>
+          <a:ext cx="0" cy="0"/>
+          <a:chOff x="0" y="0"/>
+          <a:chExt cx="0" cy="0"/>
+        </a:xfrm>
+      </p:grpSpPr>
+      <p:sp>
+        <p:nvSpPr>
+          <p:cNvPr id="3" name="Content Placeholder 2"/>
+          <p:cNvSpPr>
+            <a:spLocks noGrp="1"/>
+          </p:cNvSpPr>
+          <p:nvPr>
+            <p:ph idx="1"/>
+          </p:nvPr>
+        </p:nvSpPr>
+        <p:spPr/>
+        <p:txBody>
+          <a:bodyPr/>
+          <a:lstStyle/>
+          <a:p>
+            <a:pPr lvl="0" indent="0" marL="0">
+              <a:spcBef>
+                <a:spcPts val="3000"/>
+              </a:spcBef>
+              <a:buNone/>
+            </a:pPr>
+            <a:r>
+              <a:rPr b="1"/>
+              <a:t>Your coefficient has a standard error. When does it mean anything?</a:t>
+            </a:r>
+          </a:p>
+        </p:txBody>
+      </p:sp>
+    </p:spTree>
+  </p:cSld>
+</p:sld>
+</file>
+
+<file path=ppt/slides/slide20.xml><?xml version="1.0" encoding="utf-8"?>
+<p:sld xmlns:a="http://schemas.openxmlformats.org/drawingml/2006/main" xmlns:r="http://schemas.openxmlformats.org/officeDocument/2006/relationships" xmlns:p="http://schemas.openxmlformats.org/presentationml/2006/main">
+  <p:cSld>
+    <p:spTree>
+      <p:nvGrpSpPr>
+        <p:cNvPr id="1" name=""/>
+        <p:cNvGrpSpPr/>
+        <p:nvPr/>
+      </p:nvGrpSpPr>
+      <p:grpSpPr>
+        <a:xfrm>
+          <a:off x="0" y="0"/>
+          <a:ext cx="0" cy="0"/>
+          <a:chOff x="0" y="0"/>
+          <a:chExt cx="0" cy="0"/>
+        </a:xfrm>
+      </p:grpSpPr>
+      <p:sp>
+        <p:nvSpPr>
+          <p:cNvPr id="2" name="Title 1"/>
+          <p:cNvSpPr>
+            <a:spLocks noGrp="1"/>
+          </p:cNvSpPr>
+          <p:nvPr>
+            <p:ph type="title"/>
+          </p:nvPr>
+        </p:nvSpPr>
+        <p:spPr>
+          <a:xfrm>
+            <a:off x="722313" y="3305176"/>
+            <a:ext cx="7772400" cy="1021556"/>
+          </a:xfrm>
+        </p:spPr>
+        <p:txBody>
+          <a:bodyPr/>
+          <a:lstStyle/>
+          <a:p>
+            <a:pPr lvl="0" indent="0" marL="0">
+              <a:buNone/>
+            </a:pPr>
+            <a:r>
+              <a:rPr/>
+              <a:t>3.4 Omitted variable bias</a:t>
+            </a:r>
+          </a:p>
+        </p:txBody>
+      </p:sp>
+    </p:spTree>
+  </p:cSld>
+</p:sld>
+</file>
+
+<file path=ppt/slides/slide21.xml><?xml version="1.0" encoding="utf-8"?>
+<p:sld xmlns:a="http://schemas.openxmlformats.org/drawingml/2006/main" xmlns:r="http://schemas.openxmlformats.org/officeDocument/2006/relationships" xmlns:p="http://schemas.openxmlformats.org/presentationml/2006/main">
+  <p:cSld>
+    <p:spTree>
+      <p:nvGrpSpPr>
+        <p:cNvPr id="1" name=""/>
+        <p:cNvGrpSpPr/>
+        <p:nvPr/>
+      </p:nvGrpSpPr>
+      <p:grpSpPr>
+        <a:xfrm>
+          <a:off x="0" y="0"/>
+          <a:ext cx="0" cy="0"/>
+          <a:chOff x="0" y="0"/>
+          <a:chExt cx="0" cy="0"/>
+        </a:xfrm>
+      </p:grpSpPr>
+      <p:sp>
+        <p:nvSpPr>
+          <p:cNvPr id="2" name="Title 1"/>
+          <p:cNvSpPr>
+            <a:spLocks noGrp="1"/>
+          </p:cNvSpPr>
+          <p:nvPr>
+            <p:ph type="title"/>
+          </p:nvPr>
+        </p:nvSpPr>
+        <p:spPr/>
+        <p:txBody>
+          <a:bodyPr/>
+          <a:lstStyle/>
+          <a:p>
+            <a:pPr lvl="0" indent="0" marL="0">
+              <a:buNone/>
+            </a:pPr>
+            <a:r>
+              <a:rPr/>
+              <a:t>The formula</a:t>
+            </a:r>
+          </a:p>
+        </p:txBody>
+      </p:sp>
+      <mc:AlternateContent xmlns:mc="http://schemas.openxmlformats.org/markup-compatibility/2006">
+        <mc:Choice xmlns:a14="http://schemas.microsoft.com/office/drawing/2010/main" Requires="a14">
+          <p:sp>
+            <p:nvSpPr>
+              <p:cNvPr id="3" name="Content Placeholder 2"/>
+              <p:cNvSpPr>
+                <a:spLocks noGrp="1"/>
+              </p:cNvSpPr>
+              <p:nvPr>
+                <p:ph idx="1"/>
+              </p:nvPr>
+            </p:nvSpPr>
+            <p:spPr/>
+            <p:txBody>
+              <a:bodyPr/>
+              <a:lstStyle/>
+              <a:p>
+                <a:pPr lvl="0" indent="0" marL="0">
+                  <a:buNone/>
+                </a:pPr>
+                <a:r>
+                  <a:rPr/>
+                  <a:t>True model </a:t>
                 </a:r>
                 <a14:m>
                   <m:oMath xmlns:m="http://schemas.openxmlformats.org/officeDocument/2006/math">
@@ -4087,13 +5300,44 @@
                       <m:t>+</m:t>
                     </m:r>
                     <m:r>
-                      <m:t>ε</m:t>
+                      <m:t>u</m:t>
                     </m:r>
                   </m:oMath>
                 </a14:m>
                 <a:r>
                   <a:rPr/>
-                  <a:t> and you omit </a:t>
+                  <a:t>, but you estimate on </a:t>
+                </a:r>
+                <a14:m>
+                  <m:oMath xmlns:m="http://schemas.openxmlformats.org/officeDocument/2006/math">
+                    <m:sSub>
+                      <m:e>
+                        <m:r>
+                          <m:t>X</m:t>
+                        </m:r>
+                      </m:e>
+                      <m:sub>
+                        <m:r>
+                          <m:t>1</m:t>
+                        </m:r>
+                      </m:sub>
+                    </m:sSub>
+                  </m:oMath>
+                </a14:m>
+                <a:r>
+                  <a:rPr/>
+                  <a:t> alone. Let </a:t>
+                </a:r>
+                <a14:m>
+                  <m:oMath xmlns:m="http://schemas.openxmlformats.org/officeDocument/2006/math">
+                    <m:r>
+                      <m:t>δ</m:t>
+                    </m:r>
+                  </m:oMath>
+                </a14:m>
+                <a:r>
+                  <a:rPr/>
+                  <a:t> be the coefficient matrix from regressing </a:t>
                 </a:r>
                 <a14:m>
                   <m:oMath xmlns:m="http://schemas.openxmlformats.org/officeDocument/2006/math">
@@ -4113,7 +5357,27 @@
                 </a14:m>
                 <a:r>
                   <a:rPr/>
-                  <a:t>:</a:t>
+                  <a:t> on </a:t>
+                </a:r>
+                <a14:m>
+                  <m:oMath xmlns:m="http://schemas.openxmlformats.org/officeDocument/2006/math">
+                    <m:sSub>
+                      <m:e>
+                        <m:r>
+                          <m:t>X</m:t>
+                        </m:r>
+                      </m:e>
+                      <m:sub>
+                        <m:r>
+                          <m:t>1</m:t>
+                        </m:r>
+                      </m:sub>
+                    </m:sSub>
+                  </m:oMath>
+                </a14:m>
+                <a:r>
+                  <a:rPr/>
+                  <a:t>. Then</a:t>
                 </a:r>
               </a:p>
               <a:p>
@@ -4129,28 +5393,39 @@
                       <m:r>
                         <m:rPr>
                           <m:sty m:val="p"/>
+                          <m:scr m:val="double-struck"/>
                         </m:rPr>
-                        <m:t>plim</m:t>
+                        <m:t>E</m:t>
                       </m:r>
-                      <m:sSub>
+                      <m:d>
+                        <m:dPr>
+                          <m:begChr m:val="["/>
+                          <m:sepChr m:val=""/>
+                          <m:endChr m:val="]"/>
+                          <m:grow/>
+                        </m:dPr>
                         <m:e>
-                          <m:acc>
-                            <m:accPr>
-                              <m:chr m:val="̂"/>
-                            </m:accPr>
+                          <m:sSub>
                             <m:e>
+                              <m:acc>
+                                <m:accPr>
+                                  <m:chr m:val="̂"/>
+                                </m:accPr>
+                                <m:e>
+                                  <m:r>
+                                    <m:t>β</m:t>
+                                  </m:r>
+                                </m:e>
+                              </m:acc>
+                            </m:e>
+                            <m:sub>
                               <m:r>
-                                <m:t>β</m:t>
+                                <m:t>1</m:t>
                               </m:r>
-                            </m:e>
-                          </m:acc>
+                            </m:sub>
+                          </m:sSub>
                         </m:e>
-                        <m:sub>
-                          <m:r>
-                            <m:t>1</m:t>
-                          </m:r>
-                        </m:sub>
-                      </m:sSub>
+                      </m:d>
                       <m:r>
                         <m:rPr>
                           <m:sty m:val="p"/>
@@ -4175,87 +5450,8 @@
                         </m:rPr>
                         <m:t>+</m:t>
                       </m:r>
-                      <m:limLow>
-                        <m:e>
-                          <m:limLow>
-                            <m:e>
-                              <m:r>
-                                <m:t>δ</m:t>
-                              </m:r>
-                            </m:e>
-                            <m:lim>
-                              <m:r>
-                                <m:rPr>
-                                  <m:sty m:val="p"/>
-                                </m:rPr>
-                                <m:t>⏟</m:t>
-                              </m:r>
-                            </m:lim>
-                          </m:limLow>
-                        </m:e>
-                        <m:lim>
-                          <m:m>
-                            <m:mPr>
-                              <m:baseJc m:val="center"/>
-                              <m:plcHide m:val="on"/>
-                              <m:mcs>
-                                <m:mc>
-                                  <m:mcPr>
-                                    <m:mcJc m:val="center"/>
-                                    <m:count m:val="1"/>
-                                  </m:mcPr>
-                                </m:mc>
-                              </m:mcs>
-                            </m:mPr>
-                            <m:mr>
-                              <m:e>
-                                <m:sSub>
-                                  <m:e>
-                                    <m:r>
-                                      <m:t>X</m:t>
-                                    </m:r>
-                                  </m:e>
-                                  <m:sub>
-                                    <m:r>
-                                      <m:t>2</m:t>
-                                    </m:r>
-                                  </m:sub>
-                                </m:sSub>
-                                <m:r>
-                                  <m:rPr>
-                                    <m:nor/>
-                                    <m:sty m:val="p"/>
-                                  </m:rPr>
-                                  <m:t> on </m:t>
-                                </m:r>
-                                <m:sSub>
-                                  <m:e>
-                                    <m:r>
-                                      <m:t>X</m:t>
-                                    </m:r>
-                                  </m:e>
-                                  <m:sub>
-                                    <m:r>
-                                      <m:t>1</m:t>
-                                    </m:r>
-                                  </m:sub>
-                                </m:sSub>
-                              </m:e>
-                            </m:mr>
-                          </m:m>
-                        </m:lim>
-                      </m:limLow>
                       <m:r>
-                        <m:t>​</m:t>
-                      </m:r>
-                      <m:r>
-                        <m:rPr>
-                          <m:sty m:val="p"/>
-                        </m:rPr>
-                        <m:t>⋅</m:t>
-                      </m:r>
-                      <m:r>
-                        <m:t> </m:t>
+                        <m:t>δ</m:t>
                       </m:r>
                       <m:sSub>
                         <m:e>
@@ -4273,2063 +5469,10 @@
                   </m:oMathPara>
                 </a14:m>
               </a:p>
-              <a:p>
-                <a:pPr lvl="0" indent="0" marL="0">
-                  <a:buNone/>
-                </a:pPr>
-                <a:r>
-                  <a:rPr/>
-                  <a:t>The bias has a </a:t>
-                </a:r>
-                <a:r>
-                  <a:rPr b="1"/>
-                  <a:t>sign you can reason about</a:t>
-                </a:r>
-                <a:r>
-                  <a:rPr/>
-                  <a:t> before you see any output:</a:t>
-                </a:r>
-              </a:p>
-              <a:p>
-                <a:pPr lvl="0"/>
-                <a14:m>
-                  <m:oMath xmlns:m="http://schemas.openxmlformats.org/officeDocument/2006/math">
-                    <m:r>
-                      <m:t>δ</m:t>
-                    </m:r>
-                    <m:r>
-                      <m:rPr>
-                        <m:sty m:val="p"/>
-                      </m:rPr>
-                      <m:t>&gt;</m:t>
-                    </m:r>
-                    <m:r>
-                      <m:t>0</m:t>
-                    </m:r>
-                  </m:oMath>
-                </a14:m>
-                <a:r>
-                  <a:rPr/>
-                  <a:t> and </a:t>
-                </a:r>
-                <a14:m>
-                  <m:oMath xmlns:m="http://schemas.openxmlformats.org/officeDocument/2006/math">
-                    <m:sSub>
-                      <m:e>
-                        <m:r>
-                          <m:t>β</m:t>
-                        </m:r>
-                      </m:e>
-                      <m:sub>
-                        <m:r>
-                          <m:t>2</m:t>
-                        </m:r>
-                      </m:sub>
-                    </m:sSub>
-                    <m:r>
-                      <m:rPr>
-                        <m:sty m:val="p"/>
-                      </m:rPr>
-                      <m:t>&gt;</m:t>
-                    </m:r>
-                    <m:r>
-                      <m:t>0</m:t>
-                    </m:r>
-                  </m:oMath>
-                </a14:m>
-                <a:r>
-                  <a:rPr/>
-                  <a:t> → upward bias</a:t>
-                </a:r>
-              </a:p>
-              <a:p>
-                <a:pPr lvl="0"/>
-                <a:r>
-                  <a:rPr/>
-                  <a:t>signs opposite → downward bias</a:t>
-                </a:r>
-              </a:p>
-              <a:p>
-                <a:pPr lvl="0" indent="0" marL="0">
-                  <a:buNone/>
-                </a:pPr>
-                <a:r>
-                  <a:rPr/>
-                  <a:t>State the expected direction in writing </a:t>
-                </a:r>
-                <a:r>
-                  <a:rPr i="1"/>
-                  <a:t>before</a:t>
-                </a:r>
-                <a:r>
-                  <a:rPr/>
-                  <a:t> estimating. This is the single most useful discipline in applied work.</a:t>
-                </a:r>
-              </a:p>
             </p:txBody>
           </p:sp>
         </mc:Choice>
       </mc:AlternateContent>
-    </p:spTree>
-  </p:cSld>
-</p:sld>
-</file>
-
-<file path=ppt/slides/slide14.xml><?xml version="1.0" encoding="utf-8"?>
-<p:sld xmlns:a="http://schemas.openxmlformats.org/drawingml/2006/main" xmlns:r="http://schemas.openxmlformats.org/officeDocument/2006/relationships" xmlns:p="http://schemas.openxmlformats.org/presentationml/2006/main">
-  <p:cSld>
-    <p:spTree>
-      <p:nvGrpSpPr>
-        <p:cNvPr id="1" name=""/>
-        <p:cNvGrpSpPr/>
-        <p:nvPr/>
-      </p:nvGrpSpPr>
-      <p:grpSpPr>
-        <a:xfrm>
-          <a:off x="0" y="0"/>
-          <a:ext cx="0" cy="0"/>
-          <a:chOff x="0" y="0"/>
-          <a:chExt cx="0" cy="0"/>
-        </a:xfrm>
-      </p:grpSpPr>
-      <p:sp>
-        <p:nvSpPr>
-          <p:cNvPr id="2" name="Title 1"/>
-          <p:cNvSpPr>
-            <a:spLocks noGrp="1"/>
-          </p:cNvSpPr>
-          <p:nvPr>
-            <p:ph type="title"/>
-          </p:nvPr>
-        </p:nvSpPr>
-        <p:spPr>
-          <a:xfrm>
-            <a:off x="722313" y="3305176"/>
-            <a:ext cx="7772400" cy="1021556"/>
-          </a:xfrm>
-        </p:spPr>
-        <p:txBody>
-          <a:bodyPr/>
-          <a:lstStyle/>
-          <a:p>
-            <a:pPr lvl="0" indent="0" marL="0">
-              <a:buNone/>
-            </a:pPr>
-            <a:r>
-              <a:rPr/>
-              <a:t>The data</a:t>
-            </a:r>
-          </a:p>
-        </p:txBody>
-      </p:sp>
-    </p:spTree>
-  </p:cSld>
-</p:sld>
-</file>
-
-<file path=ppt/slides/slide15.xml><?xml version="1.0" encoding="utf-8"?>
-<p:sld xmlns:a="http://schemas.openxmlformats.org/drawingml/2006/main" xmlns:r="http://schemas.openxmlformats.org/officeDocument/2006/relationships" xmlns:p="http://schemas.openxmlformats.org/presentationml/2006/main">
-  <p:cSld>
-    <p:spTree>
-      <p:nvGrpSpPr>
-        <p:cNvPr id="1" name=""/>
-        <p:cNvGrpSpPr/>
-        <p:nvPr/>
-      </p:nvGrpSpPr>
-      <p:grpSpPr>
-        <a:xfrm>
-          <a:off x="0" y="0"/>
-          <a:ext cx="0" cy="0"/>
-          <a:chOff x="0" y="0"/>
-          <a:chExt cx="0" cy="0"/>
-        </a:xfrm>
-      </p:grpSpPr>
-      <p:sp>
-        <p:nvSpPr>
-          <p:cNvPr id="2" name="Title 1"/>
-          <p:cNvSpPr>
-            <a:spLocks noGrp="1"/>
-          </p:cNvSpPr>
-          <p:nvPr>
-            <p:ph type="title"/>
-          </p:nvPr>
-        </p:nvSpPr>
-        <p:spPr>
-          <a:xfrm>
-            <a:off x="457201" y="204787"/>
-            <a:ext cx="3008313" cy="871538"/>
-          </a:xfrm>
-        </p:spPr>
-        <p:txBody>
-          <a:bodyPr/>
-          <a:lstStyle/>
-          <a:p>
-            <a:pPr lvl="0" indent="0" marL="0">
-              <a:buNone/>
-            </a:pPr>
-            <a:r>
-              <a:rPr/>
-              <a:t>Building the panel</a:t>
-            </a:r>
-          </a:p>
-        </p:txBody>
-      </p:sp>
-      <p:sp>
-        <p:nvSpPr>
-          <p:cNvPr id="4" name="Text Placeholder 3"/>
-          <p:cNvSpPr>
-            <a:spLocks noGrp="1"/>
-          </p:cNvSpPr>
-          <p:nvPr>
-            <p:ph idx="2" sz="half" type="body"/>
-          </p:nvPr>
-        </p:nvSpPr>
-        <p:spPr/>
-        <p:txBody>
-          <a:bodyPr/>
-          <a:lstStyle/>
-          <a:p>
-            <a:pPr lvl="0" indent="0">
-              <a:buNone/>
-            </a:pPr>
-            <a:r>
-              <a:rPr b="1">
-                <a:solidFill>
-                  <a:srgbClr val="008000"/>
-                </a:solidFill>
-                <a:latin typeface="Courier"/>
-              </a:rPr>
-              <a:t>import</a:t>
-            </a:r>
-            <a:r>
-              <a:rPr>
-                <a:latin typeface="Courier"/>
-              </a:rPr>
-              <a:t> pandas </a:t>
-            </a:r>
-            <a:r>
-              <a:rPr b="1">
-                <a:solidFill>
-                  <a:srgbClr val="008000"/>
-                </a:solidFill>
-                <a:latin typeface="Courier"/>
-              </a:rPr>
-              <a:t>as</a:t>
-            </a:r>
-            <a:r>
-              <a:rPr>
-                <a:latin typeface="Courier"/>
-              </a:rPr>
-              <a:t> pd</a:t>
-            </a:r>
-            <a:br/>
-            <a:br/>
-            <a:r>
-              <a:rPr>
-                <a:latin typeface="Courier"/>
-              </a:rPr>
-              <a:t>b    </a:t>
-            </a:r>
-            <a:r>
-              <a:rPr>
-                <a:solidFill>
-                  <a:srgbClr val="666666"/>
-                </a:solidFill>
-                <a:latin typeface="Courier"/>
-              </a:rPr>
-              <a:t>=</a:t>
-            </a:r>
-            <a:r>
-              <a:rPr>
-                <a:latin typeface="Courier"/>
-              </a:rPr>
-              <a:t> pd.read_parquet(</a:t>
-            </a:r>
-            <a:r>
-              <a:rPr>
-                <a:solidFill>
-                  <a:srgbClr val="4070A0"/>
-                </a:solidFill>
-                <a:latin typeface="Courier"/>
-              </a:rPr>
-              <a:t>"data/spine/angle_b_sector.parquet"</a:t>
-            </a:r>
-            <a:r>
-              <a:rPr>
-                <a:latin typeface="Courier"/>
-              </a:rPr>
-              <a:t>)</a:t>
-            </a:r>
-            <a:br/>
-            <a:r>
-              <a:rPr>
-                <a:latin typeface="Courier"/>
-              </a:rPr>
-              <a:t>core </a:t>
-            </a:r>
-            <a:r>
-              <a:rPr>
-                <a:solidFill>
-                  <a:srgbClr val="666666"/>
-                </a:solidFill>
-                <a:latin typeface="Courier"/>
-              </a:rPr>
-              <a:t>=</a:t>
-            </a:r>
-            <a:r>
-              <a:rPr>
-                <a:latin typeface="Courier"/>
-              </a:rPr>
-              <a:t> pd.read_parquet(</a:t>
-            </a:r>
-            <a:r>
-              <a:rPr>
-                <a:solidFill>
-                  <a:srgbClr val="4070A0"/>
-                </a:solidFill>
-                <a:latin typeface="Courier"/>
-              </a:rPr>
-              <a:t>"data/spine/core.parquet"</a:t>
-            </a:r>
-            <a:r>
-              <a:rPr>
-                <a:latin typeface="Courier"/>
-              </a:rPr>
-              <a:t>)</a:t>
-            </a:r>
-            <a:br/>
-            <a:br/>
-            <a:r>
-              <a:rPr>
-                <a:latin typeface="Courier"/>
-              </a:rPr>
-              <a:t>df </a:t>
-            </a:r>
-            <a:r>
-              <a:rPr>
-                <a:solidFill>
-                  <a:srgbClr val="666666"/>
-                </a:solidFill>
-                <a:latin typeface="Courier"/>
-              </a:rPr>
-              <a:t>=</a:t>
-            </a:r>
-            <a:r>
-              <a:rPr>
-                <a:latin typeface="Courier"/>
-              </a:rPr>
-              <a:t> b.merge(core[[</a:t>
-            </a:r>
-            <a:r>
-              <a:rPr>
-                <a:solidFill>
-                  <a:srgbClr val="4070A0"/>
-                </a:solidFill>
-                <a:latin typeface="Courier"/>
-              </a:rPr>
-              <a:t>"geo"</a:t>
-            </a:r>
-            <a:r>
-              <a:rPr>
-                <a:latin typeface="Courier"/>
-              </a:rPr>
-              <a:t>, </a:t>
-            </a:r>
-            <a:r>
-              <a:rPr>
-                <a:solidFill>
-                  <a:srgbClr val="4070A0"/>
-                </a:solidFill>
-                <a:latin typeface="Courier"/>
-              </a:rPr>
-              <a:t>"time"</a:t>
-            </a:r>
-            <a:r>
-              <a:rPr>
-                <a:latin typeface="Courier"/>
-              </a:rPr>
-              <a:t>, </a:t>
-            </a:r>
-            <a:r>
-              <a:rPr>
-                <a:solidFill>
-                  <a:srgbClr val="4070A0"/>
-                </a:solidFill>
-                <a:latin typeface="Courier"/>
-              </a:rPr>
-              <a:t>"gdp_pc_eur"</a:t>
-            </a:r>
-            <a:r>
-              <a:rPr>
-                <a:latin typeface="Courier"/>
-              </a:rPr>
-              <a:t>, </a:t>
-            </a:r>
-            <a:r>
-              <a:rPr>
-                <a:solidFill>
-                  <a:srgbClr val="4070A0"/>
-                </a:solidFill>
-                <a:latin typeface="Courier"/>
-              </a:rPr>
-              <a:t>"productivity_idx"</a:t>
-            </a:r>
-            <a:r>
-              <a:rPr>
-                <a:latin typeface="Courier"/>
-              </a:rPr>
-              <a:t>]],</a:t>
-            </a:r>
-            <a:br/>
-            <a:r>
-              <a:rPr>
-                <a:latin typeface="Courier"/>
-              </a:rPr>
-              <a:t>             on</a:t>
-            </a:r>
-            <a:r>
-              <a:rPr>
-                <a:solidFill>
-                  <a:srgbClr val="666666"/>
-                </a:solidFill>
-                <a:latin typeface="Courier"/>
-              </a:rPr>
-              <a:t>=</a:t>
-            </a:r>
-            <a:r>
-              <a:rPr>
-                <a:latin typeface="Courier"/>
-              </a:rPr>
-              <a:t>[</a:t>
-            </a:r>
-            <a:r>
-              <a:rPr>
-                <a:solidFill>
-                  <a:srgbClr val="4070A0"/>
-                </a:solidFill>
-                <a:latin typeface="Courier"/>
-              </a:rPr>
-              <a:t>"geo"</a:t>
-            </a:r>
-            <a:r>
-              <a:rPr>
-                <a:latin typeface="Courier"/>
-              </a:rPr>
-              <a:t>, </a:t>
-            </a:r>
-            <a:r>
-              <a:rPr>
-                <a:solidFill>
-                  <a:srgbClr val="4070A0"/>
-                </a:solidFill>
-                <a:latin typeface="Courier"/>
-              </a:rPr>
-              <a:t>"time"</a:t>
-            </a:r>
-            <a:r>
-              <a:rPr>
-                <a:latin typeface="Courier"/>
-              </a:rPr>
-              <a:t>])</a:t>
-            </a:r>
-            <a:br/>
-            <a:r>
-              <a:rPr>
-                <a:solidFill>
-                  <a:srgbClr val="008000"/>
-                </a:solidFill>
-                <a:latin typeface="Courier"/>
-              </a:rPr>
-              <a:t>print</a:t>
-            </a:r>
-            <a:r>
-              <a:rPr>
-                <a:latin typeface="Courier"/>
-              </a:rPr>
-              <a:t>(df.shape)     </a:t>
-            </a:r>
-            <a:r>
-              <a:rPr i="1">
-                <a:solidFill>
-                  <a:srgbClr val="60A0B0"/>
-                </a:solidFill>
-                <a:latin typeface="Courier"/>
-              </a:rPr>
-              <a:t># 3150 rows: 30 countries x 7 sectors x 15 years</a:t>
-            </a:r>
-          </a:p>
-        </p:txBody>
-      </p:sp>
-      <p:graphicFrame>
-        <p:nvGraphicFramePr>
-          <p:cNvPr id="6" name="Content Placeholder 5"/>
-          <p:cNvGraphicFramePr>
-            <a:graphicFrameLocks noGrp="1"/>
-          </p:cNvGraphicFramePr>
-          <p:nvPr>
-            <p:ph idx="1"/>
-          </p:nvPr>
-        </p:nvGraphicFramePr>
-        <p:xfrm>
-          <a:off x="3568700" y="203200"/>
-          <a:ext cx="5105400" cy="4381500"/>
-        </p:xfrm>
-        <a:graphic>
-          <a:graphicData uri="http://schemas.openxmlformats.org/drawingml/2006/table">
-            <a:tbl>
-              <a:tblPr firstRow="1" bandRow="1">
-                <a:tableStyleId>{5C22544A-7EE6-4342-B048-85BDC9FD1C3A}</a:tableStyleId>
-              </a:tblPr>
-              <a:tblGrid>
-                <a:gridCol w="2552700"/>
-                <a:gridCol w="2552700"/>
-              </a:tblGrid>
-              <a:tr h="0">
-                <a:tc>
-                  <a:txBody>
-                    <a:bodyPr/>
-                    <a:lstStyle/>
-                    <a:p>
-                      <a:pPr lvl="0" indent="0" marL="0">
-                        <a:buNone/>
-                      </a:pPr>
-                      <a:r>
-                        <a:rPr/>
-                        <a:t>Column</a:t>
-                      </a:r>
-                    </a:p>
-                  </a:txBody>
-                  <a:tcPr/>
-                </a:tc>
-                <a:tc>
-                  <a:txBody>
-                    <a:bodyPr/>
-                    <a:lstStyle/>
-                    <a:p>
-                      <a:pPr lvl="0" indent="0" marL="0">
-                        <a:buNone/>
-                      </a:pPr>
-                      <a:r>
-                        <a:rPr/>
-                        <a:t>Meaning</a:t>
-                      </a:r>
-                    </a:p>
-                  </a:txBody>
-                  <a:tcPr/>
-                </a:tc>
-              </a:tr>
-              <a:tr h="0">
-                <a:tc>
-                  <a:txBody>
-                    <a:bodyPr/>
-                    <a:lstStyle/>
-                    <a:p>
-                      <a:pPr lvl="0" indent="0" marL="0">
-                        <a:buNone/>
-                      </a:pPr>
-                      <a:r>
-                        <a:rPr>
-                          <a:latin typeface="Courier"/>
-                        </a:rPr>
-                        <a:t>annual_earnings_eur</a:t>
-                      </a:r>
-                    </a:p>
-                  </a:txBody>
-                </a:tc>
-                <a:tc>
-                  <a:txBody>
-                    <a:bodyPr/>
-                    <a:lstStyle/>
-                    <a:p>
-                      <a:pPr lvl="0" indent="0" marL="0">
-                        <a:buNone/>
-                      </a:pPr>
-                      <a:r>
-                        <a:rPr/>
-                        <a:t>Mean annual earnings</a:t>
-                      </a:r>
-                    </a:p>
-                  </a:txBody>
-                </a:tc>
-              </a:tr>
-              <a:tr h="0">
-                <a:tc>
-                  <a:txBody>
-                    <a:bodyPr/>
-                    <a:lstStyle/>
-                    <a:p>
-                      <a:pPr lvl="0" indent="0" marL="0">
-                        <a:buNone/>
-                      </a:pPr>
-                      <a:r>
-                        <a:rPr>
-                          <a:latin typeface="Courier"/>
-                        </a:rPr>
-                        <a:t>tertiary_share</a:t>
-                      </a:r>
-                    </a:p>
-                  </a:txBody>
-                </a:tc>
-                <a:tc>
-                  <a:txBody>
-                    <a:bodyPr/>
-                    <a:lstStyle/>
-                    <a:p>
-                      <a:pPr lvl="0" indent="0" marL="0">
-                        <a:buNone/>
-                      </a:pPr>
-                      <a:r>
-                        <a:rPr/>
-                        <a:t>Share of employment with tertiary education</a:t>
-                      </a:r>
-                    </a:p>
-                  </a:txBody>
-                </a:tc>
-              </a:tr>
-              <a:tr h="0">
-                <a:tc>
-                  <a:txBody>
-                    <a:bodyPr/>
-                    <a:lstStyle/>
-                    <a:p>
-                      <a:pPr lvl="0" indent="0" marL="0">
-                        <a:buNone/>
-                      </a:pPr>
-                      <a:r>
-                        <a:rPr>
-                          <a:latin typeface="Courier"/>
-                        </a:rPr>
-                        <a:t>vacancy_rate</a:t>
-                      </a:r>
-                    </a:p>
-                  </a:txBody>
-                </a:tc>
-                <a:tc>
-                  <a:txBody>
-                    <a:bodyPr/>
-                    <a:lstStyle/>
-                    <a:p>
-                      <a:pPr lvl="0" indent="0" marL="0">
-                        <a:buNone/>
-                      </a:pPr>
-                      <a:r>
-                        <a:rPr/>
-                        <a:t>Job vacancy rate, %</a:t>
-                      </a:r>
-                    </a:p>
-                  </a:txBody>
-                </a:tc>
-              </a:tr>
-              <a:tr h="0">
-                <a:tc>
-                  <a:txBody>
-                    <a:bodyPr/>
-                    <a:lstStyle/>
-                    <a:p>
-                      <a:pPr lvl="0" indent="0" marL="0">
-                        <a:buNone/>
-                      </a:pPr>
-                      <a:r>
-                        <a:rPr>
-                          <a:latin typeface="Courier"/>
-                        </a:rPr>
-                        <a:t>nace_r2</a:t>
-                      </a:r>
-                    </a:p>
-                  </a:txBody>
-                </a:tc>
-                <a:tc>
-                  <a:txBody>
-                    <a:bodyPr/>
-                    <a:lstStyle/>
-                    <a:p>
-                      <a:pPr lvl="0" indent="0" marL="0">
-                        <a:buNone/>
-                      </a:pPr>
-                      <a:r>
-                        <a:rPr/>
-                        <a:t>Sector (NACE Rev. 2 section)</a:t>
-                      </a:r>
-                    </a:p>
-                  </a:txBody>
-                </a:tc>
-              </a:tr>
-            </a:tbl>
-          </a:graphicData>
-        </a:graphic>
-      </p:graphicFrame>
-    </p:spTree>
-  </p:cSld>
-</p:sld>
-</file>
-
-<file path=ppt/slides/slide16.xml><?xml version="1.0" encoding="utf-8"?>
-<p:sld xmlns:a="http://schemas.openxmlformats.org/drawingml/2006/main" xmlns:r="http://schemas.openxmlformats.org/officeDocument/2006/relationships" xmlns:p="http://schemas.openxmlformats.org/presentationml/2006/main">
-  <p:cSld>
-    <p:spTree>
-      <p:nvGrpSpPr>
-        <p:cNvPr id="1" name=""/>
-        <p:cNvGrpSpPr/>
-        <p:nvPr/>
-      </p:nvGrpSpPr>
-      <p:grpSpPr>
-        <a:xfrm>
-          <a:off x="0" y="0"/>
-          <a:ext cx="0" cy="0"/>
-          <a:chOff x="0" y="0"/>
-          <a:chExt cx="0" cy="0"/>
-        </a:xfrm>
-      </p:grpSpPr>
-      <p:sp>
-        <p:nvSpPr>
-          <p:cNvPr id="2" name="Title 1"/>
-          <p:cNvSpPr>
-            <a:spLocks noGrp="1"/>
-          </p:cNvSpPr>
-          <p:nvPr>
-            <p:ph type="title"/>
-          </p:nvPr>
-        </p:nvSpPr>
-        <p:spPr/>
-        <p:txBody>
-          <a:bodyPr/>
-          <a:lstStyle/>
-          <a:p>
-            <a:pPr lvl="0" indent="0" marL="0">
-              <a:buNone/>
-            </a:pPr>
-            <a:r>
-              <a:rPr/>
-              <a:t>What is deliberately wrong with it</a:t>
-            </a:r>
-          </a:p>
-        </p:txBody>
-      </p:sp>
-      <p:sp>
-        <p:nvSpPr>
-          <p:cNvPr id="3" name="Content Placeholder 2"/>
-          <p:cNvSpPr>
-            <a:spLocks noGrp="1"/>
-          </p:cNvSpPr>
-          <p:nvPr>
-            <p:ph idx="1"/>
-          </p:nvPr>
-        </p:nvSpPr>
-        <p:spPr/>
-        <p:txBody>
-          <a:bodyPr/>
-          <a:lstStyle/>
-          <a:p>
-            <a:pPr lvl="0"/>
-            <a:r>
-              <a:rPr b="1"/>
-              <a:t>Variance scales with country size.</a:t>
-            </a:r>
-            <a:r>
-              <a:rPr/>
-              <a:t> Small countries are noisier. That is heteroskedasticity you can see.</a:t>
-            </a:r>
-          </a:p>
-          <a:p>
-            <a:pPr lvl="0"/>
-            <a:r>
-              <a:rPr b="1"/>
-              <a:t>Repeated observations per country.</a:t>
-            </a:r>
-            <a:r>
-              <a:rPr/>
-              <a:t> 105 rows per country — nowhere near 105 independent facts.</a:t>
-            </a:r>
-          </a:p>
-          <a:p>
-            <a:pPr lvl="0"/>
-            <a:r>
-              <a:rPr b="1">
-                <a:latin typeface="Courier"/>
-              </a:rPr>
-              <a:t>annual_earnings_eur</a:t>
-            </a:r>
-            <a:r>
-              <a:rPr b="1"/>
-              <a:t> comes from a quadrennial source.</a:t>
-            </a:r>
-            <a:r>
-              <a:rPr/>
-              <a:t> Annual variation is partly interpolation, not measurement.</a:t>
-            </a:r>
-          </a:p>
-          <a:p>
-            <a:pPr lvl="0" indent="0" marL="0">
-              <a:buNone/>
-            </a:pPr>
-            <a:r>
-              <a:rPr/>
-              <a:t>Treating 3,150 rows as 3,150 independent observations is how you get a t-statistic of 12 for an effect that is not there.</a:t>
-            </a:r>
-          </a:p>
-        </p:txBody>
-      </p:sp>
-    </p:spTree>
-  </p:cSld>
-</p:sld>
-</file>
-
-<file path=ppt/slides/slide17.xml><?xml version="1.0" encoding="utf-8"?>
-<p:sld xmlns:a="http://schemas.openxmlformats.org/drawingml/2006/main" xmlns:r="http://schemas.openxmlformats.org/officeDocument/2006/relationships" xmlns:p="http://schemas.openxmlformats.org/presentationml/2006/main">
-  <p:cSld>
-    <p:spTree>
-      <p:nvGrpSpPr>
-        <p:cNvPr id="1" name=""/>
-        <p:cNvGrpSpPr/>
-        <p:nvPr/>
-      </p:nvGrpSpPr>
-      <p:grpSpPr>
-        <a:xfrm>
-          <a:off x="0" y="0"/>
-          <a:ext cx="0" cy="0"/>
-          <a:chOff x="0" y="0"/>
-          <a:chExt cx="0" cy="0"/>
-        </a:xfrm>
-      </p:grpSpPr>
-      <p:sp>
-        <p:nvSpPr>
-          <p:cNvPr id="2" name="Title 1"/>
-          <p:cNvSpPr>
-            <a:spLocks noGrp="1"/>
-          </p:cNvSpPr>
-          <p:nvPr>
-            <p:ph type="title"/>
-          </p:nvPr>
-        </p:nvSpPr>
-        <p:spPr>
-          <a:xfrm>
-            <a:off x="722313" y="3305176"/>
-            <a:ext cx="7772400" cy="1021556"/>
-          </a:xfrm>
-        </p:spPr>
-        <p:txBody>
-          <a:bodyPr/>
-          <a:lstStyle/>
-          <a:p>
-            <a:pPr lvl="0" indent="0" marL="0">
-              <a:buNone/>
-            </a:pPr>
-            <a:r>
-              <a:rPr/>
-              <a:t>Doing it</a:t>
-            </a:r>
-          </a:p>
-        </p:txBody>
-      </p:sp>
-    </p:spTree>
-  </p:cSld>
-</p:sld>
-</file>
-
-<file path=ppt/slides/slide18.xml><?xml version="1.0" encoding="utf-8"?>
-<p:sld xmlns:a="http://schemas.openxmlformats.org/drawingml/2006/main" xmlns:r="http://schemas.openxmlformats.org/officeDocument/2006/relationships" xmlns:p="http://schemas.openxmlformats.org/presentationml/2006/main">
-  <p:cSld>
-    <p:spTree>
-      <p:nvGrpSpPr>
-        <p:cNvPr id="1" name=""/>
-        <p:cNvGrpSpPr/>
-        <p:nvPr/>
-      </p:nvGrpSpPr>
-      <p:grpSpPr>
-        <a:xfrm>
-          <a:off x="0" y="0"/>
-          <a:ext cx="0" cy="0"/>
-          <a:chOff x="0" y="0"/>
-          <a:chExt cx="0" cy="0"/>
-        </a:xfrm>
-      </p:grpSpPr>
-      <p:sp>
-        <p:nvSpPr>
-          <p:cNvPr id="2" name="Title 1"/>
-          <p:cNvSpPr>
-            <a:spLocks noGrp="1"/>
-          </p:cNvSpPr>
-          <p:nvPr>
-            <p:ph type="title"/>
-          </p:nvPr>
-        </p:nvSpPr>
-        <p:spPr/>
-        <p:txBody>
-          <a:bodyPr/>
-          <a:lstStyle/>
-          <a:p>
-            <a:pPr lvl="0" indent="0" marL="0">
-              <a:buNone/>
-            </a:pPr>
-            <a:r>
-              <a:rPr/>
-              <a:t>Fit, then look at the residuals</a:t>
-            </a:r>
-          </a:p>
-        </p:txBody>
-      </p:sp>
-      <p:sp>
-        <p:nvSpPr>
-          <p:cNvPr id="3" name="Content Placeholder 2"/>
-          <p:cNvSpPr>
-            <a:spLocks noGrp="1"/>
-          </p:cNvSpPr>
-          <p:nvPr>
-            <p:ph idx="1"/>
-          </p:nvPr>
-        </p:nvSpPr>
-        <p:spPr/>
-        <p:txBody>
-          <a:bodyPr/>
-          <a:lstStyle/>
-          <a:p>
-            <a:pPr lvl="0" indent="0">
-              <a:buNone/>
-            </a:pPr>
-            <a:r>
-              <a:rPr b="1">
-                <a:solidFill>
-                  <a:srgbClr val="008000"/>
-                </a:solidFill>
-                <a:latin typeface="Courier"/>
-              </a:rPr>
-              <a:t>import</a:t>
-            </a:r>
-            <a:r>
-              <a:rPr>
-                <a:latin typeface="Courier"/>
-              </a:rPr>
-              <a:t> statsmodels.formula.api </a:t>
-            </a:r>
-            <a:r>
-              <a:rPr b="1">
-                <a:solidFill>
-                  <a:srgbClr val="008000"/>
-                </a:solidFill>
-                <a:latin typeface="Courier"/>
-              </a:rPr>
-              <a:t>as</a:t>
-            </a:r>
-            <a:r>
-              <a:rPr>
-                <a:latin typeface="Courier"/>
-              </a:rPr>
-              <a:t> smf</a:t>
-            </a:r>
-            <a:br/>
-            <a:br/>
-            <a:r>
-              <a:rPr>
-                <a:latin typeface="Courier"/>
-              </a:rPr>
-              <a:t>m </a:t>
-            </a:r>
-            <a:r>
-              <a:rPr>
-                <a:solidFill>
-                  <a:srgbClr val="666666"/>
-                </a:solidFill>
-                <a:latin typeface="Courier"/>
-              </a:rPr>
-              <a:t>=</a:t>
-            </a:r>
-            <a:r>
-              <a:rPr>
-                <a:latin typeface="Courier"/>
-              </a:rPr>
-              <a:t> smf.ols(</a:t>
-            </a:r>
-            <a:r>
-              <a:rPr>
-                <a:solidFill>
-                  <a:srgbClr val="4070A0"/>
-                </a:solidFill>
-                <a:latin typeface="Courier"/>
-              </a:rPr>
-              <a:t>"np.log(annual_earnings_eur) ~ tertiary_share + vacancy_rate "</a:t>
-            </a:r>
-            <a:br/>
-            <a:r>
-              <a:rPr>
-                <a:latin typeface="Courier"/>
-              </a:rPr>
-              <a:t>            </a:t>
-            </a:r>
-            <a:r>
-              <a:rPr>
-                <a:solidFill>
-                  <a:srgbClr val="4070A0"/>
-                </a:solidFill>
-                <a:latin typeface="Courier"/>
-              </a:rPr>
-              <a:t>"+ C(nace_r2)"</a:t>
-            </a:r>
-            <a:r>
-              <a:rPr>
-                <a:latin typeface="Courier"/>
-              </a:rPr>
-              <a:t>, data</a:t>
-            </a:r>
-            <a:r>
-              <a:rPr>
-                <a:solidFill>
-                  <a:srgbClr val="666666"/>
-                </a:solidFill>
-                <a:latin typeface="Courier"/>
-              </a:rPr>
-              <a:t>=</a:t>
-            </a:r>
-            <a:r>
-              <a:rPr>
-                <a:latin typeface="Courier"/>
-              </a:rPr>
-              <a:t>df).fit()</a:t>
-            </a:r>
-            <a:br/>
-            <a:br/>
-            <a:r>
-              <a:rPr b="1">
-                <a:solidFill>
-                  <a:srgbClr val="008000"/>
-                </a:solidFill>
-                <a:latin typeface="Courier"/>
-              </a:rPr>
-              <a:t>import</a:t>
-            </a:r>
-            <a:r>
-              <a:rPr>
-                <a:latin typeface="Courier"/>
-              </a:rPr>
-              <a:t> matplotlib.pyplot </a:t>
-            </a:r>
-            <a:r>
-              <a:rPr b="1">
-                <a:solidFill>
-                  <a:srgbClr val="008000"/>
-                </a:solidFill>
-                <a:latin typeface="Courier"/>
-              </a:rPr>
-              <a:t>as</a:t>
-            </a:r>
-            <a:r>
-              <a:rPr>
-                <a:latin typeface="Courier"/>
-              </a:rPr>
-              <a:t> plt</a:t>
-            </a:r>
-            <a:br/>
-            <a:r>
-              <a:rPr>
-                <a:latin typeface="Courier"/>
-              </a:rPr>
-              <a:t>plt.scatter(m.fittedvalues, m.resid, s</a:t>
-            </a:r>
-            <a:r>
-              <a:rPr>
-                <a:solidFill>
-                  <a:srgbClr val="666666"/>
-                </a:solidFill>
-                <a:latin typeface="Courier"/>
-              </a:rPr>
-              <a:t>=</a:t>
-            </a:r>
-            <a:r>
-              <a:rPr>
-                <a:solidFill>
-                  <a:srgbClr val="40A070"/>
-                </a:solidFill>
-                <a:latin typeface="Courier"/>
-              </a:rPr>
-              <a:t>6</a:t>
-            </a:r>
-            <a:r>
-              <a:rPr>
-                <a:latin typeface="Courier"/>
-              </a:rPr>
-              <a:t>, alpha</a:t>
-            </a:r>
-            <a:r>
-              <a:rPr>
-                <a:solidFill>
-                  <a:srgbClr val="666666"/>
-                </a:solidFill>
-                <a:latin typeface="Courier"/>
-              </a:rPr>
-              <a:t>=</a:t>
-            </a:r>
-            <a:r>
-              <a:rPr>
-                <a:solidFill>
-                  <a:srgbClr val="40A070"/>
-                </a:solidFill>
-                <a:latin typeface="Courier"/>
-              </a:rPr>
-              <a:t>0.4</a:t>
-            </a:r>
-            <a:r>
-              <a:rPr>
-                <a:latin typeface="Courier"/>
-              </a:rPr>
-              <a:t>)</a:t>
-            </a:r>
-            <a:br/>
-            <a:r>
-              <a:rPr>
-                <a:latin typeface="Courier"/>
-              </a:rPr>
-              <a:t>plt.axhline(</a:t>
-            </a:r>
-            <a:r>
-              <a:rPr>
-                <a:solidFill>
-                  <a:srgbClr val="40A070"/>
-                </a:solidFill>
-                <a:latin typeface="Courier"/>
-              </a:rPr>
-              <a:t>0</a:t>
-            </a:r>
-            <a:r>
-              <a:rPr>
-                <a:latin typeface="Courier"/>
-              </a:rPr>
-              <a:t>)</a:t>
-            </a:r>
-            <a:r>
-              <a:rPr>
-                <a:solidFill>
-                  <a:srgbClr val="666666"/>
-                </a:solidFill>
-                <a:latin typeface="Courier"/>
-              </a:rPr>
-              <a:t>;</a:t>
-            </a:r>
-            <a:r>
-              <a:rPr>
-                <a:latin typeface="Courier"/>
-              </a:rPr>
-              <a:t> plt.xlabel(</a:t>
-            </a:r>
-            <a:r>
-              <a:rPr>
-                <a:solidFill>
-                  <a:srgbClr val="4070A0"/>
-                </a:solidFill>
-                <a:latin typeface="Courier"/>
-              </a:rPr>
-              <a:t>"fitted"</a:t>
-            </a:r>
-            <a:r>
-              <a:rPr>
-                <a:latin typeface="Courier"/>
-              </a:rPr>
-              <a:t>)</a:t>
-            </a:r>
-            <a:r>
-              <a:rPr>
-                <a:solidFill>
-                  <a:srgbClr val="666666"/>
-                </a:solidFill>
-                <a:latin typeface="Courier"/>
-              </a:rPr>
-              <a:t>;</a:t>
-            </a:r>
-            <a:r>
-              <a:rPr>
-                <a:latin typeface="Courier"/>
-              </a:rPr>
-              <a:t> plt.ylabel(</a:t>
-            </a:r>
-            <a:r>
-              <a:rPr>
-                <a:solidFill>
-                  <a:srgbClr val="4070A0"/>
-                </a:solidFill>
-                <a:latin typeface="Courier"/>
-              </a:rPr>
-              <a:t>"residual"</a:t>
-            </a:r>
-            <a:r>
-              <a:rPr>
-                <a:latin typeface="Courier"/>
-              </a:rPr>
-              <a:t>)</a:t>
-            </a:r>
-          </a:p>
-          <a:p>
-            <a:pPr lvl="0" indent="0" marL="0">
-              <a:buNone/>
-            </a:pPr>
-            <a:r>
-              <a:rPr/>
-              <a:t>A fan opening to the right is heteroskedasticity. You are looking for a shape, not running a test yet.</a:t>
-            </a:r>
-          </a:p>
-        </p:txBody>
-      </p:sp>
-    </p:spTree>
-  </p:cSld>
-</p:sld>
-</file>
-
-<file path=ppt/slides/slide19.xml><?xml version="1.0" encoding="utf-8"?>
-<p:sld xmlns:a="http://schemas.openxmlformats.org/drawingml/2006/main" xmlns:r="http://schemas.openxmlformats.org/officeDocument/2006/relationships" xmlns:p="http://schemas.openxmlformats.org/presentationml/2006/main">
-  <p:cSld>
-    <p:spTree>
-      <p:nvGrpSpPr>
-        <p:cNvPr id="1" name=""/>
-        <p:cNvGrpSpPr/>
-        <p:nvPr/>
-      </p:nvGrpSpPr>
-      <p:grpSpPr>
-        <a:xfrm>
-          <a:off x="0" y="0"/>
-          <a:ext cx="0" cy="0"/>
-          <a:chOff x="0" y="0"/>
-          <a:chExt cx="0" cy="0"/>
-        </a:xfrm>
-      </p:grpSpPr>
-      <p:sp>
-        <p:nvSpPr>
-          <p:cNvPr id="2" name="Title 1"/>
-          <p:cNvSpPr>
-            <a:spLocks noGrp="1"/>
-          </p:cNvSpPr>
-          <p:nvPr>
-            <p:ph type="title"/>
-          </p:nvPr>
-        </p:nvSpPr>
-        <p:spPr/>
-        <p:txBody>
-          <a:bodyPr/>
-          <a:lstStyle/>
-          <a:p>
-            <a:pPr lvl="0" indent="0" marL="0">
-              <a:buNone/>
-            </a:pPr>
-            <a:r>
-              <a:rPr/>
-              <a:t>The same model, three standard errors</a:t>
-            </a:r>
-          </a:p>
-        </p:txBody>
-      </p:sp>
-      <p:sp>
-        <p:nvSpPr>
-          <p:cNvPr id="3" name="Content Placeholder 2"/>
-          <p:cNvSpPr>
-            <a:spLocks noGrp="1"/>
-          </p:cNvSpPr>
-          <p:nvPr>
-            <p:ph idx="1"/>
-          </p:nvPr>
-        </p:nvSpPr>
-        <p:spPr/>
-        <p:txBody>
-          <a:bodyPr/>
-          <a:lstStyle/>
-          <a:p>
-            <a:pPr lvl="0" indent="0">
-              <a:buNone/>
-            </a:pPr>
-            <a:r>
-              <a:rPr>
-                <a:latin typeface="Courier"/>
-              </a:rPr>
-              <a:t>classical </a:t>
-            </a:r>
-            <a:r>
-              <a:rPr>
-                <a:solidFill>
-                  <a:srgbClr val="666666"/>
-                </a:solidFill>
-                <a:latin typeface="Courier"/>
-              </a:rPr>
-              <a:t>=</a:t>
-            </a:r>
-            <a:r>
-              <a:rPr>
-                <a:latin typeface="Courier"/>
-              </a:rPr>
-              <a:t> m</a:t>
-            </a:r>
-            <a:br/>
-            <a:r>
-              <a:rPr>
-                <a:latin typeface="Courier"/>
-              </a:rPr>
-              <a:t>robust    </a:t>
-            </a:r>
-            <a:r>
-              <a:rPr>
-                <a:solidFill>
-                  <a:srgbClr val="666666"/>
-                </a:solidFill>
-                <a:latin typeface="Courier"/>
-              </a:rPr>
-              <a:t>=</a:t>
-            </a:r>
-            <a:r>
-              <a:rPr>
-                <a:latin typeface="Courier"/>
-              </a:rPr>
-              <a:t> m.get_robustcov_results(cov_type</a:t>
-            </a:r>
-            <a:r>
-              <a:rPr>
-                <a:solidFill>
-                  <a:srgbClr val="666666"/>
-                </a:solidFill>
-                <a:latin typeface="Courier"/>
-              </a:rPr>
-              <a:t>=</a:t>
-            </a:r>
-            <a:r>
-              <a:rPr>
-                <a:solidFill>
-                  <a:srgbClr val="4070A0"/>
-                </a:solidFill>
-                <a:latin typeface="Courier"/>
-              </a:rPr>
-              <a:t>"HC3"</a:t>
-            </a:r>
-            <a:r>
-              <a:rPr>
-                <a:latin typeface="Courier"/>
-              </a:rPr>
-              <a:t>)</a:t>
-            </a:r>
-            <a:br/>
-            <a:r>
-              <a:rPr>
-                <a:latin typeface="Courier"/>
-              </a:rPr>
-              <a:t>clustered </a:t>
-            </a:r>
-            <a:r>
-              <a:rPr>
-                <a:solidFill>
-                  <a:srgbClr val="666666"/>
-                </a:solidFill>
-                <a:latin typeface="Courier"/>
-              </a:rPr>
-              <a:t>=</a:t>
-            </a:r>
-            <a:r>
-              <a:rPr>
-                <a:latin typeface="Courier"/>
-              </a:rPr>
-              <a:t> m.get_robustcov_results(cov_type</a:t>
-            </a:r>
-            <a:r>
-              <a:rPr>
-                <a:solidFill>
-                  <a:srgbClr val="666666"/>
-                </a:solidFill>
-                <a:latin typeface="Courier"/>
-              </a:rPr>
-              <a:t>=</a:t>
-            </a:r>
-            <a:r>
-              <a:rPr>
-                <a:solidFill>
-                  <a:srgbClr val="4070A0"/>
-                </a:solidFill>
-                <a:latin typeface="Courier"/>
-              </a:rPr>
-              <a:t>"cluster"</a:t>
-            </a:r>
-            <a:r>
-              <a:rPr>
-                <a:latin typeface="Courier"/>
-              </a:rPr>
-              <a:t>,</a:t>
-            </a:r>
-            <a:br/>
-            <a:r>
-              <a:rPr>
-                <a:latin typeface="Courier"/>
-              </a:rPr>
-              <a:t>                                    groups</a:t>
-            </a:r>
-            <a:r>
-              <a:rPr>
-                <a:solidFill>
-                  <a:srgbClr val="666666"/>
-                </a:solidFill>
-                <a:latin typeface="Courier"/>
-              </a:rPr>
-              <a:t>=</a:t>
-            </a:r>
-            <a:r>
-              <a:rPr>
-                <a:latin typeface="Courier"/>
-              </a:rPr>
-              <a:t>df.loc[m.model.data.row_labels, </a:t>
-            </a:r>
-            <a:r>
-              <a:rPr>
-                <a:solidFill>
-                  <a:srgbClr val="4070A0"/>
-                </a:solidFill>
-                <a:latin typeface="Courier"/>
-              </a:rPr>
-              <a:t>"geo"</a:t>
-            </a:r>
-            <a:r>
-              <a:rPr>
-                <a:latin typeface="Courier"/>
-              </a:rPr>
-              <a:t>])</a:t>
-            </a:r>
-            <a:br/>
-            <a:br/>
-            <a:r>
-              <a:rPr>
-                <a:latin typeface="Courier"/>
-              </a:rPr>
-              <a:t>i </a:t>
-            </a:r>
-            <a:r>
-              <a:rPr>
-                <a:solidFill>
-                  <a:srgbClr val="666666"/>
-                </a:solidFill>
-                <a:latin typeface="Courier"/>
-              </a:rPr>
-              <a:t>=</a:t>
-            </a:r>
-            <a:r>
-              <a:rPr>
-                <a:latin typeface="Courier"/>
-              </a:rPr>
-              <a:t> </a:t>
-            </a:r>
-            <a:r>
-              <a:rPr>
-                <a:solidFill>
-                  <a:srgbClr val="008000"/>
-                </a:solidFill>
-                <a:latin typeface="Courier"/>
-              </a:rPr>
-              <a:t>list</a:t>
-            </a:r>
-            <a:r>
-              <a:rPr>
-                <a:latin typeface="Courier"/>
-              </a:rPr>
-              <a:t>(m.params.index).index(</a:t>
-            </a:r>
-            <a:r>
-              <a:rPr>
-                <a:solidFill>
-                  <a:srgbClr val="4070A0"/>
-                </a:solidFill>
-                <a:latin typeface="Courier"/>
-              </a:rPr>
-              <a:t>"tertiary_share"</a:t>
-            </a:r>
-            <a:r>
-              <a:rPr>
-                <a:latin typeface="Courier"/>
-              </a:rPr>
-              <a:t>)</a:t>
-            </a:r>
-            <a:br/>
-            <a:r>
-              <a:rPr b="1">
-                <a:solidFill>
-                  <a:srgbClr val="007020"/>
-                </a:solidFill>
-                <a:latin typeface="Courier"/>
-              </a:rPr>
-              <a:t>for</a:t>
-            </a:r>
-            <a:r>
-              <a:rPr>
-                <a:latin typeface="Courier"/>
-              </a:rPr>
-              <a:t> name, r </a:t>
-            </a:r>
-            <a:r>
-              <a:rPr b="1">
-                <a:solidFill>
-                  <a:srgbClr val="007020"/>
-                </a:solidFill>
-                <a:latin typeface="Courier"/>
-              </a:rPr>
-              <a:t>in</a:t>
-            </a:r>
-            <a:r>
-              <a:rPr>
-                <a:latin typeface="Courier"/>
-              </a:rPr>
-              <a:t> [(</a:t>
-            </a:r>
-            <a:r>
-              <a:rPr>
-                <a:solidFill>
-                  <a:srgbClr val="4070A0"/>
-                </a:solidFill>
-                <a:latin typeface="Courier"/>
-              </a:rPr>
-              <a:t>"classical"</a:t>
-            </a:r>
-            <a:r>
-              <a:rPr>
-                <a:latin typeface="Courier"/>
-              </a:rPr>
-              <a:t>, classical), (</a:t>
-            </a:r>
-            <a:r>
-              <a:rPr>
-                <a:solidFill>
-                  <a:srgbClr val="4070A0"/>
-                </a:solidFill>
-                <a:latin typeface="Courier"/>
-              </a:rPr>
-              <a:t>"HC3"</a:t>
-            </a:r>
-            <a:r>
-              <a:rPr>
-                <a:latin typeface="Courier"/>
-              </a:rPr>
-              <a:t>, robust), (</a:t>
-            </a:r>
-            <a:r>
-              <a:rPr>
-                <a:solidFill>
-                  <a:srgbClr val="4070A0"/>
-                </a:solidFill>
-                <a:latin typeface="Courier"/>
-              </a:rPr>
-              <a:t>"cluster"</a:t>
-            </a:r>
-            <a:r>
-              <a:rPr>
-                <a:latin typeface="Courier"/>
-              </a:rPr>
-              <a:t>, clustered)]:</a:t>
-            </a:r>
-            <a:br/>
-            <a:r>
-              <a:rPr>
-                <a:latin typeface="Courier"/>
-              </a:rPr>
-              <a:t>    </a:t>
-            </a:r>
-            <a:r>
-              <a:rPr>
-                <a:solidFill>
-                  <a:srgbClr val="008000"/>
-                </a:solidFill>
-                <a:latin typeface="Courier"/>
-              </a:rPr>
-              <a:t>print</a:t>
-            </a:r>
-            <a:r>
-              <a:rPr>
-                <a:latin typeface="Courier"/>
-              </a:rPr>
-              <a:t>(</a:t>
-            </a:r>
-            <a:r>
-              <a:rPr>
-                <a:solidFill>
-                  <a:srgbClr val="BB6688"/>
-                </a:solidFill>
-                <a:latin typeface="Courier"/>
-              </a:rPr>
-              <a:t>f"</a:t>
-            </a:r>
-            <a:r>
-              <a:rPr>
-                <a:solidFill>
-                  <a:srgbClr val="4070A0"/>
-                </a:solidFill>
-                <a:latin typeface="Courier"/>
-              </a:rPr>
-              <a:t>{</a:t>
-            </a:r>
-            <a:r>
-              <a:rPr>
-                <a:latin typeface="Courier"/>
-              </a:rPr>
-              <a:t>name</a:t>
-            </a:r>
-            <a:r>
-              <a:rPr>
-                <a:solidFill>
-                  <a:srgbClr val="4070A0"/>
-                </a:solidFill>
-                <a:latin typeface="Courier"/>
-              </a:rPr>
-              <a:t>:10s}</a:t>
-            </a:r>
-            <a:r>
-              <a:rPr>
-                <a:solidFill>
-                  <a:srgbClr val="BB6688"/>
-                </a:solidFill>
-                <a:latin typeface="Courier"/>
-              </a:rPr>
-              <a:t> se = </a:t>
-            </a:r>
-            <a:r>
-              <a:rPr>
-                <a:solidFill>
-                  <a:srgbClr val="4070A0"/>
-                </a:solidFill>
-                <a:latin typeface="Courier"/>
-              </a:rPr>
-              <a:t>{</a:t>
-            </a:r>
-            <a:r>
-              <a:rPr>
-                <a:latin typeface="Courier"/>
-              </a:rPr>
-              <a:t>np</a:t>
-            </a:r>
-            <a:r>
-              <a:rPr>
-                <a:solidFill>
-                  <a:srgbClr val="4070A0"/>
-                </a:solidFill>
-                <a:latin typeface="Courier"/>
-              </a:rPr>
-              <a:t>.</a:t>
-            </a:r>
-            <a:r>
-              <a:rPr>
-                <a:latin typeface="Courier"/>
-              </a:rPr>
-              <a:t>asarray(r.bse)[i]</a:t>
-            </a:r>
-            <a:r>
-              <a:rPr>
-                <a:solidFill>
-                  <a:srgbClr val="4070A0"/>
-                </a:solidFill>
-                <a:latin typeface="Courier"/>
-              </a:rPr>
-              <a:t>:.4f}</a:t>
-            </a:r>
-            <a:r>
-              <a:rPr>
-                <a:solidFill>
-                  <a:srgbClr val="BB6688"/>
-                </a:solidFill>
-                <a:latin typeface="Courier"/>
-              </a:rPr>
-              <a:t>"</a:t>
-            </a:r>
-            <a:r>
-              <a:rPr>
-                <a:latin typeface="Courier"/>
-              </a:rPr>
-              <a:t>)</a:t>
-            </a:r>
-          </a:p>
-          <a:p>
-            <a:pPr lvl="0" indent="0" marL="0">
-              <a:buNone/>
-            </a:pPr>
-            <a:r>
-              <a:rPr/>
-              <a:t>Index by </a:t>
-            </a:r>
-            <a:r>
-              <a:rPr b="1"/>
-              <a:t>name</a:t>
-            </a:r>
-            <a:r>
-              <a:rPr/>
-              <a:t>, not position. </a:t>
-            </a:r>
-            <a:r>
-              <a:rPr>
-                <a:latin typeface="Courier"/>
-              </a:rPr>
-              <a:t>m.bse</a:t>
-            </a:r>
-            <a:r>
-              <a:rPr/>
-              <a:t> is a name-indexed Series while the robust results return a plain array, so </a:t>
-            </a:r>
-            <a:r>
-              <a:rPr>
-                <a:latin typeface="Courier"/>
-              </a:rPr>
-              <a:t>bse[1]</a:t>
-            </a:r>
-            <a:r>
-              <a:rPr/>
-              <a:t> means different things — or raises — depending on which object you hand it.</a:t>
-            </a:r>
-          </a:p>
-          <a:p>
-            <a:pPr lvl="0" indent="0" marL="0">
-              <a:buNone/>
-            </a:pPr>
-            <a:r>
-              <a:rPr/>
-              <a:t>The coefficient is identical in all three. Only the standard error moves. On this specification the clustered one is about </a:t>
-            </a:r>
-            <a:r>
-              <a:rPr b="1"/>
-              <a:t>3× the classical</a:t>
-            </a:r>
-            <a:r>
-              <a:rPr/>
-              <a:t> — so a t-statistic of 6 was really a t-statistic of 2.</a:t>
-            </a:r>
-          </a:p>
-        </p:txBody>
-      </p:sp>
-    </p:spTree>
-  </p:cSld>
-</p:sld>
-</file>
-
-<file path=ppt/slides/slide2.xml><?xml version="1.0" encoding="utf-8"?>
-<p:sld xmlns:a="http://schemas.openxmlformats.org/drawingml/2006/main" xmlns:r="http://schemas.openxmlformats.org/officeDocument/2006/relationships" xmlns:p="http://schemas.openxmlformats.org/presentationml/2006/main">
-  <p:cSld>
-    <p:spTree>
-      <p:nvGrpSpPr>
-        <p:cNvPr id="1" name=""/>
-        <p:cNvGrpSpPr/>
-        <p:nvPr/>
-      </p:nvGrpSpPr>
-      <p:grpSpPr>
-        <a:xfrm>
-          <a:off x="0" y="0"/>
-          <a:ext cx="0" cy="0"/>
-          <a:chOff x="0" y="0"/>
-          <a:chExt cx="0" cy="0"/>
-        </a:xfrm>
-      </p:grpSpPr>
-      <p:sp>
-        <p:nvSpPr>
-          <p:cNvPr id="2" name="Title 1"/>
-          <p:cNvSpPr>
-            <a:spLocks noGrp="1"/>
-          </p:cNvSpPr>
-          <p:nvPr>
-            <p:ph type="title"/>
-          </p:nvPr>
-        </p:nvSpPr>
-        <p:spPr>
-          <a:xfrm>
-            <a:off x="722313" y="3305176"/>
-            <a:ext cx="7772400" cy="1021556"/>
-          </a:xfrm>
-        </p:spPr>
-        <p:txBody>
-          <a:bodyPr/>
-          <a:lstStyle/>
-          <a:p>
-            <a:pPr lvl="0" indent="0" marL="0">
-              <a:buNone/>
-            </a:pPr>
-            <a:r>
-              <a:rPr/>
-              <a:t>Where we are</a:t>
-            </a:r>
-          </a:p>
-        </p:txBody>
-      </p:sp>
-    </p:spTree>
-  </p:cSld>
-</p:sld>
-</file>
-
-<file path=ppt/slides/slide20.xml><?xml version="1.0" encoding="utf-8"?>
-<p:sld xmlns:a="http://schemas.openxmlformats.org/drawingml/2006/main" xmlns:r="http://schemas.openxmlformats.org/officeDocument/2006/relationships" xmlns:p="http://schemas.openxmlformats.org/presentationml/2006/main">
-  <p:cSld>
-    <p:spTree>
-      <p:nvGrpSpPr>
-        <p:cNvPr id="1" name=""/>
-        <p:cNvGrpSpPr/>
-        <p:nvPr/>
-      </p:nvGrpSpPr>
-      <p:grpSpPr>
-        <a:xfrm>
-          <a:off x="0" y="0"/>
-          <a:ext cx="0" cy="0"/>
-          <a:chOff x="0" y="0"/>
-          <a:chExt cx="0" cy="0"/>
-        </a:xfrm>
-      </p:grpSpPr>
-      <p:sp>
-        <p:nvSpPr>
-          <p:cNvPr id="2" name="Title 1"/>
-          <p:cNvSpPr>
-            <a:spLocks noGrp="1"/>
-          </p:cNvSpPr>
-          <p:nvPr>
-            <p:ph type="title"/>
-          </p:nvPr>
-        </p:nvSpPr>
-        <p:spPr/>
-        <p:txBody>
-          <a:bodyPr/>
-          <a:lstStyle/>
-          <a:p>
-            <a:pPr lvl="0" indent="0" marL="0">
-              <a:buNone/>
-            </a:pPr>
-            <a:r>
-              <a:rPr/>
-              <a:t>Clustering stops mattering — watch</a:t>
-            </a:r>
-          </a:p>
-        </p:txBody>
-      </p:sp>
-      <p:sp>
-        <p:nvSpPr>
-          <p:cNvPr id="3" name="Content Placeholder 2"/>
-          <p:cNvSpPr>
-            <a:spLocks noGrp="1"/>
-          </p:cNvSpPr>
-          <p:nvPr>
-            <p:ph idx="1"/>
-          </p:nvPr>
-        </p:nvSpPr>
-        <p:spPr/>
-        <p:txBody>
-          <a:bodyPr/>
-          <a:lstStyle/>
-          <a:p>
-            <a:pPr lvl="0" indent="0" marL="0">
-              <a:buNone/>
-            </a:pPr>
-            <a:r>
-              <a:rPr/>
-              <a:t>Add a country-level control and re-run:</a:t>
-            </a:r>
-          </a:p>
-          <a:p>
-            <a:pPr lvl="0" indent="0">
-              <a:buNone/>
-            </a:pPr>
-            <a:r>
-              <a:rPr>
-                <a:latin typeface="Courier"/>
-              </a:rPr>
-              <a:t>m2 </a:t>
-            </a:r>
-            <a:r>
-              <a:rPr>
-                <a:solidFill>
-                  <a:srgbClr val="666666"/>
-                </a:solidFill>
-                <a:latin typeface="Courier"/>
-              </a:rPr>
-              <a:t>=</a:t>
-            </a:r>
-            <a:r>
-              <a:rPr>
-                <a:latin typeface="Courier"/>
-              </a:rPr>
-              <a:t> smf.ols(</a:t>
-            </a:r>
-            <a:r>
-              <a:rPr>
-                <a:solidFill>
-                  <a:srgbClr val="4070A0"/>
-                </a:solidFill>
-                <a:latin typeface="Courier"/>
-              </a:rPr>
-              <a:t>"np.log(annual_earnings_eur) ~ tertiary_share + vacancy_rate "</a:t>
-            </a:r>
-            <a:br/>
-            <a:r>
-              <a:rPr>
-                <a:latin typeface="Courier"/>
-              </a:rPr>
-              <a:t>             </a:t>
-            </a:r>
-            <a:r>
-              <a:rPr>
-                <a:solidFill>
-                  <a:srgbClr val="4070A0"/>
-                </a:solidFill>
-                <a:latin typeface="Courier"/>
-              </a:rPr>
-              <a:t>"+ np.log(gdp_pc_eur) + C(nace_r2)"</a:t>
-            </a:r>
-            <a:r>
-              <a:rPr>
-                <a:latin typeface="Courier"/>
-              </a:rPr>
-              <a:t>, data</a:t>
-            </a:r>
-            <a:r>
-              <a:rPr>
-                <a:solidFill>
-                  <a:srgbClr val="666666"/>
-                </a:solidFill>
-                <a:latin typeface="Courier"/>
-              </a:rPr>
-              <a:t>=</a:t>
-            </a:r>
-            <a:r>
-              <a:rPr>
-                <a:latin typeface="Courier"/>
-              </a:rPr>
-              <a:t>df).fit()</a:t>
-            </a:r>
-          </a:p>
-          <a:p>
-            <a:pPr lvl="0" indent="0" marL="0">
-              <a:buNone/>
-            </a:pPr>
-            <a:r>
-              <a:rPr/>
-              <a:t>Now classical and clustered standard errors are </a:t>
-            </a:r>
-            <a:r>
-              <a:rPr b="1"/>
-              <a:t>almost identical</a:t>
-            </a:r>
-            <a:r>
-              <a:rPr/>
-              <a:t> — the ratio falls to about 1.0.</a:t>
-            </a:r>
-          </a:p>
-        </p:txBody>
-      </p:sp>
-    </p:spTree>
-  </p:cSld>
-</p:sld>
-</file>
-
-<file path=ppt/slides/slide21.xml><?xml version="1.0" encoding="utf-8"?>
-<p:sld xmlns:a="http://schemas.openxmlformats.org/drawingml/2006/main" xmlns:r="http://schemas.openxmlformats.org/officeDocument/2006/relationships" xmlns:p="http://schemas.openxmlformats.org/presentationml/2006/main">
-  <p:cSld>
-    <p:spTree>
-      <p:nvGrpSpPr>
-        <p:cNvPr id="1" name=""/>
-        <p:cNvGrpSpPr/>
-        <p:nvPr/>
-      </p:nvGrpSpPr>
-      <p:grpSpPr>
-        <a:xfrm>
-          <a:off x="0" y="0"/>
-          <a:ext cx="0" cy="0"/>
-          <a:chOff x="0" y="0"/>
-          <a:chExt cx="0" cy="0"/>
-        </a:xfrm>
-      </p:grpSpPr>
-      <p:sp>
-        <p:nvSpPr>
-          <p:cNvPr id="2" name="Title 1"/>
-          <p:cNvSpPr>
-            <a:spLocks noGrp="1"/>
-          </p:cNvSpPr>
-          <p:nvPr>
-            <p:ph type="title"/>
-          </p:nvPr>
-        </p:nvSpPr>
-        <p:spPr/>
-        <p:txBody>
-          <a:bodyPr/>
-          <a:lstStyle/>
-          <a:p>
-            <a:pPr lvl="0" indent="0" marL="0">
-              <a:buNone/>
-            </a:pPr>
-            <a:r>
-              <a:rPr/>
-              <a:t>Why that happened</a:t>
-            </a:r>
-          </a:p>
-        </p:txBody>
-      </p:sp>
-      <p:sp>
-        <p:nvSpPr>
-          <p:cNvPr id="3" name="Content Placeholder 2"/>
-          <p:cNvSpPr>
-            <a:spLocks noGrp="1"/>
-          </p:cNvSpPr>
-          <p:nvPr>
-            <p:ph idx="1"/>
-          </p:nvPr>
-        </p:nvSpPr>
-        <p:spPr/>
-        <p:txBody>
-          <a:bodyPr/>
-          <a:lstStyle/>
-          <a:p>
-            <a:pPr lvl="0" indent="0" marL="0">
-              <a:buNone/>
-            </a:pPr>
-            <a:r>
-              <a:rPr>
-                <a:latin typeface="Courier"/>
-              </a:rPr>
-              <a:t>log(gdp_pc_eur)</a:t>
-            </a:r>
-            <a:r>
-              <a:rPr/>
-              <a:t> varies at the country-year level. Putting it in the model </a:t>
-            </a:r>
-            <a:r>
-              <a:rPr b="1"/>
-              <a:t>absorbs the common shock</a:t>
-            </a:r>
-            <a:r>
-              <a:rPr/>
-              <a:t> that was making residuals correlate within a country. There is little correlation left for clustering to correct.</a:t>
-            </a:r>
-          </a:p>
-          <a:p>
-            <a:pPr lvl="0"/>
-            <a:r>
-              <a:rPr/>
-              <a:t>Clustered SEs matter when a </a:t>
-            </a:r>
-            <a:r>
-              <a:rPr b="1"/>
-              <a:t>shared, unmodelled</a:t>
-            </a:r>
-            <a:r>
-              <a:rPr/>
-              <a:t> shock is in the residual</a:t>
-            </a:r>
-          </a:p>
-          <a:p>
-            <a:pPr lvl="0"/>
-            <a:r>
-              <a:rPr/>
-              <a:t>Model that shock explicitly and the correction shrinks</a:t>
-            </a:r>
-          </a:p>
-          <a:p>
-            <a:pPr lvl="0"/>
-            <a:r>
-              <a:rPr/>
-              <a:t>Neither route is cheating; they are the same fact handled in two places</a:t>
-            </a:r>
-          </a:p>
-          <a:p>
-            <a:pPr lvl="0" indent="0" marL="0">
-              <a:buNone/>
-            </a:pPr>
-            <a:r>
-              <a:rPr/>
-              <a:t>Do </a:t>
-            </a:r>
-            <a:r>
-              <a:rPr b="1"/>
-              <a:t>not</a:t>
-            </a:r>
-            <a:r>
-              <a:rPr/>
-              <a:t> conclude “clustering never matters, just add controls”. A control that absorbs the shock may also absorb the variation you wanted to study.</a:t>
-            </a:r>
-          </a:p>
-        </p:txBody>
-      </p:sp>
     </p:spTree>
   </p:cSld>
 </p:sld>
@@ -6372,7 +5515,7 @@
             </a:pPr>
             <a:r>
               <a:rPr/>
-              <a:t>Which one do you report?</a:t>
+              <a:t>Sign the bias with two questions</a:t>
             </a:r>
           </a:p>
         </p:txBody>
@@ -6394,61 +5537,69 @@
               <a:bodyPr/>
               <a:lstStyle/>
               <a:p>
-                <a:pPr lvl="0"/>
+                <a:pPr lvl="0" indent="-342900" marL="342900">
+                  <a:buAutoNum type="arabicPeriod"/>
+                </a:pPr>
                 <a:r>
                   <a:rPr/>
-                  <a:t>Cluster at the level at which </a:t>
+                  <a:t>How does the omitted variable relate to </a:t>
                 </a:r>
                 <a:r>
                   <a:rPr b="1"/>
-                  <a:t>treatment varies</a:t>
+                  <a:t>my regressor</a:t>
                 </a:r>
                 <a:r>
                   <a:rPr/>
-                  <a:t> and shocks are shared — here, </a:t>
-                </a:r>
-                <a:r>
-                  <a:rPr>
-                    <a:latin typeface="Courier"/>
-                  </a:rPr>
-                  <a:t>geo</a:t>
-                </a:r>
-                <a:r>
-                  <a:rPr/>
-                  <a:t>.</a:t>
-                </a:r>
-              </a:p>
-              <a:p>
-                <a:pPr lvl="0"/>
-                <a:r>
-                  <a:rPr/>
-                  <a:t>With 30 countries you are near the small-</a:t>
+                  <a:t>? → </a:t>
                 </a:r>
                 <a14:m>
                   <m:oMath xmlns:m="http://schemas.openxmlformats.org/officeDocument/2006/math">
                     <m:r>
-                      <m:t>G</m:t>
+                      <m:t>δ</m:t>
                     </m:r>
                   </m:oMath>
                 </a14:m>
+              </a:p>
+              <a:p>
+                <a:pPr lvl="0" indent="-342900" marL="342900">
+                  <a:buAutoNum type="arabicPeriod"/>
+                </a:pPr>
                 <a:r>
                   <a:rPr/>
-                  <a:t> regime; clustered standard errors are themselves noisy.</a:t>
-                </a:r>
-              </a:p>
-              <a:p>
-                <a:pPr lvl="0"/>
-                <a:r>
-                  <a:rPr/>
-                  <a:t>Report the clustered version, </a:t>
+                  <a:t>How does it relate to the </a:t>
                 </a:r>
                 <a:r>
                   <a:rPr b="1"/>
-                  <a:t>say</a:t>
+                  <a:t>outcome</a:t>
                 </a:r>
                 <a:r>
                   <a:rPr/>
-                  <a:t> you clustered, and say on what.</a:t>
+                  <a:t>? → </a:t>
+                </a:r>
+                <a14:m>
+                  <m:oMath xmlns:m="http://schemas.openxmlformats.org/officeDocument/2006/math">
+                    <m:sSub>
+                      <m:e>
+                        <m:r>
+                          <m:t>β</m:t>
+                        </m:r>
+                      </m:e>
+                      <m:sub>
+                        <m:r>
+                          <m:t>2</m:t>
+                        </m:r>
+                      </m:sub>
+                    </m:sSub>
+                  </m:oMath>
+                </a14:m>
+              </a:p>
+              <a:p>
+                <a:pPr lvl="0" indent="0" marL="0">
+                  <a:buNone/>
+                </a:pPr>
+                <a:r>
+                  <a:rPr b="1"/>
+                  <a:t>Same sign in both → upward bias.</a:t>
                 </a:r>
               </a:p>
               <a:p>
@@ -6457,7 +5608,15 @@
                 </a:pPr>
                 <a:r>
                   <a:rPr/>
-                  <a:t>“Robust standard errors” in a table note without naming the cluster level tells the reader nothing. Two papers can write that sentence and mean different things.</a:t>
+                  <a:t>Answer both in writing </a:t>
+                </a:r>
+                <a:r>
+                  <a:rPr i="1"/>
+                  <a:t>before</a:t>
+                </a:r>
+                <a:r>
+                  <a:rPr/>
+                  <a:t> you estimate. The single most useful discipline in applied work, and it is free.</a:t>
                 </a:r>
               </a:p>
             </p:txBody>
@@ -6496,7 +5655,12 @@
             <p:ph type="title"/>
           </p:nvPr>
         </p:nvSpPr>
-        <p:spPr/>
+        <p:spPr>
+          <a:xfrm>
+            <a:off x="722313" y="3305176"/>
+            <a:ext cx="7772400" cy="1021556"/>
+          </a:xfrm>
+        </p:spPr>
         <p:txBody>
           <a:bodyPr/>
           <a:lstStyle/>
@@ -6506,321 +5670,11 @@
             </a:pPr>
             <a:r>
               <a:rPr/>
-              <a:t>The confounder you can sign</a:t>
-            </a:r>
-          </a:p>
-        </p:txBody>
-      </p:sp>
-      <mc:AlternateContent xmlns:mc="http://schemas.openxmlformats.org/markup-compatibility/2006">
-        <mc:Choice xmlns:a14="http://schemas.microsoft.com/office/drawing/2010/main" Requires="a14">
-          <p:sp>
-            <p:nvSpPr>
-              <p:cNvPr id="3" name="Content Placeholder 2"/>
-              <p:cNvSpPr>
-                <a:spLocks noGrp="1"/>
-              </p:cNvSpPr>
-              <p:nvPr>
-                <p:ph idx="1"/>
-              </p:nvPr>
-            </p:nvSpPr>
-            <p:spPr/>
-            <p:txBody>
-              <a:bodyPr/>
-              <a:lstStyle/>
-              <a:p>
-                <a:pPr lvl="0" indent="0" marL="0">
-                  <a:buNone/>
-                </a:pPr>
-                <a:r>
-                  <a:rPr/>
-                  <a:t>Suppose you omit </a:t>
-                </a:r>
-                <a:r>
-                  <a:rPr>
-                    <a:latin typeface="Courier"/>
-                  </a:rPr>
-                  <a:t>productivity_idx</a:t>
-                </a:r>
-                <a:r>
-                  <a:rPr/>
-                  <a:t>.</a:t>
-                </a:r>
-              </a:p>
-              <a:p>
-                <a:pPr lvl="0"/>
-                <a:r>
-                  <a:rPr/>
-                  <a:t>Productive countries have </a:t>
-                </a:r>
-                <a:r>
-                  <a:rPr b="1"/>
-                  <a:t>higher</a:t>
-                </a:r>
-                <a:r>
-                  <a:rPr/>
-                  <a:t> earnings → </a:t>
-                </a:r>
-                <a14:m>
-                  <m:oMath xmlns:m="http://schemas.openxmlformats.org/officeDocument/2006/math">
-                    <m:sSub>
-                      <m:e>
-                        <m:r>
-                          <m:t>β</m:t>
-                        </m:r>
-                      </m:e>
-                      <m:sub>
-                        <m:r>
-                          <m:t>2</m:t>
-                        </m:r>
-                      </m:sub>
-                    </m:sSub>
-                    <m:r>
-                      <m:rPr>
-                        <m:sty m:val="p"/>
-                      </m:rPr>
-                      <m:t>&gt;</m:t>
-                    </m:r>
-                    <m:r>
-                      <m:t>0</m:t>
-                    </m:r>
-                  </m:oMath>
-                </a14:m>
-              </a:p>
-              <a:p>
-                <a:pPr lvl="0"/>
-                <a:r>
-                  <a:rPr/>
-                  <a:t>Productive countries also have </a:t>
-                </a:r>
-                <a:r>
-                  <a:rPr b="1"/>
-                  <a:t>higher</a:t>
-                </a:r>
-                <a:r>
-                  <a:rPr/>
-                  <a:t> tertiary shares → </a:t>
-                </a:r>
-                <a14:m>
-                  <m:oMath xmlns:m="http://schemas.openxmlformats.org/officeDocument/2006/math">
-                    <m:r>
-                      <m:t>δ</m:t>
-                    </m:r>
-                    <m:r>
-                      <m:rPr>
-                        <m:sty m:val="p"/>
-                      </m:rPr>
-                      <m:t>&gt;</m:t>
-                    </m:r>
-                    <m:r>
-                      <m:t>0</m:t>
-                    </m:r>
-                  </m:oMath>
-                </a14:m>
-              </a:p>
-              <a:p>
-                <a:pPr lvl="0"/>
-                <a:r>
-                  <a:rPr/>
-                  <a:t>Therefore the omitted-variable bias on </a:t>
-                </a:r>
-                <a:r>
-                  <a:rPr>
-                    <a:latin typeface="Courier"/>
-                  </a:rPr>
-                  <a:t>tertiary_share</a:t>
-                </a:r>
-                <a:r>
-                  <a:rPr/>
-                  <a:t> is </a:t>
-                </a:r>
-                <a:r>
-                  <a:rPr b="1"/>
-                  <a:t>upward</a:t>
-                </a:r>
-              </a:p>
-              <a:p>
-                <a:pPr lvl="0" indent="0">
-                  <a:buNone/>
-                </a:pPr>
-                <a:r>
-                  <a:rPr>
-                    <a:latin typeface="Courier"/>
-                  </a:rPr>
-                  <a:t>short </a:t>
-                </a:r>
-                <a:r>
-                  <a:rPr>
-                    <a:solidFill>
-                      <a:srgbClr val="666666"/>
-                    </a:solidFill>
-                    <a:latin typeface="Courier"/>
-                  </a:rPr>
-                  <a:t>=</a:t>
-                </a:r>
-                <a:r>
-                  <a:rPr>
-                    <a:latin typeface="Courier"/>
-                  </a:rPr>
-                  <a:t> smf.ols(</a:t>
-                </a:r>
-                <a:r>
-                  <a:rPr>
-                    <a:solidFill>
-                      <a:srgbClr val="4070A0"/>
-                    </a:solidFill>
-                    <a:latin typeface="Courier"/>
-                  </a:rPr>
-                  <a:t>"np.log(annual_earnings_eur) ~ tertiary_share"</a:t>
-                </a:r>
-                <a:r>
-                  <a:rPr>
-                    <a:latin typeface="Courier"/>
-                  </a:rPr>
-                  <a:t>, data</a:t>
-                </a:r>
-                <a:r>
-                  <a:rPr>
-                    <a:solidFill>
-                      <a:srgbClr val="666666"/>
-                    </a:solidFill>
-                    <a:latin typeface="Courier"/>
-                  </a:rPr>
-                  <a:t>=</a:t>
-                </a:r>
-                <a:r>
-                  <a:rPr>
-                    <a:latin typeface="Courier"/>
-                  </a:rPr>
-                  <a:t>df).fit()</a:t>
-                </a:r>
-                <a:br/>
-                <a:r>
-                  <a:rPr>
-                    <a:latin typeface="Courier"/>
-                  </a:rPr>
-                  <a:t>long_ </a:t>
-                </a:r>
-                <a:r>
-                  <a:rPr>
-                    <a:solidFill>
-                      <a:srgbClr val="666666"/>
-                    </a:solidFill>
-                    <a:latin typeface="Courier"/>
-                  </a:rPr>
-                  <a:t>=</a:t>
-                </a:r>
-                <a:r>
-                  <a:rPr>
-                    <a:latin typeface="Courier"/>
-                  </a:rPr>
-                  <a:t> smf.ols(</a:t>
-                </a:r>
-                <a:r>
-                  <a:rPr>
-                    <a:solidFill>
-                      <a:srgbClr val="4070A0"/>
-                    </a:solidFill>
-                    <a:latin typeface="Courier"/>
-                  </a:rPr>
-                  <a:t>"np.log(annual_earnings_eur) ~ tertiary_share "</a:t>
-                </a:r>
-                <a:br/>
-                <a:r>
-                  <a:rPr>
-                    <a:latin typeface="Courier"/>
-                  </a:rPr>
-                  <a:t>                </a:t>
-                </a:r>
-                <a:r>
-                  <a:rPr>
-                    <a:solidFill>
-                      <a:srgbClr val="4070A0"/>
-                    </a:solidFill>
-                    <a:latin typeface="Courier"/>
-                  </a:rPr>
-                  <a:t>"+ productivity_idx"</a:t>
-                </a:r>
-                <a:r>
-                  <a:rPr>
-                    <a:latin typeface="Courier"/>
-                  </a:rPr>
-                  <a:t>, data</a:t>
-                </a:r>
-                <a:r>
-                  <a:rPr>
-                    <a:solidFill>
-                      <a:srgbClr val="666666"/>
-                    </a:solidFill>
-                    <a:latin typeface="Courier"/>
-                  </a:rPr>
-                  <a:t>=</a:t>
-                </a:r>
-                <a:r>
-                  <a:rPr>
-                    <a:latin typeface="Courier"/>
-                  </a:rPr>
-                  <a:t>df).fit()</a:t>
-                </a:r>
-                <a:br/>
-                <a:r>
-                  <a:rPr>
-                    <a:solidFill>
-                      <a:srgbClr val="008000"/>
-                    </a:solidFill>
-                    <a:latin typeface="Courier"/>
-                  </a:rPr>
-                  <a:t>print</a:t>
-                </a:r>
-                <a:r>
-                  <a:rPr>
-                    <a:latin typeface="Courier"/>
-                  </a:rPr>
-                  <a:t>(short.params[</a:t>
-                </a:r>
-                <a:r>
-                  <a:rPr>
-                    <a:solidFill>
-                      <a:srgbClr val="4070A0"/>
-                    </a:solidFill>
-                    <a:latin typeface="Courier"/>
-                  </a:rPr>
-                  <a:t>"tertiary_share"</a:t>
-                </a:r>
-                <a:r>
-                  <a:rPr>
-                    <a:latin typeface="Courier"/>
-                  </a:rPr>
-                  <a:t>], long_.params[</a:t>
-                </a:r>
-                <a:r>
-                  <a:rPr>
-                    <a:solidFill>
-                      <a:srgbClr val="4070A0"/>
-                    </a:solidFill>
-                    <a:latin typeface="Courier"/>
-                  </a:rPr>
-                  <a:t>"tertiary_share"</a:t>
-                </a:r>
-                <a:r>
-                  <a:rPr>
-                    <a:latin typeface="Courier"/>
-                  </a:rPr>
-                  <a:t>])</a:t>
-                </a:r>
-              </a:p>
-              <a:p>
-                <a:pPr lvl="0" indent="0" marL="0">
-                  <a:buNone/>
-                </a:pPr>
-                <a:r>
-                  <a:rPr/>
-                  <a:t>The short coefficient should exceed the long one. You predicted the direction before you ran it.</a:t>
-                </a:r>
-              </a:p>
-            </p:txBody>
-          </p:sp>
-        </mc:Choice>
-      </mc:AlternateContent>
+              <a:t>3.5 A Mincer coefficient</a:t>
+            </a:r>
+          </a:p>
+        </p:txBody>
+      </p:sp>
     </p:spTree>
   </p:cSld>
 </p:sld>
@@ -6863,131 +5717,7 @@
             </a:pPr>
             <a:r>
               <a:rPr/>
-              <a:t>What to report</a:t>
-            </a:r>
-          </a:p>
-        </p:txBody>
-      </p:sp>
-      <p:sp>
-        <p:nvSpPr>
-          <p:cNvPr id="3" name="Content Placeholder 2"/>
-          <p:cNvSpPr>
-            <a:spLocks noGrp="1"/>
-          </p:cNvSpPr>
-          <p:nvPr>
-            <p:ph idx="1"/>
-          </p:nvPr>
-        </p:nvSpPr>
-        <p:spPr/>
-        <p:txBody>
-          <a:bodyPr/>
-          <a:lstStyle/>
-          <a:p>
-            <a:pPr lvl="0"/>
-            <a:r>
-              <a:rPr/>
-              <a:t>The coefficient, its </a:t>
-            </a:r>
-            <a:r>
-              <a:rPr b="1"/>
-              <a:t>clustered</a:t>
-            </a:r>
-            <a:r>
-              <a:rPr/>
-              <a:t> standard error, and the cluster unit</a:t>
-            </a:r>
-          </a:p>
-          <a:p>
-            <a:pPr lvl="0"/>
-            <a:r>
-              <a:rPr/>
-              <a:t>The residual plot, or a sentence about what it showed</a:t>
-            </a:r>
-          </a:p>
-          <a:p>
-            <a:pPr lvl="0"/>
-            <a:r>
-              <a:rPr/>
-              <a:t>The confounder you worried about and </a:t>
-            </a:r>
-            <a:r>
-              <a:rPr b="1"/>
-              <a:t>which way</a:t>
-            </a:r>
-            <a:r>
-              <a:rPr/>
-              <a:t> it would bias you</a:t>
-            </a:r>
-          </a:p>
-          <a:p>
-            <a:pPr lvl="0"/>
-            <a:r>
-              <a:rPr/>
-              <a:t>Sample size </a:t>
-            </a:r>
-            <a:r>
-              <a:rPr b="1"/>
-              <a:t>and</a:t>
-            </a:r>
-            <a:r>
-              <a:rPr/>
-              <a:t> number of clusters — 3,150 and 30 are both true, and only one governs precision</a:t>
-            </a:r>
-          </a:p>
-          <a:p>
-            <a:pPr lvl="0" indent="0" marL="0">
-              <a:buNone/>
-            </a:pPr>
-            <a:r>
-              <a:rPr/>
-              <a:t>A p-value answers “how surprising is this under the null?” — not “how large is the effect?” and not “is the model right?”. Report the magnitude in euros.</a:t>
-            </a:r>
-          </a:p>
-        </p:txBody>
-      </p:sp>
-    </p:spTree>
-  </p:cSld>
-</p:sld>
-</file>
-
-<file path=ppt/slides/slide25.xml><?xml version="1.0" encoding="utf-8"?>
-<p:sld xmlns:a="http://schemas.openxmlformats.org/drawingml/2006/main" xmlns:r="http://schemas.openxmlformats.org/officeDocument/2006/relationships" xmlns:p="http://schemas.openxmlformats.org/presentationml/2006/main">
-  <p:cSld>
-    <p:spTree>
-      <p:nvGrpSpPr>
-        <p:cNvPr id="1" name=""/>
-        <p:cNvGrpSpPr/>
-        <p:nvPr/>
-      </p:nvGrpSpPr>
-      <p:grpSpPr>
-        <a:xfrm>
-          <a:off x="0" y="0"/>
-          <a:ext cx="0" cy="0"/>
-          <a:chOff x="0" y="0"/>
-          <a:chExt cx="0" cy="0"/>
-        </a:xfrm>
-      </p:grpSpPr>
-      <p:sp>
-        <p:nvSpPr>
-          <p:cNvPr id="2" name="Title 1"/>
-          <p:cNvSpPr>
-            <a:spLocks noGrp="1"/>
-          </p:cNvSpPr>
-          <p:nvPr>
-            <p:ph type="title"/>
-          </p:nvPr>
-        </p:nvSpPr>
-        <p:spPr/>
-        <p:txBody>
-          <a:bodyPr/>
-          <a:lstStyle/>
-          <a:p>
-            <a:pPr lvl="0" indent="0" marL="0">
-              <a:buNone/>
-            </a:pPr>
-            <a:r>
-              <a:rPr/>
-              <a:t>What a p-value is</a:t>
+              <a:t>What it identifies</a:t>
             </a:r>
           </a:p>
         </p:txBody>
@@ -7019,8 +5749,23 @@
                     </m:oMathParaPr>
                     <m:oMath>
                       <m:r>
-                        <m:t>p</m:t>
+                        <m:rPr>
+                          <m:sty m:val="p"/>
+                        </m:rPr>
+                        <m:t>log</m:t>
                       </m:r>
+                      <m:sSub>
+                        <m:e>
+                          <m:r>
+                            <m:t>w</m:t>
+                          </m:r>
+                        </m:e>
+                        <m:sub>
+                          <m:r>
+                            <m:t>i</m:t>
+                          </m:r>
+                        </m:sub>
+                      </m:sSub>
                       <m:r>
                         <m:rPr>
                           <m:sty m:val="p"/>
@@ -7028,156 +5773,245 @@
                         <m:t>=</m:t>
                       </m:r>
                       <m:r>
-                        <m:rPr>
-                          <m:sty m:val="p"/>
-                        </m:rPr>
-                        <m:t>Pr</m:t>
+                        <m:t>α</m:t>
                       </m:r>
                       <m:r>
                         <m:rPr>
                           <m:sty m:val="p"/>
                         </m:rPr>
-                        <m:t>(</m:t>
+                        <m:t>+</m:t>
+                      </m:r>
+                      <m:r>
+                        <m:t>ρ</m:t>
                       </m:r>
                       <m:r>
                         <m:t> </m:t>
                       </m:r>
-                      <m:d>
-                        <m:dPr>
-                          <m:begChr m:val="|"/>
-                          <m:sepChr m:val=""/>
-                          <m:endChr m:val="|"/>
-                          <m:grow/>
-                        </m:dPr>
+                      <m:sSub>
                         <m:e>
                           <m:r>
-                            <m:t>T</m:t>
+                            <m:t>S</m:t>
                           </m:r>
                         </m:e>
-                      </m:d>
+                        <m:sub>
+                          <m:r>
+                            <m:t>i</m:t>
+                          </m:r>
+                        </m:sub>
+                      </m:sSub>
                       <m:r>
                         <m:rPr>
                           <m:sty m:val="p"/>
                         </m:rPr>
-                        <m:t>≥</m:t>
+                        <m:t>+</m:t>
                       </m:r>
-                      <m:d>
-                        <m:dPr>
-                          <m:begChr m:val="|"/>
-                          <m:sepChr m:val=""/>
-                          <m:endChr m:val="|"/>
-                          <m:grow/>
-                        </m:dPr>
-                        <m:e>
-                          <m:sSub>
-                            <m:e>
-                              <m:r>
-                                <m:t>t</m:t>
-                              </m:r>
-                            </m:e>
-                            <m:sub>
-                              <m:r>
-                                <m:rPr>
-                                  <m:nor/>
-                                  <m:sty m:val="p"/>
-                                </m:rPr>
-                                <m:t>obs</m:t>
-                              </m:r>
-                            </m:sub>
-                          </m:sSub>
-                        </m:e>
-                      </m:d>
-                      <m:r>
-                        <m:t> </m:t>
-                      </m:r>
-                      <m:d>
-                        <m:dPr>
-                          <m:begChr m:val="|"/>
-                          <m:sepChr m:val=""/>
-                          <m:endChr m:val=")"/>
-                          <m:grow/>
-                        </m:dPr>
+                      <m:sSub>
                         <m:e>
                           <m:r>
-                            <m:t> </m:t>
-                          </m:r>
-                          <m:sSub>
-                            <m:e>
-                              <m:r>
-                                <m:t>H</m:t>
-                              </m:r>
-                            </m:e>
-                            <m:sub>
-                              <m:r>
-                                <m:t>0</m:t>
-                              </m:r>
-                            </m:sub>
-                          </m:sSub>
-                          <m:r>
-                            <m:rPr>
-                              <m:nor/>
-                              <m:sty m:val="p"/>
-                            </m:rPr>
-                            <m:t> true</m:t>
-                          </m:r>
-                          <m:r>
-                            <m:t> </m:t>
+                            <m:t>γ</m:t>
                           </m:r>
                         </m:e>
-                      </m:d>
+                        <m:sub>
+                          <m:r>
+                            <m:t>1</m:t>
+                          </m:r>
+                        </m:sub>
+                      </m:sSub>
+                      <m:sSub>
+                        <m:e>
+                          <m:r>
+                            <m:t>X</m:t>
+                          </m:r>
+                        </m:e>
+                        <m:sub>
+                          <m:r>
+                            <m:t>i</m:t>
+                          </m:r>
+                        </m:sub>
+                      </m:sSub>
+                      <m:r>
+                        <m:rPr>
+                          <m:sty m:val="p"/>
+                        </m:rPr>
+                        <m:t>+</m:t>
+                      </m:r>
+                      <m:sSub>
+                        <m:e>
+                          <m:r>
+                            <m:t>γ</m:t>
+                          </m:r>
+                        </m:e>
+                        <m:sub>
+                          <m:r>
+                            <m:t>2</m:t>
+                          </m:r>
+                        </m:sub>
+                      </m:sSub>
+                      <m:sSubSup>
+                        <m:e>
+                          <m:r>
+                            <m:t>X</m:t>
+                          </m:r>
+                        </m:e>
+                        <m:sub>
+                          <m:r>
+                            <m:t>i</m:t>
+                          </m:r>
+                        </m:sub>
+                        <m:sup>
+                          <m:r>
+                            <m:t>2</m:t>
+                          </m:r>
+                        </m:sup>
+                      </m:sSubSup>
+                      <m:r>
+                        <m:rPr>
+                          <m:sty m:val="p"/>
+                        </m:rPr>
+                        <m:t>+</m:t>
+                      </m:r>
+                      <m:sSub>
+                        <m:e>
+                          <m:r>
+                            <m:t>ε</m:t>
+                          </m:r>
+                        </m:e>
+                        <m:sub>
+                          <m:r>
+                            <m:t>i</m:t>
+                          </m:r>
+                        </m:sub>
+                      </m:sSub>
                     </m:oMath>
                   </m:oMathPara>
                 </a14:m>
               </a:p>
               <a:p>
-                <a:pPr lvl="0"/>
-                <a:r>
-                  <a:rPr/>
-                  <a:t>✅ “If there were no effect, data this extreme would arise 3% of the time.”</a:t>
-                </a:r>
-              </a:p>
-              <a:p>
-                <a:pPr lvl="0"/>
-                <a:r>
-                  <a:rPr/>
-                  <a:t>❌ “There is a 97% chance the effect is real.”</a:t>
-                </a:r>
-              </a:p>
-              <a:p>
-                <a:pPr lvl="0"/>
-                <a:r>
-                  <a:rPr/>
-                  <a:t>❌ “The effect is large.”</a:t>
-                </a:r>
-              </a:p>
-              <a:p>
-                <a:pPr lvl="0"/>
-                <a:r>
-                  <a:rPr/>
-                  <a:t>❌ “The model is correct.”</a:t>
-                </a:r>
-              </a:p>
-              <a:p>
                 <a:pPr lvl="0" indent="0" marL="0">
                   <a:buNone/>
                 </a:pPr>
+                <a14:m>
+                  <m:oMath xmlns:m="http://schemas.openxmlformats.org/officeDocument/2006/math">
+                    <m:r>
+                      <m:t>ρ</m:t>
+                    </m:r>
+                  </m:oMath>
+                </a14:m>
                 <a:r>
                   <a:rPr/>
-                  <a:t>It is a statement about </a:t>
-                </a:r>
-                <a:r>
-                  <a:rPr b="1"/>
-                  <a:t>data under an assumed null</a:t>
-                </a:r>
-                <a:r>
-                  <a:rPr/>
-                  <a:t> — not about the hypothesis, and not about magnitude.</a:t>
+                  <a:t> is often read as “the return to a year of schooling”.</a:t>
                 </a:r>
               </a:p>
             </p:txBody>
           </p:sp>
         </mc:Choice>
       </mc:AlternateContent>
+    </p:spTree>
+  </p:cSld>
+</p:sld>
+</file>
+
+<file path=ppt/slides/slide25.xml><?xml version="1.0" encoding="utf-8"?>
+<p:sld xmlns:a="http://schemas.openxmlformats.org/drawingml/2006/main" xmlns:r="http://schemas.openxmlformats.org/officeDocument/2006/relationships" xmlns:p="http://schemas.openxmlformats.org/presentationml/2006/main">
+  <p:cSld>
+    <p:spTree>
+      <p:nvGrpSpPr>
+        <p:cNvPr id="1" name=""/>
+        <p:cNvGrpSpPr/>
+        <p:nvPr/>
+      </p:nvGrpSpPr>
+      <p:grpSpPr>
+        <a:xfrm>
+          <a:off x="0" y="0"/>
+          <a:ext cx="0" cy="0"/>
+          <a:chOff x="0" y="0"/>
+          <a:chExt cx="0" cy="0"/>
+        </a:xfrm>
+      </p:grpSpPr>
+      <p:sp>
+        <p:nvSpPr>
+          <p:cNvPr id="2" name="Title 1"/>
+          <p:cNvSpPr>
+            <a:spLocks noGrp="1"/>
+          </p:cNvSpPr>
+          <p:nvPr>
+            <p:ph type="title"/>
+          </p:nvPr>
+        </p:nvSpPr>
+        <p:spPr/>
+        <p:txBody>
+          <a:bodyPr/>
+          <a:lstStyle/>
+          <a:p>
+            <a:pPr lvl="0" indent="0" marL="0">
+              <a:buNone/>
+            </a:pPr>
+            <a:r>
+              <a:rPr/>
+              <a:t>Strictly</a:t>
+            </a:r>
+          </a:p>
+        </p:txBody>
+      </p:sp>
+      <p:sp>
+        <p:nvSpPr>
+          <p:cNvPr id="3" name="Content Placeholder 2"/>
+          <p:cNvSpPr>
+            <a:spLocks noGrp="1"/>
+          </p:cNvSpPr>
+          <p:nvPr>
+            <p:ph idx="1"/>
+          </p:nvPr>
+        </p:nvSpPr>
+        <p:spPr/>
+        <p:txBody>
+          <a:bodyPr/>
+          <a:lstStyle/>
+          <a:p>
+            <a:pPr lvl="0" indent="0" marL="1270000">
+              <a:buNone/>
+            </a:pPr>
+            <a:r>
+              <a:rPr sz="2000"/>
+              <a:t>The mean log-wage difference associated with an additional year of schooling </a:t>
+            </a:r>
+            <a:r>
+              <a:rPr sz="2000" b="1"/>
+              <a:t>among people who are otherwise identical on the included covariates</a:t>
+            </a:r>
+            <a:r>
+              <a:rPr sz="2000"/>
+              <a:t>.</a:t>
+            </a:r>
+          </a:p>
+          <a:p>
+            <a:pPr lvl="0" indent="0" marL="0">
+              <a:buNone/>
+            </a:pPr>
+            <a:r>
+              <a:rPr/>
+              <a:t>Unobserved ability, selection into schooling and measurement error all break the causal reading. Session 10 gives tools that take this seriously.</a:t>
+            </a:r>
+          </a:p>
+          <a:p>
+            <a:pPr lvl="0" indent="0" marL="0">
+              <a:buNone/>
+            </a:pPr>
+            <a:r>
+              <a:rPr/>
+              <a:t>Today the discipline is simply to </a:t>
+            </a:r>
+            <a:r>
+              <a:rPr b="1"/>
+              <a:t>say precisely what you have estimated</a:t>
+            </a:r>
+            <a:r>
+              <a:rPr/>
+              <a:t>.</a:t>
+            </a:r>
+          </a:p>
+        </p:txBody>
+      </p:sp>
     </p:spTree>
   </p:cSld>
 </p:sld>
@@ -7210,7 +6044,12 @@
             <p:ph type="title"/>
           </p:nvPr>
         </p:nvSpPr>
-        <p:spPr/>
+        <p:spPr>
+          <a:xfrm>
+            <a:off x="722313" y="3305176"/>
+            <a:ext cx="7772400" cy="1021556"/>
+          </a:xfrm>
+        </p:spPr>
         <p:txBody>
           <a:bodyPr/>
           <a:lstStyle/>
@@ -7220,7 +6059,665 @@
             </a:pPr>
             <a:r>
               <a:rPr/>
-              <a:t>How many clusters is enough?</a:t>
+              <a:t>The lab</a:t>
+            </a:r>
+          </a:p>
+        </p:txBody>
+      </p:sp>
+    </p:spTree>
+  </p:cSld>
+</p:sld>
+</file>
+
+<file path=ppt/slides/slide27.xml><?xml version="1.0" encoding="utf-8"?>
+<p:sld xmlns:a="http://schemas.openxmlformats.org/drawingml/2006/main" xmlns:r="http://schemas.openxmlformats.org/officeDocument/2006/relationships" xmlns:p="http://schemas.openxmlformats.org/presentationml/2006/main">
+  <p:cSld>
+    <p:spTree>
+      <p:nvGrpSpPr>
+        <p:cNvPr id="1" name=""/>
+        <p:cNvGrpSpPr/>
+        <p:nvPr/>
+      </p:nvGrpSpPr>
+      <p:grpSpPr>
+        <a:xfrm>
+          <a:off x="0" y="0"/>
+          <a:ext cx="0" cy="0"/>
+          <a:chOff x="0" y="0"/>
+          <a:chExt cx="0" cy="0"/>
+        </a:xfrm>
+      </p:grpSpPr>
+      <p:sp>
+        <p:nvSpPr>
+          <p:cNvPr id="2" name="Title 1"/>
+          <p:cNvSpPr>
+            <a:spLocks noGrp="1"/>
+          </p:cNvSpPr>
+          <p:nvPr>
+            <p:ph type="title"/>
+          </p:nvPr>
+        </p:nvSpPr>
+        <p:spPr/>
+        <p:txBody>
+          <a:bodyPr/>
+          <a:lstStyle/>
+          <a:p>
+            <a:pPr lvl="0" indent="0" marL="0">
+              <a:buNone/>
+            </a:pPr>
+            <a:r>
+              <a:rPr/>
+              <a:t>What you do</a:t>
+            </a:r>
+          </a:p>
+        </p:txBody>
+      </p:sp>
+      <mc:AlternateContent xmlns:mc="http://schemas.openxmlformats.org/markup-compatibility/2006">
+        <mc:Choice xmlns:a14="http://schemas.microsoft.com/office/drawing/2010/main" Requires="a14">
+          <p:sp>
+            <p:nvSpPr>
+              <p:cNvPr id="3" name="Content Placeholder 2"/>
+              <p:cNvSpPr>
+                <a:spLocks noGrp="1"/>
+              </p:cNvSpPr>
+              <p:nvPr>
+                <p:ph idx="1"/>
+              </p:nvPr>
+            </p:nvSpPr>
+            <p:spPr/>
+            <p:txBody>
+              <a:bodyPr/>
+              <a:lstStyle/>
+              <a:p>
+                <a:pPr lvl="0" indent="-342900" marL="342900">
+                  <a:buAutoNum type="arabicPeriod"/>
+                </a:pPr>
+                <a:r>
+                  <a:rPr/>
+                  <a:t>Fit your angle’s specification; inspect residuals against fitted values</a:t>
+                </a:r>
+              </a:p>
+              <a:p>
+                <a:pPr lvl="0" indent="-342900" marL="342900">
+                  <a:buAutoNum type="arabicPeriod"/>
+                </a:pPr>
+                <a:r>
+                  <a:rPr/>
+                  <a:t>Compute classical, HC1 and cluster-robust standard errors side by side</a:t>
+                </a:r>
+              </a:p>
+              <a:p>
+                <a:pPr lvl="0" indent="-342900" marL="342900">
+                  <a:buAutoNum type="arabicPeriod"/>
+                </a:pPr>
+                <a:r>
+                  <a:rPr/>
+                  <a:t>Name a confounder, </a:t>
+                </a:r>
+                <a:r>
+                  <a:rPr b="1"/>
+                  <a:t>sign its bias</a:t>
+                </a:r>
+                <a:r>
+                  <a:rPr/>
+                  <a:t>, then test your prediction</a:t>
+                </a:r>
+              </a:p>
+              <a:p>
+                <a:pPr lvl="0" indent="-342900" marL="342900">
+                  <a:buAutoNum type="arabicPeriod"/>
+                </a:pPr>
+                <a:r>
+                  <a:rPr/>
+                  <a:t>Report the coefficient with the cluster level named</a:t>
+                </a:r>
+              </a:p>
+              <a:p>
+                <a:pPr lvl="0" indent="0" marL="0">
+                  <a:buNone/>
+                </a:pPr>
+                <a:r>
+                  <a:rPr/>
+                  <a:t>Report </a:t>
+                </a:r>
+                <a14:m>
+                  <m:oMath xmlns:m="http://schemas.openxmlformats.org/officeDocument/2006/math">
+                    <m:r>
+                      <m:t>n</m:t>
+                    </m:r>
+                  </m:oMath>
+                </a14:m>
+                <a:r>
+                  <a:rPr/>
+                  <a:t> </a:t>
+                </a:r>
+                <a:r>
+                  <a:rPr b="1"/>
+                  <a:t>and</a:t>
+                </a:r>
+                <a:r>
+                  <a:rPr/>
+                  <a:t> the number of clusters. Both are true; only one governs precision.</a:t>
+                </a:r>
+              </a:p>
+            </p:txBody>
+          </p:sp>
+        </mc:Choice>
+      </mc:AlternateContent>
+    </p:spTree>
+  </p:cSld>
+</p:sld>
+</file>
+
+<file path=ppt/slides/slide28.xml><?xml version="1.0" encoding="utf-8"?>
+<p:sld xmlns:a="http://schemas.openxmlformats.org/drawingml/2006/main" xmlns:r="http://schemas.openxmlformats.org/officeDocument/2006/relationships" xmlns:p="http://schemas.openxmlformats.org/presentationml/2006/main">
+  <p:cSld>
+    <p:spTree>
+      <p:nvGrpSpPr>
+        <p:cNvPr id="1" name=""/>
+        <p:cNvGrpSpPr/>
+        <p:nvPr/>
+      </p:nvGrpSpPr>
+      <p:grpSpPr>
+        <a:xfrm>
+          <a:off x="0" y="0"/>
+          <a:ext cx="0" cy="0"/>
+          <a:chOff x="0" y="0"/>
+          <a:chExt cx="0" cy="0"/>
+        </a:xfrm>
+      </p:grpSpPr>
+      <p:sp>
+        <p:nvSpPr>
+          <p:cNvPr id="2" name="Title 1"/>
+          <p:cNvSpPr>
+            <a:spLocks noGrp="1"/>
+          </p:cNvSpPr>
+          <p:nvPr>
+            <p:ph type="title"/>
+          </p:nvPr>
+        </p:nvSpPr>
+        <p:spPr/>
+        <p:txBody>
+          <a:bodyPr/>
+          <a:lstStyle/>
+          <a:p>
+            <a:pPr lvl="0" indent="0" marL="0">
+              <a:buNone/>
+            </a:pPr>
+            <a:r>
+              <a:rPr/>
+              <a:t>The two-minute report</a:t>
+            </a:r>
+          </a:p>
+        </p:txBody>
+      </p:sp>
+      <p:sp>
+        <p:nvSpPr>
+          <p:cNvPr id="3" name="Content Placeholder 2"/>
+          <p:cNvSpPr>
+            <a:spLocks noGrp="1"/>
+          </p:cNvSpPr>
+          <p:nvPr>
+            <p:ph idx="1"/>
+          </p:nvPr>
+        </p:nvSpPr>
+        <p:spPr/>
+        <p:txBody>
+          <a:bodyPr/>
+          <a:lstStyle/>
+          <a:p>
+            <a:pPr lvl="0" indent="0" marL="0">
+              <a:buNone/>
+            </a:pPr>
+            <a:r>
+              <a:rPr b="1"/>
+              <a:t>One slide. Three sentences.</a:t>
+            </a:r>
+          </a:p>
+          <a:p>
+            <a:pPr lvl="0" indent="-342900" marL="342900">
+              <a:buAutoNum type="arabicPeriod"/>
+            </a:pPr>
+            <a:r>
+              <a:rPr b="1"/>
+              <a:t>What I did</a:t>
+            </a:r>
+            <a:r>
+              <a:rPr/>
+              <a:t> — the specification, and what you clustered on</a:t>
+            </a:r>
+          </a:p>
+          <a:p>
+            <a:pPr lvl="0" indent="-342900" marL="342900">
+              <a:buAutoNum type="arabicPeriod"/>
+            </a:pPr>
+            <a:r>
+              <a:rPr b="1"/>
+              <a:t>The number</a:t>
+            </a:r>
+            <a:r>
+              <a:rPr/>
+              <a:t> — with its interval</a:t>
+            </a:r>
+          </a:p>
+          <a:p>
+            <a:pPr lvl="0" indent="-342900" marL="342900">
+              <a:buAutoNum type="arabicPeriod"/>
+            </a:pPr>
+            <a:r>
+              <a:rPr b="1"/>
+              <a:t>The catch</a:t>
+            </a:r>
+            <a:r>
+              <a:rPr/>
+              <a:t> — the confounder you could not rule out, and its direction</a:t>
+            </a:r>
+          </a:p>
+          <a:p>
+            <a:pPr lvl="0" indent="0" marL="0">
+              <a:buNone/>
+            </a:pPr>
+            <a:r>
+              <a:rPr/>
+              <a:t>Full brief: </a:t>
+            </a:r>
+            <a:r>
+              <a:rPr>
+                <a:hlinkClick r:id="rId2"/>
+                <a:latin typeface="Courier"/>
+              </a:rPr>
+              <a:t>02-lab/README.md</a:t>
+            </a:r>
+          </a:p>
+        </p:txBody>
+      </p:sp>
+    </p:spTree>
+  </p:cSld>
+</p:sld>
+</file>
+
+<file path=ppt/slides/slide3.xml><?xml version="1.0" encoding="utf-8"?>
+<p:sld xmlns:a="http://schemas.openxmlformats.org/drawingml/2006/main" xmlns:r="http://schemas.openxmlformats.org/officeDocument/2006/relationships" xmlns:p="http://schemas.openxmlformats.org/presentationml/2006/main">
+  <p:cSld>
+    <p:spTree>
+      <p:nvGrpSpPr>
+        <p:cNvPr id="1" name=""/>
+        <p:cNvGrpSpPr/>
+        <p:nvPr/>
+      </p:nvGrpSpPr>
+      <p:grpSpPr>
+        <a:xfrm>
+          <a:off x="0" y="0"/>
+          <a:ext cx="0" cy="0"/>
+          <a:chOff x="0" y="0"/>
+          <a:chExt cx="0" cy="0"/>
+        </a:xfrm>
+      </p:grpSpPr>
+      <p:sp>
+        <p:nvSpPr>
+          <p:cNvPr id="2" name="Title 1"/>
+          <p:cNvSpPr>
+            <a:spLocks noGrp="1"/>
+          </p:cNvSpPr>
+          <p:nvPr>
+            <p:ph type="title"/>
+          </p:nvPr>
+        </p:nvSpPr>
+        <p:spPr/>
+        <p:txBody>
+          <a:bodyPr/>
+          <a:lstStyle/>
+          <a:p>
+            <a:pPr lvl="0" indent="0" marL="0">
+              <a:buNone/>
+            </a:pPr>
+            <a:r>
+              <a:rPr/>
+              <a:t>These slides follow the notes</a:t>
+            </a:r>
+          </a:p>
+        </p:txBody>
+      </p:sp>
+      <p:graphicFrame>
+        <p:nvGraphicFramePr>
+          <p:cNvPr id="6" name="Content Placeholder 5"/>
+          <p:cNvGraphicFramePr>
+            <a:graphicFrameLocks noGrp="1"/>
+          </p:cNvGraphicFramePr>
+          <p:nvPr>
+            <p:ph idx="1"/>
+          </p:nvPr>
+        </p:nvGraphicFramePr>
+        <p:xfrm>
+          <a:off x="457200" y="1193800"/>
+          <a:ext cx="8229600" cy="3390900"/>
+        </p:xfrm>
+        <a:graphic>
+          <a:graphicData uri="http://schemas.openxmlformats.org/drawingml/2006/table">
+            <a:tbl>
+              <a:tblPr firstRow="0" bandRow="1">
+                <a:tableStyleId>{5C22544A-7EE6-4342-B048-85BDC9FD1C3A}</a:tableStyleId>
+              </a:tblPr>
+              <a:tblGrid>
+                <a:gridCol w="4114800"/>
+                <a:gridCol w="4114800"/>
+              </a:tblGrid>
+              <a:tr h="0">
+                <a:tc>
+                  <a:txBody>
+                    <a:bodyPr/>
+                    <a:lstStyle/>
+                    <a:p>
+                      <a:pPr lvl="0" indent="0" marL="0">
+                        <a:buNone/>
+                      </a:pPr>
+                      <a:r>
+                        <a:rPr b="1"/>
+                        <a:t>3.1</a:t>
+                      </a:r>
+                    </a:p>
+                  </a:txBody>
+                </a:tc>
+                <a:tc>
+                  <a:txBody>
+                    <a:bodyPr/>
+                    <a:lstStyle/>
+                    <a:p>
+                      <a:pPr lvl="0" indent="0" marL="0">
+                        <a:buNone/>
+                      </a:pPr>
+                      <a:r>
+                        <a:rPr/>
+                        <a:t>Sampling distribution of the OLS estimator</a:t>
+                      </a:r>
+                    </a:p>
+                  </a:txBody>
+                </a:tc>
+              </a:tr>
+              <a:tr h="0">
+                <a:tc>
+                  <a:txBody>
+                    <a:bodyPr/>
+                    <a:lstStyle/>
+                    <a:p>
+                      <a:pPr lvl="0" indent="0" marL="0">
+                        <a:buNone/>
+                      </a:pPr>
+                      <a:r>
+                        <a:rPr b="1"/>
+                        <a:t>3.2</a:t>
+                      </a:r>
+                    </a:p>
+                  </a:txBody>
+                </a:tc>
+                <a:tc>
+                  <a:txBody>
+                    <a:bodyPr/>
+                    <a:lstStyle/>
+                    <a:p>
+                      <a:pPr lvl="0" indent="0" marL="0">
+                        <a:buNone/>
+                      </a:pPr>
+                      <a:r>
+                        <a:rPr/>
+                        <a:t>Gauss–Markov</a:t>
+                      </a:r>
+                    </a:p>
+                  </a:txBody>
+                </a:tc>
+              </a:tr>
+              <a:tr h="0">
+                <a:tc>
+                  <a:txBody>
+                    <a:bodyPr/>
+                    <a:lstStyle/>
+                    <a:p>
+                      <a:pPr lvl="0" indent="0" marL="0">
+                        <a:buNone/>
+                      </a:pPr>
+                      <a:r>
+                        <a:rPr b="1"/>
+                        <a:t>3.3</a:t>
+                      </a:r>
+                    </a:p>
+                  </a:txBody>
+                </a:tc>
+                <a:tc>
+                  <a:txBody>
+                    <a:bodyPr/>
+                    <a:lstStyle/>
+                    <a:p>
+                      <a:pPr lvl="0" indent="0" marL="0">
+                        <a:buNone/>
+                      </a:pPr>
+                      <a:r>
+                        <a:rPr/>
+                        <a:t>When assumption 4 fails</a:t>
+                      </a:r>
+                    </a:p>
+                  </a:txBody>
+                </a:tc>
+              </a:tr>
+              <a:tr h="0">
+                <a:tc>
+                  <a:txBody>
+                    <a:bodyPr/>
+                    <a:lstStyle/>
+                    <a:p>
+                      <a:pPr lvl="0" indent="0" marL="0">
+                        <a:buNone/>
+                      </a:pPr>
+                      <a:r>
+                        <a:rPr b="1"/>
+                        <a:t>3.4</a:t>
+                      </a:r>
+                    </a:p>
+                  </a:txBody>
+                </a:tc>
+                <a:tc>
+                  <a:txBody>
+                    <a:bodyPr/>
+                    <a:lstStyle/>
+                    <a:p>
+                      <a:pPr lvl="0" indent="0" marL="0">
+                        <a:buNone/>
+                      </a:pPr>
+                      <a:r>
+                        <a:rPr/>
+                        <a:t>Omitted variable bias</a:t>
+                      </a:r>
+                    </a:p>
+                  </a:txBody>
+                </a:tc>
+              </a:tr>
+              <a:tr h="0">
+                <a:tc>
+                  <a:txBody>
+                    <a:bodyPr/>
+                    <a:lstStyle/>
+                    <a:p>
+                      <a:pPr lvl="0" indent="0" marL="0">
+                        <a:buNone/>
+                      </a:pPr>
+                      <a:r>
+                        <a:rPr b="1"/>
+                        <a:t>3.5</a:t>
+                      </a:r>
+                    </a:p>
+                  </a:txBody>
+                </a:tc>
+                <a:tc>
+                  <a:txBody>
+                    <a:bodyPr/>
+                    <a:lstStyle/>
+                    <a:p>
+                      <a:pPr lvl="0" indent="0" marL="0">
+                        <a:buNone/>
+                      </a:pPr>
+                      <a:r>
+                        <a:rPr/>
+                        <a:t>What a Mincer coefficient identifies</a:t>
+                      </a:r>
+                    </a:p>
+                  </a:txBody>
+                </a:tc>
+              </a:tr>
+            </a:tbl>
+          </a:graphicData>
+        </a:graphic>
+      </p:graphicFrame>
+    </p:spTree>
+  </p:cSld>
+</p:sld>
+</file>
+
+<file path=ppt/slides/slide4.xml><?xml version="1.0" encoding="utf-8"?>
+<p:sld xmlns:a="http://schemas.openxmlformats.org/drawingml/2006/main" xmlns:r="http://schemas.openxmlformats.org/officeDocument/2006/relationships" xmlns:p="http://schemas.openxmlformats.org/presentationml/2006/main">
+  <p:cSld>
+    <p:spTree>
+      <p:nvGrpSpPr>
+        <p:cNvPr id="1" name=""/>
+        <p:cNvGrpSpPr/>
+        <p:nvPr/>
+      </p:nvGrpSpPr>
+      <p:grpSpPr>
+        <a:xfrm>
+          <a:off x="0" y="0"/>
+          <a:ext cx="0" cy="0"/>
+          <a:chOff x="0" y="0"/>
+          <a:chExt cx="0" cy="0"/>
+        </a:xfrm>
+      </p:grpSpPr>
+      <p:sp>
+        <p:nvSpPr>
+          <p:cNvPr id="3" name="Content Placeholder 2"/>
+          <p:cNvSpPr>
+            <a:spLocks noGrp="1"/>
+          </p:cNvSpPr>
+          <p:nvPr>
+            <p:ph idx="1"/>
+          </p:nvPr>
+        </p:nvSpPr>
+        <p:spPr/>
+        <p:txBody>
+          <a:bodyPr/>
+          <a:lstStyle/>
+          <a:p>
+            <a:pPr lvl="0" indent="0" marL="0">
+              <a:buNone/>
+            </a:pPr>
+            <a:r>
+              <a:rPr/>
+              <a:t>Same numbering and notation as </a:t>
+            </a:r>
+            <a:r>
+              <a:rPr>
+                <a:hlinkClick r:id="rId2"/>
+                <a:latin typeface="Courier"/>
+              </a:rPr>
+              <a:t>01-lecture/README.md</a:t>
+            </a:r>
+            <a:r>
+              <a:rPr/>
+              <a:t>.</a:t>
+            </a:r>
+          </a:p>
+        </p:txBody>
+      </p:sp>
+    </p:spTree>
+  </p:cSld>
+</p:sld>
+</file>
+
+<file path=ppt/slides/slide5.xml><?xml version="1.0" encoding="utf-8"?>
+<p:sld xmlns:a="http://schemas.openxmlformats.org/drawingml/2006/main" xmlns:r="http://schemas.openxmlformats.org/officeDocument/2006/relationships" xmlns:p="http://schemas.openxmlformats.org/presentationml/2006/main">
+  <p:cSld>
+    <p:spTree>
+      <p:nvGrpSpPr>
+        <p:cNvPr id="1" name=""/>
+        <p:cNvGrpSpPr/>
+        <p:nvPr/>
+      </p:nvGrpSpPr>
+      <p:grpSpPr>
+        <a:xfrm>
+          <a:off x="0" y="0"/>
+          <a:ext cx="0" cy="0"/>
+          <a:chOff x="0" y="0"/>
+          <a:chExt cx="0" cy="0"/>
+        </a:xfrm>
+      </p:grpSpPr>
+      <p:sp>
+        <p:nvSpPr>
+          <p:cNvPr id="2" name="Title 1"/>
+          <p:cNvSpPr>
+            <a:spLocks noGrp="1"/>
+          </p:cNvSpPr>
+          <p:nvPr>
+            <p:ph type="title"/>
+          </p:nvPr>
+        </p:nvSpPr>
+        <p:spPr>
+          <a:xfrm>
+            <a:off x="722313" y="3305176"/>
+            <a:ext cx="7772400" cy="1021556"/>
+          </a:xfrm>
+        </p:spPr>
+        <p:txBody>
+          <a:bodyPr/>
+          <a:lstStyle/>
+          <a:p>
+            <a:pPr lvl="0" indent="0" marL="0">
+              <a:buNone/>
+            </a:pPr>
+            <a:r>
+              <a:rPr/>
+              <a:t>3.1 Sampling distribution</a:t>
+            </a:r>
+          </a:p>
+        </p:txBody>
+      </p:sp>
+    </p:spTree>
+  </p:cSld>
+</p:sld>
+</file>
+
+<file path=ppt/slides/slide6.xml><?xml version="1.0" encoding="utf-8"?>
+<p:sld xmlns:a="http://schemas.openxmlformats.org/drawingml/2006/main" xmlns:r="http://schemas.openxmlformats.org/officeDocument/2006/relationships" xmlns:p="http://schemas.openxmlformats.org/presentationml/2006/main">
+  <p:cSld>
+    <p:spTree>
+      <p:nvGrpSpPr>
+        <p:cNvPr id="1" name=""/>
+        <p:cNvGrpSpPr/>
+        <p:nvPr/>
+      </p:nvGrpSpPr>
+      <p:grpSpPr>
+        <a:xfrm>
+          <a:off x="0" y="0"/>
+          <a:ext cx="0" cy="0"/>
+          <a:chOff x="0" y="0"/>
+          <a:chExt cx="0" cy="0"/>
+        </a:xfrm>
+      </p:grpSpPr>
+      <p:sp>
+        <p:nvSpPr>
+          <p:cNvPr id="2" name="Title 1"/>
+          <p:cNvSpPr>
+            <a:spLocks noGrp="1"/>
+          </p:cNvSpPr>
+          <p:nvPr>
+            <p:ph type="title"/>
+          </p:nvPr>
+        </p:nvSpPr>
+        <p:spPr/>
+        <p:txBody>
+          <a:bodyPr/>
+          <a:lstStyle/>
+          <a:p>
+            <a:pPr lvl="0" indent="0" marL="0">
+              <a:buNone/>
+            </a:pPr>
+            <a:r>
+              <a:rPr/>
+              <a:t>The decomposition that is all of inference</a:t>
             </a:r>
           </a:p>
         </p:txBody>
@@ -7247,37 +6744,225 @@
                 </a:pPr>
                 <a:r>
                   <a:rPr/>
-                  <a:t>The cluster-robust estimator is consistent as the number of </a:t>
+                  <a:t>Substitute </a:t>
                 </a:r>
-                <a:r>
-                  <a:rPr b="1"/>
-                  <a:t>clusters</a:t>
-                </a:r>
+                <a14:m>
+                  <m:oMath xmlns:m="http://schemas.openxmlformats.org/officeDocument/2006/math">
+                    <m:r>
+                      <m:t>y</m:t>
+                    </m:r>
+                    <m:r>
+                      <m:rPr>
+                        <m:sty m:val="p"/>
+                      </m:rPr>
+                      <m:t>=</m:t>
+                    </m:r>
+                    <m:r>
+                      <m:t>X</m:t>
+                    </m:r>
+                    <m:r>
+                      <m:t>β</m:t>
+                    </m:r>
+                    <m:r>
+                      <m:rPr>
+                        <m:sty m:val="p"/>
+                      </m:rPr>
+                      <m:t>+</m:t>
+                    </m:r>
+                    <m:r>
+                      <m:t>ε</m:t>
+                    </m:r>
+                  </m:oMath>
+                </a14:m>
                 <a:r>
                   <a:rPr/>
-                  <a:t> grows, not as the number of rows grows.</a:t>
+                  <a:t> into </a:t>
+                </a:r>
+                <a14:m>
+                  <m:oMath xmlns:m="http://schemas.openxmlformats.org/officeDocument/2006/math">
+                    <m:acc>
+                      <m:accPr>
+                        <m:chr m:val="̂"/>
+                      </m:accPr>
+                      <m:e>
+                        <m:r>
+                          <m:t>β</m:t>
+                        </m:r>
+                      </m:e>
+                    </m:acc>
+                    <m:r>
+                      <m:rPr>
+                        <m:sty m:val="p"/>
+                      </m:rPr>
+                      <m:t>=</m:t>
+                    </m:r>
+                    <m:sSup>
+                      <m:e>
+                        <m:d>
+                          <m:dPr>
+                            <m:begChr m:val="("/>
+                            <m:sepChr m:val=""/>
+                            <m:endChr m:val=")"/>
+                            <m:grow/>
+                          </m:dPr>
+                          <m:e>
+                            <m:sSup>
+                              <m:e>
+                                <m:r>
+                                  <m:t>X</m:t>
+                                </m:r>
+                              </m:e>
+                              <m:sup>
+                                <m:r>
+                                  <m:rPr>
+                                    <m:sty m:val="p"/>
+                                  </m:rPr>
+                                  <m:t>⊤</m:t>
+                                </m:r>
+                              </m:sup>
+                            </m:sSup>
+                            <m:r>
+                              <m:t>X</m:t>
+                            </m:r>
+                          </m:e>
+                        </m:d>
+                      </m:e>
+                      <m:sup>
+                        <m:r>
+                          <m:rPr>
+                            <m:sty m:val="p"/>
+                          </m:rPr>
+                          <m:t>−</m:t>
+                        </m:r>
+                        <m:r>
+                          <m:t>1</m:t>
+                        </m:r>
+                      </m:sup>
+                    </m:sSup>
+                    <m:sSup>
+                      <m:e>
+                        <m:r>
+                          <m:t>X</m:t>
+                        </m:r>
+                      </m:e>
+                      <m:sup>
+                        <m:r>
+                          <m:rPr>
+                            <m:sty m:val="p"/>
+                          </m:rPr>
+                          <m:t>⊤</m:t>
+                        </m:r>
+                      </m:sup>
+                    </m:sSup>
+                    <m:r>
+                      <m:t>y</m:t>
+                    </m:r>
+                  </m:oMath>
+                </a14:m>
+                <a:r>
+                  <a:rPr/>
+                  <a:t>:</a:t>
                 </a:r>
               </a:p>
               <a:p>
-                <a:pPr lvl="0"/>
-                <a:r>
-                  <a:rPr/>
-                  <a:t>30 countries is on the edge — often cited as a rough minimum</a:t>
-                </a:r>
-              </a:p>
-              <a:p>
-                <a:pPr lvl="0"/>
-                <a:r>
-                  <a:rPr/>
-                  <a:t>Below that, intervals are too narrow again, for a new reason</a:t>
-                </a:r>
-              </a:p>
-              <a:p>
-                <a:pPr lvl="0"/>
-                <a:r>
-                  <a:rPr/>
-                  <a:t>The wild cluster bootstrap is the standard remedy</a:t>
-                </a:r>
+                <a:pPr lvl="0" indent="0" marL="0">
+                  <a:buNone/>
+                </a:pPr>
+                <a14:m>
+                  <m:oMathPara xmlns:m="http://schemas.openxmlformats.org/officeDocument/2006/math">
+                    <m:oMathParaPr>
+                      <m:jc m:val="center"/>
+                    </m:oMathParaPr>
+                    <m:oMath>
+                      <m:acc>
+                        <m:accPr>
+                          <m:chr m:val="̂"/>
+                        </m:accPr>
+                        <m:e>
+                          <m:r>
+                            <m:t>β</m:t>
+                          </m:r>
+                        </m:e>
+                      </m:acc>
+                      <m:r>
+                        <m:rPr>
+                          <m:sty m:val="p"/>
+                        </m:rPr>
+                        <m:t>=</m:t>
+                      </m:r>
+                      <m:r>
+                        <m:t>β</m:t>
+                      </m:r>
+                      <m:r>
+                        <m:rPr>
+                          <m:sty m:val="p"/>
+                        </m:rPr>
+                        <m:t>+</m:t>
+                      </m:r>
+                      <m:sSup>
+                        <m:e>
+                          <m:d>
+                            <m:dPr>
+                              <m:begChr m:val="("/>
+                              <m:sepChr m:val=""/>
+                              <m:endChr m:val=")"/>
+                              <m:grow/>
+                            </m:dPr>
+                            <m:e>
+                              <m:sSup>
+                                <m:e>
+                                  <m:r>
+                                    <m:t>X</m:t>
+                                  </m:r>
+                                </m:e>
+                                <m:sup>
+                                  <m:r>
+                                    <m:rPr>
+                                      <m:sty m:val="p"/>
+                                    </m:rPr>
+                                    <m:t>⊤</m:t>
+                                  </m:r>
+                                </m:sup>
+                              </m:sSup>
+                              <m:r>
+                                <m:t>X</m:t>
+                              </m:r>
+                            </m:e>
+                          </m:d>
+                        </m:e>
+                        <m:sup>
+                          <m:r>
+                            <m:rPr>
+                              <m:sty m:val="p"/>
+                            </m:rPr>
+                            <m:t>−</m:t>
+                          </m:r>
+                          <m:r>
+                            <m:t>1</m:t>
+                          </m:r>
+                        </m:sup>
+                      </m:sSup>
+                      <m:sSup>
+                        <m:e>
+                          <m:r>
+                            <m:t>X</m:t>
+                          </m:r>
+                        </m:e>
+                        <m:sup>
+                          <m:r>
+                            <m:rPr>
+                              <m:sty m:val="p"/>
+                            </m:rPr>
+                            <m:t>⊤</m:t>
+                          </m:r>
+                        </m:sup>
+                      </m:sSup>
+                      <m:r>
+                        <m:t>ε</m:t>
+                      </m:r>
+                    </m:oMath>
+                  </m:oMathPara>
+                </a14:m>
               </a:p>
               <a:p>
                 <a:pPr lvl="0" indent="0" marL="0">
@@ -7285,430 +6970,24 @@
                 </a:pPr>
                 <a:r>
                   <a:rPr/>
-                  <a:t>Report your number of clusters next to </a:t>
+                  <a:t>Everything that follows depends only on what you are willing to assume about </a:t>
                 </a:r>
                 <a14:m>
                   <m:oMath xmlns:m="http://schemas.openxmlformats.org/officeDocument/2006/math">
                     <m:r>
-                      <m:t>n</m:t>
+                      <m:t>ε</m:t>
                     </m:r>
                   </m:oMath>
                 </a14:m>
                 <a:r>
                   <a:rPr/>
-                  <a:t>. A reader cannot judge your inference without it, and almost nobody prints it.</a:t>
+                  <a:t>.</a:t>
                 </a:r>
               </a:p>
             </p:txBody>
           </p:sp>
         </mc:Choice>
       </mc:AlternateContent>
-    </p:spTree>
-  </p:cSld>
-</p:sld>
-</file>
-
-<file path=ppt/slides/slide27.xml><?xml version="1.0" encoding="UTF-8"?><p:sld xmlns:a="http://schemas.openxmlformats.org/drawingml/2006/main" xmlns:r="http://schemas.openxmlformats.org/officeDocument/2006/relationships" xmlns:p="http://schemas.openxmlformats.org/presentationml/2006/main"><p:cSld><p:spTree><p:nvGrpSpPr><p:cNvPr id="1" name="" /><p:cNvGrpSpPr /><p:nvPr /></p:nvGrpSpPr><p:grpSpPr><a:xfrm><a:off x="0" y="0" /><a:ext cx="0" cy="0" /><a:chOff x="0" y="0" /><a:chExt cx="0" cy="0" /></a:xfrm></p:grpSpPr><p:sp><p:nvSpPr><p:cNvPr id="2" name="Title 1" /><p:cNvSpPr><a:spLocks noGrp="1" /></p:cNvSpPr><p:nvPr><p:ph type="title" /></p:nvPr></p:nvSpPr><p:spPr /><p:txBody><a:bodyPr /><a:lstStyle /><a:p><a:pPr lvl="0" indent="0" marL="0"><a:buNone /></a:pPr><a:r><a:rPr /><a:t>Common mistakes</a:t></a:r></a:p></p:txBody></p:sp><p:graphicFrame><p:nvGraphicFramePr><p:cNvPr id="6" name="Content Placeholder 5" /><p:cNvGraphicFramePr><a:graphicFrameLocks noGrp="1" /></p:cNvGraphicFramePr><p:nvPr><p:ph idx="1" /></p:nvPr></p:nvGraphicFramePr><p:xfrm><a:off x="457200" y="1193800" /><a:ext cx="8229600" cy="3390900" /></p:xfrm><a:graphic><a:graphicData uri="http://schemas.openxmlformats.org/drawingml/2006/table"><a:tbl><a:tblPr firstRow="1" bandRow="1"><a:tableStyleId>{5C22544A-7EE6-4342-B048-85BDC9FD1C3A}</a:tableStyleId></a:tblPr><a:tblGrid><a:gridCol w="4114800" /><a:gridCol w="4114800" /></a:tblGrid><a:tr h="0"><a:tc><a:txBody><a:bodyPr /><a:lstStyle /><a:p><a:pPr lvl="0" indent="0" marL="0"><a:buNone /></a:pPr><a:r><a:rPr /><a:t>Mistake</a:t></a:r></a:p></a:txBody><a:tcPr /></a:tc><a:tc><a:txBody><a:bodyPr /><a:lstStyle /><a:p><a:pPr lvl="0" indent="0" marL="0"><a:buNone /></a:pPr><a:r><a:rPr /><a:t>Consequence</a:t></a:r></a:p></a:txBody><a:tcPr /></a:tc></a:tr><a:tr h="0"><a:tc><a:txBody><a:bodyPr /><a:lstStyle /><a:p><a:pPr lvl="0" indent="0" marL="0"><a:buNone /></a:pPr><a:r><a:rPr /><a:t>Default standard errors on panel data</a:t></a:r></a:p></a:txBody></a:tc><a:tc><a:txBody><a:bodyPr /><a:lstStyle /><a:p><a:pPr lvl="0" indent="0" marL="0"><a:buNone /></a:pPr><a:r><a:rPr /><a:t>Intervals far too narrow</a:t></a:r></a:p></a:txBody></a:tc></a:tr><a:tr h="0"><a:tc><a:txBody><a:bodyPr /><a:lstStyle /><a:p><a:pPr lvl="0" indent="0" marL="0"><a:buNone /></a:pPr><a:r><a:rPr /><a:t>Clustering on the wrong level</a:t></a:r></a:p></a:txBody></a:tc><a:tc><a:txBody><a:bodyPr /><a:lstStyle /><a:p><a:pPr lvl="0" indent="0" marL="0"><a:buNone /></a:pPr><a:r><a:rPr /><a:t>Precision over- or under-stated</a:t></a:r></a:p></a:txBody></a:tc></a:tr><a:tr h="0"><a:tc><a:txBody><a:bodyPr /><a:lstStyle /><a:p><a:pPr lvl="0" indent="0" marL="0"><a:buNone /></a:pPr><a:r><a:rPr /><a:t>“Controlling for everything”</a:t></a:r></a:p></a:txBody></a:tc><a:tc><a:txBody><a:bodyPr /><a:lstStyle /><a:p><a:pPr lvl="0" indent="0" marL="0"><a:buNone /></a:pPr><a:r><a:rPr /><a:t>Post-treatment bias; uninterpretable coefficients</a:t></a:r></a:p></a:txBody></a:tc></a:tr><a:tr h="0"><a:tc><a:txBody><a:bodyPr /><a:lstStyle /><a:p><a:pPr lvl="0" indent="0" marL="0"><a:buNone /></a:pPr><a:r><a:rPr /><a:t>Reading significance from </a:t></a:r><a14:m><m:oMath xmlns:m="http://schemas.openxmlformats.org/officeDocument/2006/math"><m:r><m:t>n</m:t></m:r><m:r><m:rPr><m:sty m:val="p" /></m:rPr><m:t>=</m:t></m:r><m:r><m:t>3150</m:t></m:r></m:oMath></a14:m></a:p></a:txBody></a:tc><a:tc><a:txBody><a:bodyPr /><a:lstStyle /><a:p><a:pPr lvl="0" indent="0" marL="0"><a:buNone /></a:pPr><a:r><a:rPr /><a:t>You have 30 independent units</a:t></a:r></a:p></a:txBody></a:tc></a:tr><a:tr h="0"><a:tc><a:txBody><a:bodyPr /><a:lstStyle /><a:p><a:pPr lvl="0" indent="0" marL="0"><a:buNone /></a:pPr><a:r><a:rPr /><a:t>Dropping </a:t></a:r><a:r><a:rPr><a:latin typeface="Courier" /></a:rPr><a:t>flag == &quot;u&quot;</a:t></a:r><a:r><a:rPr /><a:t> rows</a:t></a:r></a:p></a:txBody></a:tc><a:tc><a:txBody><a:bodyPr /><a:lstStyle /><a:p><a:pPr lvl="0" indent="0" marL="0"><a:buNone /></a:pPr><a:r><a:rPr /><a:t>Coverage biased toward large economies</a:t></a:r></a:p></a:txBody></a:tc></a:tr></a:tbl></a:graphicData></a:graphic></p:graphicFrame></p:spTree></p:cSld></p:sld>
-</file>
-
-<file path=ppt/slides/slide28.xml><?xml version="1.0" encoding="utf-8"?>
-<p:sld xmlns:a="http://schemas.openxmlformats.org/drawingml/2006/main" xmlns:r="http://schemas.openxmlformats.org/officeDocument/2006/relationships" xmlns:p="http://schemas.openxmlformats.org/presentationml/2006/main">
-  <p:cSld>
-    <p:spTree>
-      <p:nvGrpSpPr>
-        <p:cNvPr id="1" name=""/>
-        <p:cNvGrpSpPr/>
-        <p:nvPr/>
-      </p:nvGrpSpPr>
-      <p:grpSpPr>
-        <a:xfrm>
-          <a:off x="0" y="0"/>
-          <a:ext cx="0" cy="0"/>
-          <a:chOff x="0" y="0"/>
-          <a:chExt cx="0" cy="0"/>
-        </a:xfrm>
-      </p:grpSpPr>
-      <p:sp>
-        <p:nvSpPr>
-          <p:cNvPr id="2" name="Title 1"/>
-          <p:cNvSpPr>
-            <a:spLocks noGrp="1"/>
-          </p:cNvSpPr>
-          <p:nvPr>
-            <p:ph type="title"/>
-          </p:nvPr>
-        </p:nvSpPr>
-        <p:spPr/>
-        <p:txBody>
-          <a:bodyPr/>
-          <a:lstStyle/>
-          <a:p>
-            <a:pPr lvl="0" indent="0" marL="0">
-              <a:buNone/>
-            </a:pPr>
-            <a:r>
-              <a:rPr/>
-              <a:t>In the lab</a:t>
-            </a:r>
-          </a:p>
-        </p:txBody>
-      </p:sp>
-      <p:sp>
-        <p:nvSpPr>
-          <p:cNvPr id="3" name="Content Placeholder 2"/>
-          <p:cNvSpPr>
-            <a:spLocks noGrp="1"/>
-          </p:cNvSpPr>
-          <p:nvPr>
-            <p:ph idx="1"/>
-          </p:nvPr>
-        </p:nvSpPr>
-        <p:spPr/>
-        <p:txBody>
-          <a:bodyPr/>
-          <a:lstStyle/>
-          <a:p>
-            <a:pPr lvl="0" indent="0" marL="0">
-              <a:buNone/>
-            </a:pPr>
-            <a:r>
-              <a:rPr/>
-              <a:t>Work through </a:t>
-            </a:r>
-            <a:r>
-              <a:rPr>
-                <a:hlinkClick r:id="rId2"/>
-                <a:latin typeface="Courier"/>
-              </a:rPr>
-              <a:t>02-lab/README.md</a:t>
-            </a:r>
-            <a:r>
-              <a:rPr/>
-              <a:t>.</a:t>
-            </a:r>
-          </a:p>
-          <a:p>
-            <a:pPr lvl="0" indent="-342900" marL="342900">
-              <a:buAutoNum type="arabicPeriod"/>
-            </a:pPr>
-            <a:r>
-              <a:rPr/>
-              <a:t>Fit the earnings model and inspect residuals against fitted values</a:t>
-            </a:r>
-          </a:p>
-          <a:p>
-            <a:pPr lvl="0" indent="-342900" marL="342900">
-              <a:buAutoNum type="arabicPeriod"/>
-            </a:pPr>
-            <a:r>
-              <a:rPr/>
-              <a:t>Compute classical, HC3 and clustered standard errors side by side</a:t>
-            </a:r>
-          </a:p>
-          <a:p>
-            <a:pPr lvl="0" indent="-342900" marL="342900">
-              <a:buAutoNum type="arabicPeriod"/>
-            </a:pPr>
-            <a:r>
-              <a:rPr/>
-              <a:t>Write down a confounder, sign its bias, then test your prediction</a:t>
-            </a:r>
-          </a:p>
-          <a:p>
-            <a:pPr lvl="0" indent="-342900" marL="342900">
-              <a:buAutoNum type="arabicPeriod"/>
-            </a:pPr>
-            <a:r>
-              <a:rPr/>
-              <a:t>Three sentences — with the cluster level named</a:t>
-            </a:r>
-          </a:p>
-        </p:txBody>
-      </p:sp>
-    </p:spTree>
-  </p:cSld>
-</p:sld>
-</file>
-
-<file path=ppt/slides/slide3.xml><?xml version="1.0" encoding="UTF-8"?><p:sld xmlns:a="http://schemas.openxmlformats.org/drawingml/2006/main" xmlns:r="http://schemas.openxmlformats.org/officeDocument/2006/relationships" xmlns:p="http://schemas.openxmlformats.org/presentationml/2006/main"><p:cSld><p:spTree><p:nvGrpSpPr><p:cNvPr id="1" name="" /><p:cNvGrpSpPr /><p:nvPr /></p:nvGrpSpPr><p:grpSpPr><a:xfrm><a:off x="0" y="0" /><a:ext cx="0" cy="0" /><a:chOff x="0" y="0" /><a:chExt cx="0" cy="0" /></a:xfrm></p:grpSpPr><p:sp><p:nvSpPr><p:cNvPr id="2" name="Title 1" /><p:cNvSpPr><a:spLocks noGrp="1" /></p:cNvSpPr><p:nvPr><p:ph type="title" /></p:nvPr></p:nvSpPr><p:spPr /><p:txBody><a:bodyPr /><a:lstStyle /><a:p><a:pPr lvl="0" indent="0" marL="0"><a:buNone /></a:pPr><a:r><a:rPr /><a:t>The 90 minutes ahead</a:t></a:r></a:p></p:txBody></p:sp><p:graphicFrame><p:nvGraphicFramePr><p:cNvPr id="6" name="Content Placeholder 5" /><p:cNvGraphicFramePr><a:graphicFrameLocks noGrp="1" /></p:cNvGraphicFramePr><p:nvPr><p:ph idx="1" /></p:nvPr></p:nvGraphicFramePr><p:xfrm><a:off x="457200" y="1193800" /><a:ext cx="8229600" cy="3390900" /></p:xfrm><a:graphic><a:graphicData uri="http://schemas.openxmlformats.org/drawingml/2006/table"><a:tbl><a:tblPr firstRow="0" bandRow="1"><a:tableStyleId>{5C22544A-7EE6-4342-B048-85BDC9FD1C3A}</a:tableStyleId></a:tblPr><a:tblGrid><a:gridCol w="4114800" /><a:gridCol w="4114800" /></a:tblGrid><a:tr h="0"><a:tc><a:txBody><a:bodyPr /><a:lstStyle /><a:p><a:pPr lvl="0" indent="0" marL="0"><a:buNone /></a:pPr><a:r><a:rPr b="1" /><a:t>0–10</a:t></a:r></a:p></a:txBody></a:tc><a:tc><a:txBody><a:bodyPr /><a:lstStyle /><a:p><a:pPr lvl="0" indent="0" marL="0"><a:buNone /></a:pPr><a:r><a:rPr /><a:t>Three ways a standard error lies</a:t></a:r></a:p></a:txBody></a:tc></a:tr><a:tr h="0"><a:tc><a:txBody><a:bodyPr /><a:lstStyle /><a:p><a:pPr lvl="0" indent="0" marL="0"><a:buNone /></a:pPr><a:r><a:rPr b="1" /><a:t>10–30</a:t></a:r></a:p></a:txBody></a:tc><a:tc><a:txBody><a:bodyPr /><a:lstStyle /><a:p><a:pPr lvl="0" indent="0" marL="0"><a:buNone /></a:pPr><a:r><a:rPr /><a:t>The sandwich, and three guesses at </a:t></a:r><a14:m><m:oMath xmlns:m="http://schemas.openxmlformats.org/officeDocument/2006/math"><m:r><m:t>Ω</m:t></m:r></m:oMath></a14:m></a:p></a:txBody></a:tc></a:tr><a:tr h="0"><a:tc><a:txBody><a:bodyPr /><a:lstStyle /><a:p><a:pPr lvl="0" indent="0" marL="0"><a:buNone /></a:pPr><a:r><a:rPr b="1" /><a:t>30–45</a:t></a:r></a:p></a:txBody></a:tc><a:tc><a:txBody><a:bodyPr /><a:lstStyle /><a:p><a:pPr lvl="0" indent="0" marL="0"><a:buNone /></a:pPr><a:r><a:rPr /><a:t>Omitted variables, and signing the bias</a:t></a:r></a:p></a:txBody></a:tc></a:tr><a:tr h="0"><a:tc><a:txBody><a:bodyPr /><a:lstStyle /><a:p><a:pPr lvl="0" indent="0" marL="0"><a:buNone /></a:pPr><a:r><a:rPr b="1" /><a:t>45–70</a:t></a:r></a:p></a:txBody></a:tc><a:tc><a:txBody><a:bodyPr /><a:lstStyle /><a:p><a:pPr lvl="0" indent="0" marL="0"><a:buNone /></a:pPr><a:r><a:rPr /><a:t>Doing it: three standard errors, one coefficient</a:t></a:r></a:p></a:txBody></a:tc></a:tr><a:tr h="0"><a:tc><a:txBody><a:bodyPr /><a:lstStyle /><a:p><a:pPr lvl="0" indent="0" marL="0"><a:buNone /></a:pPr><a:r><a:rPr b="1" /><a:t>70–85</a:t></a:r></a:p></a:txBody></a:tc><a:tc><a:txBody><a:bodyPr /><a:lstStyle /><a:p><a:pPr lvl="0" indent="0" marL="0"><a:buNone /></a:pPr><a:r><a:rPr /><a:t>What a p-value is and is not</a:t></a:r></a:p></a:txBody></a:tc></a:tr><a:tr h="0"><a:tc><a:txBody><a:bodyPr /><a:lstStyle /><a:p><a:pPr lvl="0" indent="0" marL="0"><a:buNone /></a:pPr><a:r><a:rPr b="1" /><a:t>85–90</a:t></a:r></a:p></a:txBody></a:tc><a:tc><a:txBody><a:bodyPr /><a:lstStyle /><a:p><a:pPr lvl="0" indent="0" marL="0"><a:buNone /></a:pPr><a:r><a:rPr /><a:t>Handoff to the lab</a:t></a:r></a:p></a:txBody></a:tc></a:tr></a:tbl></a:graphicData></a:graphic></p:graphicFrame></p:spTree></p:cSld></p:sld>
-</file>
-
-<file path=ppt/slides/slide4.xml><?xml version="1.0" encoding="utf-8"?>
-<p:sld xmlns:a="http://schemas.openxmlformats.org/drawingml/2006/main" xmlns:r="http://schemas.openxmlformats.org/officeDocument/2006/relationships" xmlns:p="http://schemas.openxmlformats.org/presentationml/2006/main">
-  <p:cSld>
-    <p:spTree>
-      <p:nvGrpSpPr>
-        <p:cNvPr id="1" name=""/>
-        <p:cNvGrpSpPr/>
-        <p:nvPr/>
-      </p:nvGrpSpPr>
-      <p:grpSpPr>
-        <a:xfrm>
-          <a:off x="0" y="0"/>
-          <a:ext cx="0" cy="0"/>
-          <a:chOff x="0" y="0"/>
-          <a:chExt cx="0" cy="0"/>
-        </a:xfrm>
-      </p:grpSpPr>
-      <p:sp>
-        <p:nvSpPr>
-          <p:cNvPr id="2" name="Title 1"/>
-          <p:cNvSpPr>
-            <a:spLocks noGrp="1"/>
-          </p:cNvSpPr>
-          <p:nvPr>
-            <p:ph type="title"/>
-          </p:nvPr>
-        </p:nvSpPr>
-        <p:spPr/>
-        <p:txBody>
-          <a:bodyPr/>
-          <a:lstStyle/>
-          <a:p>
-            <a:pPr lvl="0" indent="0" marL="0">
-              <a:buNone/>
-            </a:pPr>
-            <a:r>
-              <a:rPr/>
-              <a:t>Before class you read</a:t>
-            </a:r>
-          </a:p>
-        </p:txBody>
-      </p:sp>
-      <p:sp>
-        <p:nvSpPr>
-          <p:cNvPr id="3" name="Content Placeholder 2"/>
-          <p:cNvSpPr>
-            <a:spLocks noGrp="1"/>
-          </p:cNvSpPr>
-          <p:nvPr>
-            <p:ph idx="1"/>
-          </p:nvPr>
-        </p:nvSpPr>
-        <p:spPr/>
-        <p:txBody>
-          <a:bodyPr/>
-          <a:lstStyle/>
-          <a:p>
-            <a:pPr lvl="0" indent="0" marL="0">
-              <a:buNone/>
-            </a:pPr>
-            <a:r>
-              <a:rPr b="1"/>
-              <a:t>Bertrand, Duflo &amp; Mullainathan</a:t>
-            </a:r>
-            <a:r>
-              <a:rPr/>
-              <a:t>, </a:t>
-            </a:r>
-            <a:r>
-              <a:rPr i="1"/>
-              <a:t>How Much Should We Trust Differences-in-Differences Estimates?</a:t>
-            </a:r>
-            <a:r>
-              <a:rPr/>
-              <a:t>, </a:t>
-            </a:r>
-            <a:r>
-              <a:rPr b="1"/>
-              <a:t>QJE</a:t>
-            </a:r>
-            <a:r>
-              <a:rPr/>
-              <a:t> 2004.</a:t>
-            </a:r>
-          </a:p>
-          <a:p>
-            <a:pPr lvl="0" indent="0" marL="0">
-              <a:buNone/>
-            </a:pPr>
-            <a:r>
-              <a:rPr/>
-              <a:t>DOI: 10.1162/003355304772839588</a:t>
-            </a:r>
-          </a:p>
-          <a:p>
-            <a:pPr lvl="0" indent="0" marL="0">
-              <a:buNone/>
-            </a:pPr>
-            <a:r>
-              <a:rPr/>
-              <a:t>Their result, which should alarm you:</a:t>
-            </a:r>
-          </a:p>
-          <a:p>
-            <a:pPr lvl="0" indent="0" marL="1270000">
-              <a:buNone/>
-            </a:pPr>
-            <a:r>
-              <a:rPr sz="2000"/>
-              <a:t>Using placebo “treatments” that could have no effect, conventional standard errors rejected the true null in </a:t>
-            </a:r>
-            <a:r>
-              <a:rPr sz="2000" b="1"/>
-              <a:t>up to 45%</a:t>
-            </a:r>
-            <a:r>
-              <a:rPr sz="2000"/>
-              <a:t> of cases — at a nominal 5% level.</a:t>
-            </a:r>
-          </a:p>
-          <a:p>
-            <a:pPr lvl="0" indent="0" marL="0">
-              <a:buNone/>
-            </a:pPr>
-            <a:r>
-              <a:rPr/>
-              <a:t>Not a modelling subtlety. An error rate nine times what was claimed, in a literature that was already published.</a:t>
-            </a:r>
-          </a:p>
-        </p:txBody>
-      </p:sp>
-    </p:spTree>
-  </p:cSld>
-</p:sld>
-</file>
-
-<file path=ppt/slides/slide5.xml><?xml version="1.0" encoding="utf-8"?>
-<p:sld xmlns:a="http://schemas.openxmlformats.org/drawingml/2006/main" xmlns:r="http://schemas.openxmlformats.org/officeDocument/2006/relationships" xmlns:p="http://schemas.openxmlformats.org/presentationml/2006/main">
-  <p:cSld>
-    <p:spTree>
-      <p:nvGrpSpPr>
-        <p:cNvPr id="1" name=""/>
-        <p:cNvGrpSpPr/>
-        <p:nvPr/>
-      </p:nvGrpSpPr>
-      <p:grpSpPr>
-        <a:xfrm>
-          <a:off x="0" y="0"/>
-          <a:ext cx="0" cy="0"/>
-          <a:chOff x="0" y="0"/>
-          <a:chExt cx="0" cy="0"/>
-        </a:xfrm>
-      </p:grpSpPr>
-      <p:sp>
-        <p:nvSpPr>
-          <p:cNvPr id="2" name="Title 1"/>
-          <p:cNvSpPr>
-            <a:spLocks noGrp="1"/>
-          </p:cNvSpPr>
-          <p:nvPr>
-            <p:ph type="title"/>
-          </p:nvPr>
-        </p:nvSpPr>
-        <p:spPr/>
-        <p:txBody>
-          <a:bodyPr/>
-          <a:lstStyle/>
-          <a:p>
-            <a:pPr lvl="0" indent="0" marL="0">
-              <a:buNone/>
-            </a:pPr>
-            <a:r>
-              <a:rPr/>
-              <a:t>Where that came from</a:t>
-            </a:r>
-          </a:p>
-        </p:txBody>
-      </p:sp>
-      <p:sp>
-        <p:nvSpPr>
-          <p:cNvPr id="3" name="Content Placeholder 2"/>
-          <p:cNvSpPr>
-            <a:spLocks noGrp="1"/>
-          </p:cNvSpPr>
-          <p:nvPr>
-            <p:ph idx="1"/>
-          </p:nvPr>
-        </p:nvSpPr>
-        <p:spPr/>
-        <p:txBody>
-          <a:bodyPr/>
-          <a:lstStyle/>
-          <a:p>
-            <a:pPr lvl="0"/>
-            <a:r>
-              <a:rPr/>
-              <a:t>Serially correlated outcomes</a:t>
-            </a:r>
-          </a:p>
-          <a:p>
-            <a:pPr lvl="0"/>
-            <a:r>
-              <a:rPr/>
-              <a:t>Repeated observations on the same unit</a:t>
-            </a:r>
-          </a:p>
-          <a:p>
-            <a:pPr lvl="0"/>
-            <a:r>
-              <a:rPr/>
-              <a:t>Standard errors computed as though each row were an independent draw</a:t>
-            </a:r>
-          </a:p>
-          <a:p>
-            <a:pPr lvl="0" indent="0" marL="0">
-              <a:buNone/>
-            </a:pPr>
-            <a:r>
-              <a:rPr/>
-              <a:t>Our panel has all three. 3,150 rows, 30 countries. Today is about not making their mistake.</a:t>
-            </a:r>
-          </a:p>
-        </p:txBody>
-      </p:sp>
-    </p:spTree>
-  </p:cSld>
-</p:sld>
-</file>
-
-<file path=ppt/slides/slide6.xml><?xml version="1.0" encoding="utf-8"?>
-<p:sld xmlns:a="http://schemas.openxmlformats.org/drawingml/2006/main" xmlns:r="http://schemas.openxmlformats.org/officeDocument/2006/relationships" xmlns:p="http://schemas.openxmlformats.org/presentationml/2006/main">
-  <p:cSld>
-    <p:spTree>
-      <p:nvGrpSpPr>
-        <p:cNvPr id="1" name=""/>
-        <p:cNvGrpSpPr/>
-        <p:nvPr/>
-      </p:nvGrpSpPr>
-      <p:grpSpPr>
-        <a:xfrm>
-          <a:off x="0" y="0"/>
-          <a:ext cx="0" cy="0"/>
-          <a:chOff x="0" y="0"/>
-          <a:chExt cx="0" cy="0"/>
-        </a:xfrm>
-      </p:grpSpPr>
-      <p:sp>
-        <p:nvSpPr>
-          <p:cNvPr id="2" name="Title 1"/>
-          <p:cNvSpPr>
-            <a:spLocks noGrp="1"/>
-          </p:cNvSpPr>
-          <p:nvPr>
-            <p:ph type="title"/>
-          </p:nvPr>
-        </p:nvSpPr>
-        <p:spPr>
-          <a:xfrm>
-            <a:off x="722313" y="3305176"/>
-            <a:ext cx="7772400" cy="1021556"/>
-          </a:xfrm>
-        </p:spPr>
-        <p:txBody>
-          <a:bodyPr/>
-          <a:lstStyle/>
-          <a:p>
-            <a:pPr lvl="0" indent="0" marL="0">
-              <a:buNone/>
-            </a:pPr>
-            <a:r>
-              <a:rPr/>
-              <a:t>The question</a:t>
-            </a:r>
-          </a:p>
-        </p:txBody>
-      </p:sp>
     </p:spTree>
   </p:cSld>
 </p:sld>
@@ -7751,99 +7030,226 @@
             </a:pPr>
             <a:r>
               <a:rPr/>
-              <a:t>Earnings and education across Europe</a:t>
-            </a:r>
-          </a:p>
-        </p:txBody>
-      </p:sp>
-      <p:sp>
-        <p:nvSpPr>
-          <p:cNvPr id="3" name="Content Placeholder 2"/>
-          <p:cNvSpPr>
-            <a:spLocks noGrp="1"/>
-          </p:cNvSpPr>
-          <p:nvPr>
-            <p:ph idx="1"/>
-          </p:nvPr>
-        </p:nvSpPr>
-        <p:spPr/>
-        <p:txBody>
-          <a:bodyPr/>
-          <a:lstStyle/>
-          <a:p>
-            <a:pPr lvl="0" indent="0" marL="1270000">
-              <a:buNone/>
-            </a:pPr>
-            <a:r>
-              <a:rPr sz="2000" i="1"/>
-              <a:t>“A higher tertiary-education share is associated with higher annual earnings.”</a:t>
-            </a:r>
-          </a:p>
-          <a:p>
-            <a:pPr lvl="0" indent="0" marL="0">
-              <a:buNone/>
-            </a:pPr>
-            <a:r>
-              <a:rPr/>
-              <a:t>Estimating that coefficient is the easy part. The hard part:</a:t>
-            </a:r>
-          </a:p>
-          <a:p>
-            <a:pPr lvl="0"/>
-            <a:r>
-              <a:rPr/>
-              <a:t>How </a:t>
-            </a:r>
-            <a:r>
-              <a:rPr b="1"/>
-              <a:t>precise</a:t>
-            </a:r>
-            <a:r>
-              <a:rPr/>
-              <a:t> is it?</a:t>
-            </a:r>
-          </a:p>
-          <a:p>
-            <a:pPr lvl="0"/>
-            <a:r>
-              <a:rPr/>
-              <a:t>What is the </a:t>
-            </a:r>
-            <a:r>
-              <a:rPr b="1"/>
-              <a:t>p-value</a:t>
-            </a:r>
-            <a:r>
-              <a:rPr/>
-              <a:t> actually testing?</a:t>
-            </a:r>
-          </a:p>
-          <a:p>
-            <a:pPr lvl="0"/>
-            <a:r>
-              <a:rPr/>
-              <a:t>What would make the whole thing </a:t>
-            </a:r>
-            <a:r>
-              <a:rPr b="1"/>
-              <a:t>wrong</a:t>
-            </a:r>
-            <a:r>
-              <a:rPr/>
-              <a:t> rather than merely imprecise?</a:t>
-            </a:r>
-          </a:p>
-          <a:p>
-            <a:pPr lvl="0" indent="0" marL="0">
-              <a:buNone/>
-            </a:pPr>
-            <a:r>
-              <a:rPr/>
-              <a:t>Session 02 gave you the point estimate. This session is about whether you are entitled to any confidence in it.</a:t>
-            </a:r>
-          </a:p>
-        </p:txBody>
-      </p:sp>
+              <a:t>Unbiasedness</a:t>
+            </a:r>
+          </a:p>
+        </p:txBody>
+      </p:sp>
+      <mc:AlternateContent xmlns:mc="http://schemas.openxmlformats.org/markup-compatibility/2006">
+        <mc:Choice xmlns:a14="http://schemas.microsoft.com/office/drawing/2010/main" Requires="a14">
+          <p:sp>
+            <p:nvSpPr>
+              <p:cNvPr id="3" name="Content Placeholder 2"/>
+              <p:cNvSpPr>
+                <a:spLocks noGrp="1"/>
+              </p:cNvSpPr>
+              <p:nvPr>
+                <p:ph idx="1"/>
+              </p:nvPr>
+            </p:nvSpPr>
+            <p:spPr/>
+            <p:txBody>
+              <a:bodyPr/>
+              <a:lstStyle/>
+              <a:p>
+                <a:pPr lvl="0" indent="0" marL="0">
+                  <a:buNone/>
+                </a:pPr>
+                <a14:m>
+                  <m:oMathPara xmlns:m="http://schemas.openxmlformats.org/officeDocument/2006/math">
+                    <m:oMathParaPr>
+                      <m:jc m:val="center"/>
+                    </m:oMathParaPr>
+                    <m:oMath>
+                      <m:r>
+                        <m:rPr>
+                          <m:sty m:val="p"/>
+                          <m:scr m:val="double-struck"/>
+                        </m:rPr>
+                        <m:t>E</m:t>
+                      </m:r>
+                      <m:d>
+                        <m:dPr>
+                          <m:begChr m:val="["/>
+                          <m:sepChr m:val=""/>
+                          <m:endChr m:val="]"/>
+                          <m:grow/>
+                        </m:dPr>
+                        <m:e>
+                          <m:acc>
+                            <m:accPr>
+                              <m:chr m:val="̂"/>
+                            </m:accPr>
+                            <m:e>
+                              <m:r>
+                                <m:t>β</m:t>
+                              </m:r>
+                            </m:e>
+                          </m:acc>
+                          <m:r>
+                            <m:rPr>
+                              <m:sty m:val="p"/>
+                            </m:rPr>
+                            <m:t>∣</m:t>
+                          </m:r>
+                          <m:r>
+                            <m:t>X</m:t>
+                          </m:r>
+                        </m:e>
+                      </m:d>
+                      <m:r>
+                        <m:rPr>
+                          <m:sty m:val="p"/>
+                        </m:rPr>
+                        <m:t>=</m:t>
+                      </m:r>
+                      <m:r>
+                        <m:t>β</m:t>
+                      </m:r>
+                      <m:r>
+                        <m:rPr>
+                          <m:sty m:val="p"/>
+                        </m:rPr>
+                        <m:t>+</m:t>
+                      </m:r>
+                      <m:sSup>
+                        <m:e>
+                          <m:d>
+                            <m:dPr>
+                              <m:begChr m:val="("/>
+                              <m:sepChr m:val=""/>
+                              <m:endChr m:val=")"/>
+                              <m:grow/>
+                            </m:dPr>
+                            <m:e>
+                              <m:sSup>
+                                <m:e>
+                                  <m:r>
+                                    <m:t>X</m:t>
+                                  </m:r>
+                                </m:e>
+                                <m:sup>
+                                  <m:r>
+                                    <m:rPr>
+                                      <m:sty m:val="p"/>
+                                    </m:rPr>
+                                    <m:t>⊤</m:t>
+                                  </m:r>
+                                </m:sup>
+                              </m:sSup>
+                              <m:r>
+                                <m:t>X</m:t>
+                              </m:r>
+                            </m:e>
+                          </m:d>
+                        </m:e>
+                        <m:sup>
+                          <m:r>
+                            <m:rPr>
+                              <m:sty m:val="p"/>
+                            </m:rPr>
+                            <m:t>−</m:t>
+                          </m:r>
+                          <m:r>
+                            <m:t>1</m:t>
+                          </m:r>
+                        </m:sup>
+                      </m:sSup>
+                      <m:sSup>
+                        <m:e>
+                          <m:r>
+                            <m:t>X</m:t>
+                          </m:r>
+                        </m:e>
+                        <m:sup>
+                          <m:r>
+                            <m:rPr>
+                              <m:sty m:val="p"/>
+                            </m:rPr>
+                            <m:t>⊤</m:t>
+                          </m:r>
+                        </m:sup>
+                      </m:sSup>
+                      <m:r>
+                        <m:rPr>
+                          <m:sty m:val="p"/>
+                          <m:scr m:val="double-struck"/>
+                        </m:rPr>
+                        <m:t>E</m:t>
+                      </m:r>
+                      <m:d>
+                        <m:dPr>
+                          <m:begChr m:val="["/>
+                          <m:sepChr m:val=""/>
+                          <m:endChr m:val="]"/>
+                          <m:grow/>
+                        </m:dPr>
+                        <m:e>
+                          <m:r>
+                            <m:t>ε</m:t>
+                          </m:r>
+                          <m:r>
+                            <m:rPr>
+                              <m:sty m:val="p"/>
+                            </m:rPr>
+                            <m:t>∣</m:t>
+                          </m:r>
+                          <m:r>
+                            <m:t>X</m:t>
+                          </m:r>
+                        </m:e>
+                      </m:d>
+                      <m:r>
+                        <m:rPr>
+                          <m:sty m:val="p"/>
+                        </m:rPr>
+                        <m:t>=</m:t>
+                      </m:r>
+                      <m:r>
+                        <m:t>β</m:t>
+                      </m:r>
+                    </m:oMath>
+                  </m:oMathPara>
+                </a14:m>
+              </a:p>
+              <a:p>
+                <a:pPr lvl="0" indent="0" marL="0">
+                  <a:buNone/>
+                </a:pPr>
+                <a:r>
+                  <a:rPr/>
+                  <a:t>using only </a:t>
+                </a:r>
+                <a:r>
+                  <a:rPr b="1"/>
+                  <a:t>strict exogeneity</a:t>
+                </a:r>
+                <a:r>
+                  <a:rPr/>
+                  <a:t>.</a:t>
+                </a:r>
+              </a:p>
+              <a:p>
+                <a:pPr lvl="0" indent="0" marL="0">
+                  <a:buNone/>
+                </a:pPr>
+                <a:r>
+                  <a:rPr/>
+                  <a:t>Note what is </a:t>
+                </a:r>
+                <a:r>
+                  <a:rPr i="1"/>
+                  <a:t>not</a:t>
+                </a:r>
+                <a:r>
+                  <a:rPr/>
+                  <a:t> needed: no homoskedasticity, no normality, no independence.</a:t>
+                </a:r>
+              </a:p>
+            </p:txBody>
+          </p:sp>
+        </mc:Choice>
+      </mc:AlternateContent>
     </p:spTree>
   </p:cSld>
 </p:sld>
@@ -7886,91 +7292,279 @@
             </a:pPr>
             <a:r>
               <a:rPr/>
-              <a:t>Three ways your standard errors lie</a:t>
-            </a:r>
-          </a:p>
-        </p:txBody>
-      </p:sp>
-      <p:sp>
-        <p:nvSpPr>
-          <p:cNvPr id="3" name="Content Placeholder 2"/>
-          <p:cNvSpPr>
-            <a:spLocks noGrp="1"/>
-          </p:cNvSpPr>
-          <p:nvPr>
-            <p:ph idx="1"/>
-          </p:nvPr>
-        </p:nvSpPr>
-        <p:spPr/>
-        <p:txBody>
-          <a:bodyPr/>
-          <a:lstStyle/>
-          <a:p>
-            <a:pPr lvl="0" indent="-342900" marL="342900">
-              <a:buAutoNum type="arabicPeriod"/>
-            </a:pPr>
-            <a:r>
-              <a:rPr b="1"/>
-              <a:t>Heteroskedasticity</a:t>
-            </a:r>
-            <a:r>
-              <a:rPr/>
-              <a:t> — the error variance is not constant. In this panel it scales with country size.</a:t>
-            </a:r>
-          </a:p>
-          <a:p>
-            <a:pPr lvl="0" indent="-342900" marL="342900">
-              <a:buAutoNum type="arabicPeriod"/>
-            </a:pPr>
-            <a:r>
-              <a:rPr b="1"/>
-              <a:t>Within-country correlation</a:t>
-            </a:r>
-            <a:r>
-              <a:rPr/>
-              <a:t> — Germany in 2019 and Germany in 2020 are not independent draws.</a:t>
-            </a:r>
-          </a:p>
-          <a:p>
-            <a:pPr lvl="0" indent="-342900" marL="342900">
-              <a:buAutoNum type="arabicPeriod"/>
-            </a:pPr>
-            <a:r>
-              <a:rPr b="1"/>
-              <a:t>Omitted variables</a:t>
-            </a:r>
-            <a:r>
-              <a:rPr/>
-              <a:t> — no standard error can rescue you from a missing confounder. That is a bias, not a variance.</a:t>
-            </a:r>
-          </a:p>
-          <a:p>
-            <a:pPr lvl="0" indent="0" marL="0">
-              <a:buNone/>
-            </a:pPr>
-            <a:r>
-              <a:rPr/>
-              <a:t>The first two make your intervals </a:t>
-            </a:r>
-            <a:r>
-              <a:rPr b="1"/>
-              <a:t>too narrow</a:t>
-            </a:r>
-            <a:r>
-              <a:rPr/>
-              <a:t>. The third makes the estimate </a:t>
-            </a:r>
-            <a:r>
-              <a:rPr b="1"/>
-              <a:t>wrong</a:t>
-            </a:r>
-            <a:r>
-              <a:rPr/>
-              <a:t>. They require different responses.</a:t>
-            </a:r>
-          </a:p>
-        </p:txBody>
-      </p:sp>
+              <a:t>Variance, under homoskedasticity</a:t>
+            </a:r>
+          </a:p>
+        </p:txBody>
+      </p:sp>
+      <mc:AlternateContent xmlns:mc="http://schemas.openxmlformats.org/markup-compatibility/2006">
+        <mc:Choice xmlns:a14="http://schemas.microsoft.com/office/drawing/2010/main" Requires="a14">
+          <p:sp>
+            <p:nvSpPr>
+              <p:cNvPr id="3" name="Content Placeholder 2"/>
+              <p:cNvSpPr>
+                <a:spLocks noGrp="1"/>
+              </p:cNvSpPr>
+              <p:nvPr>
+                <p:ph idx="1"/>
+              </p:nvPr>
+            </p:nvSpPr>
+            <p:spPr/>
+            <p:txBody>
+              <a:bodyPr/>
+              <a:lstStyle/>
+              <a:p>
+                <a:pPr lvl="0" indent="0" marL="0">
+                  <a:buNone/>
+                </a:pPr>
+                <a14:m>
+                  <m:oMathPara xmlns:m="http://schemas.openxmlformats.org/officeDocument/2006/math">
+                    <m:oMathParaPr>
+                      <m:jc m:val="center"/>
+                    </m:oMathParaPr>
+                    <m:oMath>
+                      <m:r>
+                        <m:rPr>
+                          <m:sty m:val="p"/>
+                        </m:rPr>
+                        <m:t>Var</m:t>
+                      </m:r>
+                      <m:d>
+                        <m:dPr>
+                          <m:begChr m:val="("/>
+                          <m:sepChr m:val=""/>
+                          <m:endChr m:val=")"/>
+                          <m:grow/>
+                        </m:dPr>
+                        <m:e>
+                          <m:acc>
+                            <m:accPr>
+                              <m:chr m:val="̂"/>
+                            </m:accPr>
+                            <m:e>
+                              <m:r>
+                                <m:t>β</m:t>
+                              </m:r>
+                            </m:e>
+                          </m:acc>
+                          <m:r>
+                            <m:rPr>
+                              <m:sty m:val="p"/>
+                            </m:rPr>
+                            <m:t>∣</m:t>
+                          </m:r>
+                          <m:r>
+                            <m:t>X</m:t>
+                          </m:r>
+                        </m:e>
+                      </m:d>
+                      <m:r>
+                        <m:rPr>
+                          <m:sty m:val="p"/>
+                        </m:rPr>
+                        <m:t>=</m:t>
+                      </m:r>
+                      <m:sSup>
+                        <m:e>
+                          <m:d>
+                            <m:dPr>
+                              <m:begChr m:val="("/>
+                              <m:sepChr m:val=""/>
+                              <m:endChr m:val=")"/>
+                              <m:grow/>
+                            </m:dPr>
+                            <m:e>
+                              <m:sSup>
+                                <m:e>
+                                  <m:r>
+                                    <m:t>X</m:t>
+                                  </m:r>
+                                </m:e>
+                                <m:sup>
+                                  <m:r>
+                                    <m:rPr>
+                                      <m:sty m:val="p"/>
+                                    </m:rPr>
+                                    <m:t>⊤</m:t>
+                                  </m:r>
+                                </m:sup>
+                              </m:sSup>
+                              <m:r>
+                                <m:t>X</m:t>
+                              </m:r>
+                            </m:e>
+                          </m:d>
+                        </m:e>
+                        <m:sup>
+                          <m:r>
+                            <m:rPr>
+                              <m:sty m:val="p"/>
+                            </m:rPr>
+                            <m:t>−</m:t>
+                          </m:r>
+                          <m:r>
+                            <m:t>1</m:t>
+                          </m:r>
+                        </m:sup>
+                      </m:sSup>
+                      <m:sSup>
+                        <m:e>
+                          <m:r>
+                            <m:t>X</m:t>
+                          </m:r>
+                        </m:e>
+                        <m:sup>
+                          <m:r>
+                            <m:rPr>
+                              <m:sty m:val="p"/>
+                            </m:rPr>
+                            <m:t>⊤</m:t>
+                          </m:r>
+                        </m:sup>
+                      </m:sSup>
+                      <m:r>
+                        <m:rPr>
+                          <m:sty m:val="p"/>
+                        </m:rPr>
+                        <m:t>Var</m:t>
+                      </m:r>
+                      <m:d>
+                        <m:dPr>
+                          <m:begChr m:val="("/>
+                          <m:sepChr m:val=""/>
+                          <m:endChr m:val=")"/>
+                          <m:grow/>
+                        </m:dPr>
+                        <m:e>
+                          <m:r>
+                            <m:t>ε</m:t>
+                          </m:r>
+                          <m:r>
+                            <m:rPr>
+                              <m:sty m:val="p"/>
+                            </m:rPr>
+                            <m:t>∣</m:t>
+                          </m:r>
+                          <m:r>
+                            <m:t>X</m:t>
+                          </m:r>
+                        </m:e>
+                      </m:d>
+                      <m:r>
+                        <m:t>X</m:t>
+                      </m:r>
+                      <m:sSup>
+                        <m:e>
+                          <m:d>
+                            <m:dPr>
+                              <m:begChr m:val="("/>
+                              <m:sepChr m:val=""/>
+                              <m:endChr m:val=")"/>
+                              <m:grow/>
+                            </m:dPr>
+                            <m:e>
+                              <m:sSup>
+                                <m:e>
+                                  <m:r>
+                                    <m:t>X</m:t>
+                                  </m:r>
+                                </m:e>
+                                <m:sup>
+                                  <m:r>
+                                    <m:rPr>
+                                      <m:sty m:val="p"/>
+                                    </m:rPr>
+                                    <m:t>⊤</m:t>
+                                  </m:r>
+                                </m:sup>
+                              </m:sSup>
+                              <m:r>
+                                <m:t>X</m:t>
+                              </m:r>
+                            </m:e>
+                          </m:d>
+                        </m:e>
+                        <m:sup>
+                          <m:r>
+                            <m:rPr>
+                              <m:sty m:val="p"/>
+                            </m:rPr>
+                            <m:t>−</m:t>
+                          </m:r>
+                          <m:r>
+                            <m:t>1</m:t>
+                          </m:r>
+                        </m:sup>
+                      </m:sSup>
+                      <m:r>
+                        <m:rPr>
+                          <m:sty m:val="p"/>
+                        </m:rPr>
+                        <m:t>=</m:t>
+                      </m:r>
+                      <m:sSup>
+                        <m:e>
+                          <m:r>
+                            <m:t>σ</m:t>
+                          </m:r>
+                        </m:e>
+                        <m:sup>
+                          <m:r>
+                            <m:t>2</m:t>
+                          </m:r>
+                        </m:sup>
+                      </m:sSup>
+                      <m:sSup>
+                        <m:e>
+                          <m:d>
+                            <m:dPr>
+                              <m:begChr m:val="("/>
+                              <m:sepChr m:val=""/>
+                              <m:endChr m:val=")"/>
+                              <m:grow/>
+                            </m:dPr>
+                            <m:e>
+                              <m:sSup>
+                                <m:e>
+                                  <m:r>
+                                    <m:t>X</m:t>
+                                  </m:r>
+                                </m:e>
+                                <m:sup>
+                                  <m:r>
+                                    <m:rPr>
+                                      <m:sty m:val="p"/>
+                                    </m:rPr>
+                                    <m:t>⊤</m:t>
+                                  </m:r>
+                                </m:sup>
+                              </m:sSup>
+                              <m:r>
+                                <m:t>X</m:t>
+                              </m:r>
+                            </m:e>
+                          </m:d>
+                        </m:e>
+                        <m:sup>
+                          <m:r>
+                            <m:rPr>
+                              <m:sty m:val="p"/>
+                            </m:rPr>
+                            <m:t>−</m:t>
+                          </m:r>
+                          <m:r>
+                            <m:t>1</m:t>
+                          </m:r>
+                        </m:sup>
+                      </m:sSup>
+                    </m:oMath>
+                  </m:oMathPara>
+                </a14:m>
+              </a:p>
+            </p:txBody>
+          </p:sp>
+        </mc:Choice>
+      </mc:AlternateContent>
     </p:spTree>
   </p:cSld>
 </p:sld>
@@ -8003,12 +7597,7 @@
             <p:ph type="title"/>
           </p:nvPr>
         </p:nvSpPr>
-        <p:spPr>
-          <a:xfrm>
-            <a:off x="722313" y="3305176"/>
-            <a:ext cx="7772400" cy="1021556"/>
-          </a:xfrm>
-        </p:spPr>
+        <p:spPr/>
         <p:txBody>
           <a:bodyPr/>
           <a:lstStyle/>
@@ -8018,11 +7607,269 @@
             </a:pPr>
             <a:r>
               <a:rPr/>
-              <a:t>The method</a:t>
-            </a:r>
-          </a:p>
-        </p:txBody>
-      </p:sp>
+              <a:t>The form worth memorising</a:t>
+            </a:r>
+          </a:p>
+        </p:txBody>
+      </p:sp>
+      <mc:AlternateContent xmlns:mc="http://schemas.openxmlformats.org/markup-compatibility/2006">
+        <mc:Choice xmlns:a14="http://schemas.microsoft.com/office/drawing/2010/main" Requires="a14">
+          <p:sp>
+            <p:nvSpPr>
+              <p:cNvPr id="3" name="Content Placeholder 2"/>
+              <p:cNvSpPr>
+                <a:spLocks noGrp="1"/>
+              </p:cNvSpPr>
+              <p:nvPr>
+                <p:ph idx="1"/>
+              </p:nvPr>
+            </p:nvSpPr>
+            <p:spPr/>
+            <p:txBody>
+              <a:bodyPr/>
+              <a:lstStyle/>
+              <a:p>
+                <a:pPr lvl="0" indent="0" marL="0">
+                  <a:buNone/>
+                </a:pPr>
+                <a:r>
+                  <a:rPr/>
+                  <a:t>For a single coefficient:</a:t>
+                </a:r>
+              </a:p>
+              <a:p>
+                <a:pPr lvl="0" indent="0" marL="0">
+                  <a:buNone/>
+                </a:pPr>
+                <a14:m>
+                  <m:oMathPara xmlns:m="http://schemas.openxmlformats.org/officeDocument/2006/math">
+                    <m:oMathParaPr>
+                      <m:jc m:val="center"/>
+                    </m:oMathParaPr>
+                    <m:oMath>
+                      <m:r>
+                        <m:rPr>
+                          <m:sty m:val="p"/>
+                        </m:rPr>
+                        <m:t>Var</m:t>
+                      </m:r>
+                      <m:d>
+                        <m:dPr>
+                          <m:begChr m:val="("/>
+                          <m:sepChr m:val=""/>
+                          <m:endChr m:val=")"/>
+                          <m:grow/>
+                        </m:dPr>
+                        <m:e>
+                          <m:sSub>
+                            <m:e>
+                              <m:acc>
+                                <m:accPr>
+                                  <m:chr m:val="̂"/>
+                                </m:accPr>
+                                <m:e>
+                                  <m:r>
+                                    <m:t>β</m:t>
+                                  </m:r>
+                                </m:e>
+                              </m:acc>
+                            </m:e>
+                            <m:sub>
+                              <m:r>
+                                <m:t>j</m:t>
+                              </m:r>
+                            </m:sub>
+                          </m:sSub>
+                        </m:e>
+                      </m:d>
+                      <m:r>
+                        <m:rPr>
+                          <m:sty m:val="p"/>
+                        </m:rPr>
+                        <m:t>=</m:t>
+                      </m:r>
+                      <m:f>
+                        <m:fPr>
+                          <m:type m:val="bar"/>
+                        </m:fPr>
+                        <m:num>
+                          <m:sSup>
+                            <m:e>
+                              <m:r>
+                                <m:t>σ</m:t>
+                              </m:r>
+                            </m:e>
+                            <m:sup>
+                              <m:r>
+                                <m:t>2</m:t>
+                              </m:r>
+                            </m:sup>
+                          </m:sSup>
+                        </m:num>
+                        <m:den>
+                          <m:r>
+                            <m:t>n</m:t>
+                          </m:r>
+                          <m:r>
+                            <m:rPr>
+                              <m:sty m:val="p"/>
+                            </m:rPr>
+                            <m:t>⋅</m:t>
+                          </m:r>
+                          <m:r>
+                            <m:rPr>
+                              <m:sty m:val="p"/>
+                            </m:rPr>
+                            <m:t>Var</m:t>
+                          </m:r>
+                          <m:d>
+                            <m:dPr>
+                              <m:begChr m:val="("/>
+                              <m:sepChr m:val=""/>
+                              <m:endChr m:val=")"/>
+                              <m:grow/>
+                            </m:dPr>
+                            <m:e>
+                              <m:sSub>
+                                <m:e>
+                                  <m:r>
+                                    <m:t>x</m:t>
+                                  </m:r>
+                                </m:e>
+                                <m:sub>
+                                  <m:r>
+                                    <m:t>j</m:t>
+                                  </m:r>
+                                </m:sub>
+                              </m:sSub>
+                            </m:e>
+                          </m:d>
+                          <m:r>
+                            <m:rPr>
+                              <m:sty m:val="p"/>
+                            </m:rPr>
+                            <m:t>⋅</m:t>
+                          </m:r>
+                          <m:d>
+                            <m:dPr>
+                              <m:begChr m:val="("/>
+                              <m:sepChr m:val=""/>
+                              <m:endChr m:val=")"/>
+                              <m:grow/>
+                            </m:dPr>
+                            <m:e>
+                              <m:r>
+                                <m:t>1</m:t>
+                              </m:r>
+                              <m:r>
+                                <m:rPr>
+                                  <m:sty m:val="p"/>
+                                </m:rPr>
+                                <m:t>−</m:t>
+                              </m:r>
+                              <m:sSubSup>
+                                <m:e>
+                                  <m:r>
+                                    <m:t>R</m:t>
+                                  </m:r>
+                                </m:e>
+                                <m:sub>
+                                  <m:r>
+                                    <m:t>j</m:t>
+                                  </m:r>
+                                </m:sub>
+                                <m:sup>
+                                  <m:r>
+                                    <m:t>2</m:t>
+                                  </m:r>
+                                </m:sup>
+                              </m:sSubSup>
+                            </m:e>
+                          </m:d>
+                        </m:den>
+                      </m:f>
+                    </m:oMath>
+                  </m:oMathPara>
+                </a14:m>
+              </a:p>
+              <a:p>
+                <a:pPr lvl="0" indent="0" marL="0">
+                  <a:buNone/>
+                </a:pPr>
+                <a:r>
+                  <a:rPr/>
+                  <a:t>where </a:t>
+                </a:r>
+                <a14:m>
+                  <m:oMath xmlns:m="http://schemas.openxmlformats.org/officeDocument/2006/math">
+                    <m:sSubSup>
+                      <m:e>
+                        <m:r>
+                          <m:t>R</m:t>
+                        </m:r>
+                      </m:e>
+                      <m:sub>
+                        <m:r>
+                          <m:t>j</m:t>
+                        </m:r>
+                      </m:sub>
+                      <m:sup>
+                        <m:r>
+                          <m:t>2</m:t>
+                        </m:r>
+                      </m:sup>
+                    </m:sSubSup>
+                  </m:oMath>
+                </a14:m>
+                <a:r>
+                  <a:rPr/>
+                  <a:t> is the </a:t>
+                </a:r>
+                <a14:m>
+                  <m:oMath xmlns:m="http://schemas.openxmlformats.org/officeDocument/2006/math">
+                    <m:sSup>
+                      <m:e>
+                        <m:r>
+                          <m:t>R</m:t>
+                        </m:r>
+                      </m:e>
+                      <m:sup>
+                        <m:r>
+                          <m:t>2</m:t>
+                        </m:r>
+                      </m:sup>
+                    </m:sSup>
+                  </m:oMath>
+                </a14:m>
+                <a:r>
+                  <a:rPr/>
+                  <a:t> from regressing </a:t>
+                </a:r>
+                <a14:m>
+                  <m:oMath xmlns:m="http://schemas.openxmlformats.org/officeDocument/2006/math">
+                    <m:sSub>
+                      <m:e>
+                        <m:r>
+                          <m:t>x</m:t>
+                        </m:r>
+                      </m:e>
+                      <m:sub>
+                        <m:r>
+                          <m:t>j</m:t>
+                        </m:r>
+                      </m:sub>
+                    </m:sSub>
+                  </m:oMath>
+                </a14:m>
+                <a:r>
+                  <a:rPr/>
+                  <a:t> on all other regressors.</a:t>
+                </a:r>
+              </a:p>
+            </p:txBody>
+          </p:sp>
+        </mc:Choice>
+      </mc:AlternateContent>
     </p:spTree>
   </p:cSld>
 </p:sld>

--- a/03-inference-diagnostics-interpretation/slides.pptx
+++ b/03-inference-diagnostics-interpretation/slides.pptx
@@ -6133,7 +6133,7 @@
                 </a:pPr>
                 <a:r>
                   <a:rPr/>
-                  <a:t>Fit your angle’s specification; inspect residuals against fitted values</a:t>
+                  <a:t>Fit your project’s specification; inspect residuals against fitted values</a:t>
                 </a:r>
               </a:p>
               <a:p>

--- a/03-inference-diagnostics-interpretation/slides.pptx
+++ b/03-inference-diagnostics-interpretation/slides.pptx
@@ -6133,7 +6133,7 @@
                 </a:pPr>
                 <a:r>
                   <a:rPr/>
-                  <a:t>Fit your project’s specification; inspect residuals against fitted values</a:t>
+                  <a:t>Fit the specification on the practice data; inspect residuals against fitted values</a:t>
                 </a:r>
               </a:p>
               <a:p>

--- a/03-inference-diagnostics-interpretation/slides.pptx
+++ b/03-inference-diagnostics-interpretation/slides.pptx
@@ -6059,7 +6059,7 @@
             </a:pPr>
             <a:r>
               <a:rPr/>
-              <a:t>The lab</a:t>
+              <a:t>The practice</a:t>
             </a:r>
           </a:p>
         </p:txBody>
@@ -6325,7 +6325,7 @@
                 <a:hlinkClick r:id="rId2"/>
                 <a:latin typeface="Courier"/>
               </a:rPr>
-              <a:t>02-lab/README.md</a:t>
+              <a:t>02-practice/README.md</a:t>
             </a:r>
           </a:p>
         </p:txBody>

--- a/03-inference-diagnostics-interpretation/slides.pptx
+++ b/03-inference-diagnostics-interpretation/slides.pptx
@@ -3390,7 +3390,19 @@
                       <m:rPr>
                         <m:sty m:val="p"/>
                       </m:rPr>
-                      <m:t>Var</m:t>
+                      <m:t>V</m:t>
+                    </m:r>
+                    <m:r>
+                      <m:rPr>
+                        <m:sty m:val="p"/>
+                      </m:rPr>
+                      <m:t>a</m:t>
+                    </m:r>
+                    <m:r>
+                      <m:rPr>
+                        <m:sty m:val="p"/>
+                      </m:rPr>
+                      <m:t>r</m:t>
                     </m:r>
                     <m:d>
                       <m:dPr>
@@ -3909,7 +3921,19 @@
                         <m:rPr>
                           <m:sty m:val="p"/>
                         </m:rPr>
-                        <m:t>Var</m:t>
+                        <m:t>V</m:t>
+                      </m:r>
+                      <m:r>
+                        <m:rPr>
+                          <m:sty m:val="p"/>
+                        </m:rPr>
+                        <m:t>a</m:t>
+                      </m:r>
+                      <m:r>
+                        <m:rPr>
+                          <m:sty m:val="p"/>
+                        </m:rPr>
+                        <m:t>r</m:t>
                       </m:r>
                       <m:d>
                         <m:dPr>
@@ -4036,7 +4060,19 @@
                         <m:rPr>
                           <m:sty m:val="p"/>
                         </m:rPr>
-                        <m:t>Var</m:t>
+                        <m:t>V</m:t>
+                      </m:r>
+                      <m:r>
+                        <m:rPr>
+                          <m:sty m:val="p"/>
+                        </m:rPr>
+                        <m:t>a</m:t>
+                      </m:r>
+                      <m:r>
+                        <m:rPr>
+                          <m:sty m:val="p"/>
+                        </m:rPr>
+                        <m:t>r</m:t>
                       </m:r>
                       <m:d>
                         <m:dPr>
@@ -4338,7 +4374,19 @@
                         <m:rPr>
                           <m:sty m:val="p"/>
                         </m:rPr>
-                        <m:t>Var</m:t>
+                        <m:t>V</m:t>
+                      </m:r>
+                      <m:r>
+                        <m:rPr>
+                          <m:sty m:val="p"/>
+                        </m:rPr>
+                        <m:t>a</m:t>
+                      </m:r>
+                      <m:r>
+                        <m:rPr>
+                          <m:sty m:val="p"/>
+                        </m:rPr>
+                        <m:t>r</m:t>
                       </m:r>
                       <m:d>
                         <m:dPr>
@@ -4519,7 +4567,19 @@
                       <m:rPr>
                         <m:sty m:val="p"/>
                       </m:rPr>
-                      <m:t>Var</m:t>
+                      <m:t>V</m:t>
+                    </m:r>
+                    <m:r>
+                      <m:rPr>
+                        <m:sty m:val="p"/>
+                      </m:rPr>
+                      <m:t>a</m:t>
+                    </m:r>
+                    <m:r>
+                      <m:rPr>
+                        <m:sty m:val="p"/>
+                      </m:rPr>
+                      <m:t>r</m:t>
                     </m:r>
                     <m:d>
                       <m:dPr>
@@ -4674,7 +4734,25 @@
                         <m:rPr>
                           <m:sty m:val="p"/>
                         </m:rPr>
-                        <m:t>diag</m:t>
+                        <m:t>d</m:t>
+                      </m:r>
+                      <m:r>
+                        <m:rPr>
+                          <m:sty m:val="p"/>
+                        </m:rPr>
+                        <m:t>i</m:t>
+                      </m:r>
+                      <m:r>
+                        <m:rPr>
+                          <m:sty m:val="p"/>
+                        </m:rPr>
+                        <m:t>a</m:t>
+                      </m:r>
+                      <m:r>
+                        <m:rPr>
+                          <m:sty m:val="p"/>
+                        </m:rPr>
+                        <m:t>g</m:t>
                       </m:r>
                       <m:d>
                         <m:dPr>
@@ -7327,7 +7405,19 @@
                         <m:rPr>
                           <m:sty m:val="p"/>
                         </m:rPr>
-                        <m:t>Var</m:t>
+                        <m:t>V</m:t>
+                      </m:r>
+                      <m:r>
+                        <m:rPr>
+                          <m:sty m:val="p"/>
+                        </m:rPr>
+                        <m:t>a</m:t>
+                      </m:r>
+                      <m:r>
+                        <m:rPr>
+                          <m:sty m:val="p"/>
+                        </m:rPr>
+                        <m:t>r</m:t>
                       </m:r>
                       <m:d>
                         <m:dPr>
@@ -7426,7 +7516,19 @@
                         <m:rPr>
                           <m:sty m:val="p"/>
                         </m:rPr>
-                        <m:t>Var</m:t>
+                        <m:t>V</m:t>
+                      </m:r>
+                      <m:r>
+                        <m:rPr>
+                          <m:sty m:val="p"/>
+                        </m:rPr>
+                        <m:t>a</m:t>
+                      </m:r>
+                      <m:r>
+                        <m:rPr>
+                          <m:sty m:val="p"/>
+                        </m:rPr>
+                        <m:t>r</m:t>
                       </m:r>
                       <m:d>
                         <m:dPr>
@@ -7651,7 +7753,19 @@
                         <m:rPr>
                           <m:sty m:val="p"/>
                         </m:rPr>
-                        <m:t>Var</m:t>
+                        <m:t>V</m:t>
+                      </m:r>
+                      <m:r>
+                        <m:rPr>
+                          <m:sty m:val="p"/>
+                        </m:rPr>
+                        <m:t>a</m:t>
+                      </m:r>
+                      <m:r>
+                        <m:rPr>
+                          <m:sty m:val="p"/>
+                        </m:rPr>
+                        <m:t>r</m:t>
                       </m:r>
                       <m:d>
                         <m:dPr>
@@ -7720,7 +7834,19 @@
                             <m:rPr>
                               <m:sty m:val="p"/>
                             </m:rPr>
-                            <m:t>Var</m:t>
+                            <m:t>V</m:t>
+                          </m:r>
+                          <m:r>
+                            <m:rPr>
+                              <m:sty m:val="p"/>
+                            </m:rPr>
+                            <m:t>a</m:t>
+                          </m:r>
+                          <m:r>
+                            <m:rPr>
+                              <m:sty m:val="p"/>
+                            </m:rPr>
+                            <m:t>r</m:t>
                           </m:r>
                           <m:d>
                             <m:dPr>

--- a/03-inference-diagnostics-interpretation/slides.pptx
+++ b/03-inference-diagnostics-interpretation/slides.pptx
@@ -33,6 +33,18 @@
     <p:sldId id="281" r:id="rId27"/>
     <p:sldId id="282" r:id="rId28"/>
     <p:sldId id="283" r:id="rId29"/>
+    <p:sldId id="284" r:id="rId30"/>
+    <p:sldId id="285" r:id="rId31"/>
+    <p:sldId id="286" r:id="rId32"/>
+    <p:sldId id="287" r:id="rId33"/>
+    <p:sldId id="288" r:id="rId34"/>
+    <p:sldId id="289" r:id="rId35"/>
+    <p:sldId id="290" r:id="rId36"/>
+    <p:sldId id="291" r:id="rId37"/>
+    <p:sldId id="292" r:id="rId38"/>
+    <p:sldId id="293" r:id="rId39"/>
+    <p:sldId id="294" r:id="rId40"/>
+    <p:sldId id="295" r:id="rId41"/>
   </p:sldIdLst>
   <p:sldSz cx="9144000" cy="5143500" type="screen16x9"/>
   <p:notesSz cx="6858000" cy="9144000"/>
@@ -933,15 +945,15 @@
         </p:nvSpPr>
         <p:spPr>
           <a:xfrm>
-            <a:off x="722313" y="3305176"/>
-            <a:ext cx="7772400" cy="1021556"/>
+            <a:off x="722313" y="1850000"/>
+            <a:ext cx="7772400" cy="1300000"/>
           </a:xfrm>
         </p:spPr>
         <p:txBody>
           <a:bodyPr anchor="t"/>
           <a:lstStyle>
             <a:lvl1pPr algn="l">
-              <a:defRPr sz="1850" b="1" cap="all"/>
+              <a:defRPr sz="2800" b="1" cap="none"/>
             </a:lvl1pPr>
           </a:lstStyle>
           <a:p>
@@ -964,8 +976,8 @@
         </p:nvSpPr>
         <p:spPr>
           <a:xfrm>
-            <a:off x="722313" y="2180035"/>
-            <a:ext cx="7772400" cy="1125140"/>
+            <a:off x="722313" y="3250000"/>
+            <a:ext cx="7772400" cy="700000"/>
           </a:xfrm>
         </p:spPr>
         <p:txBody>
@@ -3269,7 +3281,7 @@
             </a:pPr>
             <a:r>
               <a:rPr/>
-              <a:t>20 August 2026</a:t>
+              <a:t>21 August 2026</a:t>
             </a:r>
           </a:p>
         </p:txBody>
@@ -3280,3485 +3292,6 @@
 </file>
 
 <file path=ppt/slides/slide10.xml><?xml version="1.0" encoding="utf-8"?>
-<p:sld xmlns:a="http://schemas.openxmlformats.org/drawingml/2006/main" xmlns:r="http://schemas.openxmlformats.org/officeDocument/2006/relationships" xmlns:p="http://schemas.openxmlformats.org/presentationml/2006/main">
-  <p:cSld>
-    <p:spTree>
-      <p:nvGrpSpPr>
-        <p:cNvPr id="1" name=""/>
-        <p:cNvGrpSpPr/>
-        <p:nvPr/>
-      </p:nvGrpSpPr>
-      <p:grpSpPr>
-        <a:xfrm>
-          <a:off x="0" y="0"/>
-          <a:ext cx="0" cy="0"/>
-          <a:chOff x="0" y="0"/>
-          <a:chExt cx="0" cy="0"/>
-        </a:xfrm>
-      </p:grpSpPr>
-      <p:sp>
-        <p:nvSpPr>
-          <p:cNvPr id="2" name="Title 1"/>
-          <p:cNvSpPr>
-            <a:spLocks noGrp="1"/>
-          </p:cNvSpPr>
-          <p:nvPr>
-            <p:ph type="title"/>
-          </p:nvPr>
-        </p:nvSpPr>
-        <p:spPr/>
-        <p:txBody>
-          <a:bodyPr/>
-          <a:lstStyle/>
-          <a:p>
-            <a:pPr lvl="0" indent="0" marL="0">
-              <a:buNone/>
-            </a:pPr>
-            <a:r>
-              <a:rPr/>
-              <a:t>Four levers</a:t>
-            </a:r>
-          </a:p>
-        </p:txBody>
-      </p:sp>
-      <mc:AlternateContent xmlns:mc="http://schemas.openxmlformats.org/markup-compatibility/2006">
-        <mc:Choice xmlns:a14="http://schemas.microsoft.com/office/drawing/2010/main" Requires="a14">
-          <p:sp>
-            <p:nvSpPr>
-              <p:cNvPr id="3" name="Content Placeholder 2"/>
-              <p:cNvSpPr>
-                <a:spLocks noGrp="1"/>
-              </p:cNvSpPr>
-              <p:nvPr>
-                <p:ph idx="1"/>
-              </p:nvPr>
-            </p:nvSpPr>
-            <p:spPr/>
-            <p:txBody>
-              <a:bodyPr/>
-              <a:lstStyle/>
-              <a:p>
-                <a:pPr lvl="0"/>
-                <a14:m>
-                  <m:oMath xmlns:m="http://schemas.openxmlformats.org/officeDocument/2006/math">
-                    <m:sSup>
-                      <m:e>
-                        <m:r>
-                          <m:t>σ</m:t>
-                        </m:r>
-                      </m:e>
-                      <m:sup>
-                        <m:r>
-                          <m:t>2</m:t>
-                        </m:r>
-                      </m:sup>
-                    </m:sSup>
-                  </m:oMath>
-                </a14:m>
-                <a:r>
-                  <a:rPr/>
-                  <a:t> — </a:t>
-                </a:r>
-                <a:r>
-                  <a:rPr b="1"/>
-                  <a:t>noise</a:t>
-                </a:r>
-              </a:p>
-              <a:p>
-                <a:pPr lvl="0"/>
-                <a14:m>
-                  <m:oMath xmlns:m="http://schemas.openxmlformats.org/officeDocument/2006/math">
-                    <m:r>
-                      <m:t>n</m:t>
-                    </m:r>
-                  </m:oMath>
-                </a14:m>
-                <a:r>
-                  <a:rPr/>
-                  <a:t> — </a:t>
-                </a:r>
-                <a:r>
-                  <a:rPr b="1"/>
-                  <a:t>sample size</a:t>
-                </a:r>
-              </a:p>
-              <a:p>
-                <a:pPr lvl="0"/>
-                <a14:m>
-                  <m:oMath xmlns:m="http://schemas.openxmlformats.org/officeDocument/2006/math">
-                    <m:r>
-                      <m:rPr>
-                        <m:sty m:val="p"/>
-                      </m:rPr>
-                      <m:t>V</m:t>
-                    </m:r>
-                    <m:r>
-                      <m:rPr>
-                        <m:sty m:val="p"/>
-                      </m:rPr>
-                      <m:t>a</m:t>
-                    </m:r>
-                    <m:r>
-                      <m:rPr>
-                        <m:sty m:val="p"/>
-                      </m:rPr>
-                      <m:t>r</m:t>
-                    </m:r>
-                    <m:d>
-                      <m:dPr>
-                        <m:begChr m:val="("/>
-                        <m:sepChr m:val=""/>
-                        <m:endChr m:val=")"/>
-                        <m:grow/>
-                      </m:dPr>
-                      <m:e>
-                        <m:sSub>
-                          <m:e>
-                            <m:r>
-                              <m:t>x</m:t>
-                            </m:r>
-                          </m:e>
-                          <m:sub>
-                            <m:r>
-                              <m:t>j</m:t>
-                            </m:r>
-                          </m:sub>
-                        </m:sSub>
-                      </m:e>
-                    </m:d>
-                  </m:oMath>
-                </a14:m>
-                <a:r>
-                  <a:rPr/>
-                  <a:t> — </a:t>
-                </a:r>
-                <a:r>
-                  <a:rPr b="1"/>
-                  <a:t>variation in the regressor</a:t>
-                </a:r>
-              </a:p>
-              <a:p>
-                <a:pPr lvl="0"/>
-                <a14:m>
-                  <m:oMath xmlns:m="http://schemas.openxmlformats.org/officeDocument/2006/math">
-                    <m:r>
-                      <m:t>1</m:t>
-                    </m:r>
-                    <m:r>
-                      <m:rPr>
-                        <m:sty m:val="p"/>
-                      </m:rPr>
-                      <m:t>/</m:t>
-                    </m:r>
-                    <m:d>
-                      <m:dPr>
-                        <m:begChr m:val="("/>
-                        <m:sepChr m:val=""/>
-                        <m:endChr m:val=")"/>
-                        <m:grow/>
-                      </m:dPr>
-                      <m:e>
-                        <m:r>
-                          <m:t>1</m:t>
-                        </m:r>
-                        <m:r>
-                          <m:rPr>
-                            <m:sty m:val="p"/>
-                          </m:rPr>
-                          <m:t>−</m:t>
-                        </m:r>
-                        <m:sSubSup>
-                          <m:e>
-                            <m:r>
-                              <m:t>R</m:t>
-                            </m:r>
-                          </m:e>
-                          <m:sub>
-                            <m:r>
-                              <m:t>j</m:t>
-                            </m:r>
-                          </m:sub>
-                          <m:sup>
-                            <m:r>
-                              <m:t>2</m:t>
-                            </m:r>
-                          </m:sup>
-                        </m:sSubSup>
-                      </m:e>
-                    </m:d>
-                  </m:oMath>
-                </a14:m>
-                <a:r>
-                  <a:rPr/>
-                  <a:t> — </a:t>
-                </a:r>
-                <a:r>
-                  <a:rPr b="1"/>
-                  <a:t>redundancy</a:t>
-                </a:r>
-                <a:r>
-                  <a:rPr/>
-                  <a:t>: the variance inflation factor</a:t>
-                </a:r>
-              </a:p>
-              <a:p>
-                <a:pPr lvl="0" indent="0" marL="0">
-                  <a:buNone/>
-                </a:pPr>
-                <a:r>
-                  <a:rPr/>
-                  <a:t>That last factor is the price of collinearity — and precisely what regularisation in Session 05 proposes to pay differently.</a:t>
-                </a:r>
-              </a:p>
-            </p:txBody>
-          </p:sp>
-        </mc:Choice>
-      </mc:AlternateContent>
-    </p:spTree>
-  </p:cSld>
-</p:sld>
-</file>
-
-<file path=ppt/slides/slide11.xml><?xml version="1.0" encoding="utf-8"?>
-<p:sld xmlns:a="http://schemas.openxmlformats.org/drawingml/2006/main" xmlns:r="http://schemas.openxmlformats.org/officeDocument/2006/relationships" xmlns:p="http://schemas.openxmlformats.org/presentationml/2006/main">
-  <p:cSld>
-    <p:spTree>
-      <p:nvGrpSpPr>
-        <p:cNvPr id="1" name=""/>
-        <p:cNvGrpSpPr/>
-        <p:nvPr/>
-      </p:nvGrpSpPr>
-      <p:grpSpPr>
-        <a:xfrm>
-          <a:off x="0" y="0"/>
-          <a:ext cx="0" cy="0"/>
-          <a:chOff x="0" y="0"/>
-          <a:chExt cx="0" cy="0"/>
-        </a:xfrm>
-      </p:grpSpPr>
-      <p:sp>
-        <p:nvSpPr>
-          <p:cNvPr id="2" name="Title 1"/>
-          <p:cNvSpPr>
-            <a:spLocks noGrp="1"/>
-          </p:cNvSpPr>
-          <p:nvPr>
-            <p:ph type="title"/>
-          </p:nvPr>
-        </p:nvSpPr>
-        <p:spPr>
-          <a:xfrm>
-            <a:off x="722313" y="3305176"/>
-            <a:ext cx="7772400" cy="1021556"/>
-          </a:xfrm>
-        </p:spPr>
-        <p:txBody>
-          <a:bodyPr/>
-          <a:lstStyle/>
-          <a:p>
-            <a:pPr lvl="0" indent="0" marL="0">
-              <a:buNone/>
-            </a:pPr>
-            <a:r>
-              <a:rPr/>
-              <a:t>3.2 Gauss–Markov</a:t>
-            </a:r>
-          </a:p>
-        </p:txBody>
-      </p:sp>
-    </p:spTree>
-  </p:cSld>
-</p:sld>
-</file>
-
-<file path=ppt/slides/slide12.xml><?xml version="1.0" encoding="utf-8"?>
-<p:sld xmlns:a="http://schemas.openxmlformats.org/drawingml/2006/main" xmlns:r="http://schemas.openxmlformats.org/officeDocument/2006/relationships" xmlns:p="http://schemas.openxmlformats.org/presentationml/2006/main">
-  <p:cSld>
-    <p:spTree>
-      <p:nvGrpSpPr>
-        <p:cNvPr id="1" name=""/>
-        <p:cNvGrpSpPr/>
-        <p:nvPr/>
-      </p:nvGrpSpPr>
-      <p:grpSpPr>
-        <a:xfrm>
-          <a:off x="0" y="0"/>
-          <a:ext cx="0" cy="0"/>
-          <a:chOff x="0" y="0"/>
-          <a:chExt cx="0" cy="0"/>
-        </a:xfrm>
-      </p:grpSpPr>
-      <p:sp>
-        <p:nvSpPr>
-          <p:cNvPr id="2" name="Title 1"/>
-          <p:cNvSpPr>
-            <a:spLocks noGrp="1"/>
-          </p:cNvSpPr>
-          <p:nvPr>
-            <p:ph type="title"/>
-          </p:nvPr>
-        </p:nvSpPr>
-        <p:spPr/>
-        <p:txBody>
-          <a:bodyPr/>
-          <a:lstStyle/>
-          <a:p>
-            <a:pPr lvl="0" indent="0" marL="0">
-              <a:buNone/>
-            </a:pPr>
-            <a:r>
-              <a:rPr/>
-              <a:t>The theorem</a:t>
-            </a:r>
-          </a:p>
-        </p:txBody>
-      </p:sp>
-      <mc:AlternateContent xmlns:mc="http://schemas.openxmlformats.org/markup-compatibility/2006">
-        <mc:Choice xmlns:a14="http://schemas.microsoft.com/office/drawing/2010/main" Requires="a14">
-          <p:sp>
-            <p:nvSpPr>
-              <p:cNvPr id="3" name="Content Placeholder 2"/>
-              <p:cNvSpPr>
-                <a:spLocks noGrp="1"/>
-              </p:cNvSpPr>
-              <p:nvPr>
-                <p:ph idx="1"/>
-              </p:nvPr>
-            </p:nvSpPr>
-            <p:spPr/>
-            <p:txBody>
-              <a:bodyPr/>
-              <a:lstStyle/>
-              <a:p>
-                <a:pPr lvl="0" indent="0" marL="1270000">
-                  <a:buNone/>
-                </a:pPr>
-                <a:r>
-                  <a:rPr sz="2000"/>
-                  <a:t>Under assumptions 1–4, </a:t>
-                </a:r>
-                <a14:m>
-                  <m:oMath xmlns:m="http://schemas.openxmlformats.org/officeDocument/2006/math">
-                    <m:sSub>
-                      <m:e>
-                        <m:acc>
-                          <m:accPr>
-                            <m:chr m:val="̂"/>
-                          </m:accPr>
-                          <m:e>
-                            <m:r>
-                              <m:t>β</m:t>
-                            </m:r>
-                          </m:e>
-                        </m:acc>
-                      </m:e>
-                      <m:sub>
-                        <m:r>
-                          <m:t>O</m:t>
-                        </m:r>
-                        <m:r>
-                          <m:t>L</m:t>
-                        </m:r>
-                        <m:r>
-                          <m:t>S</m:t>
-                        </m:r>
-                      </m:sub>
-                    </m:sSub>
-                  </m:oMath>
-                </a14:m>
-                <a:r>
-                  <a:rPr sz="2000"/>
-                  <a:t> has the </a:t>
-                </a:r>
-                <a:r>
-                  <a:rPr sz="2000" b="1"/>
-                  <a:t>smallest variance in the class of linear unbiased estimators</a:t>
-                </a:r>
-                <a:r>
-                  <a:rPr sz="2000"/>
-                  <a:t>.</a:t>
-                </a:r>
-              </a:p>
-            </p:txBody>
-          </p:sp>
-        </mc:Choice>
-      </mc:AlternateContent>
-    </p:spTree>
-  </p:cSld>
-</p:sld>
-</file>
-
-<file path=ppt/slides/slide13.xml><?xml version="1.0" encoding="utf-8"?>
-<p:sld xmlns:a="http://schemas.openxmlformats.org/drawingml/2006/main" xmlns:r="http://schemas.openxmlformats.org/officeDocument/2006/relationships" xmlns:p="http://schemas.openxmlformats.org/presentationml/2006/main">
-  <p:cSld>
-    <p:spTree>
-      <p:nvGrpSpPr>
-        <p:cNvPr id="1" name=""/>
-        <p:cNvGrpSpPr/>
-        <p:nvPr/>
-      </p:nvGrpSpPr>
-      <p:grpSpPr>
-        <a:xfrm>
-          <a:off x="0" y="0"/>
-          <a:ext cx="0" cy="0"/>
-          <a:chOff x="0" y="0"/>
-          <a:chExt cx="0" cy="0"/>
-        </a:xfrm>
-      </p:grpSpPr>
-      <p:sp>
-        <p:nvSpPr>
-          <p:cNvPr id="2" name="Title 1"/>
-          <p:cNvSpPr>
-            <a:spLocks noGrp="1"/>
-          </p:cNvSpPr>
-          <p:nvPr>
-            <p:ph type="title"/>
-          </p:nvPr>
-        </p:nvSpPr>
-        <p:spPr/>
-        <p:txBody>
-          <a:bodyPr/>
-          <a:lstStyle/>
-          <a:p>
-            <a:pPr lvl="0" indent="0" marL="0">
-              <a:buNone/>
-            </a:pPr>
-            <a:r>
-              <a:rPr/>
-              <a:t>Proof sketch</a:t>
-            </a:r>
-          </a:p>
-        </p:txBody>
-      </p:sp>
-      <mc:AlternateContent xmlns:mc="http://schemas.openxmlformats.org/markup-compatibility/2006">
-        <mc:Choice xmlns:a14="http://schemas.microsoft.com/office/drawing/2010/main" Requires="a14">
-          <p:sp>
-            <p:nvSpPr>
-              <p:cNvPr id="3" name="Content Placeholder 2"/>
-              <p:cNvSpPr>
-                <a:spLocks noGrp="1"/>
-              </p:cNvSpPr>
-              <p:nvPr>
-                <p:ph idx="1"/>
-              </p:nvPr>
-            </p:nvSpPr>
-            <p:spPr/>
-            <p:txBody>
-              <a:bodyPr/>
-              <a:lstStyle/>
-              <a:p>
-                <a:pPr lvl="0" indent="0" marL="0">
-                  <a:buNone/>
-                </a:pPr>
-                <a:r>
-                  <a:rPr/>
-                  <a:t>Let </a:t>
-                </a:r>
-                <a14:m>
-                  <m:oMath xmlns:m="http://schemas.openxmlformats.org/officeDocument/2006/math">
-                    <m:acc>
-                      <m:accPr>
-                        <m:chr m:val="̃"/>
-                      </m:accPr>
-                      <m:e>
-                        <m:r>
-                          <m:t>β</m:t>
-                        </m:r>
-                      </m:e>
-                    </m:acc>
-                    <m:r>
-                      <m:rPr>
-                        <m:sty m:val="p"/>
-                      </m:rPr>
-                      <m:t>=</m:t>
-                    </m:r>
-                    <m:r>
-                      <m:t>C</m:t>
-                    </m:r>
-                    <m:r>
-                      <m:t>y</m:t>
-                    </m:r>
-                  </m:oMath>
-                </a14:m>
-                <a:r>
-                  <a:rPr/>
-                  <a:t> be any linear unbiased estimator; write</a:t>
-                </a:r>
-              </a:p>
-              <a:p>
-                <a:pPr lvl="0" indent="0" marL="0">
-                  <a:buNone/>
-                </a:pPr>
-                <a14:m>
-                  <m:oMathPara xmlns:m="http://schemas.openxmlformats.org/officeDocument/2006/math">
-                    <m:oMathParaPr>
-                      <m:jc m:val="center"/>
-                    </m:oMathParaPr>
-                    <m:oMath>
-                      <m:r>
-                        <m:t>C</m:t>
-                      </m:r>
-                      <m:r>
-                        <m:rPr>
-                          <m:sty m:val="p"/>
-                        </m:rPr>
-                        <m:t>=</m:t>
-                      </m:r>
-                      <m:sSup>
-                        <m:e>
-                          <m:d>
-                            <m:dPr>
-                              <m:begChr m:val="("/>
-                              <m:sepChr m:val=""/>
-                              <m:endChr m:val=")"/>
-                              <m:grow/>
-                            </m:dPr>
-                            <m:e>
-                              <m:sSup>
-                                <m:e>
-                                  <m:r>
-                                    <m:t>X</m:t>
-                                  </m:r>
-                                </m:e>
-                                <m:sup>
-                                  <m:r>
-                                    <m:rPr>
-                                      <m:sty m:val="p"/>
-                                    </m:rPr>
-                                    <m:t>⊤</m:t>
-                                  </m:r>
-                                </m:sup>
-                              </m:sSup>
-                              <m:r>
-                                <m:t>X</m:t>
-                              </m:r>
-                            </m:e>
-                          </m:d>
-                        </m:e>
-                        <m:sup>
-                          <m:r>
-                            <m:rPr>
-                              <m:sty m:val="p"/>
-                            </m:rPr>
-                            <m:t>−</m:t>
-                          </m:r>
-                          <m:r>
-                            <m:t>1</m:t>
-                          </m:r>
-                        </m:sup>
-                      </m:sSup>
-                      <m:sSup>
-                        <m:e>
-                          <m:r>
-                            <m:t>X</m:t>
-                          </m:r>
-                        </m:e>
-                        <m:sup>
-                          <m:r>
-                            <m:rPr>
-                              <m:sty m:val="p"/>
-                            </m:rPr>
-                            <m:t>⊤</m:t>
-                          </m:r>
-                        </m:sup>
-                      </m:sSup>
-                      <m:r>
-                        <m:rPr>
-                          <m:sty m:val="p"/>
-                        </m:rPr>
-                        <m:t>+</m:t>
-                      </m:r>
-                      <m:r>
-                        <m:t>D</m:t>
-                      </m:r>
-                    </m:oMath>
-                  </m:oMathPara>
-                </a14:m>
-              </a:p>
-              <a:p>
-                <a:pPr lvl="0" indent="0" marL="0">
-                  <a:buNone/>
-                </a:pPr>
-                <a:r>
-                  <a:rPr/>
-                  <a:t>Unbiasedness forces </a:t>
-                </a:r>
-                <a14:m>
-                  <m:oMath xmlns:m="http://schemas.openxmlformats.org/officeDocument/2006/math">
-                    <m:r>
-                      <m:t>D</m:t>
-                    </m:r>
-                    <m:r>
-                      <m:t>X</m:t>
-                    </m:r>
-                    <m:r>
-                      <m:rPr>
-                        <m:sty m:val="p"/>
-                      </m:rPr>
-                      <m:t>=</m:t>
-                    </m:r>
-                    <m:r>
-                      <m:t>0</m:t>
-                    </m:r>
-                  </m:oMath>
-                </a14:m>
-                <a:r>
-                  <a:rPr/>
-                  <a:t>. Then</a:t>
-                </a:r>
-              </a:p>
-              <a:p>
-                <a:pPr lvl="0" indent="0" marL="0">
-                  <a:buNone/>
-                </a:pPr>
-                <a14:m>
-                  <m:oMathPara xmlns:m="http://schemas.openxmlformats.org/officeDocument/2006/math">
-                    <m:oMathParaPr>
-                      <m:jc m:val="center"/>
-                    </m:oMathParaPr>
-                    <m:oMath>
-                      <m:r>
-                        <m:rPr>
-                          <m:sty m:val="p"/>
-                        </m:rPr>
-                        <m:t>V</m:t>
-                      </m:r>
-                      <m:r>
-                        <m:rPr>
-                          <m:sty m:val="p"/>
-                        </m:rPr>
-                        <m:t>a</m:t>
-                      </m:r>
-                      <m:r>
-                        <m:rPr>
-                          <m:sty m:val="p"/>
-                        </m:rPr>
-                        <m:t>r</m:t>
-                      </m:r>
-                      <m:d>
-                        <m:dPr>
-                          <m:begChr m:val="("/>
-                          <m:sepChr m:val=""/>
-                          <m:endChr m:val=")"/>
-                          <m:grow/>
-                        </m:dPr>
-                        <m:e>
-                          <m:acc>
-                            <m:accPr>
-                              <m:chr m:val="̃"/>
-                            </m:accPr>
-                            <m:e>
-                              <m:r>
-                                <m:t>β</m:t>
-                              </m:r>
-                            </m:e>
-                          </m:acc>
-                        </m:e>
-                      </m:d>
-                      <m:r>
-                        <m:rPr>
-                          <m:sty m:val="p"/>
-                        </m:rPr>
-                        <m:t>=</m:t>
-                      </m:r>
-                      <m:sSup>
-                        <m:e>
-                          <m:r>
-                            <m:t>σ</m:t>
-                          </m:r>
-                        </m:e>
-                        <m:sup>
-                          <m:r>
-                            <m:t>2</m:t>
-                          </m:r>
-                        </m:sup>
-                      </m:sSup>
-                      <m:d>
-                        <m:dPr>
-                          <m:begChr m:val="["/>
-                          <m:sepChr m:val=""/>
-                          <m:endChr m:val="]"/>
-                          <m:grow/>
-                        </m:dPr>
-                        <m:e>
-                          <m:sSup>
-                            <m:e>
-                              <m:d>
-                                <m:dPr>
-                                  <m:begChr m:val="("/>
-                                  <m:sepChr m:val=""/>
-                                  <m:endChr m:val=")"/>
-                                  <m:grow/>
-                                </m:dPr>
-                                <m:e>
-                                  <m:sSup>
-                                    <m:e>
-                                      <m:r>
-                                        <m:t>X</m:t>
-                                      </m:r>
-                                    </m:e>
-                                    <m:sup>
-                                      <m:r>
-                                        <m:rPr>
-                                          <m:sty m:val="p"/>
-                                        </m:rPr>
-                                        <m:t>⊤</m:t>
-                                      </m:r>
-                                    </m:sup>
-                                  </m:sSup>
-                                  <m:r>
-                                    <m:t>X</m:t>
-                                  </m:r>
-                                </m:e>
-                              </m:d>
-                            </m:e>
-                            <m:sup>
-                              <m:r>
-                                <m:rPr>
-                                  <m:sty m:val="p"/>
-                                </m:rPr>
-                                <m:t>−</m:t>
-                              </m:r>
-                              <m:r>
-                                <m:t>1</m:t>
-                              </m:r>
-                            </m:sup>
-                          </m:sSup>
-                          <m:r>
-                            <m:rPr>
-                              <m:sty m:val="p"/>
-                            </m:rPr>
-                            <m:t>+</m:t>
-                          </m:r>
-                          <m:r>
-                            <m:t>D</m:t>
-                          </m:r>
-                          <m:sSup>
-                            <m:e>
-                              <m:r>
-                                <m:t>D</m:t>
-                              </m:r>
-                            </m:e>
-                            <m:sup>
-                              <m:r>
-                                <m:rPr>
-                                  <m:sty m:val="p"/>
-                                </m:rPr>
-                                <m:t>⊤</m:t>
-                              </m:r>
-                            </m:sup>
-                          </m:sSup>
-                        </m:e>
-                      </m:d>
-                      <m:r>
-                        <m:rPr>
-                          <m:sty m:val="p"/>
-                        </m:rPr>
-                        <m:t>≽</m:t>
-                      </m:r>
-                      <m:r>
-                        <m:rPr>
-                          <m:sty m:val="p"/>
-                        </m:rPr>
-                        <m:t>V</m:t>
-                      </m:r>
-                      <m:r>
-                        <m:rPr>
-                          <m:sty m:val="p"/>
-                        </m:rPr>
-                        <m:t>a</m:t>
-                      </m:r>
-                      <m:r>
-                        <m:rPr>
-                          <m:sty m:val="p"/>
-                        </m:rPr>
-                        <m:t>r</m:t>
-                      </m:r>
-                      <m:d>
-                        <m:dPr>
-                          <m:begChr m:val="("/>
-                          <m:sepChr m:val=""/>
-                          <m:endChr m:val=")"/>
-                          <m:grow/>
-                        </m:dPr>
-                        <m:e>
-                          <m:acc>
-                            <m:accPr>
-                              <m:chr m:val="̂"/>
-                            </m:accPr>
-                            <m:e>
-                              <m:r>
-                                <m:t>β</m:t>
-                              </m:r>
-                            </m:e>
-                          </m:acc>
-                        </m:e>
-                      </m:d>
-                    </m:oMath>
-                  </m:oMathPara>
-                </a14:m>
-              </a:p>
-              <a:p>
-                <a:pPr lvl="0" indent="0" marL="0">
-                  <a:buNone/>
-                </a:pPr>
-                <a:r>
-                  <a:rPr/>
-                  <a:t>since </a:t>
-                </a:r>
-                <a14:m>
-                  <m:oMath xmlns:m="http://schemas.openxmlformats.org/officeDocument/2006/math">
-                    <m:r>
-                      <m:t>D</m:t>
-                    </m:r>
-                    <m:sSup>
-                      <m:e>
-                        <m:r>
-                          <m:t>D</m:t>
-                        </m:r>
-                      </m:e>
-                      <m:sup>
-                        <m:r>
-                          <m:rPr>
-                            <m:sty m:val="p"/>
-                          </m:rPr>
-                          <m:t>⊤</m:t>
-                        </m:r>
-                      </m:sup>
-                    </m:sSup>
-                    <m:r>
-                      <m:rPr>
-                        <m:sty m:val="p"/>
-                      </m:rPr>
-                      <m:t>≽</m:t>
-                    </m:r>
-                    <m:r>
-                      <m:t>0</m:t>
-                    </m:r>
-                  </m:oMath>
-                </a14:m>
-                <a:r>
-                  <a:rPr/>
-                  <a:t>. </a:t>
-                </a:r>
-                <a14:m>
-                  <m:oMath xmlns:m="http://schemas.openxmlformats.org/officeDocument/2006/math">
-                    <m:r>
-                      <m:rPr>
-                        <m:sty m:val="p"/>
-                      </m:rPr>
-                      <m:t>◼</m:t>
-                    </m:r>
-                  </m:oMath>
-                </a14:m>
-              </a:p>
-            </p:txBody>
-          </p:sp>
-        </mc:Choice>
-      </mc:AlternateContent>
-    </p:spTree>
-  </p:cSld>
-</p:sld>
-</file>
-
-<file path=ppt/slides/slide14.xml><?xml version="1.0" encoding="utf-8"?>
-<p:sld xmlns:a="http://schemas.openxmlformats.org/drawingml/2006/main" xmlns:r="http://schemas.openxmlformats.org/officeDocument/2006/relationships" xmlns:p="http://schemas.openxmlformats.org/presentationml/2006/main">
-  <p:cSld>
-    <p:spTree>
-      <p:nvGrpSpPr>
-        <p:cNvPr id="1" name=""/>
-        <p:cNvGrpSpPr/>
-        <p:nvPr/>
-      </p:nvGrpSpPr>
-      <p:grpSpPr>
-        <a:xfrm>
-          <a:off x="0" y="0"/>
-          <a:ext cx="0" cy="0"/>
-          <a:chOff x="0" y="0"/>
-          <a:chExt cx="0" cy="0"/>
-        </a:xfrm>
-      </p:grpSpPr>
-      <p:sp>
-        <p:nvSpPr>
-          <p:cNvPr id="2" name="Title 1"/>
-          <p:cNvSpPr>
-            <a:spLocks noGrp="1"/>
-          </p:cNvSpPr>
-          <p:nvPr>
-            <p:ph type="title"/>
-          </p:nvPr>
-        </p:nvSpPr>
-        <p:spPr/>
-        <p:txBody>
-          <a:bodyPr/>
-          <a:lstStyle/>
-          <a:p>
-            <a:pPr lvl="0" indent="0" marL="0">
-              <a:buNone/>
-            </a:pPr>
-            <a:r>
-              <a:rPr/>
-              <a:t>The crucial caveat</a:t>
-            </a:r>
-          </a:p>
-        </p:txBody>
-      </p:sp>
-      <p:sp>
-        <p:nvSpPr>
-          <p:cNvPr id="3" name="Content Placeholder 2"/>
-          <p:cNvSpPr>
-            <a:spLocks noGrp="1"/>
-          </p:cNvSpPr>
-          <p:nvPr>
-            <p:ph idx="1"/>
-          </p:nvPr>
-        </p:nvSpPr>
-        <p:spPr/>
-        <p:txBody>
-          <a:bodyPr/>
-          <a:lstStyle/>
-          <a:p>
-            <a:pPr lvl="0" indent="0" marL="0">
-              <a:buNone/>
-            </a:pPr>
-            <a:r>
-              <a:rPr/>
-              <a:t>BLUE is a guarantee </a:t>
-            </a:r>
-            <a:r>
-              <a:rPr b="1"/>
-              <a:t>within the class of unbiased estimators</a:t>
-            </a:r>
-            <a:r>
-              <a:rPr/>
-              <a:t>.</a:t>
-            </a:r>
-          </a:p>
-          <a:p>
-            <a:pPr lvl="0" indent="0" marL="0">
-              <a:buNone/>
-            </a:pPr>
-            <a:r>
-              <a:rPr/>
-              <a:t>Sessions 04 and 05 show that deliberately accepting bias can lower total error. Gauss–Markov does not forbid this. It simply does not apply.</a:t>
-            </a:r>
-          </a:p>
-        </p:txBody>
-      </p:sp>
-    </p:spTree>
-  </p:cSld>
-</p:sld>
-</file>
-
-<file path=ppt/slides/slide15.xml><?xml version="1.0" encoding="utf-8"?>
-<p:sld xmlns:a="http://schemas.openxmlformats.org/drawingml/2006/main" xmlns:r="http://schemas.openxmlformats.org/officeDocument/2006/relationships" xmlns:p="http://schemas.openxmlformats.org/presentationml/2006/main">
-  <p:cSld>
-    <p:spTree>
-      <p:nvGrpSpPr>
-        <p:cNvPr id="1" name=""/>
-        <p:cNvGrpSpPr/>
-        <p:nvPr/>
-      </p:nvGrpSpPr>
-      <p:grpSpPr>
-        <a:xfrm>
-          <a:off x="0" y="0"/>
-          <a:ext cx="0" cy="0"/>
-          <a:chOff x="0" y="0"/>
-          <a:chExt cx="0" cy="0"/>
-        </a:xfrm>
-      </p:grpSpPr>
-      <p:sp>
-        <p:nvSpPr>
-          <p:cNvPr id="2" name="Title 1"/>
-          <p:cNvSpPr>
-            <a:spLocks noGrp="1"/>
-          </p:cNvSpPr>
-          <p:nvPr>
-            <p:ph type="title"/>
-          </p:nvPr>
-        </p:nvSpPr>
-        <p:spPr>
-          <a:xfrm>
-            <a:off x="722313" y="3305176"/>
-            <a:ext cx="7772400" cy="1021556"/>
-          </a:xfrm>
-        </p:spPr>
-        <p:txBody>
-          <a:bodyPr/>
-          <a:lstStyle/>
-          <a:p>
-            <a:pPr lvl="0" indent="0" marL="0">
-              <a:buNone/>
-            </a:pPr>
-            <a:r>
-              <a:rPr/>
-              <a:t>3.3 When assumption 4 fails</a:t>
-            </a:r>
-          </a:p>
-        </p:txBody>
-      </p:sp>
-    </p:spTree>
-  </p:cSld>
-</p:sld>
-</file>
-
-<file path=ppt/slides/slide16.xml><?xml version="1.0" encoding="utf-8"?>
-<p:sld xmlns:a="http://schemas.openxmlformats.org/drawingml/2006/main" xmlns:r="http://schemas.openxmlformats.org/officeDocument/2006/relationships" xmlns:p="http://schemas.openxmlformats.org/presentationml/2006/main">
-  <p:cSld>
-    <p:spTree>
-      <p:nvGrpSpPr>
-        <p:cNvPr id="1" name=""/>
-        <p:cNvGrpSpPr/>
-        <p:nvPr/>
-      </p:nvGrpSpPr>
-      <p:grpSpPr>
-        <a:xfrm>
-          <a:off x="0" y="0"/>
-          <a:ext cx="0" cy="0"/>
-          <a:chOff x="0" y="0"/>
-          <a:chExt cx="0" cy="0"/>
-        </a:xfrm>
-      </p:grpSpPr>
-      <p:sp>
-        <p:nvSpPr>
-          <p:cNvPr id="2" name="Title 1"/>
-          <p:cNvSpPr>
-            <a:spLocks noGrp="1"/>
-          </p:cNvSpPr>
-          <p:nvPr>
-            <p:ph type="title"/>
-          </p:nvPr>
-        </p:nvSpPr>
-        <p:spPr/>
-        <p:txBody>
-          <a:bodyPr/>
-          <a:lstStyle/>
-          <a:p>
-            <a:pPr lvl="0" indent="0" marL="0">
-              <a:buNone/>
-            </a:pPr>
-            <a:r>
-              <a:rPr/>
-              <a:t>The sandwich is always correct</a:t>
-            </a:r>
-          </a:p>
-        </p:txBody>
-      </p:sp>
-      <mc:AlternateContent xmlns:mc="http://schemas.openxmlformats.org/markup-compatibility/2006">
-        <mc:Choice xmlns:a14="http://schemas.microsoft.com/office/drawing/2010/main" Requires="a14">
-          <p:sp>
-            <p:nvSpPr>
-              <p:cNvPr id="3" name="Content Placeholder 2"/>
-              <p:cNvSpPr>
-                <a:spLocks noGrp="1"/>
-              </p:cNvSpPr>
-              <p:nvPr>
-                <p:ph idx="1"/>
-              </p:nvPr>
-            </p:nvSpPr>
-            <p:spPr/>
-            <p:txBody>
-              <a:bodyPr/>
-              <a:lstStyle/>
-              <a:p>
-                <a:pPr lvl="0" indent="0" marL="0">
-                  <a:buNone/>
-                </a:pPr>
-                <a14:m>
-                  <m:oMathPara xmlns:m="http://schemas.openxmlformats.org/officeDocument/2006/math">
-                    <m:oMathParaPr>
-                      <m:jc m:val="center"/>
-                    </m:oMathParaPr>
-                    <m:oMath>
-                      <m:r>
-                        <m:rPr>
-                          <m:sty m:val="p"/>
-                        </m:rPr>
-                        <m:t>V</m:t>
-                      </m:r>
-                      <m:r>
-                        <m:rPr>
-                          <m:sty m:val="p"/>
-                        </m:rPr>
-                        <m:t>a</m:t>
-                      </m:r>
-                      <m:r>
-                        <m:rPr>
-                          <m:sty m:val="p"/>
-                        </m:rPr>
-                        <m:t>r</m:t>
-                      </m:r>
-                      <m:d>
-                        <m:dPr>
-                          <m:begChr m:val="("/>
-                          <m:sepChr m:val=""/>
-                          <m:endChr m:val=")"/>
-                          <m:grow/>
-                        </m:dPr>
-                        <m:e>
-                          <m:acc>
-                            <m:accPr>
-                              <m:chr m:val="̂"/>
-                            </m:accPr>
-                            <m:e>
-                              <m:r>
-                                <m:t>β</m:t>
-                              </m:r>
-                            </m:e>
-                          </m:acc>
-                          <m:r>
-                            <m:rPr>
-                              <m:sty m:val="p"/>
-                            </m:rPr>
-                            <m:t>∣</m:t>
-                          </m:r>
-                          <m:r>
-                            <m:t>X</m:t>
-                          </m:r>
-                        </m:e>
-                      </m:d>
-                      <m:r>
-                        <m:rPr>
-                          <m:sty m:val="p"/>
-                        </m:rPr>
-                        <m:t>=</m:t>
-                      </m:r>
-                      <m:sSup>
-                        <m:e>
-                          <m:d>
-                            <m:dPr>
-                              <m:begChr m:val="("/>
-                              <m:sepChr m:val=""/>
-                              <m:endChr m:val=")"/>
-                              <m:grow/>
-                            </m:dPr>
-                            <m:e>
-                              <m:sSup>
-                                <m:e>
-                                  <m:r>
-                                    <m:t>X</m:t>
-                                  </m:r>
-                                </m:e>
-                                <m:sup>
-                                  <m:r>
-                                    <m:rPr>
-                                      <m:sty m:val="p"/>
-                                    </m:rPr>
-                                    <m:t>⊤</m:t>
-                                  </m:r>
-                                </m:sup>
-                              </m:sSup>
-                              <m:r>
-                                <m:t>X</m:t>
-                              </m:r>
-                            </m:e>
-                          </m:d>
-                        </m:e>
-                        <m:sup>
-                          <m:r>
-                            <m:rPr>
-                              <m:sty m:val="p"/>
-                            </m:rPr>
-                            <m:t>−</m:t>
-                          </m:r>
-                          <m:r>
-                            <m:t>1</m:t>
-                          </m:r>
-                        </m:sup>
-                      </m:sSup>
-                      <m:d>
-                        <m:dPr>
-                          <m:begChr m:val="("/>
-                          <m:sepChr m:val=""/>
-                          <m:endChr m:val=")"/>
-                          <m:grow/>
-                        </m:dPr>
-                        <m:e>
-                          <m:sSup>
-                            <m:e>
-                              <m:r>
-                                <m:t>X</m:t>
-                              </m:r>
-                            </m:e>
-                            <m:sup>
-                              <m:r>
-                                <m:rPr>
-                                  <m:sty m:val="p"/>
-                                </m:rPr>
-                                <m:t>⊤</m:t>
-                              </m:r>
-                            </m:sup>
-                          </m:sSup>
-                          <m:r>
-                            <m:t>Ω</m:t>
-                          </m:r>
-                          <m:r>
-                            <m:t>X</m:t>
-                          </m:r>
-                        </m:e>
-                      </m:d>
-                      <m:sSup>
-                        <m:e>
-                          <m:d>
-                            <m:dPr>
-                              <m:begChr m:val="("/>
-                              <m:sepChr m:val=""/>
-                              <m:endChr m:val=")"/>
-                              <m:grow/>
-                            </m:dPr>
-                            <m:e>
-                              <m:sSup>
-                                <m:e>
-                                  <m:r>
-                                    <m:t>X</m:t>
-                                  </m:r>
-                                </m:e>
-                                <m:sup>
-                                  <m:r>
-                                    <m:rPr>
-                                      <m:sty m:val="p"/>
-                                    </m:rPr>
-                                    <m:t>⊤</m:t>
-                                  </m:r>
-                                </m:sup>
-                              </m:sSup>
-                              <m:r>
-                                <m:t>X</m:t>
-                              </m:r>
-                            </m:e>
-                          </m:d>
-                        </m:e>
-                        <m:sup>
-                          <m:r>
-                            <m:rPr>
-                              <m:sty m:val="p"/>
-                            </m:rPr>
-                            <m:t>−</m:t>
-                          </m:r>
-                          <m:r>
-                            <m:t>1</m:t>
-                          </m:r>
-                        </m:sup>
-                      </m:sSup>
-                    </m:oMath>
-                  </m:oMathPara>
-                </a14:m>
-              </a:p>
-              <a:p>
-                <a:pPr lvl="0" indent="0" marL="0">
-                  <a:buNone/>
-                </a:pPr>
-                <a:r>
-                  <a:rPr/>
-                  <a:t>with </a:t>
-                </a:r>
-                <a14:m>
-                  <m:oMath xmlns:m="http://schemas.openxmlformats.org/officeDocument/2006/math">
-                    <m:r>
-                      <m:t>Ω</m:t>
-                    </m:r>
-                    <m:r>
-                      <m:rPr>
-                        <m:sty m:val="p"/>
-                      </m:rPr>
-                      <m:t>=</m:t>
-                    </m:r>
-                    <m:r>
-                      <m:rPr>
-                        <m:sty m:val="p"/>
-                      </m:rPr>
-                      <m:t>V</m:t>
-                    </m:r>
-                    <m:r>
-                      <m:rPr>
-                        <m:sty m:val="p"/>
-                      </m:rPr>
-                      <m:t>a</m:t>
-                    </m:r>
-                    <m:r>
-                      <m:rPr>
-                        <m:sty m:val="p"/>
-                      </m:rPr>
-                      <m:t>r</m:t>
-                    </m:r>
-                    <m:d>
-                      <m:dPr>
-                        <m:begChr m:val="("/>
-                        <m:sepChr m:val=""/>
-                        <m:endChr m:val=")"/>
-                        <m:grow/>
-                      </m:dPr>
-                      <m:e>
-                        <m:r>
-                          <m:t>ε</m:t>
-                        </m:r>
-                        <m:r>
-                          <m:rPr>
-                            <m:sty m:val="p"/>
-                          </m:rPr>
-                          <m:t>∣</m:t>
-                        </m:r>
-                        <m:r>
-                          <m:t>X</m:t>
-                        </m:r>
-                      </m:e>
-                    </m:d>
-                  </m:oMath>
-                </a14:m>
-                <a:r>
-                  <a:rPr/>
-                  <a:t>.</a:t>
-                </a:r>
-              </a:p>
-              <a:p>
-                <a:pPr lvl="0" indent="0" marL="0">
-                  <a:buNone/>
-                </a:pPr>
-                <a14:m>
-                  <m:oMath xmlns:m="http://schemas.openxmlformats.org/officeDocument/2006/math">
-                    <m:acc>
-                      <m:accPr>
-                        <m:chr m:val="̂"/>
-                      </m:accPr>
-                      <m:e>
-                        <m:r>
-                          <m:t>β</m:t>
-                        </m:r>
-                      </m:e>
-                    </m:acc>
-                  </m:oMath>
-                </a14:m>
-                <a:r>
-                  <a:rPr/>
-                  <a:t> never changes. Only your claimed precision does.</a:t>
-                </a:r>
-              </a:p>
-            </p:txBody>
-          </p:sp>
-        </mc:Choice>
-      </mc:AlternateContent>
-    </p:spTree>
-  </p:cSld>
-</p:sld>
-</file>
-
-<file path=ppt/slides/slide17.xml><?xml version="1.0" encoding="utf-8"?>
-<p:sld xmlns:a="http://schemas.openxmlformats.org/drawingml/2006/main" xmlns:r="http://schemas.openxmlformats.org/officeDocument/2006/relationships" xmlns:p="http://schemas.openxmlformats.org/presentationml/2006/main">
-  <p:cSld>
-    <p:spTree>
-      <p:nvGrpSpPr>
-        <p:cNvPr id="1" name=""/>
-        <p:cNvGrpSpPr/>
-        <p:nvPr/>
-      </p:nvGrpSpPr>
-      <p:grpSpPr>
-        <a:xfrm>
-          <a:off x="0" y="0"/>
-          <a:ext cx="0" cy="0"/>
-          <a:chOff x="0" y="0"/>
-          <a:chExt cx="0" cy="0"/>
-        </a:xfrm>
-      </p:grpSpPr>
-      <p:sp>
-        <p:nvSpPr>
-          <p:cNvPr id="2" name="Title 1"/>
-          <p:cNvSpPr>
-            <a:spLocks noGrp="1"/>
-          </p:cNvSpPr>
-          <p:nvPr>
-            <p:ph type="title"/>
-          </p:nvPr>
-        </p:nvSpPr>
-        <p:spPr/>
-        <p:txBody>
-          <a:bodyPr/>
-          <a:lstStyle/>
-          <a:p>
-            <a:pPr lvl="0" indent="0" marL="0">
-              <a:buNone/>
-            </a:pPr>
-            <a:r>
-              <a:rPr/>
-              <a:t>Heteroskedasticity-robust — White / HC1</a:t>
-            </a:r>
-          </a:p>
-        </p:txBody>
-      </p:sp>
-      <mc:AlternateContent xmlns:mc="http://schemas.openxmlformats.org/markup-compatibility/2006">
-        <mc:Choice xmlns:a14="http://schemas.microsoft.com/office/drawing/2010/main" Requires="a14">
-          <p:sp>
-            <p:nvSpPr>
-              <p:cNvPr id="3" name="Content Placeholder 2"/>
-              <p:cNvSpPr>
-                <a:spLocks noGrp="1"/>
-              </p:cNvSpPr>
-              <p:nvPr>
-                <p:ph idx="1"/>
-              </p:nvPr>
-            </p:nvSpPr>
-            <p:spPr/>
-            <p:txBody>
-              <a:bodyPr/>
-              <a:lstStyle/>
-              <a:p>
-                <a:pPr lvl="0" indent="0" marL="0">
-                  <a:buNone/>
-                </a:pPr>
-                <a:r>
-                  <a:rPr/>
-                  <a:t>Estimate </a:t>
-                </a:r>
-                <a14:m>
-                  <m:oMath xmlns:m="http://schemas.openxmlformats.org/officeDocument/2006/math">
-                    <m:r>
-                      <m:t>Ω</m:t>
-                    </m:r>
-                  </m:oMath>
-                </a14:m>
-                <a:r>
-                  <a:rPr/>
-                  <a:t> by</a:t>
-                </a:r>
-              </a:p>
-              <a:p>
-                <a:pPr lvl="0" indent="0" marL="0">
-                  <a:buNone/>
-                </a:pPr>
-                <a14:m>
-                  <m:oMathPara xmlns:m="http://schemas.openxmlformats.org/officeDocument/2006/math">
-                    <m:oMathParaPr>
-                      <m:jc m:val="center"/>
-                    </m:oMathParaPr>
-                    <m:oMath>
-                      <m:r>
-                        <m:rPr>
-                          <m:sty m:val="p"/>
-                        </m:rPr>
-                        <m:t>d</m:t>
-                      </m:r>
-                      <m:r>
-                        <m:rPr>
-                          <m:sty m:val="p"/>
-                        </m:rPr>
-                        <m:t>i</m:t>
-                      </m:r>
-                      <m:r>
-                        <m:rPr>
-                          <m:sty m:val="p"/>
-                        </m:rPr>
-                        <m:t>a</m:t>
-                      </m:r>
-                      <m:r>
-                        <m:rPr>
-                          <m:sty m:val="p"/>
-                        </m:rPr>
-                        <m:t>g</m:t>
-                      </m:r>
-                      <m:d>
-                        <m:dPr>
-                          <m:begChr m:val="("/>
-                          <m:sepChr m:val=""/>
-                          <m:endChr m:val=")"/>
-                          <m:grow/>
-                        </m:dPr>
-                        <m:e>
-                          <m:sSubSup>
-                            <m:e>
-                              <m:acc>
-                                <m:accPr>
-                                  <m:chr m:val="̂"/>
-                                </m:accPr>
-                                <m:e>
-                                  <m:r>
-                                    <m:t>ε</m:t>
-                                  </m:r>
-                                </m:e>
-                              </m:acc>
-                            </m:e>
-                            <m:sub>
-                              <m:r>
-                                <m:t>i</m:t>
-                              </m:r>
-                            </m:sub>
-                            <m:sup>
-                              <m:r>
-                                <m:t>2</m:t>
-                              </m:r>
-                            </m:sup>
-                          </m:sSubSup>
-                        </m:e>
-                      </m:d>
-                    </m:oMath>
-                  </m:oMathPara>
-                </a14:m>
-              </a:p>
-              <a:p>
-                <a:pPr lvl="0" indent="0" marL="0">
-                  <a:buNone/>
-                </a:pPr>
-                <a:r>
-                  <a:rPr/>
-                  <a:t>with a small-sample correction </a:t>
-                </a:r>
-                <a14:m>
-                  <m:oMath xmlns:m="http://schemas.openxmlformats.org/officeDocument/2006/math">
-                    <m:r>
-                      <m:t>n</m:t>
-                    </m:r>
-                    <m:r>
-                      <m:rPr>
-                        <m:sty m:val="p"/>
-                      </m:rPr>
-                      <m:t>/</m:t>
-                    </m:r>
-                    <m:d>
-                      <m:dPr>
-                        <m:begChr m:val="("/>
-                        <m:sepChr m:val=""/>
-                        <m:endChr m:val=")"/>
-                        <m:grow/>
-                      </m:dPr>
-                      <m:e>
-                        <m:r>
-                          <m:t>n</m:t>
-                        </m:r>
-                        <m:r>
-                          <m:rPr>
-                            <m:sty m:val="p"/>
-                          </m:rPr>
-                          <m:t>−</m:t>
-                        </m:r>
-                        <m:r>
-                          <m:t>p</m:t>
-                        </m:r>
-                      </m:e>
-                    </m:d>
-                  </m:oMath>
-                </a14:m>
-                <a:r>
-                  <a:rPr/>
-                  <a:t>.</a:t>
-                </a:r>
-              </a:p>
-            </p:txBody>
-          </p:sp>
-        </mc:Choice>
-      </mc:AlternateContent>
-    </p:spTree>
-  </p:cSld>
-</p:sld>
-</file>
-
-<file path=ppt/slides/slide18.xml><?xml version="1.0" encoding="utf-8"?>
-<p:sld xmlns:a="http://schemas.openxmlformats.org/drawingml/2006/main" xmlns:r="http://schemas.openxmlformats.org/officeDocument/2006/relationships" xmlns:p="http://schemas.openxmlformats.org/presentationml/2006/main">
-  <p:cSld>
-    <p:spTree>
-      <p:nvGrpSpPr>
-        <p:cNvPr id="1" name=""/>
-        <p:cNvGrpSpPr/>
-        <p:nvPr/>
-      </p:nvGrpSpPr>
-      <p:grpSpPr>
-        <a:xfrm>
-          <a:off x="0" y="0"/>
-          <a:ext cx="0" cy="0"/>
-          <a:chOff x="0" y="0"/>
-          <a:chExt cx="0" cy="0"/>
-        </a:xfrm>
-      </p:grpSpPr>
-      <p:sp>
-        <p:nvSpPr>
-          <p:cNvPr id="2" name="Title 1"/>
-          <p:cNvSpPr>
-            <a:spLocks noGrp="1"/>
-          </p:cNvSpPr>
-          <p:nvPr>
-            <p:ph type="title"/>
-          </p:nvPr>
-        </p:nvSpPr>
-        <p:spPr/>
-        <p:txBody>
-          <a:bodyPr/>
-          <a:lstStyle/>
-          <a:p>
-            <a:pPr lvl="0" indent="0" marL="0">
-              <a:buNone/>
-            </a:pPr>
-            <a:r>
-              <a:rPr/>
-              <a:t>Cluster-robust</a:t>
-            </a:r>
-          </a:p>
-        </p:txBody>
-      </p:sp>
-      <mc:AlternateContent xmlns:mc="http://schemas.openxmlformats.org/markup-compatibility/2006">
-        <mc:Choice xmlns:a14="http://schemas.microsoft.com/office/drawing/2010/main" Requires="a14">
-          <p:sp>
-            <p:nvSpPr>
-              <p:cNvPr id="3" name="Content Placeholder 2"/>
-              <p:cNvSpPr>
-                <a:spLocks noGrp="1"/>
-              </p:cNvSpPr>
-              <p:nvPr>
-                <p:ph idx="1"/>
-              </p:nvPr>
-            </p:nvSpPr>
-            <p:spPr/>
-            <p:txBody>
-              <a:bodyPr/>
-              <a:lstStyle/>
-              <a:p>
-                <a:pPr lvl="0" indent="0" marL="0">
-                  <a:buNone/>
-                </a:pPr>
-                <a:r>
-                  <a:rPr/>
-                  <a:t>If errors are correlated within groups </a:t>
-                </a:r>
-                <a14:m>
-                  <m:oMath xmlns:m="http://schemas.openxmlformats.org/officeDocument/2006/math">
-                    <m:r>
-                      <m:t>g</m:t>
-                    </m:r>
-                  </m:oMath>
-                </a14:m>
-                <a:r>
-                  <a:rPr/>
-                  <a:t> — firms, regions, countries:</a:t>
-                </a:r>
-              </a:p>
-              <a:p>
-                <a:pPr lvl="0" indent="0" marL="0">
-                  <a:buNone/>
-                </a:pPr>
-                <a14:m>
-                  <m:oMathPara xmlns:m="http://schemas.openxmlformats.org/officeDocument/2006/math">
-                    <m:oMathParaPr>
-                      <m:jc m:val="center"/>
-                    </m:oMathParaPr>
-                    <m:oMath>
-                      <m:acc>
-                        <m:accPr>
-                          <m:chr m:val="̂"/>
-                        </m:accPr>
-                        <m:e>
-                          <m:r>
-                            <m:t>Ω</m:t>
-                          </m:r>
-                        </m:e>
-                      </m:acc>
-                      <m:r>
-                        <m:rPr>
-                          <m:sty m:val="p"/>
-                        </m:rPr>
-                        <m:t>=</m:t>
-                      </m:r>
-                      <m:nary>
-                        <m:naryPr>
-                          <m:chr m:val="∑"/>
-                          <m:limLoc m:val="undOvr"/>
-                          <m:subHide m:val="off"/>
-                          <m:supHide m:val="on"/>
-                        </m:naryPr>
-                        <m:sub>
-                          <m:r>
-                            <m:t>g</m:t>
-                          </m:r>
-                        </m:sub>
-                        <m:sup>
-                          <m:r>
-                            <m:t>​</m:t>
-                          </m:r>
-                        </m:sup>
-                        <m:e>
-                          <m:sSub>
-                            <m:e>
-                              <m:acc>
-                                <m:accPr>
-                                  <m:chr m:val="̂"/>
-                                </m:accPr>
-                                <m:e>
-                                  <m:r>
-                                    <m:t>ε</m:t>
-                                  </m:r>
-                                </m:e>
-                              </m:acc>
-                            </m:e>
-                            <m:sub>
-                              <m:r>
-                                <m:t>g</m:t>
-                              </m:r>
-                            </m:sub>
-                          </m:sSub>
-                        </m:e>
-                      </m:nary>
-                      <m:sSubSup>
-                        <m:e>
-                          <m:acc>
-                            <m:accPr>
-                              <m:chr m:val="̂"/>
-                            </m:accPr>
-                            <m:e>
-                              <m:r>
-                                <m:t>ε</m:t>
-                              </m:r>
-                            </m:e>
-                          </m:acc>
-                        </m:e>
-                        <m:sub>
-                          <m:r>
-                            <m:t>g</m:t>
-                          </m:r>
-                        </m:sub>
-                        <m:sup>
-                          <m:r>
-                            <m:rPr>
-                              <m:sty m:val="p"/>
-                            </m:rPr>
-                            <m:t>⊤</m:t>
-                          </m:r>
-                        </m:sup>
-                      </m:sSubSup>
-                    </m:oMath>
-                  </m:oMathPara>
-                </a14:m>
-              </a:p>
-              <a:p>
-                <a:pPr lvl="0" indent="0" marL="0">
-                  <a:buNone/>
-                </a:pPr>
-                <a:r>
-                  <a:rPr/>
-                  <a:t>Requires </a:t>
-                </a:r>
-                <a:r>
-                  <a:rPr b="1"/>
-                  <a:t>many</a:t>
-                </a:r>
-                <a:r>
-                  <a:rPr/>
-                  <a:t> clusters. With fewer than roughly </a:t>
-                </a:r>
-                <a:r>
-                  <a:rPr b="1"/>
-                  <a:t>40</a:t>
-                </a:r>
-                <a:r>
-                  <a:rPr/>
-                  <a:t>, inference is unreliable — and a 30-country panel sits below that line.</a:t>
-                </a:r>
-              </a:p>
-            </p:txBody>
-          </p:sp>
-        </mc:Choice>
-      </mc:AlternateContent>
-    </p:spTree>
-  </p:cSld>
-</p:sld>
-</file>
-
-<file path=ppt/slides/slide19.xml><?xml version="1.0" encoding="utf-8"?>
-<p:sld xmlns:a="http://schemas.openxmlformats.org/drawingml/2006/main" xmlns:r="http://schemas.openxmlformats.org/officeDocument/2006/relationships" xmlns:p="http://schemas.openxmlformats.org/presentationml/2006/main">
-  <p:cSld>
-    <p:spTree>
-      <p:nvGrpSpPr>
-        <p:cNvPr id="1" name=""/>
-        <p:cNvGrpSpPr/>
-        <p:nvPr/>
-      </p:nvGrpSpPr>
-      <p:grpSpPr>
-        <a:xfrm>
-          <a:off x="0" y="0"/>
-          <a:ext cx="0" cy="0"/>
-          <a:chOff x="0" y="0"/>
-          <a:chExt cx="0" cy="0"/>
-        </a:xfrm>
-      </p:grpSpPr>
-      <p:sp>
-        <p:nvSpPr>
-          <p:cNvPr id="2" name="Title 1"/>
-          <p:cNvSpPr>
-            <a:spLocks noGrp="1"/>
-          </p:cNvSpPr>
-          <p:nvPr>
-            <p:ph type="title"/>
-          </p:nvPr>
-        </p:nvSpPr>
-        <p:spPr/>
-        <p:txBody>
-          <a:bodyPr/>
-          <a:lstStyle/>
-          <a:p>
-            <a:pPr lvl="0" indent="0" marL="0">
-              <a:buNone/>
-            </a:pPr>
-            <a:r>
-              <a:rPr/>
-              <a:t>The practical rule</a:t>
-            </a:r>
-          </a:p>
-        </p:txBody>
-      </p:sp>
-      <p:sp>
-        <p:nvSpPr>
-          <p:cNvPr id="3" name="Content Placeholder 2"/>
-          <p:cNvSpPr>
-            <a:spLocks noGrp="1"/>
-          </p:cNvSpPr>
-          <p:nvPr>
-            <p:ph idx="1"/>
-          </p:nvPr>
-        </p:nvSpPr>
-        <p:spPr/>
-        <p:txBody>
-          <a:bodyPr/>
-          <a:lstStyle/>
-          <a:p>
-            <a:pPr lvl="0" indent="0" marL="1270000">
-              <a:buNone/>
-            </a:pPr>
-            <a:r>
-              <a:rPr sz="2000" b="1"/>
-              <a:t>Cluster at the level at which treatment is assigned.</a:t>
-            </a:r>
-          </a:p>
-          <a:p>
-            <a:pPr lvl="0" indent="0" marL="0">
-              <a:buNone/>
-            </a:pPr>
-            <a:r>
-              <a:rPr/>
-              <a:t>Not at the level that gives the smallest standard error. State the level in your table note: two papers can both write “robust standard errors” and mean different things.</a:t>
-            </a:r>
-          </a:p>
-        </p:txBody>
-      </p:sp>
-    </p:spTree>
-  </p:cSld>
-</p:sld>
-</file>
-
-<file path=ppt/slides/slide2.xml><?xml version="1.0" encoding="utf-8"?>
-<p:sld xmlns:a="http://schemas.openxmlformats.org/drawingml/2006/main" xmlns:r="http://schemas.openxmlformats.org/officeDocument/2006/relationships" xmlns:p="http://schemas.openxmlformats.org/presentationml/2006/main">
-  <p:cSld>
-    <p:spTree>
-      <p:nvGrpSpPr>
-        <p:cNvPr id="1" name=""/>
-        <p:cNvGrpSpPr/>
-        <p:nvPr/>
-      </p:nvGrpSpPr>
-      <p:grpSpPr>
-        <a:xfrm>
-          <a:off x="0" y="0"/>
-          <a:ext cx="0" cy="0"/>
-          <a:chOff x="0" y="0"/>
-          <a:chExt cx="0" cy="0"/>
-        </a:xfrm>
-      </p:grpSpPr>
-      <p:sp>
-        <p:nvSpPr>
-          <p:cNvPr id="3" name="Content Placeholder 2"/>
-          <p:cNvSpPr>
-            <a:spLocks noGrp="1"/>
-          </p:cNvSpPr>
-          <p:nvPr>
-            <p:ph idx="1"/>
-          </p:nvPr>
-        </p:nvSpPr>
-        <p:spPr/>
-        <p:txBody>
-          <a:bodyPr/>
-          <a:lstStyle/>
-          <a:p>
-            <a:pPr lvl="0" indent="0" marL="0">
-              <a:spcBef>
-                <a:spcPts val="3000"/>
-              </a:spcBef>
-              <a:buNone/>
-            </a:pPr>
-            <a:r>
-              <a:rPr b="1"/>
-              <a:t>Your coefficient has a standard error. When does it mean anything?</a:t>
-            </a:r>
-          </a:p>
-        </p:txBody>
-      </p:sp>
-    </p:spTree>
-  </p:cSld>
-</p:sld>
-</file>
-
-<file path=ppt/slides/slide20.xml><?xml version="1.0" encoding="utf-8"?>
-<p:sld xmlns:a="http://schemas.openxmlformats.org/drawingml/2006/main" xmlns:r="http://schemas.openxmlformats.org/officeDocument/2006/relationships" xmlns:p="http://schemas.openxmlformats.org/presentationml/2006/main">
-  <p:cSld>
-    <p:spTree>
-      <p:nvGrpSpPr>
-        <p:cNvPr id="1" name=""/>
-        <p:cNvGrpSpPr/>
-        <p:nvPr/>
-      </p:nvGrpSpPr>
-      <p:grpSpPr>
-        <a:xfrm>
-          <a:off x="0" y="0"/>
-          <a:ext cx="0" cy="0"/>
-          <a:chOff x="0" y="0"/>
-          <a:chExt cx="0" cy="0"/>
-        </a:xfrm>
-      </p:grpSpPr>
-      <p:sp>
-        <p:nvSpPr>
-          <p:cNvPr id="2" name="Title 1"/>
-          <p:cNvSpPr>
-            <a:spLocks noGrp="1"/>
-          </p:cNvSpPr>
-          <p:nvPr>
-            <p:ph type="title"/>
-          </p:nvPr>
-        </p:nvSpPr>
-        <p:spPr>
-          <a:xfrm>
-            <a:off x="722313" y="3305176"/>
-            <a:ext cx="7772400" cy="1021556"/>
-          </a:xfrm>
-        </p:spPr>
-        <p:txBody>
-          <a:bodyPr/>
-          <a:lstStyle/>
-          <a:p>
-            <a:pPr lvl="0" indent="0" marL="0">
-              <a:buNone/>
-            </a:pPr>
-            <a:r>
-              <a:rPr/>
-              <a:t>3.4 Omitted variable bias</a:t>
-            </a:r>
-          </a:p>
-        </p:txBody>
-      </p:sp>
-    </p:spTree>
-  </p:cSld>
-</p:sld>
-</file>
-
-<file path=ppt/slides/slide21.xml><?xml version="1.0" encoding="utf-8"?>
-<p:sld xmlns:a="http://schemas.openxmlformats.org/drawingml/2006/main" xmlns:r="http://schemas.openxmlformats.org/officeDocument/2006/relationships" xmlns:p="http://schemas.openxmlformats.org/presentationml/2006/main">
-  <p:cSld>
-    <p:spTree>
-      <p:nvGrpSpPr>
-        <p:cNvPr id="1" name=""/>
-        <p:cNvGrpSpPr/>
-        <p:nvPr/>
-      </p:nvGrpSpPr>
-      <p:grpSpPr>
-        <a:xfrm>
-          <a:off x="0" y="0"/>
-          <a:ext cx="0" cy="0"/>
-          <a:chOff x="0" y="0"/>
-          <a:chExt cx="0" cy="0"/>
-        </a:xfrm>
-      </p:grpSpPr>
-      <p:sp>
-        <p:nvSpPr>
-          <p:cNvPr id="2" name="Title 1"/>
-          <p:cNvSpPr>
-            <a:spLocks noGrp="1"/>
-          </p:cNvSpPr>
-          <p:nvPr>
-            <p:ph type="title"/>
-          </p:nvPr>
-        </p:nvSpPr>
-        <p:spPr/>
-        <p:txBody>
-          <a:bodyPr/>
-          <a:lstStyle/>
-          <a:p>
-            <a:pPr lvl="0" indent="0" marL="0">
-              <a:buNone/>
-            </a:pPr>
-            <a:r>
-              <a:rPr/>
-              <a:t>The formula</a:t>
-            </a:r>
-          </a:p>
-        </p:txBody>
-      </p:sp>
-      <mc:AlternateContent xmlns:mc="http://schemas.openxmlformats.org/markup-compatibility/2006">
-        <mc:Choice xmlns:a14="http://schemas.microsoft.com/office/drawing/2010/main" Requires="a14">
-          <p:sp>
-            <p:nvSpPr>
-              <p:cNvPr id="3" name="Content Placeholder 2"/>
-              <p:cNvSpPr>
-                <a:spLocks noGrp="1"/>
-              </p:cNvSpPr>
-              <p:nvPr>
-                <p:ph idx="1"/>
-              </p:nvPr>
-            </p:nvSpPr>
-            <p:spPr/>
-            <p:txBody>
-              <a:bodyPr/>
-              <a:lstStyle/>
-              <a:p>
-                <a:pPr lvl="0" indent="0" marL="0">
-                  <a:buNone/>
-                </a:pPr>
-                <a:r>
-                  <a:rPr/>
-                  <a:t>True model </a:t>
-                </a:r>
-                <a14:m>
-                  <m:oMath xmlns:m="http://schemas.openxmlformats.org/officeDocument/2006/math">
-                    <m:r>
-                      <m:t>y</m:t>
-                    </m:r>
-                    <m:r>
-                      <m:rPr>
-                        <m:sty m:val="p"/>
-                      </m:rPr>
-                      <m:t>=</m:t>
-                    </m:r>
-                    <m:sSub>
-                      <m:e>
-                        <m:r>
-                          <m:t>X</m:t>
-                        </m:r>
-                      </m:e>
-                      <m:sub>
-                        <m:r>
-                          <m:t>1</m:t>
-                        </m:r>
-                      </m:sub>
-                    </m:sSub>
-                    <m:sSub>
-                      <m:e>
-                        <m:r>
-                          <m:t>β</m:t>
-                        </m:r>
-                      </m:e>
-                      <m:sub>
-                        <m:r>
-                          <m:t>1</m:t>
-                        </m:r>
-                      </m:sub>
-                    </m:sSub>
-                    <m:r>
-                      <m:rPr>
-                        <m:sty m:val="p"/>
-                      </m:rPr>
-                      <m:t>+</m:t>
-                    </m:r>
-                    <m:sSub>
-                      <m:e>
-                        <m:r>
-                          <m:t>X</m:t>
-                        </m:r>
-                      </m:e>
-                      <m:sub>
-                        <m:r>
-                          <m:t>2</m:t>
-                        </m:r>
-                      </m:sub>
-                    </m:sSub>
-                    <m:sSub>
-                      <m:e>
-                        <m:r>
-                          <m:t>β</m:t>
-                        </m:r>
-                      </m:e>
-                      <m:sub>
-                        <m:r>
-                          <m:t>2</m:t>
-                        </m:r>
-                      </m:sub>
-                    </m:sSub>
-                    <m:r>
-                      <m:rPr>
-                        <m:sty m:val="p"/>
-                      </m:rPr>
-                      <m:t>+</m:t>
-                    </m:r>
-                    <m:r>
-                      <m:t>u</m:t>
-                    </m:r>
-                  </m:oMath>
-                </a14:m>
-                <a:r>
-                  <a:rPr/>
-                  <a:t>, but you estimate on </a:t>
-                </a:r>
-                <a14:m>
-                  <m:oMath xmlns:m="http://schemas.openxmlformats.org/officeDocument/2006/math">
-                    <m:sSub>
-                      <m:e>
-                        <m:r>
-                          <m:t>X</m:t>
-                        </m:r>
-                      </m:e>
-                      <m:sub>
-                        <m:r>
-                          <m:t>1</m:t>
-                        </m:r>
-                      </m:sub>
-                    </m:sSub>
-                  </m:oMath>
-                </a14:m>
-                <a:r>
-                  <a:rPr/>
-                  <a:t> alone. Let </a:t>
-                </a:r>
-                <a14:m>
-                  <m:oMath xmlns:m="http://schemas.openxmlformats.org/officeDocument/2006/math">
-                    <m:r>
-                      <m:t>δ</m:t>
-                    </m:r>
-                  </m:oMath>
-                </a14:m>
-                <a:r>
-                  <a:rPr/>
-                  <a:t> be the coefficient matrix from regressing </a:t>
-                </a:r>
-                <a14:m>
-                  <m:oMath xmlns:m="http://schemas.openxmlformats.org/officeDocument/2006/math">
-                    <m:sSub>
-                      <m:e>
-                        <m:r>
-                          <m:t>X</m:t>
-                        </m:r>
-                      </m:e>
-                      <m:sub>
-                        <m:r>
-                          <m:t>2</m:t>
-                        </m:r>
-                      </m:sub>
-                    </m:sSub>
-                  </m:oMath>
-                </a14:m>
-                <a:r>
-                  <a:rPr/>
-                  <a:t> on </a:t>
-                </a:r>
-                <a14:m>
-                  <m:oMath xmlns:m="http://schemas.openxmlformats.org/officeDocument/2006/math">
-                    <m:sSub>
-                      <m:e>
-                        <m:r>
-                          <m:t>X</m:t>
-                        </m:r>
-                      </m:e>
-                      <m:sub>
-                        <m:r>
-                          <m:t>1</m:t>
-                        </m:r>
-                      </m:sub>
-                    </m:sSub>
-                  </m:oMath>
-                </a14:m>
-                <a:r>
-                  <a:rPr/>
-                  <a:t>. Then</a:t>
-                </a:r>
-              </a:p>
-              <a:p>
-                <a:pPr lvl="0" indent="0" marL="0">
-                  <a:buNone/>
-                </a:pPr>
-                <a14:m>
-                  <m:oMathPara xmlns:m="http://schemas.openxmlformats.org/officeDocument/2006/math">
-                    <m:oMathParaPr>
-                      <m:jc m:val="center"/>
-                    </m:oMathParaPr>
-                    <m:oMath>
-                      <m:r>
-                        <m:rPr>
-                          <m:sty m:val="p"/>
-                          <m:scr m:val="double-struck"/>
-                        </m:rPr>
-                        <m:t>E</m:t>
-                      </m:r>
-                      <m:d>
-                        <m:dPr>
-                          <m:begChr m:val="["/>
-                          <m:sepChr m:val=""/>
-                          <m:endChr m:val="]"/>
-                          <m:grow/>
-                        </m:dPr>
-                        <m:e>
-                          <m:sSub>
-                            <m:e>
-                              <m:acc>
-                                <m:accPr>
-                                  <m:chr m:val="̂"/>
-                                </m:accPr>
-                                <m:e>
-                                  <m:r>
-                                    <m:t>β</m:t>
-                                  </m:r>
-                                </m:e>
-                              </m:acc>
-                            </m:e>
-                            <m:sub>
-                              <m:r>
-                                <m:t>1</m:t>
-                              </m:r>
-                            </m:sub>
-                          </m:sSub>
-                        </m:e>
-                      </m:d>
-                      <m:r>
-                        <m:rPr>
-                          <m:sty m:val="p"/>
-                        </m:rPr>
-                        <m:t>=</m:t>
-                      </m:r>
-                      <m:sSub>
-                        <m:e>
-                          <m:r>
-                            <m:t>β</m:t>
-                          </m:r>
-                        </m:e>
-                        <m:sub>
-                          <m:r>
-                            <m:t>1</m:t>
-                          </m:r>
-                        </m:sub>
-                      </m:sSub>
-                      <m:r>
-                        <m:rPr>
-                          <m:sty m:val="p"/>
-                        </m:rPr>
-                        <m:t>+</m:t>
-                      </m:r>
-                      <m:r>
-                        <m:t>δ</m:t>
-                      </m:r>
-                      <m:sSub>
-                        <m:e>
-                          <m:r>
-                            <m:t>β</m:t>
-                          </m:r>
-                        </m:e>
-                        <m:sub>
-                          <m:r>
-                            <m:t>2</m:t>
-                          </m:r>
-                        </m:sub>
-                      </m:sSub>
-                    </m:oMath>
-                  </m:oMathPara>
-                </a14:m>
-              </a:p>
-            </p:txBody>
-          </p:sp>
-        </mc:Choice>
-      </mc:AlternateContent>
-    </p:spTree>
-  </p:cSld>
-</p:sld>
-</file>
-
-<file path=ppt/slides/slide22.xml><?xml version="1.0" encoding="utf-8"?>
-<p:sld xmlns:a="http://schemas.openxmlformats.org/drawingml/2006/main" xmlns:r="http://schemas.openxmlformats.org/officeDocument/2006/relationships" xmlns:p="http://schemas.openxmlformats.org/presentationml/2006/main">
-  <p:cSld>
-    <p:spTree>
-      <p:nvGrpSpPr>
-        <p:cNvPr id="1" name=""/>
-        <p:cNvGrpSpPr/>
-        <p:nvPr/>
-      </p:nvGrpSpPr>
-      <p:grpSpPr>
-        <a:xfrm>
-          <a:off x="0" y="0"/>
-          <a:ext cx="0" cy="0"/>
-          <a:chOff x="0" y="0"/>
-          <a:chExt cx="0" cy="0"/>
-        </a:xfrm>
-      </p:grpSpPr>
-      <p:sp>
-        <p:nvSpPr>
-          <p:cNvPr id="2" name="Title 1"/>
-          <p:cNvSpPr>
-            <a:spLocks noGrp="1"/>
-          </p:cNvSpPr>
-          <p:nvPr>
-            <p:ph type="title"/>
-          </p:nvPr>
-        </p:nvSpPr>
-        <p:spPr/>
-        <p:txBody>
-          <a:bodyPr/>
-          <a:lstStyle/>
-          <a:p>
-            <a:pPr lvl="0" indent="0" marL="0">
-              <a:buNone/>
-            </a:pPr>
-            <a:r>
-              <a:rPr/>
-              <a:t>Sign the bias with two questions</a:t>
-            </a:r>
-          </a:p>
-        </p:txBody>
-      </p:sp>
-      <mc:AlternateContent xmlns:mc="http://schemas.openxmlformats.org/markup-compatibility/2006">
-        <mc:Choice xmlns:a14="http://schemas.microsoft.com/office/drawing/2010/main" Requires="a14">
-          <p:sp>
-            <p:nvSpPr>
-              <p:cNvPr id="3" name="Content Placeholder 2"/>
-              <p:cNvSpPr>
-                <a:spLocks noGrp="1"/>
-              </p:cNvSpPr>
-              <p:nvPr>
-                <p:ph idx="1"/>
-              </p:nvPr>
-            </p:nvSpPr>
-            <p:spPr/>
-            <p:txBody>
-              <a:bodyPr/>
-              <a:lstStyle/>
-              <a:p>
-                <a:pPr lvl="0" indent="-342900" marL="342900">
-                  <a:buAutoNum type="arabicPeriod"/>
-                </a:pPr>
-                <a:r>
-                  <a:rPr/>
-                  <a:t>How does the omitted variable relate to </a:t>
-                </a:r>
-                <a:r>
-                  <a:rPr b="1"/>
-                  <a:t>my regressor</a:t>
-                </a:r>
-                <a:r>
-                  <a:rPr/>
-                  <a:t>? → </a:t>
-                </a:r>
-                <a14:m>
-                  <m:oMath xmlns:m="http://schemas.openxmlformats.org/officeDocument/2006/math">
-                    <m:r>
-                      <m:t>δ</m:t>
-                    </m:r>
-                  </m:oMath>
-                </a14:m>
-              </a:p>
-              <a:p>
-                <a:pPr lvl="0" indent="-342900" marL="342900">
-                  <a:buAutoNum type="arabicPeriod"/>
-                </a:pPr>
-                <a:r>
-                  <a:rPr/>
-                  <a:t>How does it relate to the </a:t>
-                </a:r>
-                <a:r>
-                  <a:rPr b="1"/>
-                  <a:t>outcome</a:t>
-                </a:r>
-                <a:r>
-                  <a:rPr/>
-                  <a:t>? → </a:t>
-                </a:r>
-                <a14:m>
-                  <m:oMath xmlns:m="http://schemas.openxmlformats.org/officeDocument/2006/math">
-                    <m:sSub>
-                      <m:e>
-                        <m:r>
-                          <m:t>β</m:t>
-                        </m:r>
-                      </m:e>
-                      <m:sub>
-                        <m:r>
-                          <m:t>2</m:t>
-                        </m:r>
-                      </m:sub>
-                    </m:sSub>
-                  </m:oMath>
-                </a14:m>
-              </a:p>
-              <a:p>
-                <a:pPr lvl="0" indent="0" marL="0">
-                  <a:buNone/>
-                </a:pPr>
-                <a:r>
-                  <a:rPr b="1"/>
-                  <a:t>Same sign in both → upward bias.</a:t>
-                </a:r>
-              </a:p>
-              <a:p>
-                <a:pPr lvl="0" indent="0" marL="0">
-                  <a:buNone/>
-                </a:pPr>
-                <a:r>
-                  <a:rPr/>
-                  <a:t>Answer both in writing </a:t>
-                </a:r>
-                <a:r>
-                  <a:rPr i="1"/>
-                  <a:t>before</a:t>
-                </a:r>
-                <a:r>
-                  <a:rPr/>
-                  <a:t> you estimate. The single most useful discipline in applied work, and it is free.</a:t>
-                </a:r>
-              </a:p>
-            </p:txBody>
-          </p:sp>
-        </mc:Choice>
-      </mc:AlternateContent>
-    </p:spTree>
-  </p:cSld>
-</p:sld>
-</file>
-
-<file path=ppt/slides/slide23.xml><?xml version="1.0" encoding="utf-8"?>
-<p:sld xmlns:a="http://schemas.openxmlformats.org/drawingml/2006/main" xmlns:r="http://schemas.openxmlformats.org/officeDocument/2006/relationships" xmlns:p="http://schemas.openxmlformats.org/presentationml/2006/main">
-  <p:cSld>
-    <p:spTree>
-      <p:nvGrpSpPr>
-        <p:cNvPr id="1" name=""/>
-        <p:cNvGrpSpPr/>
-        <p:nvPr/>
-      </p:nvGrpSpPr>
-      <p:grpSpPr>
-        <a:xfrm>
-          <a:off x="0" y="0"/>
-          <a:ext cx="0" cy="0"/>
-          <a:chOff x="0" y="0"/>
-          <a:chExt cx="0" cy="0"/>
-        </a:xfrm>
-      </p:grpSpPr>
-      <p:sp>
-        <p:nvSpPr>
-          <p:cNvPr id="2" name="Title 1"/>
-          <p:cNvSpPr>
-            <a:spLocks noGrp="1"/>
-          </p:cNvSpPr>
-          <p:nvPr>
-            <p:ph type="title"/>
-          </p:nvPr>
-        </p:nvSpPr>
-        <p:spPr>
-          <a:xfrm>
-            <a:off x="722313" y="3305176"/>
-            <a:ext cx="7772400" cy="1021556"/>
-          </a:xfrm>
-        </p:spPr>
-        <p:txBody>
-          <a:bodyPr/>
-          <a:lstStyle/>
-          <a:p>
-            <a:pPr lvl="0" indent="0" marL="0">
-              <a:buNone/>
-            </a:pPr>
-            <a:r>
-              <a:rPr/>
-              <a:t>3.5 A Mincer coefficient</a:t>
-            </a:r>
-          </a:p>
-        </p:txBody>
-      </p:sp>
-    </p:spTree>
-  </p:cSld>
-</p:sld>
-</file>
-
-<file path=ppt/slides/slide24.xml><?xml version="1.0" encoding="utf-8"?>
-<p:sld xmlns:a="http://schemas.openxmlformats.org/drawingml/2006/main" xmlns:r="http://schemas.openxmlformats.org/officeDocument/2006/relationships" xmlns:p="http://schemas.openxmlformats.org/presentationml/2006/main">
-  <p:cSld>
-    <p:spTree>
-      <p:nvGrpSpPr>
-        <p:cNvPr id="1" name=""/>
-        <p:cNvGrpSpPr/>
-        <p:nvPr/>
-      </p:nvGrpSpPr>
-      <p:grpSpPr>
-        <a:xfrm>
-          <a:off x="0" y="0"/>
-          <a:ext cx="0" cy="0"/>
-          <a:chOff x="0" y="0"/>
-          <a:chExt cx="0" cy="0"/>
-        </a:xfrm>
-      </p:grpSpPr>
-      <p:sp>
-        <p:nvSpPr>
-          <p:cNvPr id="2" name="Title 1"/>
-          <p:cNvSpPr>
-            <a:spLocks noGrp="1"/>
-          </p:cNvSpPr>
-          <p:nvPr>
-            <p:ph type="title"/>
-          </p:nvPr>
-        </p:nvSpPr>
-        <p:spPr/>
-        <p:txBody>
-          <a:bodyPr/>
-          <a:lstStyle/>
-          <a:p>
-            <a:pPr lvl="0" indent="0" marL="0">
-              <a:buNone/>
-            </a:pPr>
-            <a:r>
-              <a:rPr/>
-              <a:t>What it identifies</a:t>
-            </a:r>
-          </a:p>
-        </p:txBody>
-      </p:sp>
-      <mc:AlternateContent xmlns:mc="http://schemas.openxmlformats.org/markup-compatibility/2006">
-        <mc:Choice xmlns:a14="http://schemas.microsoft.com/office/drawing/2010/main" Requires="a14">
-          <p:sp>
-            <p:nvSpPr>
-              <p:cNvPr id="3" name="Content Placeholder 2"/>
-              <p:cNvSpPr>
-                <a:spLocks noGrp="1"/>
-              </p:cNvSpPr>
-              <p:nvPr>
-                <p:ph idx="1"/>
-              </p:nvPr>
-            </p:nvSpPr>
-            <p:spPr/>
-            <p:txBody>
-              <a:bodyPr/>
-              <a:lstStyle/>
-              <a:p>
-                <a:pPr lvl="0" indent="0" marL="0">
-                  <a:buNone/>
-                </a:pPr>
-                <a14:m>
-                  <m:oMathPara xmlns:m="http://schemas.openxmlformats.org/officeDocument/2006/math">
-                    <m:oMathParaPr>
-                      <m:jc m:val="center"/>
-                    </m:oMathParaPr>
-                    <m:oMath>
-                      <m:r>
-                        <m:rPr>
-                          <m:sty m:val="p"/>
-                        </m:rPr>
-                        <m:t>log</m:t>
-                      </m:r>
-                      <m:sSub>
-                        <m:e>
-                          <m:r>
-                            <m:t>w</m:t>
-                          </m:r>
-                        </m:e>
-                        <m:sub>
-                          <m:r>
-                            <m:t>i</m:t>
-                          </m:r>
-                        </m:sub>
-                      </m:sSub>
-                      <m:r>
-                        <m:rPr>
-                          <m:sty m:val="p"/>
-                        </m:rPr>
-                        <m:t>=</m:t>
-                      </m:r>
-                      <m:r>
-                        <m:t>α</m:t>
-                      </m:r>
-                      <m:r>
-                        <m:rPr>
-                          <m:sty m:val="p"/>
-                        </m:rPr>
-                        <m:t>+</m:t>
-                      </m:r>
-                      <m:r>
-                        <m:t>ρ</m:t>
-                      </m:r>
-                      <m:r>
-                        <m:t> </m:t>
-                      </m:r>
-                      <m:sSub>
-                        <m:e>
-                          <m:r>
-                            <m:t>S</m:t>
-                          </m:r>
-                        </m:e>
-                        <m:sub>
-                          <m:r>
-                            <m:t>i</m:t>
-                          </m:r>
-                        </m:sub>
-                      </m:sSub>
-                      <m:r>
-                        <m:rPr>
-                          <m:sty m:val="p"/>
-                        </m:rPr>
-                        <m:t>+</m:t>
-                      </m:r>
-                      <m:sSub>
-                        <m:e>
-                          <m:r>
-                            <m:t>γ</m:t>
-                          </m:r>
-                        </m:e>
-                        <m:sub>
-                          <m:r>
-                            <m:t>1</m:t>
-                          </m:r>
-                        </m:sub>
-                      </m:sSub>
-                      <m:sSub>
-                        <m:e>
-                          <m:r>
-                            <m:t>X</m:t>
-                          </m:r>
-                        </m:e>
-                        <m:sub>
-                          <m:r>
-                            <m:t>i</m:t>
-                          </m:r>
-                        </m:sub>
-                      </m:sSub>
-                      <m:r>
-                        <m:rPr>
-                          <m:sty m:val="p"/>
-                        </m:rPr>
-                        <m:t>+</m:t>
-                      </m:r>
-                      <m:sSub>
-                        <m:e>
-                          <m:r>
-                            <m:t>γ</m:t>
-                          </m:r>
-                        </m:e>
-                        <m:sub>
-                          <m:r>
-                            <m:t>2</m:t>
-                          </m:r>
-                        </m:sub>
-                      </m:sSub>
-                      <m:sSubSup>
-                        <m:e>
-                          <m:r>
-                            <m:t>X</m:t>
-                          </m:r>
-                        </m:e>
-                        <m:sub>
-                          <m:r>
-                            <m:t>i</m:t>
-                          </m:r>
-                        </m:sub>
-                        <m:sup>
-                          <m:r>
-                            <m:t>2</m:t>
-                          </m:r>
-                        </m:sup>
-                      </m:sSubSup>
-                      <m:r>
-                        <m:rPr>
-                          <m:sty m:val="p"/>
-                        </m:rPr>
-                        <m:t>+</m:t>
-                      </m:r>
-                      <m:sSub>
-                        <m:e>
-                          <m:r>
-                            <m:t>ε</m:t>
-                          </m:r>
-                        </m:e>
-                        <m:sub>
-                          <m:r>
-                            <m:t>i</m:t>
-                          </m:r>
-                        </m:sub>
-                      </m:sSub>
-                    </m:oMath>
-                  </m:oMathPara>
-                </a14:m>
-              </a:p>
-              <a:p>
-                <a:pPr lvl="0" indent="0" marL="0">
-                  <a:buNone/>
-                </a:pPr>
-                <a14:m>
-                  <m:oMath xmlns:m="http://schemas.openxmlformats.org/officeDocument/2006/math">
-                    <m:r>
-                      <m:t>ρ</m:t>
-                    </m:r>
-                  </m:oMath>
-                </a14:m>
-                <a:r>
-                  <a:rPr/>
-                  <a:t> is often read as “the return to a year of schooling”.</a:t>
-                </a:r>
-              </a:p>
-            </p:txBody>
-          </p:sp>
-        </mc:Choice>
-      </mc:AlternateContent>
-    </p:spTree>
-  </p:cSld>
-</p:sld>
-</file>
-
-<file path=ppt/slides/slide25.xml><?xml version="1.0" encoding="utf-8"?>
-<p:sld xmlns:a="http://schemas.openxmlformats.org/drawingml/2006/main" xmlns:r="http://schemas.openxmlformats.org/officeDocument/2006/relationships" xmlns:p="http://schemas.openxmlformats.org/presentationml/2006/main">
-  <p:cSld>
-    <p:spTree>
-      <p:nvGrpSpPr>
-        <p:cNvPr id="1" name=""/>
-        <p:cNvGrpSpPr/>
-        <p:nvPr/>
-      </p:nvGrpSpPr>
-      <p:grpSpPr>
-        <a:xfrm>
-          <a:off x="0" y="0"/>
-          <a:ext cx="0" cy="0"/>
-          <a:chOff x="0" y="0"/>
-          <a:chExt cx="0" cy="0"/>
-        </a:xfrm>
-      </p:grpSpPr>
-      <p:sp>
-        <p:nvSpPr>
-          <p:cNvPr id="2" name="Title 1"/>
-          <p:cNvSpPr>
-            <a:spLocks noGrp="1"/>
-          </p:cNvSpPr>
-          <p:nvPr>
-            <p:ph type="title"/>
-          </p:nvPr>
-        </p:nvSpPr>
-        <p:spPr/>
-        <p:txBody>
-          <a:bodyPr/>
-          <a:lstStyle/>
-          <a:p>
-            <a:pPr lvl="0" indent="0" marL="0">
-              <a:buNone/>
-            </a:pPr>
-            <a:r>
-              <a:rPr/>
-              <a:t>Strictly</a:t>
-            </a:r>
-          </a:p>
-        </p:txBody>
-      </p:sp>
-      <p:sp>
-        <p:nvSpPr>
-          <p:cNvPr id="3" name="Content Placeholder 2"/>
-          <p:cNvSpPr>
-            <a:spLocks noGrp="1"/>
-          </p:cNvSpPr>
-          <p:nvPr>
-            <p:ph idx="1"/>
-          </p:nvPr>
-        </p:nvSpPr>
-        <p:spPr/>
-        <p:txBody>
-          <a:bodyPr/>
-          <a:lstStyle/>
-          <a:p>
-            <a:pPr lvl="0" indent="0" marL="1270000">
-              <a:buNone/>
-            </a:pPr>
-            <a:r>
-              <a:rPr sz="2000"/>
-              <a:t>The mean log-wage difference associated with an additional year of schooling </a:t>
-            </a:r>
-            <a:r>
-              <a:rPr sz="2000" b="1"/>
-              <a:t>among people who are otherwise identical on the included covariates</a:t>
-            </a:r>
-            <a:r>
-              <a:rPr sz="2000"/>
-              <a:t>.</a:t>
-            </a:r>
-          </a:p>
-          <a:p>
-            <a:pPr lvl="0" indent="0" marL="0">
-              <a:buNone/>
-            </a:pPr>
-            <a:r>
-              <a:rPr/>
-              <a:t>Unobserved ability, selection into schooling and measurement error all break the causal reading. Session 10 gives tools that take this seriously.</a:t>
-            </a:r>
-          </a:p>
-          <a:p>
-            <a:pPr lvl="0" indent="0" marL="0">
-              <a:buNone/>
-            </a:pPr>
-            <a:r>
-              <a:rPr/>
-              <a:t>Today the discipline is simply to </a:t>
-            </a:r>
-            <a:r>
-              <a:rPr b="1"/>
-              <a:t>say precisely what you have estimated</a:t>
-            </a:r>
-            <a:r>
-              <a:rPr/>
-              <a:t>.</a:t>
-            </a:r>
-          </a:p>
-        </p:txBody>
-      </p:sp>
-    </p:spTree>
-  </p:cSld>
-</p:sld>
-</file>
-
-<file path=ppt/slides/slide26.xml><?xml version="1.0" encoding="utf-8"?>
-<p:sld xmlns:a="http://schemas.openxmlformats.org/drawingml/2006/main" xmlns:r="http://schemas.openxmlformats.org/officeDocument/2006/relationships" xmlns:p="http://schemas.openxmlformats.org/presentationml/2006/main">
-  <p:cSld>
-    <p:spTree>
-      <p:nvGrpSpPr>
-        <p:cNvPr id="1" name=""/>
-        <p:cNvGrpSpPr/>
-        <p:nvPr/>
-      </p:nvGrpSpPr>
-      <p:grpSpPr>
-        <a:xfrm>
-          <a:off x="0" y="0"/>
-          <a:ext cx="0" cy="0"/>
-          <a:chOff x="0" y="0"/>
-          <a:chExt cx="0" cy="0"/>
-        </a:xfrm>
-      </p:grpSpPr>
-      <p:sp>
-        <p:nvSpPr>
-          <p:cNvPr id="2" name="Title 1"/>
-          <p:cNvSpPr>
-            <a:spLocks noGrp="1"/>
-          </p:cNvSpPr>
-          <p:nvPr>
-            <p:ph type="title"/>
-          </p:nvPr>
-        </p:nvSpPr>
-        <p:spPr>
-          <a:xfrm>
-            <a:off x="722313" y="3305176"/>
-            <a:ext cx="7772400" cy="1021556"/>
-          </a:xfrm>
-        </p:spPr>
-        <p:txBody>
-          <a:bodyPr/>
-          <a:lstStyle/>
-          <a:p>
-            <a:pPr lvl="0" indent="0" marL="0">
-              <a:buNone/>
-            </a:pPr>
-            <a:r>
-              <a:rPr/>
-              <a:t>The practice</a:t>
-            </a:r>
-          </a:p>
-        </p:txBody>
-      </p:sp>
-    </p:spTree>
-  </p:cSld>
-</p:sld>
-</file>
-
-<file path=ppt/slides/slide27.xml><?xml version="1.0" encoding="utf-8"?>
-<p:sld xmlns:a="http://schemas.openxmlformats.org/drawingml/2006/main" xmlns:r="http://schemas.openxmlformats.org/officeDocument/2006/relationships" xmlns:p="http://schemas.openxmlformats.org/presentationml/2006/main">
-  <p:cSld>
-    <p:spTree>
-      <p:nvGrpSpPr>
-        <p:cNvPr id="1" name=""/>
-        <p:cNvGrpSpPr/>
-        <p:nvPr/>
-      </p:nvGrpSpPr>
-      <p:grpSpPr>
-        <a:xfrm>
-          <a:off x="0" y="0"/>
-          <a:ext cx="0" cy="0"/>
-          <a:chOff x="0" y="0"/>
-          <a:chExt cx="0" cy="0"/>
-        </a:xfrm>
-      </p:grpSpPr>
-      <p:sp>
-        <p:nvSpPr>
-          <p:cNvPr id="2" name="Title 1"/>
-          <p:cNvSpPr>
-            <a:spLocks noGrp="1"/>
-          </p:cNvSpPr>
-          <p:nvPr>
-            <p:ph type="title"/>
-          </p:nvPr>
-        </p:nvSpPr>
-        <p:spPr/>
-        <p:txBody>
-          <a:bodyPr/>
-          <a:lstStyle/>
-          <a:p>
-            <a:pPr lvl="0" indent="0" marL="0">
-              <a:buNone/>
-            </a:pPr>
-            <a:r>
-              <a:rPr/>
-              <a:t>What you do</a:t>
-            </a:r>
-          </a:p>
-        </p:txBody>
-      </p:sp>
-      <mc:AlternateContent xmlns:mc="http://schemas.openxmlformats.org/markup-compatibility/2006">
-        <mc:Choice xmlns:a14="http://schemas.microsoft.com/office/drawing/2010/main" Requires="a14">
-          <p:sp>
-            <p:nvSpPr>
-              <p:cNvPr id="3" name="Content Placeholder 2"/>
-              <p:cNvSpPr>
-                <a:spLocks noGrp="1"/>
-              </p:cNvSpPr>
-              <p:nvPr>
-                <p:ph idx="1"/>
-              </p:nvPr>
-            </p:nvSpPr>
-            <p:spPr/>
-            <p:txBody>
-              <a:bodyPr/>
-              <a:lstStyle/>
-              <a:p>
-                <a:pPr lvl="0" indent="-342900" marL="342900">
-                  <a:buAutoNum type="arabicPeriod"/>
-                </a:pPr>
-                <a:r>
-                  <a:rPr/>
-                  <a:t>Fit the specification on the practice data; inspect residuals against fitted values</a:t>
-                </a:r>
-              </a:p>
-              <a:p>
-                <a:pPr lvl="0" indent="-342900" marL="342900">
-                  <a:buAutoNum type="arabicPeriod"/>
-                </a:pPr>
-                <a:r>
-                  <a:rPr/>
-                  <a:t>Compute classical, HC1 and cluster-robust standard errors side by side</a:t>
-                </a:r>
-              </a:p>
-              <a:p>
-                <a:pPr lvl="0" indent="-342900" marL="342900">
-                  <a:buAutoNum type="arabicPeriod"/>
-                </a:pPr>
-                <a:r>
-                  <a:rPr/>
-                  <a:t>Name a confounder, </a:t>
-                </a:r>
-                <a:r>
-                  <a:rPr b="1"/>
-                  <a:t>sign its bias</a:t>
-                </a:r>
-                <a:r>
-                  <a:rPr/>
-                  <a:t>, then test your prediction</a:t>
-                </a:r>
-              </a:p>
-              <a:p>
-                <a:pPr lvl="0" indent="-342900" marL="342900">
-                  <a:buAutoNum type="arabicPeriod"/>
-                </a:pPr>
-                <a:r>
-                  <a:rPr/>
-                  <a:t>Report the coefficient with the cluster level named</a:t>
-                </a:r>
-              </a:p>
-              <a:p>
-                <a:pPr lvl="0" indent="0" marL="0">
-                  <a:buNone/>
-                </a:pPr>
-                <a:r>
-                  <a:rPr/>
-                  <a:t>Report </a:t>
-                </a:r>
-                <a14:m>
-                  <m:oMath xmlns:m="http://schemas.openxmlformats.org/officeDocument/2006/math">
-                    <m:r>
-                      <m:t>n</m:t>
-                    </m:r>
-                  </m:oMath>
-                </a14:m>
-                <a:r>
-                  <a:rPr/>
-                  <a:t> </a:t>
-                </a:r>
-                <a:r>
-                  <a:rPr b="1"/>
-                  <a:t>and</a:t>
-                </a:r>
-                <a:r>
-                  <a:rPr/>
-                  <a:t> the number of clusters. Both are true; only one governs precision.</a:t>
-                </a:r>
-              </a:p>
-            </p:txBody>
-          </p:sp>
-        </mc:Choice>
-      </mc:AlternateContent>
-    </p:spTree>
-  </p:cSld>
-</p:sld>
-</file>
-
-<file path=ppt/slides/slide28.xml><?xml version="1.0" encoding="utf-8"?>
-<p:sld xmlns:a="http://schemas.openxmlformats.org/drawingml/2006/main" xmlns:r="http://schemas.openxmlformats.org/officeDocument/2006/relationships" xmlns:p="http://schemas.openxmlformats.org/presentationml/2006/main">
-  <p:cSld>
-    <p:spTree>
-      <p:nvGrpSpPr>
-        <p:cNvPr id="1" name=""/>
-        <p:cNvGrpSpPr/>
-        <p:nvPr/>
-      </p:nvGrpSpPr>
-      <p:grpSpPr>
-        <a:xfrm>
-          <a:off x="0" y="0"/>
-          <a:ext cx="0" cy="0"/>
-          <a:chOff x="0" y="0"/>
-          <a:chExt cx="0" cy="0"/>
-        </a:xfrm>
-      </p:grpSpPr>
-      <p:sp>
-        <p:nvSpPr>
-          <p:cNvPr id="2" name="Title 1"/>
-          <p:cNvSpPr>
-            <a:spLocks noGrp="1"/>
-          </p:cNvSpPr>
-          <p:nvPr>
-            <p:ph type="title"/>
-          </p:nvPr>
-        </p:nvSpPr>
-        <p:spPr/>
-        <p:txBody>
-          <a:bodyPr/>
-          <a:lstStyle/>
-          <a:p>
-            <a:pPr lvl="0" indent="0" marL="0">
-              <a:buNone/>
-            </a:pPr>
-            <a:r>
-              <a:rPr/>
-              <a:t>The two-minute report</a:t>
-            </a:r>
-          </a:p>
-        </p:txBody>
-      </p:sp>
-      <p:sp>
-        <p:nvSpPr>
-          <p:cNvPr id="3" name="Content Placeholder 2"/>
-          <p:cNvSpPr>
-            <a:spLocks noGrp="1"/>
-          </p:cNvSpPr>
-          <p:nvPr>
-            <p:ph idx="1"/>
-          </p:nvPr>
-        </p:nvSpPr>
-        <p:spPr/>
-        <p:txBody>
-          <a:bodyPr/>
-          <a:lstStyle/>
-          <a:p>
-            <a:pPr lvl="0" indent="0" marL="0">
-              <a:buNone/>
-            </a:pPr>
-            <a:r>
-              <a:rPr b="1"/>
-              <a:t>One slide. Three sentences.</a:t>
-            </a:r>
-          </a:p>
-          <a:p>
-            <a:pPr lvl="0" indent="-342900" marL="342900">
-              <a:buAutoNum type="arabicPeriod"/>
-            </a:pPr>
-            <a:r>
-              <a:rPr b="1"/>
-              <a:t>What I did</a:t>
-            </a:r>
-            <a:r>
-              <a:rPr/>
-              <a:t> — the specification, and what you clustered on</a:t>
-            </a:r>
-          </a:p>
-          <a:p>
-            <a:pPr lvl="0" indent="-342900" marL="342900">
-              <a:buAutoNum type="arabicPeriod"/>
-            </a:pPr>
-            <a:r>
-              <a:rPr b="1"/>
-              <a:t>The number</a:t>
-            </a:r>
-            <a:r>
-              <a:rPr/>
-              <a:t> — with its interval</a:t>
-            </a:r>
-          </a:p>
-          <a:p>
-            <a:pPr lvl="0" indent="-342900" marL="342900">
-              <a:buAutoNum type="arabicPeriod"/>
-            </a:pPr>
-            <a:r>
-              <a:rPr b="1"/>
-              <a:t>The catch</a:t>
-            </a:r>
-            <a:r>
-              <a:rPr/>
-              <a:t> — the confounder you could not rule out, and its direction</a:t>
-            </a:r>
-          </a:p>
-          <a:p>
-            <a:pPr lvl="0" indent="0" marL="0">
-              <a:buNone/>
-            </a:pPr>
-            <a:r>
-              <a:rPr/>
-              <a:t>Full brief: </a:t>
-            </a:r>
-            <a:r>
-              <a:rPr>
-                <a:hlinkClick r:id="rId2"/>
-                <a:latin typeface="Courier"/>
-              </a:rPr>
-              <a:t>02-practice/README.md</a:t>
-            </a:r>
-          </a:p>
-        </p:txBody>
-      </p:sp>
-    </p:spTree>
-  </p:cSld>
-</p:sld>
-</file>
-
-<file path=ppt/slides/slide3.xml><?xml version="1.0" encoding="utf-8"?>
-<p:sld xmlns:a="http://schemas.openxmlformats.org/drawingml/2006/main" xmlns:r="http://schemas.openxmlformats.org/officeDocument/2006/relationships" xmlns:p="http://schemas.openxmlformats.org/presentationml/2006/main">
-  <p:cSld>
-    <p:spTree>
-      <p:nvGrpSpPr>
-        <p:cNvPr id="1" name=""/>
-        <p:cNvGrpSpPr/>
-        <p:nvPr/>
-      </p:nvGrpSpPr>
-      <p:grpSpPr>
-        <a:xfrm>
-          <a:off x="0" y="0"/>
-          <a:ext cx="0" cy="0"/>
-          <a:chOff x="0" y="0"/>
-          <a:chExt cx="0" cy="0"/>
-        </a:xfrm>
-      </p:grpSpPr>
-      <p:sp>
-        <p:nvSpPr>
-          <p:cNvPr id="2" name="Title 1"/>
-          <p:cNvSpPr>
-            <a:spLocks noGrp="1"/>
-          </p:cNvSpPr>
-          <p:nvPr>
-            <p:ph type="title"/>
-          </p:nvPr>
-        </p:nvSpPr>
-        <p:spPr/>
-        <p:txBody>
-          <a:bodyPr/>
-          <a:lstStyle/>
-          <a:p>
-            <a:pPr lvl="0" indent="0" marL="0">
-              <a:buNone/>
-            </a:pPr>
-            <a:r>
-              <a:rPr/>
-              <a:t>These slides follow the notes</a:t>
-            </a:r>
-          </a:p>
-        </p:txBody>
-      </p:sp>
-      <p:graphicFrame>
-        <p:nvGraphicFramePr>
-          <p:cNvPr id="6" name="Content Placeholder 5"/>
-          <p:cNvGraphicFramePr>
-            <a:graphicFrameLocks noGrp="1"/>
-          </p:cNvGraphicFramePr>
-          <p:nvPr>
-            <p:ph idx="1"/>
-          </p:nvPr>
-        </p:nvGraphicFramePr>
-        <p:xfrm>
-          <a:off x="457200" y="1193800"/>
-          <a:ext cx="8229600" cy="3390900"/>
-        </p:xfrm>
-        <a:graphic>
-          <a:graphicData uri="http://schemas.openxmlformats.org/drawingml/2006/table">
-            <a:tbl>
-              <a:tblPr firstRow="0" bandRow="1">
-                <a:tableStyleId>{5C22544A-7EE6-4342-B048-85BDC9FD1C3A}</a:tableStyleId>
-              </a:tblPr>
-              <a:tblGrid>
-                <a:gridCol w="4114800"/>
-                <a:gridCol w="4114800"/>
-              </a:tblGrid>
-              <a:tr h="0">
-                <a:tc>
-                  <a:txBody>
-                    <a:bodyPr/>
-                    <a:lstStyle/>
-                    <a:p>
-                      <a:pPr lvl="0" indent="0" marL="0">
-                        <a:buNone/>
-                      </a:pPr>
-                      <a:r>
-                        <a:rPr b="1"/>
-                        <a:t>3.1</a:t>
-                      </a:r>
-                    </a:p>
-                  </a:txBody>
-                </a:tc>
-                <a:tc>
-                  <a:txBody>
-                    <a:bodyPr/>
-                    <a:lstStyle/>
-                    <a:p>
-                      <a:pPr lvl="0" indent="0" marL="0">
-                        <a:buNone/>
-                      </a:pPr>
-                      <a:r>
-                        <a:rPr/>
-                        <a:t>Sampling distribution of the OLS estimator</a:t>
-                      </a:r>
-                    </a:p>
-                  </a:txBody>
-                </a:tc>
-              </a:tr>
-              <a:tr h="0">
-                <a:tc>
-                  <a:txBody>
-                    <a:bodyPr/>
-                    <a:lstStyle/>
-                    <a:p>
-                      <a:pPr lvl="0" indent="0" marL="0">
-                        <a:buNone/>
-                      </a:pPr>
-                      <a:r>
-                        <a:rPr b="1"/>
-                        <a:t>3.2</a:t>
-                      </a:r>
-                    </a:p>
-                  </a:txBody>
-                </a:tc>
-                <a:tc>
-                  <a:txBody>
-                    <a:bodyPr/>
-                    <a:lstStyle/>
-                    <a:p>
-                      <a:pPr lvl="0" indent="0" marL="0">
-                        <a:buNone/>
-                      </a:pPr>
-                      <a:r>
-                        <a:rPr/>
-                        <a:t>Gauss–Markov</a:t>
-                      </a:r>
-                    </a:p>
-                  </a:txBody>
-                </a:tc>
-              </a:tr>
-              <a:tr h="0">
-                <a:tc>
-                  <a:txBody>
-                    <a:bodyPr/>
-                    <a:lstStyle/>
-                    <a:p>
-                      <a:pPr lvl="0" indent="0" marL="0">
-                        <a:buNone/>
-                      </a:pPr>
-                      <a:r>
-                        <a:rPr b="1"/>
-                        <a:t>3.3</a:t>
-                      </a:r>
-                    </a:p>
-                  </a:txBody>
-                </a:tc>
-                <a:tc>
-                  <a:txBody>
-                    <a:bodyPr/>
-                    <a:lstStyle/>
-                    <a:p>
-                      <a:pPr lvl="0" indent="0" marL="0">
-                        <a:buNone/>
-                      </a:pPr>
-                      <a:r>
-                        <a:rPr/>
-                        <a:t>When assumption 4 fails</a:t>
-                      </a:r>
-                    </a:p>
-                  </a:txBody>
-                </a:tc>
-              </a:tr>
-              <a:tr h="0">
-                <a:tc>
-                  <a:txBody>
-                    <a:bodyPr/>
-                    <a:lstStyle/>
-                    <a:p>
-                      <a:pPr lvl="0" indent="0" marL="0">
-                        <a:buNone/>
-                      </a:pPr>
-                      <a:r>
-                        <a:rPr b="1"/>
-                        <a:t>3.4</a:t>
-                      </a:r>
-                    </a:p>
-                  </a:txBody>
-                </a:tc>
-                <a:tc>
-                  <a:txBody>
-                    <a:bodyPr/>
-                    <a:lstStyle/>
-                    <a:p>
-                      <a:pPr lvl="0" indent="0" marL="0">
-                        <a:buNone/>
-                      </a:pPr>
-                      <a:r>
-                        <a:rPr/>
-                        <a:t>Omitted variable bias</a:t>
-                      </a:r>
-                    </a:p>
-                  </a:txBody>
-                </a:tc>
-              </a:tr>
-              <a:tr h="0">
-                <a:tc>
-                  <a:txBody>
-                    <a:bodyPr/>
-                    <a:lstStyle/>
-                    <a:p>
-                      <a:pPr lvl="0" indent="0" marL="0">
-                        <a:buNone/>
-                      </a:pPr>
-                      <a:r>
-                        <a:rPr b="1"/>
-                        <a:t>3.5</a:t>
-                      </a:r>
-                    </a:p>
-                  </a:txBody>
-                </a:tc>
-                <a:tc>
-                  <a:txBody>
-                    <a:bodyPr/>
-                    <a:lstStyle/>
-                    <a:p>
-                      <a:pPr lvl="0" indent="0" marL="0">
-                        <a:buNone/>
-                      </a:pPr>
-                      <a:r>
-                        <a:rPr/>
-                        <a:t>What a Mincer coefficient identifies</a:t>
-                      </a:r>
-                    </a:p>
-                  </a:txBody>
-                </a:tc>
-              </a:tr>
-            </a:tbl>
-          </a:graphicData>
-        </a:graphic>
-      </p:graphicFrame>
-    </p:spTree>
-  </p:cSld>
-</p:sld>
-</file>
-
-<file path=ppt/slides/slide4.xml><?xml version="1.0" encoding="utf-8"?>
-<p:sld xmlns:a="http://schemas.openxmlformats.org/drawingml/2006/main" xmlns:r="http://schemas.openxmlformats.org/officeDocument/2006/relationships" xmlns:p="http://schemas.openxmlformats.org/presentationml/2006/main">
-  <p:cSld>
-    <p:spTree>
-      <p:nvGrpSpPr>
-        <p:cNvPr id="1" name=""/>
-        <p:cNvGrpSpPr/>
-        <p:nvPr/>
-      </p:nvGrpSpPr>
-      <p:grpSpPr>
-        <a:xfrm>
-          <a:off x="0" y="0"/>
-          <a:ext cx="0" cy="0"/>
-          <a:chOff x="0" y="0"/>
-          <a:chExt cx="0" cy="0"/>
-        </a:xfrm>
-      </p:grpSpPr>
-      <p:sp>
-        <p:nvSpPr>
-          <p:cNvPr id="3" name="Content Placeholder 2"/>
-          <p:cNvSpPr>
-            <a:spLocks noGrp="1"/>
-          </p:cNvSpPr>
-          <p:nvPr>
-            <p:ph idx="1"/>
-          </p:nvPr>
-        </p:nvSpPr>
-        <p:spPr/>
-        <p:txBody>
-          <a:bodyPr/>
-          <a:lstStyle/>
-          <a:p>
-            <a:pPr lvl="0" indent="0" marL="0">
-              <a:buNone/>
-            </a:pPr>
-            <a:r>
-              <a:rPr/>
-              <a:t>Same numbering and notation as </a:t>
-            </a:r>
-            <a:r>
-              <a:rPr>
-                <a:hlinkClick r:id="rId2"/>
-                <a:latin typeface="Courier"/>
-              </a:rPr>
-              <a:t>01-lecture/README.md</a:t>
-            </a:r>
-            <a:r>
-              <a:rPr/>
-              <a:t>.</a:t>
-            </a:r>
-          </a:p>
-        </p:txBody>
-      </p:sp>
-    </p:spTree>
-  </p:cSld>
-</p:sld>
-</file>
-
-<file path=ppt/slides/slide5.xml><?xml version="1.0" encoding="utf-8"?>
-<p:sld xmlns:a="http://schemas.openxmlformats.org/drawingml/2006/main" xmlns:r="http://schemas.openxmlformats.org/officeDocument/2006/relationships" xmlns:p="http://schemas.openxmlformats.org/presentationml/2006/main">
-  <p:cSld>
-    <p:spTree>
-      <p:nvGrpSpPr>
-        <p:cNvPr id="1" name=""/>
-        <p:cNvGrpSpPr/>
-        <p:nvPr/>
-      </p:nvGrpSpPr>
-      <p:grpSpPr>
-        <a:xfrm>
-          <a:off x="0" y="0"/>
-          <a:ext cx="0" cy="0"/>
-          <a:chOff x="0" y="0"/>
-          <a:chExt cx="0" cy="0"/>
-        </a:xfrm>
-      </p:grpSpPr>
-      <p:sp>
-        <p:nvSpPr>
-          <p:cNvPr id="2" name="Title 1"/>
-          <p:cNvSpPr>
-            <a:spLocks noGrp="1"/>
-          </p:cNvSpPr>
-          <p:nvPr>
-            <p:ph type="title"/>
-          </p:nvPr>
-        </p:nvSpPr>
-        <p:spPr>
-          <a:xfrm>
-            <a:off x="722313" y="3305176"/>
-            <a:ext cx="7772400" cy="1021556"/>
-          </a:xfrm>
-        </p:spPr>
-        <p:txBody>
-          <a:bodyPr/>
-          <a:lstStyle/>
-          <a:p>
-            <a:pPr lvl="0" indent="0" marL="0">
-              <a:buNone/>
-            </a:pPr>
-            <a:r>
-              <a:rPr/>
-              <a:t>3.1 Sampling distribution</a:t>
-            </a:r>
-          </a:p>
-        </p:txBody>
-      </p:sp>
-    </p:spTree>
-  </p:cSld>
-</p:sld>
-</file>
-
-<file path=ppt/slides/slide6.xml><?xml version="1.0" encoding="utf-8"?>
 <p:sld xmlns:a="http://schemas.openxmlformats.org/drawingml/2006/main" xmlns:r="http://schemas.openxmlformats.org/officeDocument/2006/relationships" xmlns:p="http://schemas.openxmlformats.org/presentationml/2006/main">
   <p:cSld>
     <p:spTree>
@@ -7048,7 +3581,15 @@
                 </a:pPr>
                 <a:r>
                   <a:rPr/>
-                  <a:t>Everything that follows depends only on what you are willing to assume about </a:t>
+                  <a:t>Truth, plus a term that is pure noise. Everything that follows depends </a:t>
+                </a:r>
+                <a:r>
+                  <a:rPr b="1"/>
+                  <a:t>only</a:t>
+                </a:r>
+                <a:r>
+                  <a:rPr/>
+                  <a:t> on what you are willing to assume about </a:t>
                 </a:r>
                 <a14:m>
                   <m:oMath xmlns:m="http://schemas.openxmlformats.org/officeDocument/2006/math">
@@ -7071,7 +3612,7 @@
 </p:sld>
 </file>
 
-<file path=ppt/slides/slide7.xml><?xml version="1.0" encoding="utf-8"?>
+<file path=ppt/slides/slide11.xml><?xml version="1.0" encoding="utf-8"?>
 <p:sld xmlns:a="http://schemas.openxmlformats.org/drawingml/2006/main" xmlns:r="http://schemas.openxmlformats.org/officeDocument/2006/relationships" xmlns:p="http://schemas.openxmlformats.org/presentationml/2006/main">
   <p:cSld>
     <p:spTree>
@@ -7108,7 +3649,7 @@
             </a:pPr>
             <a:r>
               <a:rPr/>
-              <a:t>Unbiasedness</a:t>
+              <a:t>Unbiasedness is cheap</a:t>
             </a:r>
           </a:p>
         </p:txBody>
@@ -7321,7 +3862,7 @@
                 </a:r>
                 <a:r>
                   <a:rPr/>
-                  <a:t> needed: no homoskedasticity, no normality, no independence.</a:t>
+                  <a:t> needed: no homoskedasticity, no normality, no independence. Unbiasedness is a weak requirement — which is why it is a weak reassurance.</a:t>
                 </a:r>
               </a:p>
             </p:txBody>
@@ -7333,7 +3874,7 @@
 </p:sld>
 </file>
 
-<file path=ppt/slides/slide8.xml><?xml version="1.0" encoding="utf-8"?>
+<file path=ppt/slides/slide12.xml><?xml version="1.0" encoding="utf-8"?>
 <p:sld xmlns:a="http://schemas.openxmlformats.org/drawingml/2006/main" xmlns:r="http://schemas.openxmlformats.org/officeDocument/2006/relationships" xmlns:p="http://schemas.openxmlformats.org/presentationml/2006/main">
   <p:cSld>
     <p:spTree>
@@ -7370,7 +3911,7 @@
             </a:pPr>
             <a:r>
               <a:rPr/>
-              <a:t>Variance, under homoskedasticity</a:t>
+              <a:t>The variance, and its four levers</a:t>
             </a:r>
           </a:p>
         </p:txBody>
@@ -7395,348 +3936,9 @@
                 <a:pPr lvl="0" indent="0" marL="0">
                   <a:buNone/>
                 </a:pPr>
-                <a14:m>
-                  <m:oMathPara xmlns:m="http://schemas.openxmlformats.org/officeDocument/2006/math">
-                    <m:oMathParaPr>
-                      <m:jc m:val="center"/>
-                    </m:oMathParaPr>
-                    <m:oMath>
-                      <m:r>
-                        <m:rPr>
-                          <m:sty m:val="p"/>
-                        </m:rPr>
-                        <m:t>V</m:t>
-                      </m:r>
-                      <m:r>
-                        <m:rPr>
-                          <m:sty m:val="p"/>
-                        </m:rPr>
-                        <m:t>a</m:t>
-                      </m:r>
-                      <m:r>
-                        <m:rPr>
-                          <m:sty m:val="p"/>
-                        </m:rPr>
-                        <m:t>r</m:t>
-                      </m:r>
-                      <m:d>
-                        <m:dPr>
-                          <m:begChr m:val="("/>
-                          <m:sepChr m:val=""/>
-                          <m:endChr m:val=")"/>
-                          <m:grow/>
-                        </m:dPr>
-                        <m:e>
-                          <m:acc>
-                            <m:accPr>
-                              <m:chr m:val="̂"/>
-                            </m:accPr>
-                            <m:e>
-                              <m:r>
-                                <m:t>β</m:t>
-                              </m:r>
-                            </m:e>
-                          </m:acc>
-                          <m:r>
-                            <m:rPr>
-                              <m:sty m:val="p"/>
-                            </m:rPr>
-                            <m:t>∣</m:t>
-                          </m:r>
-                          <m:r>
-                            <m:t>X</m:t>
-                          </m:r>
-                        </m:e>
-                      </m:d>
-                      <m:r>
-                        <m:rPr>
-                          <m:sty m:val="p"/>
-                        </m:rPr>
-                        <m:t>=</m:t>
-                      </m:r>
-                      <m:sSup>
-                        <m:e>
-                          <m:d>
-                            <m:dPr>
-                              <m:begChr m:val="("/>
-                              <m:sepChr m:val=""/>
-                              <m:endChr m:val=")"/>
-                              <m:grow/>
-                            </m:dPr>
-                            <m:e>
-                              <m:sSup>
-                                <m:e>
-                                  <m:r>
-                                    <m:t>X</m:t>
-                                  </m:r>
-                                </m:e>
-                                <m:sup>
-                                  <m:r>
-                                    <m:rPr>
-                                      <m:sty m:val="p"/>
-                                    </m:rPr>
-                                    <m:t>⊤</m:t>
-                                  </m:r>
-                                </m:sup>
-                              </m:sSup>
-                              <m:r>
-                                <m:t>X</m:t>
-                              </m:r>
-                            </m:e>
-                          </m:d>
-                        </m:e>
-                        <m:sup>
-                          <m:r>
-                            <m:rPr>
-                              <m:sty m:val="p"/>
-                            </m:rPr>
-                            <m:t>−</m:t>
-                          </m:r>
-                          <m:r>
-                            <m:t>1</m:t>
-                          </m:r>
-                        </m:sup>
-                      </m:sSup>
-                      <m:sSup>
-                        <m:e>
-                          <m:r>
-                            <m:t>X</m:t>
-                          </m:r>
-                        </m:e>
-                        <m:sup>
-                          <m:r>
-                            <m:rPr>
-                              <m:sty m:val="p"/>
-                            </m:rPr>
-                            <m:t>⊤</m:t>
-                          </m:r>
-                        </m:sup>
-                      </m:sSup>
-                      <m:r>
-                        <m:rPr>
-                          <m:sty m:val="p"/>
-                        </m:rPr>
-                        <m:t>V</m:t>
-                      </m:r>
-                      <m:r>
-                        <m:rPr>
-                          <m:sty m:val="p"/>
-                        </m:rPr>
-                        <m:t>a</m:t>
-                      </m:r>
-                      <m:r>
-                        <m:rPr>
-                          <m:sty m:val="p"/>
-                        </m:rPr>
-                        <m:t>r</m:t>
-                      </m:r>
-                      <m:d>
-                        <m:dPr>
-                          <m:begChr m:val="("/>
-                          <m:sepChr m:val=""/>
-                          <m:endChr m:val=")"/>
-                          <m:grow/>
-                        </m:dPr>
-                        <m:e>
-                          <m:r>
-                            <m:t>ε</m:t>
-                          </m:r>
-                          <m:r>
-                            <m:rPr>
-                              <m:sty m:val="p"/>
-                            </m:rPr>
-                            <m:t>∣</m:t>
-                          </m:r>
-                          <m:r>
-                            <m:t>X</m:t>
-                          </m:r>
-                        </m:e>
-                      </m:d>
-                      <m:r>
-                        <m:t>X</m:t>
-                      </m:r>
-                      <m:sSup>
-                        <m:e>
-                          <m:d>
-                            <m:dPr>
-                              <m:begChr m:val="("/>
-                              <m:sepChr m:val=""/>
-                              <m:endChr m:val=")"/>
-                              <m:grow/>
-                            </m:dPr>
-                            <m:e>
-                              <m:sSup>
-                                <m:e>
-                                  <m:r>
-                                    <m:t>X</m:t>
-                                  </m:r>
-                                </m:e>
-                                <m:sup>
-                                  <m:r>
-                                    <m:rPr>
-                                      <m:sty m:val="p"/>
-                                    </m:rPr>
-                                    <m:t>⊤</m:t>
-                                  </m:r>
-                                </m:sup>
-                              </m:sSup>
-                              <m:r>
-                                <m:t>X</m:t>
-                              </m:r>
-                            </m:e>
-                          </m:d>
-                        </m:e>
-                        <m:sup>
-                          <m:r>
-                            <m:rPr>
-                              <m:sty m:val="p"/>
-                            </m:rPr>
-                            <m:t>−</m:t>
-                          </m:r>
-                          <m:r>
-                            <m:t>1</m:t>
-                          </m:r>
-                        </m:sup>
-                      </m:sSup>
-                      <m:r>
-                        <m:rPr>
-                          <m:sty m:val="p"/>
-                        </m:rPr>
-                        <m:t>=</m:t>
-                      </m:r>
-                      <m:sSup>
-                        <m:e>
-                          <m:r>
-                            <m:t>σ</m:t>
-                          </m:r>
-                        </m:e>
-                        <m:sup>
-                          <m:r>
-                            <m:t>2</m:t>
-                          </m:r>
-                        </m:sup>
-                      </m:sSup>
-                      <m:sSup>
-                        <m:e>
-                          <m:d>
-                            <m:dPr>
-                              <m:begChr m:val="("/>
-                              <m:sepChr m:val=""/>
-                              <m:endChr m:val=")"/>
-                              <m:grow/>
-                            </m:dPr>
-                            <m:e>
-                              <m:sSup>
-                                <m:e>
-                                  <m:r>
-                                    <m:t>X</m:t>
-                                  </m:r>
-                                </m:e>
-                                <m:sup>
-                                  <m:r>
-                                    <m:rPr>
-                                      <m:sty m:val="p"/>
-                                    </m:rPr>
-                                    <m:t>⊤</m:t>
-                                  </m:r>
-                                </m:sup>
-                              </m:sSup>
-                              <m:r>
-                                <m:t>X</m:t>
-                              </m:r>
-                            </m:e>
-                          </m:d>
-                        </m:e>
-                        <m:sup>
-                          <m:r>
-                            <m:rPr>
-                              <m:sty m:val="p"/>
-                            </m:rPr>
-                            <m:t>−</m:t>
-                          </m:r>
-                          <m:r>
-                            <m:t>1</m:t>
-                          </m:r>
-                        </m:sup>
-                      </m:sSup>
-                    </m:oMath>
-                  </m:oMathPara>
-                </a14:m>
-              </a:p>
-            </p:txBody>
-          </p:sp>
-        </mc:Choice>
-      </mc:AlternateContent>
-    </p:spTree>
-  </p:cSld>
-</p:sld>
-</file>
-
-<file path=ppt/slides/slide9.xml><?xml version="1.0" encoding="utf-8"?>
-<p:sld xmlns:a="http://schemas.openxmlformats.org/drawingml/2006/main" xmlns:r="http://schemas.openxmlformats.org/officeDocument/2006/relationships" xmlns:p="http://schemas.openxmlformats.org/presentationml/2006/main">
-  <p:cSld>
-    <p:spTree>
-      <p:nvGrpSpPr>
-        <p:cNvPr id="1" name=""/>
-        <p:cNvGrpSpPr/>
-        <p:nvPr/>
-      </p:nvGrpSpPr>
-      <p:grpSpPr>
-        <a:xfrm>
-          <a:off x="0" y="0"/>
-          <a:ext cx="0" cy="0"/>
-          <a:chOff x="0" y="0"/>
-          <a:chExt cx="0" cy="0"/>
-        </a:xfrm>
-      </p:grpSpPr>
-      <p:sp>
-        <p:nvSpPr>
-          <p:cNvPr id="2" name="Title 1"/>
-          <p:cNvSpPr>
-            <a:spLocks noGrp="1"/>
-          </p:cNvSpPr>
-          <p:nvPr>
-            <p:ph type="title"/>
-          </p:nvPr>
-        </p:nvSpPr>
-        <p:spPr/>
-        <p:txBody>
-          <a:bodyPr/>
-          <a:lstStyle/>
-          <a:p>
-            <a:pPr lvl="0" indent="0" marL="0">
-              <a:buNone/>
-            </a:pPr>
-            <a:r>
-              <a:rPr/>
-              <a:t>The form worth memorising</a:t>
-            </a:r>
-          </a:p>
-        </p:txBody>
-      </p:sp>
-      <mc:AlternateContent xmlns:mc="http://schemas.openxmlformats.org/markup-compatibility/2006">
-        <mc:Choice xmlns:a14="http://schemas.microsoft.com/office/drawing/2010/main" Requires="a14">
-          <p:sp>
-            <p:nvSpPr>
-              <p:cNvPr id="3" name="Content Placeholder 2"/>
-              <p:cNvSpPr>
-                <a:spLocks noGrp="1"/>
-              </p:cNvSpPr>
-              <p:nvPr>
-                <p:ph idx="1"/>
-              </p:nvPr>
-            </p:nvSpPr>
-            <p:spPr/>
-            <p:txBody>
-              <a:bodyPr/>
-              <a:lstStyle/>
-              <a:p>
-                <a:pPr lvl="0" indent="0" marL="0">
-                  <a:buNone/>
-                </a:pPr>
                 <a:r>
                   <a:rPr/>
-                  <a:t>For a single coefficient:</a:t>
+                  <a:t>Under homoskedasticity, for one coefficient:</a:t>
                 </a:r>
               </a:p>
               <a:p>
@@ -7919,44 +4121,13 @@
                 </a14:m>
               </a:p>
               <a:p>
-                <a:pPr lvl="0" indent="0" marL="0">
-                  <a:buNone/>
-                </a:pPr>
-                <a:r>
-                  <a:rPr/>
-                  <a:t>where </a:t>
-                </a:r>
-                <a14:m>
-                  <m:oMath xmlns:m="http://schemas.openxmlformats.org/officeDocument/2006/math">
-                    <m:sSubSup>
-                      <m:e>
-                        <m:r>
-                          <m:t>R</m:t>
-                        </m:r>
-                      </m:e>
-                      <m:sub>
-                        <m:r>
-                          <m:t>j</m:t>
-                        </m:r>
-                      </m:sub>
-                      <m:sup>
-                        <m:r>
-                          <m:t>2</m:t>
-                        </m:r>
-                      </m:sup>
-                    </m:sSubSup>
-                  </m:oMath>
-                </a14:m>
-                <a:r>
-                  <a:rPr/>
-                  <a:t> is the </a:t>
-                </a:r>
+                <a:pPr lvl="0"/>
                 <a14:m>
                   <m:oMath xmlns:m="http://schemas.openxmlformats.org/officeDocument/2006/math">
                     <m:sSup>
                       <m:e>
                         <m:r>
-                          <m:t>R</m:t>
+                          <m:t>σ</m:t>
                         </m:r>
                       </m:e>
                       <m:sup>
@@ -7969,19 +4140,2105 @@
                 </a14:m>
                 <a:r>
                   <a:rPr/>
-                  <a:t> from regressing </a:t>
+                  <a:t> — </a:t>
+                </a:r>
+                <a:r>
+                  <a:rPr b="1"/>
+                  <a:t>noise</a:t>
+                </a:r>
+                <a:r>
+                  <a:rPr/>
+                  <a:t> you cannot reduce</a:t>
+                </a:r>
+              </a:p>
+              <a:p>
+                <a:pPr lvl="0"/>
+                <a14:m>
+                  <m:oMath xmlns:m="http://schemas.openxmlformats.org/officeDocument/2006/math">
+                    <m:r>
+                      <m:t>n</m:t>
+                    </m:r>
+                  </m:oMath>
+                </a14:m>
+                <a:r>
+                  <a:rPr/>
+                  <a:t> — </a:t>
+                </a:r>
+                <a:r>
+                  <a:rPr b="1"/>
+                  <a:t>sample size</a:t>
+                </a:r>
+              </a:p>
+              <a:p>
+                <a:pPr lvl="0"/>
+                <a14:m>
+                  <m:oMath xmlns:m="http://schemas.openxmlformats.org/officeDocument/2006/math">
+                    <m:r>
+                      <m:rPr>
+                        <m:sty m:val="p"/>
+                      </m:rPr>
+                      <m:t>V</m:t>
+                    </m:r>
+                    <m:r>
+                      <m:rPr>
+                        <m:sty m:val="p"/>
+                      </m:rPr>
+                      <m:t>a</m:t>
+                    </m:r>
+                    <m:r>
+                      <m:rPr>
+                        <m:sty m:val="p"/>
+                      </m:rPr>
+                      <m:t>r</m:t>
+                    </m:r>
+                    <m:d>
+                      <m:dPr>
+                        <m:begChr m:val="("/>
+                        <m:sepChr m:val=""/>
+                        <m:endChr m:val=")"/>
+                        <m:grow/>
+                      </m:dPr>
+                      <m:e>
+                        <m:sSub>
+                          <m:e>
+                            <m:r>
+                              <m:t>x</m:t>
+                            </m:r>
+                          </m:e>
+                          <m:sub>
+                            <m:r>
+                              <m:t>j</m:t>
+                            </m:r>
+                          </m:sub>
+                        </m:sSub>
+                      </m:e>
+                    </m:d>
+                  </m:oMath>
+                </a14:m>
+                <a:r>
+                  <a:rPr/>
+                  <a:t> — </a:t>
+                </a:r>
+                <a:r>
+                  <a:rPr b="1"/>
+                  <a:t>variation in the regressor</a:t>
+                </a:r>
+                <a:r>
+                  <a:rPr/>
+                  <a:t>: no variation, no estimate</a:t>
+                </a:r>
+              </a:p>
+              <a:p>
+                <a:pPr lvl="0"/>
+                <a14:m>
+                  <m:oMath xmlns:m="http://schemas.openxmlformats.org/officeDocument/2006/math">
+                    <m:r>
+                      <m:t>1</m:t>
+                    </m:r>
+                    <m:r>
+                      <m:rPr>
+                        <m:sty m:val="p"/>
+                      </m:rPr>
+                      <m:t>/</m:t>
+                    </m:r>
+                    <m:d>
+                      <m:dPr>
+                        <m:begChr m:val="("/>
+                        <m:sepChr m:val=""/>
+                        <m:endChr m:val=")"/>
+                        <m:grow/>
+                      </m:dPr>
+                      <m:e>
+                        <m:r>
+                          <m:t>1</m:t>
+                        </m:r>
+                        <m:r>
+                          <m:rPr>
+                            <m:sty m:val="p"/>
+                          </m:rPr>
+                          <m:t>−</m:t>
+                        </m:r>
+                        <m:sSubSup>
+                          <m:e>
+                            <m:r>
+                              <m:t>R</m:t>
+                            </m:r>
+                          </m:e>
+                          <m:sub>
+                            <m:r>
+                              <m:t>j</m:t>
+                            </m:r>
+                          </m:sub>
+                          <m:sup>
+                            <m:r>
+                              <m:t>2</m:t>
+                            </m:r>
+                          </m:sup>
+                        </m:sSubSup>
+                      </m:e>
+                    </m:d>
+                  </m:oMath>
+                </a14:m>
+                <a:r>
+                  <a:rPr/>
+                  <a:t> — </a:t>
+                </a:r>
+                <a:r>
+                  <a:rPr b="1"/>
+                  <a:t>redundancy</a:t>
+                </a:r>
+                <a:r>
+                  <a:rPr/>
+                  <a:t>, the variance inflation factor</a:t>
+                </a:r>
+              </a:p>
+            </p:txBody>
+          </p:sp>
+        </mc:Choice>
+      </mc:AlternateContent>
+    </p:spTree>
+  </p:cSld>
+</p:sld>
+</file>
+
+<file path=ppt/slides/slide13.xml><?xml version="1.0" encoding="utf-8"?>
+<p:sld xmlns:a="http://schemas.openxmlformats.org/drawingml/2006/main" xmlns:r="http://schemas.openxmlformats.org/officeDocument/2006/relationships" xmlns:p="http://schemas.openxmlformats.org/presentationml/2006/main">
+  <p:cSld>
+    <p:spTree>
+      <p:nvGrpSpPr>
+        <p:cNvPr id="1" name=""/>
+        <p:cNvGrpSpPr/>
+        <p:nvPr/>
+      </p:nvGrpSpPr>
+      <p:grpSpPr>
+        <a:xfrm>
+          <a:off x="0" y="0"/>
+          <a:ext cx="0" cy="0"/>
+          <a:chOff x="0" y="0"/>
+          <a:chExt cx="0" cy="0"/>
+        </a:xfrm>
+      </p:grpSpPr>
+      <p:sp>
+        <p:nvSpPr>
+          <p:cNvPr id="2" name="Title 1"/>
+          <p:cNvSpPr>
+            <a:spLocks noGrp="1"/>
+          </p:cNvSpPr>
+          <p:nvPr>
+            <p:ph type="title"/>
+          </p:nvPr>
+        </p:nvSpPr>
+        <p:spPr/>
+        <p:txBody>
+          <a:bodyPr/>
+          <a:lstStyle/>
+          <a:p>
+            <a:pPr lvl="0" indent="0" marL="0">
+              <a:buNone/>
+            </a:pPr>
+            <a:r>
+              <a:rPr/>
+              <a:t>What redundancy costs</a:t>
+            </a:r>
+          </a:p>
+        </p:txBody>
+      </p:sp>
+      <p:pic>
+        <p:nvPicPr>
+          <p:cNvPr descr="slides_files/figure-pptx/cell-3-output-1.png" id="0" name="Picture 1"/>
+          <p:cNvPicPr>
+            <a:picLocks noGrp="1" noChangeAspect="1"/>
+          </p:cNvPicPr>
+          <p:nvPr/>
+        </p:nvPicPr>
+        <p:blipFill>
+          <a:blip r:embed="rId2"/>
+          <a:stretch>
+            <a:fillRect/>
+          </a:stretch>
+        </p:blipFill>
+        <p:spPr bwMode="auto">
+          <a:xfrm>
+            <a:off x="508000" y="1193800"/>
+            <a:ext cx="8115300" cy="3390900"/>
+          </a:xfrm>
+          <a:prstGeom prst="rect">
+            <a:avLst/>
+          </a:prstGeom>
+          <a:noFill/>
+          <a:ln w="9525">
+            <a:noFill/>
+            <a:headEnd/>
+            <a:tailEnd/>
+          </a:ln>
+        </p:spPr>
+      </p:pic>
+    </p:spTree>
+  </p:cSld>
+</p:sld>
+</file>
+
+<file path=ppt/slides/slide14.xml><?xml version="1.0" encoding="utf-8"?>
+<p:sld xmlns:a="http://schemas.openxmlformats.org/drawingml/2006/main" xmlns:r="http://schemas.openxmlformats.org/officeDocument/2006/relationships" xmlns:p="http://schemas.openxmlformats.org/presentationml/2006/main">
+  <p:cSld>
+    <p:spTree>
+      <p:nvGrpSpPr>
+        <p:cNvPr id="1" name=""/>
+        <p:cNvGrpSpPr/>
+        <p:nvPr/>
+      </p:nvGrpSpPr>
+      <p:grpSpPr>
+        <a:xfrm>
+          <a:off x="0" y="0"/>
+          <a:ext cx="0" cy="0"/>
+          <a:chOff x="0" y="0"/>
+          <a:chExt cx="0" cy="0"/>
+        </a:xfrm>
+      </p:grpSpPr>
+      <p:sp>
+        <p:nvSpPr>
+          <p:cNvPr id="3" name="Content Placeholder 2"/>
+          <p:cNvSpPr>
+            <a:spLocks noGrp="1"/>
+          </p:cNvSpPr>
+          <p:nvPr>
+            <p:ph idx="1"/>
+          </p:nvPr>
+        </p:nvSpPr>
+        <p:spPr/>
+        <p:txBody>
+          <a:bodyPr/>
+          <a:lstStyle/>
+          <a:p>
+            <a:pPr lvl="0" indent="0" marL="0">
+              <a:buNone/>
+            </a:pPr>
+            <a:r>
+              <a:rPr/>
+              <a:t>This is the price of collinearity — and exactly what regularisation in Session 05 proposes to pay </a:t>
+            </a:r>
+            <a:r>
+              <a:rPr b="1"/>
+              <a:t>differently</a:t>
+            </a:r>
+            <a:r>
+              <a:rPr/>
+              <a:t>.</a:t>
+            </a:r>
+          </a:p>
+        </p:txBody>
+      </p:sp>
+    </p:spTree>
+  </p:cSld>
+</p:sld>
+</file>
+
+<file path=ppt/slides/slide15.xml><?xml version="1.0" encoding="utf-8"?>
+<p:sld xmlns:a="http://schemas.openxmlformats.org/drawingml/2006/main" xmlns:r="http://schemas.openxmlformats.org/officeDocument/2006/relationships" xmlns:p="http://schemas.openxmlformats.org/presentationml/2006/main">
+  <p:cSld>
+    <p:spTree>
+      <p:nvGrpSpPr>
+        <p:cNvPr id="1" name=""/>
+        <p:cNvGrpSpPr/>
+        <p:nvPr/>
+      </p:nvGrpSpPr>
+      <p:grpSpPr>
+        <a:xfrm>
+          <a:off x="0" y="0"/>
+          <a:ext cx="0" cy="0"/>
+          <a:chOff x="0" y="0"/>
+          <a:chExt cx="0" cy="0"/>
+        </a:xfrm>
+      </p:grpSpPr>
+      <p:sp>
+        <p:nvSpPr>
+          <p:cNvPr id="2" name="Title 1"/>
+          <p:cNvSpPr>
+            <a:spLocks noGrp="1"/>
+          </p:cNvSpPr>
+          <p:nvPr>
+            <p:ph type="title"/>
+          </p:nvPr>
+        </p:nvSpPr>
+        <p:spPr>
+          <a:xfrm>
+            <a:off x="722313" y="1850000"/>
+            <a:ext cx="7772400" cy="1300000"/>
+          </a:xfrm>
+        </p:spPr>
+        <p:txBody>
+          <a:bodyPr/>
+          <a:lstStyle/>
+          <a:p>
+            <a:pPr lvl="0" indent="0" marL="0">
+              <a:buNone/>
+            </a:pPr>
+            <a:r>
+              <a:rPr/>
+              <a:t>3 · Gauss–Markov</a:t>
+            </a:r>
+          </a:p>
+        </p:txBody>
+      </p:sp>
+    </p:spTree>
+  </p:cSld>
+</p:sld>
+</file>
+
+<file path=ppt/slides/slide16.xml><?xml version="1.0" encoding="utf-8"?>
+<p:sld xmlns:a="http://schemas.openxmlformats.org/drawingml/2006/main" xmlns:r="http://schemas.openxmlformats.org/officeDocument/2006/relationships" xmlns:p="http://schemas.openxmlformats.org/presentationml/2006/main">
+  <p:cSld>
+    <p:spTree>
+      <p:nvGrpSpPr>
+        <p:cNvPr id="1" name=""/>
+        <p:cNvGrpSpPr/>
+        <p:nvPr/>
+      </p:nvGrpSpPr>
+      <p:grpSpPr>
+        <a:xfrm>
+          <a:off x="0" y="0"/>
+          <a:ext cx="0" cy="0"/>
+          <a:chOff x="0" y="0"/>
+          <a:chExt cx="0" cy="0"/>
+        </a:xfrm>
+      </p:grpSpPr>
+      <p:sp>
+        <p:nvSpPr>
+          <p:cNvPr id="2" name="Title 1"/>
+          <p:cNvSpPr>
+            <a:spLocks noGrp="1"/>
+          </p:cNvSpPr>
+          <p:nvPr>
+            <p:ph type="title"/>
+          </p:nvPr>
+        </p:nvSpPr>
+        <p:spPr/>
+        <p:txBody>
+          <a:bodyPr/>
+          <a:lstStyle/>
+          <a:p>
+            <a:pPr lvl="0" indent="0" marL="0">
+              <a:buNone/>
+            </a:pPr>
+            <a:r>
+              <a:rPr/>
+              <a:t>The theorem</a:t>
+            </a:r>
+          </a:p>
+        </p:txBody>
+      </p:sp>
+      <mc:AlternateContent xmlns:mc="http://schemas.openxmlformats.org/markup-compatibility/2006">
+        <mc:Choice xmlns:a14="http://schemas.microsoft.com/office/drawing/2010/main" Requires="a14">
+          <p:sp>
+            <p:nvSpPr>
+              <p:cNvPr id="3" name="Content Placeholder 2"/>
+              <p:cNvSpPr>
+                <a:spLocks noGrp="1"/>
+              </p:cNvSpPr>
+              <p:nvPr>
+                <p:ph idx="1"/>
+              </p:nvPr>
+            </p:nvSpPr>
+            <p:spPr/>
+            <p:txBody>
+              <a:bodyPr/>
+              <a:lstStyle/>
+              <a:p>
+                <a:pPr lvl="0" indent="0" marL="1270000">
+                  <a:buNone/>
+                </a:pPr>
+                <a:r>
+                  <a:rPr sz="2000"/>
+                  <a:t>Under assumptions 1–4, </a:t>
+                </a:r>
+                <a14:m>
+                  <m:oMath xmlns:m="http://schemas.openxmlformats.org/officeDocument/2006/math">
+                    <m:sSub>
+                      <m:e>
+                        <m:acc>
+                          <m:accPr>
+                            <m:chr m:val="̂"/>
+                          </m:accPr>
+                          <m:e>
+                            <m:r>
+                              <m:t>β</m:t>
+                            </m:r>
+                          </m:e>
+                        </m:acc>
+                      </m:e>
+                      <m:sub>
+                        <m:r>
+                          <m:t>O</m:t>
+                        </m:r>
+                        <m:r>
+                          <m:t>L</m:t>
+                        </m:r>
+                        <m:r>
+                          <m:t>S</m:t>
+                        </m:r>
+                      </m:sub>
+                    </m:sSub>
+                  </m:oMath>
+                </a14:m>
+                <a:r>
+                  <a:rPr sz="2000"/>
+                  <a:t> has the </a:t>
+                </a:r>
+                <a:r>
+                  <a:rPr sz="2000" b="1"/>
+                  <a:t>smallest variance among linear unbiased estimators</a:t>
+                </a:r>
+                <a:r>
+                  <a:rPr sz="2000"/>
+                  <a:t>.</a:t>
+                </a:r>
+              </a:p>
+              <a:p>
+                <a:pPr lvl="0" indent="0" marL="0">
+                  <a:buNone/>
+                </a:pPr>
+                <a:r>
+                  <a:rPr i="1"/>
+                  <a:t>Sketch.</a:t>
+                </a:r>
+                <a:r>
+                  <a:rPr/>
+                  <a:t> Any linear unbiased </a:t>
+                </a:r>
+                <a14:m>
+                  <m:oMath xmlns:m="http://schemas.openxmlformats.org/officeDocument/2006/math">
+                    <m:acc>
+                      <m:accPr>
+                        <m:chr m:val="̃"/>
+                      </m:accPr>
+                      <m:e>
+                        <m:r>
+                          <m:t>β</m:t>
+                        </m:r>
+                      </m:e>
+                    </m:acc>
+                    <m:r>
+                      <m:rPr>
+                        <m:sty m:val="p"/>
+                      </m:rPr>
+                      <m:t>=</m:t>
+                    </m:r>
+                    <m:r>
+                      <m:t>C</m:t>
+                    </m:r>
+                    <m:r>
+                      <m:t>y</m:t>
+                    </m:r>
+                  </m:oMath>
+                </a14:m>
+                <a:r>
+                  <a:rPr/>
+                  <a:t> has </a:t>
+                </a:r>
+                <a14:m>
+                  <m:oMath xmlns:m="http://schemas.openxmlformats.org/officeDocument/2006/math">
+                    <m:r>
+                      <m:t>C</m:t>
+                    </m:r>
+                    <m:r>
+                      <m:rPr>
+                        <m:sty m:val="p"/>
+                      </m:rPr>
+                      <m:t>=</m:t>
+                    </m:r>
+                    <m:sSup>
+                      <m:e>
+                        <m:d>
+                          <m:dPr>
+                            <m:begChr m:val="("/>
+                            <m:sepChr m:val=""/>
+                            <m:endChr m:val=")"/>
+                            <m:grow/>
+                          </m:dPr>
+                          <m:e>
+                            <m:sSup>
+                              <m:e>
+                                <m:r>
+                                  <m:t>X</m:t>
+                                </m:r>
+                              </m:e>
+                              <m:sup>
+                                <m:r>
+                                  <m:rPr>
+                                    <m:sty m:val="p"/>
+                                  </m:rPr>
+                                  <m:t>⊤</m:t>
+                                </m:r>
+                              </m:sup>
+                            </m:sSup>
+                            <m:r>
+                              <m:t>X</m:t>
+                            </m:r>
+                          </m:e>
+                        </m:d>
+                      </m:e>
+                      <m:sup>
+                        <m:r>
+                          <m:rPr>
+                            <m:sty m:val="p"/>
+                          </m:rPr>
+                          <m:t>−</m:t>
+                        </m:r>
+                        <m:r>
+                          <m:t>1</m:t>
+                        </m:r>
+                      </m:sup>
+                    </m:sSup>
+                    <m:sSup>
+                      <m:e>
+                        <m:r>
+                          <m:t>X</m:t>
+                        </m:r>
+                      </m:e>
+                      <m:sup>
+                        <m:r>
+                          <m:rPr>
+                            <m:sty m:val="p"/>
+                          </m:rPr>
+                          <m:t>⊤</m:t>
+                        </m:r>
+                      </m:sup>
+                    </m:sSup>
+                    <m:r>
+                      <m:rPr>
+                        <m:sty m:val="p"/>
+                      </m:rPr>
+                      <m:t>+</m:t>
+                    </m:r>
+                    <m:r>
+                      <m:t>D</m:t>
+                    </m:r>
+                  </m:oMath>
+                </a14:m>
+                <a:r>
+                  <a:rPr/>
+                  <a:t> with </a:t>
+                </a:r>
+                <a14:m>
+                  <m:oMath xmlns:m="http://schemas.openxmlformats.org/officeDocument/2006/math">
+                    <m:r>
+                      <m:t>D</m:t>
+                    </m:r>
+                    <m:r>
+                      <m:t>X</m:t>
+                    </m:r>
+                    <m:r>
+                      <m:rPr>
+                        <m:sty m:val="p"/>
+                      </m:rPr>
+                      <m:t>=</m:t>
+                    </m:r>
+                    <m:r>
+                      <m:t>0</m:t>
+                    </m:r>
+                  </m:oMath>
+                </a14:m>
+                <a:r>
+                  <a:rPr/>
+                  <a:t>; then </a:t>
+                </a:r>
+                <a14:m>
+                  <m:oMath xmlns:m="http://schemas.openxmlformats.org/officeDocument/2006/math">
+                    <m:r>
+                      <m:rPr>
+                        <m:sty m:val="p"/>
+                      </m:rPr>
+                      <m:t>V</m:t>
+                    </m:r>
+                    <m:r>
+                      <m:rPr>
+                        <m:sty m:val="p"/>
+                      </m:rPr>
+                      <m:t>a</m:t>
+                    </m:r>
+                    <m:r>
+                      <m:rPr>
+                        <m:sty m:val="p"/>
+                      </m:rPr>
+                      <m:t>r</m:t>
+                    </m:r>
+                    <m:d>
+                      <m:dPr>
+                        <m:begChr m:val="("/>
+                        <m:sepChr m:val=""/>
+                        <m:endChr m:val=")"/>
+                        <m:grow/>
+                      </m:dPr>
+                      <m:e>
+                        <m:acc>
+                          <m:accPr>
+                            <m:chr m:val="̃"/>
+                          </m:accPr>
+                          <m:e>
+                            <m:r>
+                              <m:t>β</m:t>
+                            </m:r>
+                          </m:e>
+                        </m:acc>
+                      </m:e>
+                    </m:d>
+                    <m:r>
+                      <m:rPr>
+                        <m:sty m:val="p"/>
+                      </m:rPr>
+                      <m:t>=</m:t>
+                    </m:r>
+                    <m:sSup>
+                      <m:e>
+                        <m:r>
+                          <m:t>σ</m:t>
+                        </m:r>
+                      </m:e>
+                      <m:sup>
+                        <m:r>
+                          <m:t>2</m:t>
+                        </m:r>
+                      </m:sup>
+                    </m:sSup>
+                    <m:d>
+                      <m:dPr>
+                        <m:begChr m:val="["/>
+                        <m:sepChr m:val=""/>
+                        <m:endChr m:val="]"/>
+                        <m:grow/>
+                      </m:dPr>
+                      <m:e>
+                        <m:sSup>
+                          <m:e>
+                            <m:d>
+                              <m:dPr>
+                                <m:begChr m:val="("/>
+                                <m:sepChr m:val=""/>
+                                <m:endChr m:val=")"/>
+                                <m:grow/>
+                              </m:dPr>
+                              <m:e>
+                                <m:sSup>
+                                  <m:e>
+                                    <m:r>
+                                      <m:t>X</m:t>
+                                    </m:r>
+                                  </m:e>
+                                  <m:sup>
+                                    <m:r>
+                                      <m:rPr>
+                                        <m:sty m:val="p"/>
+                                      </m:rPr>
+                                      <m:t>⊤</m:t>
+                                    </m:r>
+                                  </m:sup>
+                                </m:sSup>
+                                <m:r>
+                                  <m:t>X</m:t>
+                                </m:r>
+                              </m:e>
+                            </m:d>
+                          </m:e>
+                          <m:sup>
+                            <m:r>
+                              <m:rPr>
+                                <m:sty m:val="p"/>
+                              </m:rPr>
+                              <m:t>−</m:t>
+                            </m:r>
+                            <m:r>
+                              <m:t>1</m:t>
+                            </m:r>
+                          </m:sup>
+                        </m:sSup>
+                        <m:r>
+                          <m:rPr>
+                            <m:sty m:val="p"/>
+                          </m:rPr>
+                          <m:t>+</m:t>
+                        </m:r>
+                        <m:r>
+                          <m:t>D</m:t>
+                        </m:r>
+                        <m:sSup>
+                          <m:e>
+                            <m:r>
+                              <m:t>D</m:t>
+                            </m:r>
+                          </m:e>
+                          <m:sup>
+                            <m:r>
+                              <m:rPr>
+                                <m:sty m:val="p"/>
+                              </m:rPr>
+                              <m:t>⊤</m:t>
+                            </m:r>
+                          </m:sup>
+                        </m:sSup>
+                      </m:e>
+                    </m:d>
+                    <m:r>
+                      <m:rPr>
+                        <m:sty m:val="p"/>
+                      </m:rPr>
+                      <m:t>≽</m:t>
+                    </m:r>
+                    <m:r>
+                      <m:rPr>
+                        <m:sty m:val="p"/>
+                      </m:rPr>
+                      <m:t>V</m:t>
+                    </m:r>
+                    <m:r>
+                      <m:rPr>
+                        <m:sty m:val="p"/>
+                      </m:rPr>
+                      <m:t>a</m:t>
+                    </m:r>
+                    <m:r>
+                      <m:rPr>
+                        <m:sty m:val="p"/>
+                      </m:rPr>
+                      <m:t>r</m:t>
+                    </m:r>
+                    <m:d>
+                      <m:dPr>
+                        <m:begChr m:val="("/>
+                        <m:sepChr m:val=""/>
+                        <m:endChr m:val=")"/>
+                        <m:grow/>
+                      </m:dPr>
+                      <m:e>
+                        <m:acc>
+                          <m:accPr>
+                            <m:chr m:val="̂"/>
+                          </m:accPr>
+                          <m:e>
+                            <m:r>
+                              <m:t>β</m:t>
+                            </m:r>
+                          </m:e>
+                        </m:acc>
+                      </m:e>
+                    </m:d>
+                  </m:oMath>
+                </a14:m>
+                <a:r>
+                  <a:rPr/>
+                  <a:t>. </a:t>
+                </a:r>
+                <a14:m>
+                  <m:oMath xmlns:m="http://schemas.openxmlformats.org/officeDocument/2006/math">
+                    <m:r>
+                      <m:rPr>
+                        <m:sty m:val="p"/>
+                      </m:rPr>
+                      <m:t>◼</m:t>
+                    </m:r>
+                  </m:oMath>
+                </a14:m>
+              </a:p>
+            </p:txBody>
+          </p:sp>
+        </mc:Choice>
+      </mc:AlternateContent>
+    </p:spTree>
+  </p:cSld>
+</p:sld>
+</file>
+
+<file path=ppt/slides/slide17.xml><?xml version="1.0" encoding="utf-8"?>
+<p:sld xmlns:a="http://schemas.openxmlformats.org/drawingml/2006/main" xmlns:r="http://schemas.openxmlformats.org/officeDocument/2006/relationships" xmlns:p="http://schemas.openxmlformats.org/presentationml/2006/main">
+  <p:cSld>
+    <p:spTree>
+      <p:nvGrpSpPr>
+        <p:cNvPr id="1" name=""/>
+        <p:cNvGrpSpPr/>
+        <p:nvPr/>
+      </p:nvGrpSpPr>
+      <p:grpSpPr>
+        <a:xfrm>
+          <a:off x="0" y="0"/>
+          <a:ext cx="0" cy="0"/>
+          <a:chOff x="0" y="0"/>
+          <a:chExt cx="0" cy="0"/>
+        </a:xfrm>
+      </p:grpSpPr>
+      <p:sp>
+        <p:nvSpPr>
+          <p:cNvPr id="2" name="Title 1"/>
+          <p:cNvSpPr>
+            <a:spLocks noGrp="1"/>
+          </p:cNvSpPr>
+          <p:nvPr>
+            <p:ph type="title"/>
+          </p:nvPr>
+        </p:nvSpPr>
+        <p:spPr/>
+        <p:txBody>
+          <a:bodyPr/>
+          <a:lstStyle/>
+          <a:p>
+            <a:pPr lvl="0" indent="0" marL="0">
+              <a:buNone/>
+            </a:pPr>
+            <a:r>
+              <a:rPr/>
+              <a:t>Read the middle word</a:t>
+            </a:r>
+          </a:p>
+        </p:txBody>
+      </p:sp>
+      <p:sp>
+        <p:nvSpPr>
+          <p:cNvPr id="3" name="Content Placeholder 2"/>
+          <p:cNvSpPr>
+            <a:spLocks noGrp="1"/>
+          </p:cNvSpPr>
+          <p:nvPr>
+            <p:ph idx="1"/>
+          </p:nvPr>
+        </p:nvSpPr>
+        <p:spPr/>
+        <p:txBody>
+          <a:bodyPr/>
+          <a:lstStyle/>
+          <a:p>
+            <a:pPr lvl="0" indent="0" marL="0">
+              <a:buNone/>
+            </a:pPr>
+            <a:r>
+              <a:rPr b="1"/>
+              <a:t>B</a:t>
+            </a:r>
+            <a:r>
+              <a:rPr/>
+              <a:t>est </a:t>
+            </a:r>
+            <a:r>
+              <a:rPr b="1"/>
+              <a:t>L</a:t>
+            </a:r>
+            <a:r>
+              <a:rPr/>
+              <a:t>inear </a:t>
+            </a:r>
+            <a:r>
+              <a:rPr b="1"/>
+              <a:t>U</a:t>
+            </a:r>
+            <a:r>
+              <a:rPr/>
+              <a:t>nbiased </a:t>
+            </a:r>
+            <a:r>
+              <a:rPr b="1"/>
+              <a:t>E</a:t>
+            </a:r>
+            <a:r>
+              <a:rPr/>
+              <a:t>stimator.</a:t>
+            </a:r>
+          </a:p>
+          <a:p>
+            <a:pPr lvl="0" indent="0" marL="0">
+              <a:buNone/>
+            </a:pPr>
+            <a:r>
+              <a:rPr/>
+              <a:t>The guarantee holds only </a:t>
+            </a:r>
+            <a:r>
+              <a:rPr b="1"/>
+              <a:t>within the class of unbiased estimators</a:t>
+            </a:r>
+            <a:r>
+              <a:rPr/>
+              <a:t>. Sessions 04 and 05 show that accepting bias deliberately can lower total error. Gauss–Markov does not forbid that — it simply does not apply.</a:t>
+            </a:r>
+          </a:p>
+        </p:txBody>
+      </p:sp>
+    </p:spTree>
+  </p:cSld>
+</p:sld>
+</file>
+
+<file path=ppt/slides/slide18.xml><?xml version="1.0" encoding="utf-8"?>
+<p:sld xmlns:a="http://schemas.openxmlformats.org/drawingml/2006/main" xmlns:r="http://schemas.openxmlformats.org/officeDocument/2006/relationships" xmlns:p="http://schemas.openxmlformats.org/presentationml/2006/main">
+  <p:cSld>
+    <p:spTree>
+      <p:nvGrpSpPr>
+        <p:cNvPr id="1" name=""/>
+        <p:cNvGrpSpPr/>
+        <p:nvPr/>
+      </p:nvGrpSpPr>
+      <p:grpSpPr>
+        <a:xfrm>
+          <a:off x="0" y="0"/>
+          <a:ext cx="0" cy="0"/>
+          <a:chOff x="0" y="0"/>
+          <a:chExt cx="0" cy="0"/>
+        </a:xfrm>
+      </p:grpSpPr>
+      <p:sp>
+        <p:nvSpPr>
+          <p:cNvPr id="2" name="Title 1"/>
+          <p:cNvSpPr>
+            <a:spLocks noGrp="1"/>
+          </p:cNvSpPr>
+          <p:nvPr>
+            <p:ph type="title"/>
+          </p:nvPr>
+        </p:nvSpPr>
+        <p:spPr>
+          <a:xfrm>
+            <a:off x="722313" y="1850000"/>
+            <a:ext cx="7772400" cy="1300000"/>
+          </a:xfrm>
+        </p:spPr>
+        <p:txBody>
+          <a:bodyPr/>
+          <a:lstStyle/>
+          <a:p>
+            <a:pPr lvl="0" indent="0" marL="0">
+              <a:buNone/>
+            </a:pPr>
+            <a:r>
+              <a:rPr/>
+              <a:t>4 · When assumption 4 fails</a:t>
+            </a:r>
+          </a:p>
+        </p:txBody>
+      </p:sp>
+    </p:spTree>
+  </p:cSld>
+</p:sld>
+</file>
+
+<file path=ppt/slides/slide19.xml><?xml version="1.0" encoding="utf-8"?>
+<p:sld xmlns:a="http://schemas.openxmlformats.org/drawingml/2006/main" xmlns:r="http://schemas.openxmlformats.org/officeDocument/2006/relationships" xmlns:p="http://schemas.openxmlformats.org/presentationml/2006/main">
+  <p:cSld>
+    <p:spTree>
+      <p:nvGrpSpPr>
+        <p:cNvPr id="1" name=""/>
+        <p:cNvGrpSpPr/>
+        <p:nvPr/>
+      </p:nvGrpSpPr>
+      <p:grpSpPr>
+        <a:xfrm>
+          <a:off x="0" y="0"/>
+          <a:ext cx="0" cy="0"/>
+          <a:chOff x="0" y="0"/>
+          <a:chExt cx="0" cy="0"/>
+        </a:xfrm>
+      </p:grpSpPr>
+      <p:sp>
+        <p:nvSpPr>
+          <p:cNvPr id="2" name="Title 1"/>
+          <p:cNvSpPr>
+            <a:spLocks noGrp="1"/>
+          </p:cNvSpPr>
+          <p:nvPr>
+            <p:ph type="title"/>
+          </p:nvPr>
+        </p:nvSpPr>
+        <p:spPr/>
+        <p:txBody>
+          <a:bodyPr/>
+          <a:lstStyle/>
+          <a:p>
+            <a:pPr lvl="0" indent="0" marL="0">
+              <a:buNone/>
+            </a:pPr>
+            <a:r>
+              <a:rPr/>
+              <a:t>Look at the residuals first</a:t>
+            </a:r>
+          </a:p>
+        </p:txBody>
+      </p:sp>
+      <p:pic>
+        <p:nvPicPr>
+          <p:cNvPr descr="slides_files/figure-pptx/cell-4-output-1.png" id="0" name="Picture 1"/>
+          <p:cNvPicPr>
+            <a:picLocks noGrp="1" noChangeAspect="1"/>
+          </p:cNvPicPr>
+          <p:nvPr/>
+        </p:nvPicPr>
+        <p:blipFill>
+          <a:blip r:embed="rId2"/>
+          <a:stretch>
+            <a:fillRect/>
+          </a:stretch>
+        </p:blipFill>
+        <p:spPr bwMode="auto">
+          <a:xfrm>
+            <a:off x="1143000" y="1193800"/>
+            <a:ext cx="6858000" cy="3390900"/>
+          </a:xfrm>
+          <a:prstGeom prst="rect">
+            <a:avLst/>
+          </a:prstGeom>
+          <a:noFill/>
+          <a:ln w="9525">
+            <a:noFill/>
+            <a:headEnd/>
+            <a:tailEnd/>
+          </a:ln>
+        </p:spPr>
+      </p:pic>
+    </p:spTree>
+  </p:cSld>
+</p:sld>
+</file>
+
+<file path=ppt/slides/slide2.xml><?xml version="1.0" encoding="utf-8"?>
+<p:sld xmlns:a="http://schemas.openxmlformats.org/drawingml/2006/main" xmlns:r="http://schemas.openxmlformats.org/officeDocument/2006/relationships" xmlns:p="http://schemas.openxmlformats.org/presentationml/2006/main">
+  <p:cSld>
+    <p:spTree>
+      <p:nvGrpSpPr>
+        <p:cNvPr id="1" name=""/>
+        <p:cNvGrpSpPr/>
+        <p:nvPr/>
+      </p:nvGrpSpPr>
+      <p:grpSpPr>
+        <a:xfrm>
+          <a:off x="0" y="0"/>
+          <a:ext cx="0" cy="0"/>
+          <a:chOff x="0" y="0"/>
+          <a:chExt cx="0" cy="0"/>
+        </a:xfrm>
+      </p:grpSpPr>
+      <p:sp>
+        <p:nvSpPr>
+          <p:cNvPr id="3" name="Content Placeholder 2"/>
+          <p:cNvSpPr>
+            <a:spLocks noGrp="1"/>
+          </p:cNvSpPr>
+          <p:nvPr>
+            <p:ph idx="1"/>
+          </p:nvPr>
+        </p:nvSpPr>
+        <p:spPr/>
+        <p:txBody>
+          <a:bodyPr/>
+          <a:lstStyle/>
+          <a:p>
+            <a:pPr lvl="0" indent="0" marL="0">
+              <a:spcBef>
+                <a:spcPts val="3000"/>
+              </a:spcBef>
+              <a:buNone/>
+            </a:pPr>
+            <a:r>
+              <a:rPr b="1"/>
+              <a:t>Your coefficient has a standard error. When does it mean anything?</a:t>
+            </a:r>
+          </a:p>
+        </p:txBody>
+      </p:sp>
+    </p:spTree>
+  </p:cSld>
+</p:sld>
+</file>
+
+<file path=ppt/slides/slide20.xml><?xml version="1.0" encoding="utf-8"?>
+<p:sld xmlns:a="http://schemas.openxmlformats.org/drawingml/2006/main" xmlns:r="http://schemas.openxmlformats.org/officeDocument/2006/relationships" xmlns:p="http://schemas.openxmlformats.org/presentationml/2006/main">
+  <p:cSld>
+    <p:spTree>
+      <p:nvGrpSpPr>
+        <p:cNvPr id="1" name=""/>
+        <p:cNvGrpSpPr/>
+        <p:nvPr/>
+      </p:nvGrpSpPr>
+      <p:grpSpPr>
+        <a:xfrm>
+          <a:off x="0" y="0"/>
+          <a:ext cx="0" cy="0"/>
+          <a:chOff x="0" y="0"/>
+          <a:chExt cx="0" cy="0"/>
+        </a:xfrm>
+      </p:grpSpPr>
+      <p:sp>
+        <p:nvSpPr>
+          <p:cNvPr id="3" name="Content Placeholder 2"/>
+          <p:cNvSpPr>
+            <a:spLocks noGrp="1"/>
+          </p:cNvSpPr>
+          <p:nvPr>
+            <p:ph idx="1"/>
+          </p:nvPr>
+        </p:nvSpPr>
+        <p:spPr/>
+        <p:txBody>
+          <a:bodyPr/>
+          <a:lstStyle/>
+          <a:p>
+            <a:pPr lvl="0" indent="0" marL="0">
+              <a:buNone/>
+            </a:pPr>
+            <a:r>
+              <a:rPr/>
+              <a:t>You are looking for a </a:t>
+            </a:r>
+            <a:r>
+              <a:rPr b="1"/>
+              <a:t>shape</a:t>
+            </a:r>
+            <a:r>
+              <a:rPr/>
+              <a:t>, not running a test. In this panel the error variance scales with country size.</a:t>
+            </a:r>
+          </a:p>
+        </p:txBody>
+      </p:sp>
+    </p:spTree>
+  </p:cSld>
+</p:sld>
+</file>
+
+<file path=ppt/slides/slide21.xml><?xml version="1.0" encoding="UTF-8"?><p:sld xmlns:a="http://schemas.openxmlformats.org/drawingml/2006/main" xmlns:r="http://schemas.openxmlformats.org/officeDocument/2006/relationships" xmlns:p="http://schemas.openxmlformats.org/presentationml/2006/main"><p:cSld><p:spTree><p:nvGrpSpPr><p:cNvPr id="1" name="" /><p:cNvGrpSpPr /><p:nvPr /></p:nvGrpSpPr><p:grpSpPr><a:xfrm><a:off x="0" y="0" /><a:ext cx="0" cy="0" /><a:chOff x="0" y="0" /><a:chExt cx="0" cy="0" /></a:xfrm></p:grpSpPr><p:sp><p:nvSpPr><p:cNvPr id="2" name="Title 1" /><p:cNvSpPr><a:spLocks noGrp="1" /></p:cNvSpPr><p:nvPr><p:ph type="title" /></p:nvPr></p:nvSpPr><p:spPr><a:xfrm><a:off x="457201" y="204787" /><a:ext cx="3008313" cy="871538" /></a:xfrm></p:spPr><p:txBody><a:bodyPr /><a:lstStyle /><a:p><a:pPr lvl="0" indent="0" marL="0"><a:buNone /></a:pPr><a:r><a:rPr /><a:t>The sandwich is always correct</a:t></a:r></a:p></p:txBody></p:sp><mc:AlternateContent xmlns:mc="http://schemas.openxmlformats.org/markup-compatibility/2006"><mc:Choice xmlns:a14="http://schemas.microsoft.com/office/drawing/2010/main" Requires="a14"><p:sp><p:nvSpPr><p:cNvPr id="4" name="Text Placeholder 3" /><p:cNvSpPr><a:spLocks noGrp="1" /></p:cNvSpPr><p:nvPr><p:ph idx="2" sz="half" type="body" /></p:nvPr></p:nvSpPr><p:spPr /><p:txBody><a:bodyPr /><a:lstStyle /><a:p><a:pPr lvl="0" indent="0" marL="0"><a:buNone /></a:pPr><a14:m><m:oMathPara xmlns:m="http://schemas.openxmlformats.org/officeDocument/2006/math"><m:oMathParaPr><m:jc m:val="center" /></m:oMathParaPr><m:oMath><m:r><m:rPr><m:sty m:val="p" /></m:rPr><m:t>V</m:t></m:r><m:r><m:rPr><m:sty m:val="p" /></m:rPr><m:t>a</m:t></m:r><m:r><m:rPr><m:sty m:val="p" /></m:rPr><m:t>r</m:t></m:r><m:d><m:dPr><m:begChr m:val="(" /><m:sepChr m:val="" /><m:endChr m:val=")" /><m:grow /></m:dPr><m:e><m:acc><m:accPr><m:chr m:val="̂" /></m:accPr><m:e><m:r><m:t>β</m:t></m:r></m:e></m:acc><m:r><m:rPr><m:sty m:val="p" /></m:rPr><m:t>∣</m:t></m:r><m:r><m:t>X</m:t></m:r></m:e></m:d><m:r><m:rPr><m:sty m:val="p" /></m:rPr><m:t>=</m:t></m:r><m:sSup><m:e><m:d><m:dPr><m:begChr m:val="(" /><m:sepChr m:val="" /><m:endChr m:val=")" /><m:grow /></m:dPr><m:e><m:sSup><m:e><m:r><m:t>X</m:t></m:r></m:e><m:sup><m:r><m:rPr><m:sty m:val="p" /></m:rPr><m:t>⊤</m:t></m:r></m:sup></m:sSup><m:r><m:t>X</m:t></m:r></m:e></m:d></m:e><m:sup><m:r><m:rPr><m:sty m:val="p" /></m:rPr><m:t>−</m:t></m:r><m:r><m:t>1</m:t></m:r></m:sup></m:sSup><m:d><m:dPr><m:begChr m:val="(" /><m:sepChr m:val="" /><m:endChr m:val=")" /><m:grow /></m:dPr><m:e><m:sSup><m:e><m:r><m:t>X</m:t></m:r></m:e><m:sup><m:r><m:rPr><m:sty m:val="p" /></m:rPr><m:t>⊤</m:t></m:r></m:sup></m:sSup><m:r><m:t>Ω</m:t></m:r><m:r><m:t>X</m:t></m:r></m:e></m:d><m:sSup><m:e><m:d><m:dPr><m:begChr m:val="(" /><m:sepChr m:val="" /><m:endChr m:val=")" /><m:grow /></m:dPr><m:e><m:sSup><m:e><m:r><m:t>X</m:t></m:r></m:e><m:sup><m:r><m:rPr><m:sty m:val="p" /></m:rPr><m:t>⊤</m:t></m:r></m:sup></m:sSup><m:r><m:t>X</m:t></m:r></m:e></m:d></m:e><m:sup><m:r><m:rPr><m:sty m:val="p" /></m:rPr><m:t>−</m:t></m:r><m:r><m:t>1</m:t></m:r></m:sup></m:sSup><m:r><m:rPr><m:sty m:val="p" /></m:rPr><m:t>,</m:t></m:r><m:r><m:t>  </m:t></m:r><m:r><m:t>Ω</m:t></m:r><m:r><m:rPr><m:sty m:val="p" /></m:rPr><m:t>=</m:t></m:r><m:r><m:rPr><m:sty m:val="p" /></m:rPr><m:t>V</m:t></m:r><m:r><m:rPr><m:sty m:val="p" /></m:rPr><m:t>a</m:t></m:r><m:r><m:rPr><m:sty m:val="p" /></m:rPr><m:t>r</m:t></m:r><m:d><m:dPr><m:begChr m:val="(" /><m:sepChr m:val="" /><m:endChr m:val=")" /><m:grow /></m:dPr><m:e><m:r><m:t>ε</m:t></m:r><m:r><m:rPr><m:sty m:val="p" /></m:rPr><m:t>∣</m:t></m:r><m:r><m:t>X</m:t></m:r></m:e></m:d></m:oMath></m:oMathPara></a14:m></a:p></p:txBody></p:sp></mc:Choice></mc:AlternateContent><p:graphicFrame><p:nvGraphicFramePr><p:cNvPr id="6" name="Content Placeholder 5" /><p:cNvGraphicFramePr><a:graphicFrameLocks noGrp="1" /></p:cNvGraphicFramePr><p:nvPr><p:ph idx="1" /></p:nvPr></p:nvGraphicFramePr><p:xfrm><a:off x="3568700" y="203200" /><a:ext cx="5105400" cy="4381500" /></p:xfrm><a:graphic><a:graphicData uri="http://schemas.openxmlformats.org/drawingml/2006/table"><a:tbl><a:tblPr firstRow="1" bandRow="1"><a:tableStyleId>{5C22544A-7EE6-4342-B048-85BDC9FD1C3A}</a:tableStyleId></a:tblPr><a:tblGrid><a:gridCol w="2552700" /><a:gridCol w="2552700" /></a:tblGrid><a:tr h="0"><a:tc><a:txBody><a:bodyPr /><a:lstStyle /><a:p><a:pPr lvl="0" indent="0" marL="0"><a:buNone /></a:pPr><a:r><a:rPr /><a:t>Guess at </a:t></a:r><a14:m><m:oMath xmlns:m="http://schemas.openxmlformats.org/officeDocument/2006/math"><m:r><m:t>Ω</m:t></m:r></m:oMath></a14:m></a:p></a:txBody><a:tcPr /></a:tc><a:tc><a:txBody><a:bodyPr /><a:lstStyle /><a:p><a:pPr lvl="0" indent="0" marL="0"><a:buNone /></a:pPr><a:r><a:rPr /><a:t>When</a:t></a:r></a:p></a:txBody><a:tcPr /></a:tc></a:tr><a:tr h="0"><a:tc><a:txBody><a:bodyPr /><a:lstStyle /><a:p><a:pPr lvl="0" indent="0" marL="0"><a:buNone /></a:pPr><a14:m><m:oMath xmlns:m="http://schemas.openxmlformats.org/officeDocument/2006/math"><m:sSup><m:e><m:r><m:t>σ</m:t></m:r></m:e><m:sup><m:r><m:t>2</m:t></m:r></m:sup></m:sSup><m:r><m:t>I</m:t></m:r></m:oMath></a14:m><a:r><a:rPr /><a:t> — classical</a:t></a:r></a:p></a:txBody></a:tc><a:tc><a:txBody><a:bodyPr /><a:lstStyle /><a:p><a:pPr lvl="0" indent="0" marL="0"><a:buNone /></a:pPr><a:r><a:rPr /><a:t>essentially never with a real panel</a:t></a:r></a:p></a:txBody></a:tc></a:tr><a:tr h="0"><a:tc><a:txBody><a:bodyPr /><a:lstStyle /><a:p><a:pPr lvl="0" indent="0" marL="0"><a:buNone /></a:pPr><a14:m><m:oMath xmlns:m="http://schemas.openxmlformats.org/officeDocument/2006/math"><m:r><m:rPr><m:sty m:val="p" /></m:rPr><m:t>d</m:t></m:r><m:r><m:rPr><m:sty m:val="p" /></m:rPr><m:t>i</m:t></m:r><m:r><m:rPr><m:sty m:val="p" /></m:rPr><m:t>a</m:t></m:r><m:r><m:rPr><m:sty m:val="p" /></m:rPr><m:t>g</m:t></m:r><m:d><m:dPr><m:begChr m:val="(" /><m:sepChr m:val="" /><m:endChr m:val=")" /><m:grow /></m:dPr><m:e><m:sSubSup><m:e><m:acc><m:accPr><m:chr m:val="̂" /></m:accPr><m:e><m:r><m:t>ε</m:t></m:r></m:e></m:acc></m:e><m:sub><m:r><m:t>i</m:t></m:r></m:sub><m:sup><m:r><m:t>2</m:t></m:r></m:sup></m:sSubSup></m:e></m:d></m:oMath></a14:m><a:r><a:rPr /><a:t> — </a:t></a:r><a:r><a:rPr b="1" /><a:t>HC1</a:t></a:r></a:p></a:txBody></a:tc><a:tc><a:txBody><a:bodyPr /><a:lstStyle /><a:p><a:pPr lvl="0" indent="0" marL="0"><a:buNone /></a:pPr><a:r><a:rPr /><a:t>variance differs across units</a:t></a:r></a:p></a:txBody></a:tc></a:tr><a:tr h="0"><a:tc><a:txBody><a:bodyPr /><a:lstStyle /><a:p><a:pPr lvl="0" indent="0" marL="0"><a:buNone /></a:pPr><a14:m><m:oMath xmlns:m="http://schemas.openxmlformats.org/officeDocument/2006/math"><m:nary><m:naryPr><m:chr m:val="∑" /><m:limLoc m:val="undOvr" /><m:subHide m:val="off" /><m:supHide m:val="on" /></m:naryPr><m:sub><m:r><m:t>g</m:t></m:r></m:sub><m:sup><m:r><m:t>​</m:t></m:r></m:sup><m:e><m:sSub><m:e><m:acc><m:accPr><m:chr m:val="̂" /></m:accPr><m:e><m:r><m:t>ε</m:t></m:r></m:e></m:acc></m:e><m:sub><m:r><m:t>g</m:t></m:r></m:sub></m:sSub></m:e></m:nary><m:sSubSup><m:e><m:acc><m:accPr><m:chr m:val="̂" /></m:accPr><m:e><m:r><m:t>ε</m:t></m:r></m:e></m:acc></m:e><m:sub><m:r><m:t>g</m:t></m:r></m:sub><m:sup><m:r><m:rPr><m:sty m:val="p" /></m:rPr><m:t>⊤</m:t></m:r></m:sup></m:sSubSup></m:oMath></a14:m><a:r><a:rPr /><a:t> — </a:t></a:r><a:r><a:rPr b="1" /><a:t>cluster</a:t></a:r></a:p></a:txBody></a:tc><a:tc><a:txBody><a:bodyPr /><a:lstStyle /><a:p><a:pPr lvl="0" indent="0" marL="0"><a:buNone /></a:pPr><a:r><a:rPr /><a:t>errors correlated within a unit</a:t></a:r></a:p></a:txBody></a:tc></a:tr></a:tbl></a:graphicData></a:graphic></p:graphicFrame></p:spTree></p:cSld></p:sld>
+</file>
+
+<file path=ppt/slides/slide22.xml><?xml version="1.0" encoding="utf-8"?>
+<p:sld xmlns:a="http://schemas.openxmlformats.org/drawingml/2006/main" xmlns:r="http://schemas.openxmlformats.org/officeDocument/2006/relationships" xmlns:p="http://schemas.openxmlformats.org/presentationml/2006/main">
+  <p:cSld>
+    <p:spTree>
+      <p:nvGrpSpPr>
+        <p:cNvPr id="1" name=""/>
+        <p:cNvGrpSpPr/>
+        <p:nvPr/>
+      </p:nvGrpSpPr>
+      <p:grpSpPr>
+        <a:xfrm>
+          <a:off x="0" y="0"/>
+          <a:ext cx="0" cy="0"/>
+          <a:chOff x="0" y="0"/>
+          <a:chExt cx="0" cy="0"/>
+        </a:xfrm>
+      </p:grpSpPr>
+      <mc:AlternateContent xmlns:mc="http://schemas.openxmlformats.org/markup-compatibility/2006">
+        <mc:Choice xmlns:a14="http://schemas.microsoft.com/office/drawing/2010/main" Requires="a14">
+          <p:sp>
+            <p:nvSpPr>
+              <p:cNvPr id="3" name="Content Placeholder 2"/>
+              <p:cNvSpPr>
+                <a:spLocks noGrp="1"/>
+              </p:cNvSpPr>
+              <p:nvPr>
+                <p:ph idx="1"/>
+              </p:nvPr>
+            </p:nvSpPr>
+            <p:spPr/>
+            <p:txBody>
+              <a:bodyPr/>
+              <a:lstStyle/>
+              <a:p>
+                <a:pPr lvl="0" indent="0" marL="0">
+                  <a:buNone/>
+                </a:pPr>
+                <a14:m>
+                  <m:oMath xmlns:m="http://schemas.openxmlformats.org/officeDocument/2006/math">
+                    <m:acc>
+                      <m:accPr>
+                        <m:chr m:val="̂"/>
+                      </m:accPr>
+                      <m:e>
+                        <m:r>
+                          <m:t>β</m:t>
+                        </m:r>
+                      </m:e>
+                    </m:acc>
+                  </m:oMath>
+                </a14:m>
+                <a:r>
+                  <a:rPr/>
+                  <a:t> never changes. Only your claimed </a:t>
+                </a:r>
+                <a:r>
+                  <a:rPr b="1"/>
+                  <a:t>precision</a:t>
+                </a:r>
+                <a:r>
+                  <a:rPr/>
+                  <a:t> does.</a:t>
+                </a:r>
+              </a:p>
+            </p:txBody>
+          </p:sp>
+        </mc:Choice>
+      </mc:AlternateContent>
+    </p:spTree>
+  </p:cSld>
+</p:sld>
+</file>
+
+<file path=ppt/slides/slide23.xml><?xml version="1.0" encoding="utf-8"?>
+<p:sld xmlns:a="http://schemas.openxmlformats.org/drawingml/2006/main" xmlns:r="http://schemas.openxmlformats.org/officeDocument/2006/relationships" xmlns:p="http://schemas.openxmlformats.org/presentationml/2006/main">
+  <p:cSld>
+    <p:spTree>
+      <p:nvGrpSpPr>
+        <p:cNvPr id="1" name=""/>
+        <p:cNvGrpSpPr/>
+        <p:nvPr/>
+      </p:nvGrpSpPr>
+      <p:grpSpPr>
+        <a:xfrm>
+          <a:off x="0" y="0"/>
+          <a:ext cx="0" cy="0"/>
+          <a:chOff x="0" y="0"/>
+          <a:chExt cx="0" cy="0"/>
+        </a:xfrm>
+      </p:grpSpPr>
+      <p:sp>
+        <p:nvSpPr>
+          <p:cNvPr id="2" name="Title 1"/>
+          <p:cNvSpPr>
+            <a:spLocks noGrp="1"/>
+          </p:cNvSpPr>
+          <p:nvPr>
+            <p:ph type="title"/>
+          </p:nvPr>
+        </p:nvSpPr>
+        <p:spPr>
+          <a:xfrm>
+            <a:off x="722313" y="1850000"/>
+            <a:ext cx="7772400" cy="1300000"/>
+          </a:xfrm>
+        </p:spPr>
+        <p:txBody>
+          <a:bodyPr/>
+          <a:lstStyle/>
+          <a:p>
+            <a:pPr lvl="0" indent="0" marL="0">
+              <a:buNone/>
+            </a:pPr>
+            <a:r>
+              <a:rPr/>
+              <a:t>5 · Three standard errors</a:t>
+            </a:r>
+          </a:p>
+        </p:txBody>
+      </p:sp>
+    </p:spTree>
+  </p:cSld>
+</p:sld>
+</file>
+
+<file path=ppt/slides/slide24.xml><?xml version="1.0" encoding="utf-8"?>
+<p:sld xmlns:a="http://schemas.openxmlformats.org/drawingml/2006/main" xmlns:r="http://schemas.openxmlformats.org/officeDocument/2006/relationships" xmlns:p="http://schemas.openxmlformats.org/presentationml/2006/main">
+  <p:cSld>
+    <p:spTree>
+      <p:nvGrpSpPr>
+        <p:cNvPr id="1" name=""/>
+        <p:cNvGrpSpPr/>
+        <p:nvPr/>
+      </p:nvGrpSpPr>
+      <p:grpSpPr>
+        <a:xfrm>
+          <a:off x="0" y="0"/>
+          <a:ext cx="0" cy="0"/>
+          <a:chOff x="0" y="0"/>
+          <a:chExt cx="0" cy="0"/>
+        </a:xfrm>
+      </p:grpSpPr>
+      <p:sp>
+        <p:nvSpPr>
+          <p:cNvPr id="2" name="Title 1"/>
+          <p:cNvSpPr>
+            <a:spLocks noGrp="1"/>
+          </p:cNvSpPr>
+          <p:nvPr>
+            <p:ph type="title"/>
+          </p:nvPr>
+        </p:nvSpPr>
+        <p:spPr/>
+        <p:txBody>
+          <a:bodyPr/>
+          <a:lstStyle/>
+          <a:p>
+            <a:pPr lvl="0" indent="0" marL="0">
+              <a:buNone/>
+            </a:pPr>
+            <a:r>
+              <a:rPr/>
+              <a:t>The same coefficient, three intervals</a:t>
+            </a:r>
+          </a:p>
+        </p:txBody>
+      </p:sp>
+      <p:pic>
+        <p:nvPicPr>
+          <p:cNvPr descr="slides_files/figure-pptx/cell-5-output-1.png" id="0" name="Picture 1"/>
+          <p:cNvPicPr>
+            <a:picLocks noGrp="1" noChangeAspect="1"/>
+          </p:cNvPicPr>
+          <p:nvPr/>
+        </p:nvPicPr>
+        <p:blipFill>
+          <a:blip r:embed="rId2"/>
+          <a:stretch>
+            <a:fillRect/>
+          </a:stretch>
+        </p:blipFill>
+        <p:spPr bwMode="auto">
+          <a:xfrm>
+            <a:off x="457200" y="1409700"/>
+            <a:ext cx="8229600" cy="2959100"/>
+          </a:xfrm>
+          <a:prstGeom prst="rect">
+            <a:avLst/>
+          </a:prstGeom>
+          <a:noFill/>
+          <a:ln w="9525">
+            <a:noFill/>
+            <a:headEnd/>
+            <a:tailEnd/>
+          </a:ln>
+        </p:spPr>
+      </p:pic>
+    </p:spTree>
+  </p:cSld>
+</p:sld>
+</file>
+
+<file path=ppt/slides/slide25.xml><?xml version="1.0" encoding="utf-8"?>
+<p:sld xmlns:a="http://schemas.openxmlformats.org/drawingml/2006/main" xmlns:r="http://schemas.openxmlformats.org/officeDocument/2006/relationships" xmlns:p="http://schemas.openxmlformats.org/presentationml/2006/main">
+  <p:cSld>
+    <p:spTree>
+      <p:nvGrpSpPr>
+        <p:cNvPr id="1" name=""/>
+        <p:cNvGrpSpPr/>
+        <p:nvPr/>
+      </p:nvGrpSpPr>
+      <p:grpSpPr>
+        <a:xfrm>
+          <a:off x="0" y="0"/>
+          <a:ext cx="0" cy="0"/>
+          <a:chOff x="0" y="0"/>
+          <a:chExt cx="0" cy="0"/>
+        </a:xfrm>
+      </p:grpSpPr>
+      <mc:AlternateContent xmlns:mc="http://schemas.openxmlformats.org/markup-compatibility/2006">
+        <mc:Choice xmlns:a14="http://schemas.microsoft.com/office/drawing/2010/main" Requires="a14">
+          <p:sp>
+            <p:nvSpPr>
+              <p:cNvPr id="3" name="Content Placeholder 2"/>
+              <p:cNvSpPr>
+                <a:spLocks noGrp="1"/>
+              </p:cNvSpPr>
+              <p:nvPr>
+                <p:ph idx="1"/>
+              </p:nvPr>
+            </p:nvSpPr>
+            <p:spPr/>
+            <p:txBody>
+              <a:bodyPr/>
+              <a:lstStyle/>
+              <a:p>
+                <a:pPr lvl="0" indent="0">
+                  <a:buNone/>
+                </a:pPr>
+                <a:r>
+                  <a:rPr>
+                    <a:latin typeface="Courier"/>
+                  </a:rPr>
+                  <a:t>  classical 0.0426    HC1 0.0433    cluster 0.1259    →  cluster/classical = 2.95x</a:t>
+                </a:r>
+              </a:p>
+              <a:p>
+                <a:pPr lvl="0" indent="0" marL="0">
+                  <a:buNone/>
+                </a:pPr>
+                <a:r>
+                  <a:rPr/>
+                  <a:t>The clustered interval is about </a:t>
+                </a:r>
+                <a:r>
+                  <a:rPr b="1"/>
+                  <a:t>3× wider</a:t>
+                </a:r>
+                <a:r>
+                  <a:rPr/>
+                  <a:t>. A </a:t>
+                </a:r>
+                <a14:m>
+                  <m:oMath xmlns:m="http://schemas.openxmlformats.org/officeDocument/2006/math">
+                    <m:r>
+                      <m:t>t</m:t>
+                    </m:r>
+                  </m:oMath>
+                </a14:m>
+                <a:r>
+                  <a:rPr/>
+                  <a:t>-statistic of 6 was really a </a:t>
+                </a:r>
+                <a14:m>
+                  <m:oMath xmlns:m="http://schemas.openxmlformats.org/officeDocument/2006/math">
+                    <m:r>
+                      <m:t>t</m:t>
+                    </m:r>
+                  </m:oMath>
+                </a14:m>
+                <a:r>
+                  <a:rPr/>
+                  <a:t> of 2.</a:t>
+                </a:r>
+              </a:p>
+            </p:txBody>
+          </p:sp>
+        </mc:Choice>
+      </mc:AlternateContent>
+    </p:spTree>
+  </p:cSld>
+</p:sld>
+</file>
+
+<file path=ppt/slides/slide26.xml><?xml version="1.0" encoding="utf-8"?>
+<p:sld xmlns:a="http://schemas.openxmlformats.org/drawingml/2006/main" xmlns:r="http://schemas.openxmlformats.org/officeDocument/2006/relationships" xmlns:p="http://schemas.openxmlformats.org/presentationml/2006/main">
+  <p:cSld>
+    <p:spTree>
+      <p:nvGrpSpPr>
+        <p:cNvPr id="1" name=""/>
+        <p:cNvGrpSpPr/>
+        <p:nvPr/>
+      </p:nvGrpSpPr>
+      <p:grpSpPr>
+        <a:xfrm>
+          <a:off x="0" y="0"/>
+          <a:ext cx="0" cy="0"/>
+          <a:chOff x="0" y="0"/>
+          <a:chExt cx="0" cy="0"/>
+        </a:xfrm>
+      </p:grpSpPr>
+      <p:sp>
+        <p:nvSpPr>
+          <p:cNvPr id="2" name="Title 1"/>
+          <p:cNvSpPr>
+            <a:spLocks noGrp="1"/>
+          </p:cNvSpPr>
+          <p:nvPr>
+            <p:ph type="title"/>
+          </p:nvPr>
+        </p:nvSpPr>
+        <p:spPr>
+          <a:xfrm>
+            <a:off x="457201" y="204787"/>
+            <a:ext cx="3008313" cy="871538"/>
+          </a:xfrm>
+        </p:spPr>
+        <p:txBody>
+          <a:bodyPr/>
+          <a:lstStyle/>
+          <a:p>
+            <a:pPr lvl="0" indent="0" marL="0">
+              <a:buNone/>
+            </a:pPr>
+            <a:r>
+              <a:rPr/>
+              <a:t>Now watch it disappear</a:t>
+            </a:r>
+          </a:p>
+        </p:txBody>
+      </p:sp>
+      <mc:AlternateContent xmlns:mc="http://schemas.openxmlformats.org/markup-compatibility/2006">
+        <mc:Choice xmlns:a14="http://schemas.microsoft.com/office/drawing/2010/main" Requires="a14">
+          <p:sp>
+            <p:nvSpPr>
+              <p:cNvPr id="4" name="Text Placeholder 3"/>
+              <p:cNvSpPr>
+                <a:spLocks noGrp="1"/>
+              </p:cNvSpPr>
+              <p:nvPr>
+                <p:ph idx="2" sz="half" type="body"/>
+              </p:nvPr>
+            </p:nvSpPr>
+            <p:spPr/>
+            <p:txBody>
+              <a:bodyPr/>
+              <a:lstStyle/>
+              <a:p>
+                <a:pPr lvl="0" indent="0" marL="0">
+                  <a:buNone/>
+                </a:pPr>
+                <a:r>
+                  <a:rPr/>
+                  <a:t>Add one country-level control — </a:t>
+                </a:r>
+                <a14:m>
+                  <m:oMath xmlns:m="http://schemas.openxmlformats.org/officeDocument/2006/math">
+                    <m:r>
+                      <m:rPr>
+                        <m:sty m:val="p"/>
+                      </m:rPr>
+                      <m:t>log</m:t>
+                    </m:r>
+                  </m:oMath>
+                </a14:m>
+                <a:r>
+                  <a:rPr/>
+                  <a:t> GDP per capita:</a:t>
+                </a:r>
+              </a:p>
+            </p:txBody>
+          </p:sp>
+        </mc:Choice>
+      </mc:AlternateContent>
+      <p:pic>
+        <p:nvPicPr>
+          <p:cNvPr descr="slides_files/figure-pptx/cell-7-output-1.png" id="0" name="Picture 1"/>
+          <p:cNvPicPr>
+            <a:picLocks noGrp="1" noChangeAspect="1"/>
+          </p:cNvPicPr>
+          <p:nvPr/>
+        </p:nvPicPr>
+        <p:blipFill>
+          <a:blip r:embed="rId2"/>
+          <a:stretch>
+            <a:fillRect/>
+          </a:stretch>
+        </p:blipFill>
+        <p:spPr bwMode="auto">
+          <a:xfrm>
+            <a:off x="3568700" y="1511300"/>
+            <a:ext cx="5105400" cy="1752600"/>
+          </a:xfrm>
+          <a:prstGeom prst="rect">
+            <a:avLst/>
+          </a:prstGeom>
+          <a:noFill/>
+          <a:ln w="9525">
+            <a:noFill/>
+            <a:headEnd/>
+            <a:tailEnd/>
+          </a:ln>
+        </p:spPr>
+      </p:pic>
+    </p:spTree>
+  </p:cSld>
+</p:sld>
+</file>
+
+<file path=ppt/slides/slide27.xml><?xml version="1.0" encoding="utf-8"?>
+<p:sld xmlns:a="http://schemas.openxmlformats.org/drawingml/2006/main" xmlns:r="http://schemas.openxmlformats.org/officeDocument/2006/relationships" xmlns:p="http://schemas.openxmlformats.org/presentationml/2006/main">
+  <p:cSld>
+    <p:spTree>
+      <p:nvGrpSpPr>
+        <p:cNvPr id="1" name=""/>
+        <p:cNvGrpSpPr/>
+        <p:nvPr/>
+      </p:nvGrpSpPr>
+      <p:grpSpPr>
+        <a:xfrm>
+          <a:off x="0" y="0"/>
+          <a:ext cx="0" cy="0"/>
+          <a:chOff x="0" y="0"/>
+          <a:chExt cx="0" cy="0"/>
+        </a:xfrm>
+      </p:grpSpPr>
+      <p:sp>
+        <p:nvSpPr>
+          <p:cNvPr id="2" name="Title 1"/>
+          <p:cNvSpPr>
+            <a:spLocks noGrp="1"/>
+          </p:cNvSpPr>
+          <p:nvPr>
+            <p:ph type="title"/>
+          </p:nvPr>
+        </p:nvSpPr>
+        <p:spPr/>
+        <p:txBody>
+          <a:bodyPr/>
+          <a:lstStyle/>
+          <a:p>
+            <a:pPr lvl="0" indent="0" marL="0">
+              <a:buNone/>
+            </a:pPr>
+            <a:r>
+              <a:rPr/>
+              <a:t>Why it disappeared</a:t>
+            </a:r>
+          </a:p>
+        </p:txBody>
+      </p:sp>
+      <mc:AlternateContent xmlns:mc="http://schemas.openxmlformats.org/markup-compatibility/2006">
+        <mc:Choice xmlns:a14="http://schemas.microsoft.com/office/drawing/2010/main" Requires="a14">
+          <p:sp>
+            <p:nvSpPr>
+              <p:cNvPr id="3" name="Content Placeholder 2"/>
+              <p:cNvSpPr>
+                <a:spLocks noGrp="1"/>
+              </p:cNvSpPr>
+              <p:nvPr>
+                <p:ph idx="1"/>
+              </p:nvPr>
+            </p:nvSpPr>
+            <p:spPr/>
+            <p:txBody>
+              <a:bodyPr/>
+              <a:lstStyle/>
+              <a:p>
+                <a:pPr lvl="0" indent="0" marL="0">
+                  <a:buNone/>
+                </a:pPr>
+                <a14:m>
+                  <m:oMath xmlns:m="http://schemas.openxmlformats.org/officeDocument/2006/math">
+                    <m:r>
+                      <m:rPr>
+                        <m:sty m:val="p"/>
+                      </m:rPr>
+                      <m:t>log</m:t>
+                    </m:r>
+                    <m:d>
+                      <m:dPr>
+                        <m:begChr m:val="("/>
+                        <m:sepChr m:val=""/>
+                        <m:endChr m:val=")"/>
+                        <m:grow/>
+                      </m:dPr>
+                      <m:e>
+                        <m:r>
+                          <m:rPr>
+                            <m:nor/>
+                            <m:sty m:val="p"/>
+                          </m:rPr>
+                          <m:t>GDP per capita</m:t>
+                        </m:r>
+                      </m:e>
+                    </m:d>
+                  </m:oMath>
+                </a14:m>
+                <a:r>
+                  <a:rPr/>
+                  <a:t> varies at the </a:t>
+                </a:r>
+                <a:r>
+                  <a:rPr b="1"/>
+                  <a:t>country-year</a:t>
+                </a:r>
+                <a:r>
+                  <a:rPr/>
+                  <a:t> level, so including it </a:t>
+                </a:r>
+                <a:r>
+                  <a:rPr b="1"/>
+                  <a:t>absorbs the common shock</a:t>
+                </a:r>
+                <a:r>
+                  <a:rPr/>
+                  <a:t> that was making residuals correlate within a country.</a:t>
+                </a:r>
+              </a:p>
+              <a:p>
+                <a:pPr lvl="0"/>
+                <a:r>
+                  <a:rPr/>
+                  <a:t>Clustering matters when a </a:t>
+                </a:r>
+                <a:r>
+                  <a:rPr b="1"/>
+                  <a:t>shared, unmodelled</a:t>
+                </a:r>
+                <a:r>
+                  <a:rPr/>
+                  <a:t> shock sits in the residual</a:t>
+                </a:r>
+              </a:p>
+              <a:p>
+                <a:pPr lvl="0"/>
+                <a:r>
+                  <a:rPr/>
+                  <a:t>Model that shock explicitly and the correction shrinks</a:t>
+                </a:r>
+              </a:p>
+              <a:p>
+                <a:pPr lvl="0"/>
+                <a:r>
+                  <a:rPr/>
+                  <a:t>Neither route is cheating — the same fact, handled in two places</a:t>
+                </a:r>
+              </a:p>
+              <a:p>
+                <a:pPr lvl="0" indent="0" marL="0">
+                  <a:buNone/>
+                </a:pPr>
+                <a:r>
+                  <a:rPr/>
+                  <a:t>Do </a:t>
+                </a:r>
+                <a:r>
+                  <a:rPr b="1"/>
+                  <a:t>not</a:t>
+                </a:r>
+                <a:r>
+                  <a:rPr/>
+                  <a:t> conclude “clustering never matters, just add controls”. A control that absorbs the shock may also absorb the variation you wanted to study.</a:t>
+                </a:r>
+              </a:p>
+            </p:txBody>
+          </p:sp>
+        </mc:Choice>
+      </mc:AlternateContent>
+    </p:spTree>
+  </p:cSld>
+</p:sld>
+</file>
+
+<file path=ppt/slides/slide28.xml><?xml version="1.0" encoding="utf-8"?>
+<p:sld xmlns:a="http://schemas.openxmlformats.org/drawingml/2006/main" xmlns:r="http://schemas.openxmlformats.org/officeDocument/2006/relationships" xmlns:p="http://schemas.openxmlformats.org/presentationml/2006/main">
+  <p:cSld>
+    <p:spTree>
+      <p:nvGrpSpPr>
+        <p:cNvPr id="1" name=""/>
+        <p:cNvGrpSpPr/>
+        <p:nvPr/>
+      </p:nvGrpSpPr>
+      <p:grpSpPr>
+        <a:xfrm>
+          <a:off x="0" y="0"/>
+          <a:ext cx="0" cy="0"/>
+          <a:chOff x="0" y="0"/>
+          <a:chExt cx="0" cy="0"/>
+        </a:xfrm>
+      </p:grpSpPr>
+      <p:sp>
+        <p:nvSpPr>
+          <p:cNvPr id="2" name="Title 1"/>
+          <p:cNvSpPr>
+            <a:spLocks noGrp="1"/>
+          </p:cNvSpPr>
+          <p:nvPr>
+            <p:ph type="title"/>
+          </p:nvPr>
+        </p:nvSpPr>
+        <p:spPr/>
+        <p:txBody>
+          <a:bodyPr/>
+          <a:lstStyle/>
+          <a:p>
+            <a:pPr lvl="0" indent="0" marL="0">
+              <a:buNone/>
+            </a:pPr>
+            <a:r>
+              <a:rPr/>
+              <a:t>Which one do you report?</a:t>
+            </a:r>
+          </a:p>
+        </p:txBody>
+      </p:sp>
+      <mc:AlternateContent xmlns:mc="http://schemas.openxmlformats.org/markup-compatibility/2006">
+        <mc:Choice xmlns:a14="http://schemas.microsoft.com/office/drawing/2010/main" Requires="a14">
+          <p:sp>
+            <p:nvSpPr>
+              <p:cNvPr id="3" name="Content Placeholder 2"/>
+              <p:cNvSpPr>
+                <a:spLocks noGrp="1"/>
+              </p:cNvSpPr>
+              <p:nvPr>
+                <p:ph idx="1"/>
+              </p:nvPr>
+            </p:nvSpPr>
+            <p:spPr/>
+            <p:txBody>
+              <a:bodyPr/>
+              <a:lstStyle/>
+              <a:p>
+                <a:pPr lvl="0"/>
+                <a:r>
+                  <a:rPr/>
+                  <a:t>Cluster </a:t>
+                </a:r>
+                <a:r>
+                  <a:rPr b="1"/>
+                  <a:t>at the level at which treatment varies</a:t>
+                </a:r>
+                <a:r>
+                  <a:rPr/>
+                  <a:t> and shocks are shared — here, </a:t>
+                </a:r>
+                <a:r>
+                  <a:rPr>
+                    <a:latin typeface="Courier"/>
+                  </a:rPr>
+                  <a:t>geo</a:t>
+                </a:r>
+              </a:p>
+              <a:p>
+                <a:pPr lvl="0"/>
+                <a:r>
+                  <a:rPr/>
+                  <a:t>Report the number of </a:t>
+                </a:r>
+                <a:r>
+                  <a:rPr b="1"/>
+                  <a:t>clusters</a:t>
+                </a:r>
+                <a:r>
+                  <a:rPr/>
+                  <a:t> alongside </a:t>
+                </a:r>
+                <a14:m>
+                  <m:oMath xmlns:m="http://schemas.openxmlformats.org/officeDocument/2006/math">
+                    <m:r>
+                      <m:t>n</m:t>
+                    </m:r>
+                  </m:oMath>
+                </a14:m>
+                <a:r>
+                  <a:rPr/>
+                  <a:t>: 3,150 rows, </a:t>
+                </a:r>
+                <a:r>
+                  <a:rPr b="1"/>
+                  <a:t>30 countries</a:t>
+                </a:r>
+              </a:p>
+              <a:p>
+                <a:pPr lvl="0"/>
+                <a:r>
+                  <a:rPr/>
+                  <a:t>Below roughly </a:t>
+                </a:r>
+                <a:r>
+                  <a:rPr b="1"/>
+                  <a:t>40 clusters</a:t>
+                </a:r>
+                <a:r>
+                  <a:rPr/>
+                  <a:t>, cluster-robust inference is itself unreliable</a:t>
+                </a:r>
+              </a:p>
+              <a:p>
+                <a:pPr lvl="0" indent="0" marL="0">
+                  <a:buNone/>
+                </a:pPr>
+                <a:r>
+                  <a:rPr/>
+                  <a:t>“Robust standard errors” in a table note, with no cluster level named, tells the reader nothing.</a:t>
+                </a:r>
+              </a:p>
+            </p:txBody>
+          </p:sp>
+        </mc:Choice>
+      </mc:AlternateContent>
+    </p:spTree>
+  </p:cSld>
+</p:sld>
+</file>
+
+<file path=ppt/slides/slide29.xml><?xml version="1.0" encoding="utf-8"?>
+<p:sld xmlns:a="http://schemas.openxmlformats.org/drawingml/2006/main" xmlns:r="http://schemas.openxmlformats.org/officeDocument/2006/relationships" xmlns:p="http://schemas.openxmlformats.org/presentationml/2006/main">
+  <p:cSld>
+    <p:spTree>
+      <p:nvGrpSpPr>
+        <p:cNvPr id="1" name=""/>
+        <p:cNvGrpSpPr/>
+        <p:nvPr/>
+      </p:nvGrpSpPr>
+      <p:grpSpPr>
+        <a:xfrm>
+          <a:off x="0" y="0"/>
+          <a:ext cx="0" cy="0"/>
+          <a:chOff x="0" y="0"/>
+          <a:chExt cx="0" cy="0"/>
+        </a:xfrm>
+      </p:grpSpPr>
+      <p:sp>
+        <p:nvSpPr>
+          <p:cNvPr id="2" name="Title 1"/>
+          <p:cNvSpPr>
+            <a:spLocks noGrp="1"/>
+          </p:cNvSpPr>
+          <p:nvPr>
+            <p:ph type="title"/>
+          </p:nvPr>
+        </p:nvSpPr>
+        <p:spPr>
+          <a:xfrm>
+            <a:off x="722313" y="1850000"/>
+            <a:ext cx="7772400" cy="1300000"/>
+          </a:xfrm>
+        </p:spPr>
+        <p:txBody>
+          <a:bodyPr/>
+          <a:lstStyle/>
+          <a:p>
+            <a:pPr lvl="0" indent="0" marL="0">
+              <a:buNone/>
+            </a:pPr>
+            <a:r>
+              <a:rPr/>
+              <a:t>6 · Omitted variable bias</a:t>
+            </a:r>
+          </a:p>
+        </p:txBody>
+      </p:sp>
+    </p:spTree>
+  </p:cSld>
+</p:sld>
+</file>
+
+<file path=ppt/slides/slide3.xml><?xml version="1.0" encoding="UTF-8"?><p:sld xmlns:a="http://schemas.openxmlformats.org/drawingml/2006/main" xmlns:r="http://schemas.openxmlformats.org/officeDocument/2006/relationships" xmlns:p="http://schemas.openxmlformats.org/presentationml/2006/main"><p:cSld><p:spTree><p:nvGrpSpPr><p:cNvPr id="1" name="" /><p:cNvGrpSpPr /><p:nvPr /></p:nvGrpSpPr><p:grpSpPr><a:xfrm><a:off x="0" y="0" /><a:ext cx="0" cy="0" /><a:chOff x="0" y="0" /><a:chExt cx="0" cy="0" /></a:xfrm></p:grpSpPr><p:sp><p:nvSpPr><p:cNvPr id="2" name="Title 1" /><p:cNvSpPr><a:spLocks noGrp="1" /></p:cNvSpPr><p:nvPr><p:ph type="title" /></p:nvPr></p:nvSpPr><p:spPr /><p:txBody><a:bodyPr /><a:lstStyle /><a:p><a:pPr lvl="0" indent="0" marL="0"><a:buNone /></a:pPr><a:r><a:rPr /><a:t>Outline</a:t></a:r></a:p></p:txBody></p:sp><p:graphicFrame><p:nvGraphicFramePr><p:cNvPr id="6" name="Content Placeholder 5" /><p:cNvGraphicFramePr><a:graphicFrameLocks noGrp="1" /></p:cNvGraphicFramePr><p:nvPr><p:ph idx="1" /></p:nvPr></p:nvGraphicFramePr><p:xfrm><a:off x="457200" y="1193800" /><a:ext cx="8229600" cy="3390900" /></p:xfrm><a:graphic><a:graphicData uri="http://schemas.openxmlformats.org/drawingml/2006/table"><a:tbl><a:tblPr firstRow="0" bandRow="1"><a:tableStyleId>{5C22544A-7EE6-4342-B048-85BDC9FD1C3A}</a:tableStyleId></a:tblPr><a:tblGrid><a:gridCol w="4114800" /><a:gridCol w="4114800" /></a:tblGrid><a:tr h="0"><a:tc><a:txBody><a:bodyPr /><a:lstStyle /><a:p><a:pPr lvl="0" indent="0" marL="0"><a:buNone /></a:pPr><a:r><a:rPr b="1" /><a:t>1</a:t></a:r></a:p></a:txBody></a:tc><a:tc><a:txBody><a:bodyPr /><a:lstStyle /><a:p><a:pPr lvl="0" indent="0" marL="0"><a:buNone /></a:pPr><a:r><a:rPr /><a:t>Where we are, and what this adds</a:t></a:r></a:p></a:txBody></a:tc></a:tr><a:tr h="0"><a:tc><a:txBody><a:bodyPr /><a:lstStyle /><a:p><a:pPr lvl="0" indent="0" marL="0"><a:buNone /></a:pPr><a:r><a:rPr b="1" /><a:t>2</a:t></a:r></a:p></a:txBody></a:tc><a:tc><a:txBody><a:bodyPr /><a:lstStyle /><a:p><a:pPr lvl="0" indent="0" marL="0"><a:buNone /></a:pPr><a:r><a:rPr /><a:t>The sampling distribution of </a:t></a:r><a14:m><m:oMath xmlns:m="http://schemas.openxmlformats.org/officeDocument/2006/math"><m:acc><m:accPr><m:chr m:val="̂" /></m:accPr><m:e><m:r><m:t>β</m:t></m:r></m:e></m:acc></m:oMath></a14:m></a:p></a:txBody></a:tc></a:tr><a:tr h="0"><a:tc><a:txBody><a:bodyPr /><a:lstStyle /><a:p><a:pPr lvl="0" indent="0" marL="0"><a:buNone /></a:pPr><a:r><a:rPr b="1" /><a:t>3</a:t></a:r></a:p></a:txBody></a:tc><a:tc><a:txBody><a:bodyPr /><a:lstStyle /><a:p><a:pPr lvl="0" indent="0" marL="0"><a:buNone /></a:pPr><a:r><a:rPr /><a:t>Gauss–Markov, and its caveat</a:t></a:r></a:p></a:txBody></a:tc></a:tr><a:tr h="0"><a:tc><a:txBody><a:bodyPr /><a:lstStyle /><a:p><a:pPr lvl="0" indent="0" marL="0"><a:buNone /></a:pPr><a:r><a:rPr b="1" /><a:t>4</a:t></a:r></a:p></a:txBody></a:tc><a:tc><a:txBody><a:bodyPr /><a:lstStyle /><a:p><a:pPr lvl="0" indent="0" marL="0"><a:buNone /></a:pPr><a:r><a:rPr /><a:t>When homoskedasticity fails</a:t></a:r></a:p></a:txBody></a:tc></a:tr><a:tr h="0"><a:tc><a:txBody><a:bodyPr /><a:lstStyle /><a:p><a:pPr lvl="0" indent="0" marL="0"><a:buNone /></a:pPr><a:r><a:rPr b="1" /><a:t>5</a:t></a:r></a:p></a:txBody></a:tc><a:tc><a:txBody><a:bodyPr /><a:lstStyle /><a:p><a:pPr lvl="0" indent="0" marL="0"><a:buNone /></a:pPr><a:r><a:rPr /><a:t>Three standard errors, one coefficient</a:t></a:r></a:p></a:txBody></a:tc></a:tr><a:tr h="0"><a:tc><a:txBody><a:bodyPr /><a:lstStyle /><a:p><a:pPr lvl="0" indent="0" marL="0"><a:buNone /></a:pPr><a:r><a:rPr b="1" /><a:t>6</a:t></a:r></a:p></a:txBody></a:tc><a:tc><a:txBody><a:bodyPr /><a:lstStyle /><a:p><a:pPr lvl="0" indent="0" marL="0"><a:buNone /></a:pPr><a:r><a:rPr /><a:t>Omitted variable bias — signed in advance</a:t></a:r></a:p></a:txBody></a:tc></a:tr><a:tr h="0"><a:tc><a:txBody><a:bodyPr /><a:lstStyle /><a:p><a:pPr lvl="0" indent="0" marL="0"><a:buNone /></a:pPr><a:r><a:rPr b="1" /><a:t>7</a:t></a:r></a:p></a:txBody></a:tc><a:tc><a:txBody><a:bodyPr /><a:lstStyle /><a:p><a:pPr lvl="0" indent="0" marL="0"><a:buNone /></a:pPr><a:r><a:rPr /><a:t>What a coefficient identifies</a:t></a:r></a:p></a:txBody></a:tc></a:tr><a:tr h="0"><a:tc><a:txBody><a:bodyPr /><a:lstStyle /><a:p><a:pPr lvl="0" indent="0" marL="0"><a:buNone /></a:pPr><a:r><a:rPr b="1" /><a:t>8</a:t></a:r></a:p></a:txBody></a:tc><a:tc><a:txBody><a:bodyPr /><a:lstStyle /><a:p><a:pPr lvl="0" indent="0" marL="0"><a:buNone /></a:pPr><a:r><a:rPr /><a:t>Key takeaways</a:t></a:r></a:p></a:txBody></a:tc></a:tr></a:tbl></a:graphicData></a:graphic></p:graphicFrame></p:spTree></p:cSld></p:sld>
+</file>
+
+<file path=ppt/slides/slide30.xml><?xml version="1.0" encoding="utf-8"?>
+<p:sld xmlns:a="http://schemas.openxmlformats.org/drawingml/2006/main" xmlns:r="http://schemas.openxmlformats.org/officeDocument/2006/relationships" xmlns:p="http://schemas.openxmlformats.org/presentationml/2006/main">
+  <p:cSld>
+    <p:spTree>
+      <p:nvGrpSpPr>
+        <p:cNvPr id="1" name=""/>
+        <p:cNvGrpSpPr/>
+        <p:nvPr/>
+      </p:nvGrpSpPr>
+      <p:grpSpPr>
+        <a:xfrm>
+          <a:off x="0" y="0"/>
+          <a:ext cx="0" cy="0"/>
+          <a:chOff x="0" y="0"/>
+          <a:chExt cx="0" cy="0"/>
+        </a:xfrm>
+      </p:grpSpPr>
+      <p:sp>
+        <p:nvSpPr>
+          <p:cNvPr id="2" name="Title 1"/>
+          <p:cNvSpPr>
+            <a:spLocks noGrp="1"/>
+          </p:cNvSpPr>
+          <p:nvPr>
+            <p:ph type="title"/>
+          </p:nvPr>
+        </p:nvSpPr>
+        <p:spPr/>
+        <p:txBody>
+          <a:bodyPr/>
+          <a:lstStyle/>
+          <a:p>
+            <a:pPr lvl="0" indent="0" marL="0">
+              <a:buNone/>
+            </a:pPr>
+            <a:r>
+              <a:rPr/>
+              <a:t>The formula</a:t>
+            </a:r>
+          </a:p>
+        </p:txBody>
+      </p:sp>
+      <mc:AlternateContent xmlns:mc="http://schemas.openxmlformats.org/markup-compatibility/2006">
+        <mc:Choice xmlns:a14="http://schemas.microsoft.com/office/drawing/2010/main" Requires="a14">
+          <p:sp>
+            <p:nvSpPr>
+              <p:cNvPr id="3" name="Content Placeholder 2"/>
+              <p:cNvSpPr>
+                <a:spLocks noGrp="1"/>
+              </p:cNvSpPr>
+              <p:nvPr>
+                <p:ph idx="1"/>
+              </p:nvPr>
+            </p:nvSpPr>
+            <p:spPr/>
+            <p:txBody>
+              <a:bodyPr/>
+              <a:lstStyle/>
+              <a:p>
+                <a:pPr lvl="0" indent="0" marL="0">
+                  <a:buNone/>
+                </a:pPr>
+                <a:r>
+                  <a:rPr/>
+                  <a:t>True model </a:t>
+                </a:r>
+                <a14:m>
+                  <m:oMath xmlns:m="http://schemas.openxmlformats.org/officeDocument/2006/math">
+                    <m:r>
+                      <m:t>y</m:t>
+                    </m:r>
+                    <m:r>
+                      <m:rPr>
+                        <m:sty m:val="p"/>
+                      </m:rPr>
+                      <m:t>=</m:t>
+                    </m:r>
+                    <m:sSub>
+                      <m:e>
+                        <m:r>
+                          <m:t>X</m:t>
+                        </m:r>
+                      </m:e>
+                      <m:sub>
+                        <m:r>
+                          <m:t>1</m:t>
+                        </m:r>
+                      </m:sub>
+                    </m:sSub>
+                    <m:sSub>
+                      <m:e>
+                        <m:r>
+                          <m:t>β</m:t>
+                        </m:r>
+                      </m:e>
+                      <m:sub>
+                        <m:r>
+                          <m:t>1</m:t>
+                        </m:r>
+                      </m:sub>
+                    </m:sSub>
+                    <m:r>
+                      <m:rPr>
+                        <m:sty m:val="p"/>
+                      </m:rPr>
+                      <m:t>+</m:t>
+                    </m:r>
+                    <m:sSub>
+                      <m:e>
+                        <m:r>
+                          <m:t>X</m:t>
+                        </m:r>
+                      </m:e>
+                      <m:sub>
+                        <m:r>
+                          <m:t>2</m:t>
+                        </m:r>
+                      </m:sub>
+                    </m:sSub>
+                    <m:sSub>
+                      <m:e>
+                        <m:r>
+                          <m:t>β</m:t>
+                        </m:r>
+                      </m:e>
+                      <m:sub>
+                        <m:r>
+                          <m:t>2</m:t>
+                        </m:r>
+                      </m:sub>
+                    </m:sSub>
+                    <m:r>
+                      <m:rPr>
+                        <m:sty m:val="p"/>
+                      </m:rPr>
+                      <m:t>+</m:t>
+                    </m:r>
+                    <m:r>
+                      <m:t>u</m:t>
+                    </m:r>
+                  </m:oMath>
+                </a14:m>
+                <a:r>
+                  <a:rPr/>
+                  <a:t>, estimated on </a:t>
                 </a:r>
                 <a14:m>
                   <m:oMath xmlns:m="http://schemas.openxmlformats.org/officeDocument/2006/math">
                     <m:sSub>
                       <m:e>
                         <m:r>
-                          <m:t>x</m:t>
+                          <m:t>X</m:t>
                         </m:r>
                       </m:e>
                       <m:sub>
                         <m:r>
-                          <m:t>j</m:t>
+                          <m:t>1</m:t>
                         </m:r>
                       </m:sub>
                     </m:sSub>
@@ -7989,13 +6246,1634 @@
                 </a14:m>
                 <a:r>
                   <a:rPr/>
-                  <a:t> on all other regressors.</a:t>
-                </a:r>
+                  <a:t> alone. With </a:t>
+                </a:r>
+                <a14:m>
+                  <m:oMath xmlns:m="http://schemas.openxmlformats.org/officeDocument/2006/math">
+                    <m:r>
+                      <m:t>δ</m:t>
+                    </m:r>
+                  </m:oMath>
+                </a14:m>
+                <a:r>
+                  <a:rPr/>
+                  <a:t> from regressing </a:t>
+                </a:r>
+                <a14:m>
+                  <m:oMath xmlns:m="http://schemas.openxmlformats.org/officeDocument/2006/math">
+                    <m:sSub>
+                      <m:e>
+                        <m:r>
+                          <m:t>X</m:t>
+                        </m:r>
+                      </m:e>
+                      <m:sub>
+                        <m:r>
+                          <m:t>2</m:t>
+                        </m:r>
+                      </m:sub>
+                    </m:sSub>
+                  </m:oMath>
+                </a14:m>
+                <a:r>
+                  <a:rPr/>
+                  <a:t> on </a:t>
+                </a:r>
+                <a14:m>
+                  <m:oMath xmlns:m="http://schemas.openxmlformats.org/officeDocument/2006/math">
+                    <m:sSub>
+                      <m:e>
+                        <m:r>
+                          <m:t>X</m:t>
+                        </m:r>
+                      </m:e>
+                      <m:sub>
+                        <m:r>
+                          <m:t>1</m:t>
+                        </m:r>
+                      </m:sub>
+                    </m:sSub>
+                  </m:oMath>
+                </a14:m>
+                <a:r>
+                  <a:rPr/>
+                  <a:t>:</a:t>
+                </a:r>
+              </a:p>
+              <a:p>
+                <a:pPr lvl="0" indent="0" marL="0">
+                  <a:buNone/>
+                </a:pPr>
+                <a14:m>
+                  <m:oMathPara xmlns:m="http://schemas.openxmlformats.org/officeDocument/2006/math">
+                    <m:oMathParaPr>
+                      <m:jc m:val="center"/>
+                    </m:oMathParaPr>
+                    <m:oMath>
+                      <m:r>
+                        <m:rPr>
+                          <m:sty m:val="p"/>
+                          <m:scr m:val="double-struck"/>
+                        </m:rPr>
+                        <m:t>E</m:t>
+                      </m:r>
+                      <m:d>
+                        <m:dPr>
+                          <m:begChr m:val="["/>
+                          <m:sepChr m:val=""/>
+                          <m:endChr m:val="]"/>
+                          <m:grow/>
+                        </m:dPr>
+                        <m:e>
+                          <m:sSub>
+                            <m:e>
+                              <m:acc>
+                                <m:accPr>
+                                  <m:chr m:val="̂"/>
+                                </m:accPr>
+                                <m:e>
+                                  <m:r>
+                                    <m:t>β</m:t>
+                                  </m:r>
+                                </m:e>
+                              </m:acc>
+                            </m:e>
+                            <m:sub>
+                              <m:r>
+                                <m:t>1</m:t>
+                              </m:r>
+                            </m:sub>
+                          </m:sSub>
+                        </m:e>
+                      </m:d>
+                      <m:r>
+                        <m:rPr>
+                          <m:sty m:val="p"/>
+                        </m:rPr>
+                        <m:t>=</m:t>
+                      </m:r>
+                      <m:sSub>
+                        <m:e>
+                          <m:r>
+                            <m:t>β</m:t>
+                          </m:r>
+                        </m:e>
+                        <m:sub>
+                          <m:r>
+                            <m:t>1</m:t>
+                          </m:r>
+                        </m:sub>
+                      </m:sSub>
+                      <m:r>
+                        <m:rPr>
+                          <m:sty m:val="p"/>
+                        </m:rPr>
+                        <m:t>+</m:t>
+                      </m:r>
+                      <m:r>
+                        <m:t>δ</m:t>
+                      </m:r>
+                      <m:sSub>
+                        <m:e>
+                          <m:r>
+                            <m:t>β</m:t>
+                          </m:r>
+                        </m:e>
+                        <m:sub>
+                          <m:r>
+                            <m:t>2</m:t>
+                          </m:r>
+                        </m:sub>
+                      </m:sSub>
+                    </m:oMath>
+                  </m:oMathPara>
+                </a14:m>
               </a:p>
             </p:txBody>
           </p:sp>
         </mc:Choice>
       </mc:AlternateContent>
+    </p:spTree>
+  </p:cSld>
+</p:sld>
+</file>
+
+<file path=ppt/slides/slide31.xml><?xml version="1.0" encoding="utf-8"?>
+<p:sld xmlns:a="http://schemas.openxmlformats.org/drawingml/2006/main" xmlns:r="http://schemas.openxmlformats.org/officeDocument/2006/relationships" xmlns:p="http://schemas.openxmlformats.org/presentationml/2006/main">
+  <p:cSld>
+    <p:spTree>
+      <p:nvGrpSpPr>
+        <p:cNvPr id="1" name=""/>
+        <p:cNvGrpSpPr/>
+        <p:nvPr/>
+      </p:nvGrpSpPr>
+      <p:grpSpPr>
+        <a:xfrm>
+          <a:off x="0" y="0"/>
+          <a:ext cx="0" cy="0"/>
+          <a:chOff x="0" y="0"/>
+          <a:chExt cx="0" cy="0"/>
+        </a:xfrm>
+      </p:grpSpPr>
+      <p:sp>
+        <p:nvSpPr>
+          <p:cNvPr id="2" name="Title 1"/>
+          <p:cNvSpPr>
+            <a:spLocks noGrp="1"/>
+          </p:cNvSpPr>
+          <p:nvPr>
+            <p:ph type="title"/>
+          </p:nvPr>
+        </p:nvSpPr>
+        <p:spPr/>
+        <p:txBody>
+          <a:bodyPr/>
+          <a:lstStyle/>
+          <a:p>
+            <a:pPr lvl="0" indent="0" marL="0">
+              <a:buNone/>
+            </a:pPr>
+            <a:r>
+              <a:rPr/>
+              <a:t>Sign it with two questions</a:t>
+            </a:r>
+          </a:p>
+        </p:txBody>
+      </p:sp>
+      <p:pic>
+        <p:nvPicPr>
+          <p:cNvPr descr="slides_files/figure-pptx/cell-8-output-1.png" id="0" name="Picture 1"/>
+          <p:cNvPicPr>
+            <a:picLocks noGrp="1" noChangeAspect="1"/>
+          </p:cNvPicPr>
+          <p:nvPr/>
+        </p:nvPicPr>
+        <p:blipFill>
+          <a:blip r:embed="rId2"/>
+          <a:stretch>
+            <a:fillRect/>
+          </a:stretch>
+        </p:blipFill>
+        <p:spPr bwMode="auto">
+          <a:xfrm>
+            <a:off x="457200" y="1460500"/>
+            <a:ext cx="8229600" cy="2857500"/>
+          </a:xfrm>
+          <a:prstGeom prst="rect">
+            <a:avLst/>
+          </a:prstGeom>
+          <a:noFill/>
+          <a:ln w="9525">
+            <a:noFill/>
+            <a:headEnd/>
+            <a:tailEnd/>
+          </a:ln>
+        </p:spPr>
+      </p:pic>
+    </p:spTree>
+  </p:cSld>
+</p:sld>
+</file>
+
+<file path=ppt/slides/slide32.xml><?xml version="1.0" encoding="utf-8"?>
+<p:sld xmlns:a="http://schemas.openxmlformats.org/drawingml/2006/main" xmlns:r="http://schemas.openxmlformats.org/officeDocument/2006/relationships" xmlns:p="http://schemas.openxmlformats.org/presentationml/2006/main">
+  <p:cSld>
+    <p:spTree>
+      <p:nvGrpSpPr>
+        <p:cNvPr id="1" name=""/>
+        <p:cNvGrpSpPr/>
+        <p:nvPr/>
+      </p:nvGrpSpPr>
+      <p:grpSpPr>
+        <a:xfrm>
+          <a:off x="0" y="0"/>
+          <a:ext cx="0" cy="0"/>
+          <a:chOff x="0" y="0"/>
+          <a:chExt cx="0" cy="0"/>
+        </a:xfrm>
+      </p:grpSpPr>
+      <p:sp>
+        <p:nvSpPr>
+          <p:cNvPr id="3" name="Content Placeholder 2"/>
+          <p:cNvSpPr>
+            <a:spLocks noGrp="1"/>
+          </p:cNvSpPr>
+          <p:nvPr>
+            <p:ph idx="1"/>
+          </p:nvPr>
+        </p:nvSpPr>
+        <p:spPr/>
+        <p:txBody>
+          <a:bodyPr/>
+          <a:lstStyle/>
+          <a:p>
+            <a:pPr lvl="0" indent="0" marL="0">
+              <a:buNone/>
+            </a:pPr>
+            <a:r>
+              <a:rPr b="1"/>
+              <a:t>Same sign in both → upward bias.</a:t>
+            </a:r>
+            <a:r>
+              <a:rPr/>
+              <a:t> Answer both questions in writing </a:t>
+            </a:r>
+            <a:r>
+              <a:rPr i="1"/>
+              <a:t>before</a:t>
+            </a:r>
+            <a:r>
+              <a:rPr/>
+              <a:t> estimating. It costs nothing, and it is the most useful discipline in applied work.</a:t>
+            </a:r>
+          </a:p>
+        </p:txBody>
+      </p:sp>
+    </p:spTree>
+  </p:cSld>
+</p:sld>
+</file>
+
+<file path=ppt/slides/slide33.xml><?xml version="1.0" encoding="utf-8"?>
+<p:sld xmlns:a="http://schemas.openxmlformats.org/drawingml/2006/main" xmlns:r="http://schemas.openxmlformats.org/officeDocument/2006/relationships" xmlns:p="http://schemas.openxmlformats.org/presentationml/2006/main">
+  <p:cSld>
+    <p:spTree>
+      <p:nvGrpSpPr>
+        <p:cNvPr id="1" name=""/>
+        <p:cNvGrpSpPr/>
+        <p:nvPr/>
+      </p:nvGrpSpPr>
+      <p:grpSpPr>
+        <a:xfrm>
+          <a:off x="0" y="0"/>
+          <a:ext cx="0" cy="0"/>
+          <a:chOff x="0" y="0"/>
+          <a:chExt cx="0" cy="0"/>
+        </a:xfrm>
+      </p:grpSpPr>
+      <p:sp>
+        <p:nvSpPr>
+          <p:cNvPr id="2" name="Title 1"/>
+          <p:cNvSpPr>
+            <a:spLocks noGrp="1"/>
+          </p:cNvSpPr>
+          <p:nvPr>
+            <p:ph type="title"/>
+          </p:nvPr>
+        </p:nvSpPr>
+        <p:spPr/>
+        <p:txBody>
+          <a:bodyPr/>
+          <a:lstStyle/>
+          <a:p>
+            <a:pPr lvl="0" indent="0" marL="0">
+              <a:buNone/>
+            </a:pPr>
+            <a:r>
+              <a:rPr/>
+              <a:t>Then test the prediction</a:t>
+            </a:r>
+          </a:p>
+        </p:txBody>
+      </p:sp>
+      <p:pic>
+        <p:nvPicPr>
+          <p:cNvPr descr="slides_files/figure-pptx/cell-9-output-1.png" id="0" name="Picture 1"/>
+          <p:cNvPicPr>
+            <a:picLocks noGrp="1" noChangeAspect="1"/>
+          </p:cNvPicPr>
+          <p:nvPr/>
+        </p:nvPicPr>
+        <p:blipFill>
+          <a:blip r:embed="rId2"/>
+          <a:stretch>
+            <a:fillRect/>
+          </a:stretch>
+        </p:blipFill>
+        <p:spPr bwMode="auto">
+          <a:xfrm>
+            <a:off x="457200" y="1536700"/>
+            <a:ext cx="8229600" cy="2717800"/>
+          </a:xfrm>
+          <a:prstGeom prst="rect">
+            <a:avLst/>
+          </a:prstGeom>
+          <a:noFill/>
+          <a:ln w="9525">
+            <a:noFill/>
+            <a:headEnd/>
+            <a:tailEnd/>
+          </a:ln>
+        </p:spPr>
+      </p:pic>
+    </p:spTree>
+  </p:cSld>
+</p:sld>
+</file>
+
+<file path=ppt/slides/slide34.xml><?xml version="1.0" encoding="utf-8"?>
+<p:sld xmlns:a="http://schemas.openxmlformats.org/drawingml/2006/main" xmlns:r="http://schemas.openxmlformats.org/officeDocument/2006/relationships" xmlns:p="http://schemas.openxmlformats.org/presentationml/2006/main">
+  <p:cSld>
+    <p:spTree>
+      <p:nvGrpSpPr>
+        <p:cNvPr id="1" name=""/>
+        <p:cNvGrpSpPr/>
+        <p:nvPr/>
+      </p:nvGrpSpPr>
+      <p:grpSpPr>
+        <a:xfrm>
+          <a:off x="0" y="0"/>
+          <a:ext cx="0" cy="0"/>
+          <a:chOff x="0" y="0"/>
+          <a:chExt cx="0" cy="0"/>
+        </a:xfrm>
+      </p:grpSpPr>
+      <mc:AlternateContent xmlns:mc="http://schemas.openxmlformats.org/markup-compatibility/2006">
+        <mc:Choice xmlns:a14="http://schemas.microsoft.com/office/drawing/2010/main" Requires="a14">
+          <p:sp>
+            <p:nvSpPr>
+              <p:cNvPr id="3" name="Content Placeholder 2"/>
+              <p:cNvSpPr>
+                <a:spLocks noGrp="1"/>
+              </p:cNvSpPr>
+              <p:nvPr>
+                <p:ph idx="1"/>
+              </p:nvPr>
+            </p:nvSpPr>
+            <p:spPr/>
+            <p:txBody>
+              <a:bodyPr/>
+              <a:lstStyle/>
+              <a:p>
+                <a:pPr lvl="0" indent="0" marL="0">
+                  <a:buNone/>
+                </a:pPr>
+                <a:r>
+                  <a:rPr/>
+                  <a:t>Productive countries have higher earnings (</a:t>
+                </a:r>
+                <a14:m>
+                  <m:oMath xmlns:m="http://schemas.openxmlformats.org/officeDocument/2006/math">
+                    <m:sSub>
+                      <m:e>
+                        <m:r>
+                          <m:t>β</m:t>
+                        </m:r>
+                      </m:e>
+                      <m:sub>
+                        <m:r>
+                          <m:t>2</m:t>
+                        </m:r>
+                      </m:sub>
+                    </m:sSub>
+                    <m:r>
+                      <m:rPr>
+                        <m:sty m:val="p"/>
+                      </m:rPr>
+                      <m:t>&gt;</m:t>
+                    </m:r>
+                    <m:r>
+                      <m:t>0</m:t>
+                    </m:r>
+                  </m:oMath>
+                </a14:m>
+                <a:r>
+                  <a:rPr/>
+                  <a:t>) </a:t>
+                </a:r>
+                <a:r>
+                  <a:rPr b="1"/>
+                  <a:t>and</a:t>
+                </a:r>
+                <a:r>
+                  <a:rPr/>
+                  <a:t> higher tertiary shares (</a:t>
+                </a:r>
+                <a14:m>
+                  <m:oMath xmlns:m="http://schemas.openxmlformats.org/officeDocument/2006/math">
+                    <m:r>
+                      <m:t>δ</m:t>
+                    </m:r>
+                    <m:r>
+                      <m:rPr>
+                        <m:sty m:val="p"/>
+                      </m:rPr>
+                      <m:t>&gt;</m:t>
+                    </m:r>
+                    <m:r>
+                      <m:t>0</m:t>
+                    </m:r>
+                  </m:oMath>
+                </a14:m>
+                <a:r>
+                  <a:rPr/>
+                  <a:t>), so the bias should be </a:t>
+                </a:r>
+                <a:r>
+                  <a:rPr b="1"/>
+                  <a:t>upward</a:t>
+                </a:r>
+                <a:r>
+                  <a:rPr/>
+                  <a:t> — the short coefficient should exceed the long one. It does.</a:t>
+                </a:r>
+              </a:p>
+            </p:txBody>
+          </p:sp>
+        </mc:Choice>
+      </mc:AlternateContent>
+    </p:spTree>
+  </p:cSld>
+</p:sld>
+</file>
+
+<file path=ppt/slides/slide35.xml><?xml version="1.0" encoding="utf-8"?>
+<p:sld xmlns:a="http://schemas.openxmlformats.org/drawingml/2006/main" xmlns:r="http://schemas.openxmlformats.org/officeDocument/2006/relationships" xmlns:p="http://schemas.openxmlformats.org/presentationml/2006/main">
+  <p:cSld>
+    <p:spTree>
+      <p:nvGrpSpPr>
+        <p:cNvPr id="1" name=""/>
+        <p:cNvGrpSpPr/>
+        <p:nvPr/>
+      </p:nvGrpSpPr>
+      <p:grpSpPr>
+        <a:xfrm>
+          <a:off x="0" y="0"/>
+          <a:ext cx="0" cy="0"/>
+          <a:chOff x="0" y="0"/>
+          <a:chExt cx="0" cy="0"/>
+        </a:xfrm>
+      </p:grpSpPr>
+      <p:sp>
+        <p:nvSpPr>
+          <p:cNvPr id="2" name="Title 1"/>
+          <p:cNvSpPr>
+            <a:spLocks noGrp="1"/>
+          </p:cNvSpPr>
+          <p:nvPr>
+            <p:ph type="title"/>
+          </p:nvPr>
+        </p:nvSpPr>
+        <p:spPr>
+          <a:xfrm>
+            <a:off x="722313" y="1850000"/>
+            <a:ext cx="7772400" cy="1300000"/>
+          </a:xfrm>
+        </p:spPr>
+        <p:txBody>
+          <a:bodyPr/>
+          <a:lstStyle/>
+          <a:p>
+            <a:pPr lvl="0" indent="0" marL="0">
+              <a:buNone/>
+            </a:pPr>
+            <a:r>
+              <a:rPr/>
+              <a:t>7 · What it identifies</a:t>
+            </a:r>
+          </a:p>
+        </p:txBody>
+      </p:sp>
+    </p:spTree>
+  </p:cSld>
+</p:sld>
+</file>
+
+<file path=ppt/slides/slide36.xml><?xml version="1.0" encoding="utf-8"?>
+<p:sld xmlns:a="http://schemas.openxmlformats.org/drawingml/2006/main" xmlns:r="http://schemas.openxmlformats.org/officeDocument/2006/relationships" xmlns:p="http://schemas.openxmlformats.org/presentationml/2006/main">
+  <p:cSld>
+    <p:spTree>
+      <p:nvGrpSpPr>
+        <p:cNvPr id="1" name=""/>
+        <p:cNvGrpSpPr/>
+        <p:nvPr/>
+      </p:nvGrpSpPr>
+      <p:grpSpPr>
+        <a:xfrm>
+          <a:off x="0" y="0"/>
+          <a:ext cx="0" cy="0"/>
+          <a:chOff x="0" y="0"/>
+          <a:chExt cx="0" cy="0"/>
+        </a:xfrm>
+      </p:grpSpPr>
+      <p:sp>
+        <p:nvSpPr>
+          <p:cNvPr id="2" name="Title 1"/>
+          <p:cNvSpPr>
+            <a:spLocks noGrp="1"/>
+          </p:cNvSpPr>
+          <p:nvPr>
+            <p:ph type="title"/>
+          </p:nvPr>
+        </p:nvSpPr>
+        <p:spPr/>
+        <p:txBody>
+          <a:bodyPr/>
+          <a:lstStyle/>
+          <a:p>
+            <a:pPr lvl="0" indent="0" marL="0">
+              <a:buNone/>
+            </a:pPr>
+            <a:r>
+              <a:rPr/>
+              <a:t>The Mincer example</a:t>
+            </a:r>
+          </a:p>
+        </p:txBody>
+      </p:sp>
+      <mc:AlternateContent xmlns:mc="http://schemas.openxmlformats.org/markup-compatibility/2006">
+        <mc:Choice xmlns:a14="http://schemas.microsoft.com/office/drawing/2010/main" Requires="a14">
+          <p:sp>
+            <p:nvSpPr>
+              <p:cNvPr id="3" name="Content Placeholder 2"/>
+              <p:cNvSpPr>
+                <a:spLocks noGrp="1"/>
+              </p:cNvSpPr>
+              <p:nvPr>
+                <p:ph idx="1"/>
+              </p:nvPr>
+            </p:nvSpPr>
+            <p:spPr/>
+            <p:txBody>
+              <a:bodyPr/>
+              <a:lstStyle/>
+              <a:p>
+                <a:pPr lvl="0" indent="0" marL="0">
+                  <a:buNone/>
+                </a:pPr>
+                <a14:m>
+                  <m:oMathPara xmlns:m="http://schemas.openxmlformats.org/officeDocument/2006/math">
+                    <m:oMathParaPr>
+                      <m:jc m:val="center"/>
+                    </m:oMathParaPr>
+                    <m:oMath>
+                      <m:r>
+                        <m:rPr>
+                          <m:sty m:val="p"/>
+                        </m:rPr>
+                        <m:t>log</m:t>
+                      </m:r>
+                      <m:sSub>
+                        <m:e>
+                          <m:r>
+                            <m:t>w</m:t>
+                          </m:r>
+                        </m:e>
+                        <m:sub>
+                          <m:r>
+                            <m:t>i</m:t>
+                          </m:r>
+                        </m:sub>
+                      </m:sSub>
+                      <m:r>
+                        <m:rPr>
+                          <m:sty m:val="p"/>
+                        </m:rPr>
+                        <m:t>=</m:t>
+                      </m:r>
+                      <m:r>
+                        <m:t>α</m:t>
+                      </m:r>
+                      <m:r>
+                        <m:rPr>
+                          <m:sty m:val="p"/>
+                        </m:rPr>
+                        <m:t>+</m:t>
+                      </m:r>
+                      <m:r>
+                        <m:t>ρ</m:t>
+                      </m:r>
+                      <m:sSub>
+                        <m:e>
+                          <m:r>
+                            <m:t>S</m:t>
+                          </m:r>
+                        </m:e>
+                        <m:sub>
+                          <m:r>
+                            <m:t>i</m:t>
+                          </m:r>
+                        </m:sub>
+                      </m:sSub>
+                      <m:r>
+                        <m:rPr>
+                          <m:sty m:val="p"/>
+                        </m:rPr>
+                        <m:t>+</m:t>
+                      </m:r>
+                      <m:sSub>
+                        <m:e>
+                          <m:r>
+                            <m:t>γ</m:t>
+                          </m:r>
+                        </m:e>
+                        <m:sub>
+                          <m:r>
+                            <m:t>1</m:t>
+                          </m:r>
+                        </m:sub>
+                      </m:sSub>
+                      <m:sSub>
+                        <m:e>
+                          <m:r>
+                            <m:t>X</m:t>
+                          </m:r>
+                        </m:e>
+                        <m:sub>
+                          <m:r>
+                            <m:t>i</m:t>
+                          </m:r>
+                        </m:sub>
+                      </m:sSub>
+                      <m:r>
+                        <m:rPr>
+                          <m:sty m:val="p"/>
+                        </m:rPr>
+                        <m:t>+</m:t>
+                      </m:r>
+                      <m:sSub>
+                        <m:e>
+                          <m:r>
+                            <m:t>γ</m:t>
+                          </m:r>
+                        </m:e>
+                        <m:sub>
+                          <m:r>
+                            <m:t>2</m:t>
+                          </m:r>
+                        </m:sub>
+                      </m:sSub>
+                      <m:sSubSup>
+                        <m:e>
+                          <m:r>
+                            <m:t>X</m:t>
+                          </m:r>
+                        </m:e>
+                        <m:sub>
+                          <m:r>
+                            <m:t>i</m:t>
+                          </m:r>
+                        </m:sub>
+                        <m:sup>
+                          <m:r>
+                            <m:t>2</m:t>
+                          </m:r>
+                        </m:sup>
+                      </m:sSubSup>
+                      <m:r>
+                        <m:rPr>
+                          <m:sty m:val="p"/>
+                        </m:rPr>
+                        <m:t>+</m:t>
+                      </m:r>
+                      <m:sSub>
+                        <m:e>
+                          <m:r>
+                            <m:t>ε</m:t>
+                          </m:r>
+                        </m:e>
+                        <m:sub>
+                          <m:r>
+                            <m:t>i</m:t>
+                          </m:r>
+                        </m:sub>
+                      </m:sSub>
+                    </m:oMath>
+                  </m:oMathPara>
+                </a14:m>
+              </a:p>
+              <a:p>
+                <a:pPr lvl="0" indent="0" marL="0">
+                  <a:buNone/>
+                </a:pPr>
+                <a14:m>
+                  <m:oMath xmlns:m="http://schemas.openxmlformats.org/officeDocument/2006/math">
+                    <m:r>
+                      <m:t>ρ</m:t>
+                    </m:r>
+                  </m:oMath>
+                </a14:m>
+                <a:r>
+                  <a:rPr/>
+                  <a:t> is often read as “the return to a year of schooling”. Strictly, it is</a:t>
+                </a:r>
+              </a:p>
+              <a:p>
+                <a:pPr lvl="0" indent="0" marL="1270000">
+                  <a:buNone/>
+                </a:pPr>
+                <a:r>
+                  <a:rPr sz="2000"/>
+                  <a:t>the mean log-wage difference associated with an additional year of schooling </a:t>
+                </a:r>
+                <a:r>
+                  <a:rPr sz="2000" b="1"/>
+                  <a:t>among people otherwise identical on the included covariates.</a:t>
+                </a:r>
+              </a:p>
+              <a:p>
+                <a:pPr lvl="0" indent="0" marL="0">
+                  <a:buNone/>
+                </a:pPr>
+                <a:r>
+                  <a:rPr/>
+                  <a:t>Unobserved ability, selection into schooling and measurement error each break the causal reading. Session 10 supplies tools that take this seriously.</a:t>
+                </a:r>
+              </a:p>
+              <a:p>
+                <a:pPr lvl="0" indent="0" marL="0">
+                  <a:buNone/>
+                </a:pPr>
+                <a:r>
+                  <a:rPr/>
+                  <a:t>Today the discipline is simply to </a:t>
+                </a:r>
+                <a:r>
+                  <a:rPr b="1"/>
+                  <a:t>say precisely what you have estimated.</a:t>
+                </a:r>
+              </a:p>
+            </p:txBody>
+          </p:sp>
+        </mc:Choice>
+      </mc:AlternateContent>
+    </p:spTree>
+  </p:cSld>
+</p:sld>
+</file>
+
+<file path=ppt/slides/slide37.xml><?xml version="1.0" encoding="utf-8"?>
+<p:sld xmlns:a="http://schemas.openxmlformats.org/drawingml/2006/main" xmlns:r="http://schemas.openxmlformats.org/officeDocument/2006/relationships" xmlns:p="http://schemas.openxmlformats.org/presentationml/2006/main">
+  <p:cSld>
+    <p:spTree>
+      <p:nvGrpSpPr>
+        <p:cNvPr id="1" name=""/>
+        <p:cNvGrpSpPr/>
+        <p:nvPr/>
+      </p:nvGrpSpPr>
+      <p:grpSpPr>
+        <a:xfrm>
+          <a:off x="0" y="0"/>
+          <a:ext cx="0" cy="0"/>
+          <a:chOff x="0" y="0"/>
+          <a:chExt cx="0" cy="0"/>
+        </a:xfrm>
+      </p:grpSpPr>
+      <p:sp>
+        <p:nvSpPr>
+          <p:cNvPr id="2" name="Title 1"/>
+          <p:cNvSpPr>
+            <a:spLocks noGrp="1"/>
+          </p:cNvSpPr>
+          <p:nvPr>
+            <p:ph type="title"/>
+          </p:nvPr>
+        </p:nvSpPr>
+        <p:spPr>
+          <a:xfrm>
+            <a:off x="722313" y="1850000"/>
+            <a:ext cx="7772400" cy="1300000"/>
+          </a:xfrm>
+        </p:spPr>
+        <p:txBody>
+          <a:bodyPr/>
+          <a:lstStyle/>
+          <a:p>
+            <a:pPr lvl="0" indent="0" marL="0">
+              <a:buNone/>
+            </a:pPr>
+            <a:r>
+              <a:rPr/>
+              <a:t>8 · Key takeaways</a:t>
+            </a:r>
+          </a:p>
+        </p:txBody>
+      </p:sp>
+    </p:spTree>
+  </p:cSld>
+</p:sld>
+</file>
+
+<file path=ppt/slides/slide38.xml><?xml version="1.0" encoding="utf-8"?>
+<p:sld xmlns:a="http://schemas.openxmlformats.org/drawingml/2006/main" xmlns:r="http://schemas.openxmlformats.org/officeDocument/2006/relationships" xmlns:p="http://schemas.openxmlformats.org/presentationml/2006/main">
+  <p:cSld>
+    <p:spTree>
+      <p:nvGrpSpPr>
+        <p:cNvPr id="1" name=""/>
+        <p:cNvGrpSpPr/>
+        <p:nvPr/>
+      </p:nvGrpSpPr>
+      <p:grpSpPr>
+        <a:xfrm>
+          <a:off x="0" y="0"/>
+          <a:ext cx="0" cy="0"/>
+          <a:chOff x="0" y="0"/>
+          <a:chExt cx="0" cy="0"/>
+        </a:xfrm>
+      </p:grpSpPr>
+      <p:sp>
+        <p:nvSpPr>
+          <p:cNvPr id="2" name="Title 1"/>
+          <p:cNvSpPr>
+            <a:spLocks noGrp="1"/>
+          </p:cNvSpPr>
+          <p:nvPr>
+            <p:ph type="title"/>
+          </p:nvPr>
+        </p:nvSpPr>
+        <p:spPr/>
+        <p:txBody>
+          <a:bodyPr/>
+          <a:lstStyle/>
+          <a:p>
+            <a:pPr lvl="0" indent="0" marL="0">
+              <a:buNone/>
+            </a:pPr>
+            <a:r>
+              <a:rPr/>
+              <a:t>What to carry out of this session</a:t>
+            </a:r>
+          </a:p>
+        </p:txBody>
+      </p:sp>
+      <mc:AlternateContent xmlns:mc="http://schemas.openxmlformats.org/markup-compatibility/2006">
+        <mc:Choice xmlns:a14="http://schemas.microsoft.com/office/drawing/2010/main" Requires="a14">
+          <p:sp>
+            <p:nvSpPr>
+              <p:cNvPr id="3" name="Content Placeholder 2"/>
+              <p:cNvSpPr>
+                <a:spLocks noGrp="1"/>
+              </p:cNvSpPr>
+              <p:nvPr>
+                <p:ph idx="1"/>
+              </p:nvPr>
+            </p:nvSpPr>
+            <p:spPr/>
+            <p:txBody>
+              <a:bodyPr/>
+              <a:lstStyle/>
+              <a:p>
+                <a:pPr lvl="0" indent="-342900" marL="342900">
+                  <a:buAutoNum type="arabicPeriod"/>
+                </a:pPr>
+                <a14:m>
+                  <m:oMath xmlns:m="http://schemas.openxmlformats.org/officeDocument/2006/math">
+                    <m:acc>
+                      <m:accPr>
+                        <m:chr m:val="̂"/>
+                      </m:accPr>
+                      <m:e>
+                        <m:r>
+                          <m:t>β</m:t>
+                        </m:r>
+                      </m:e>
+                    </m:acc>
+                    <m:r>
+                      <m:rPr>
+                        <m:sty m:val="p"/>
+                      </m:rPr>
+                      <m:t>=</m:t>
+                    </m:r>
+                    <m:r>
+                      <m:t>β</m:t>
+                    </m:r>
+                    <m:r>
+                      <m:rPr>
+                        <m:sty m:val="p"/>
+                      </m:rPr>
+                      <m:t>+</m:t>
+                    </m:r>
+                    <m:sSup>
+                      <m:e>
+                        <m:d>
+                          <m:dPr>
+                            <m:begChr m:val="("/>
+                            <m:sepChr m:val=""/>
+                            <m:endChr m:val=")"/>
+                            <m:grow/>
+                          </m:dPr>
+                          <m:e>
+                            <m:sSup>
+                              <m:e>
+                                <m:r>
+                                  <m:t>X</m:t>
+                                </m:r>
+                              </m:e>
+                              <m:sup>
+                                <m:r>
+                                  <m:rPr>
+                                    <m:sty m:val="p"/>
+                                  </m:rPr>
+                                  <m:t>⊤</m:t>
+                                </m:r>
+                              </m:sup>
+                            </m:sSup>
+                            <m:r>
+                              <m:t>X</m:t>
+                            </m:r>
+                          </m:e>
+                        </m:d>
+                      </m:e>
+                      <m:sup>
+                        <m:r>
+                          <m:rPr>
+                            <m:sty m:val="p"/>
+                          </m:rPr>
+                          <m:t>−</m:t>
+                        </m:r>
+                        <m:r>
+                          <m:t>1</m:t>
+                        </m:r>
+                      </m:sup>
+                    </m:sSup>
+                    <m:sSup>
+                      <m:e>
+                        <m:r>
+                          <m:t>X</m:t>
+                        </m:r>
+                      </m:e>
+                      <m:sup>
+                        <m:r>
+                          <m:rPr>
+                            <m:sty m:val="p"/>
+                          </m:rPr>
+                          <m:t>⊤</m:t>
+                        </m:r>
+                      </m:sup>
+                    </m:sSup>
+                    <m:r>
+                      <m:t>ε</m:t>
+                    </m:r>
+                  </m:oMath>
+                </a14:m>
+                <a:r>
+                  <a:rPr/>
+                  <a:t> — </a:t>
+                </a:r>
+                <a:r>
+                  <a:rPr b="1"/>
+                  <a:t>everything follows from the second term</a:t>
+                </a:r>
+              </a:p>
+              <a:p>
+                <a:pPr lvl="0" indent="-342900" marL="342900">
+                  <a:buAutoNum type="arabicPeriod"/>
+                </a:pPr>
+                <a:r>
+                  <a:rPr/>
+                  <a:t>Unbiasedness is cheap; </a:t>
+                </a:r>
+                <a:r>
+                  <a:rPr b="1"/>
+                  <a:t>precision is where the assumptions bite</a:t>
+                </a:r>
+              </a:p>
+              <a:p>
+                <a:pPr lvl="0" indent="-342900" marL="342900">
+                  <a:buAutoNum type="arabicPeriod"/>
+                </a:pPr>
+                <a:r>
+                  <a:rPr/>
+                  <a:t>The sandwich is always right; classical, HC1 and cluster are three guesses at </a:t>
+                </a:r>
+                <a14:m>
+                  <m:oMath xmlns:m="http://schemas.openxmlformats.org/officeDocument/2006/math">
+                    <m:r>
+                      <m:t>Ω</m:t>
+                    </m:r>
+                  </m:oMath>
+                </a14:m>
+              </a:p>
+              <a:p>
+                <a:pPr lvl="0" indent="-342900" marL="342900">
+                  <a:buAutoNum type="arabicPeriod"/>
+                </a:pPr>
+                <a:r>
+                  <a:rPr b="1"/>
+                  <a:t>Cluster where treatment varies</a:t>
+                </a:r>
+                <a:r>
+                  <a:rPr/>
+                  <a:t>, name the level, report the cluster count</a:t>
+                </a:r>
+              </a:p>
+              <a:p>
+                <a:pPr lvl="0" indent="-342900" marL="342900">
+                  <a:buAutoNum type="arabicPeriod"/>
+                </a:pPr>
+                <a:r>
+                  <a:rPr b="1"/>
+                  <a:t>Sign the omitted-variable bias before estimating</a:t>
+                </a:r>
+                <a:r>
+                  <a:rPr/>
+                  <a:t>, then check</a:t>
+                </a:r>
+              </a:p>
+              <a:p>
+                <a:pPr lvl="0" indent="-342900" marL="342900">
+                  <a:buAutoNum type="arabicPeriod"/>
+                </a:pPr>
+                <a:r>
+                  <a:rPr/>
+                  <a:t>A </a:t>
+                </a:r>
+                <a14:m>
+                  <m:oMath xmlns:m="http://schemas.openxmlformats.org/officeDocument/2006/math">
+                    <m:r>
+                      <m:t>p</m:t>
+                    </m:r>
+                  </m:oMath>
+                </a14:m>
+                <a:r>
+                  <a:rPr/>
+                  <a:t>-value answers “how surprising under the null” — not “how large”, not “is the model right”</a:t>
+                </a:r>
+              </a:p>
+            </p:txBody>
+          </p:sp>
+        </mc:Choice>
+      </mc:AlternateContent>
+    </p:spTree>
+  </p:cSld>
+</p:sld>
+</file>
+
+<file path=ppt/slides/slide39.xml><?xml version="1.0" encoding="UTF-8"?><p:sld xmlns:a="http://schemas.openxmlformats.org/drawingml/2006/main" xmlns:r="http://schemas.openxmlformats.org/officeDocument/2006/relationships" xmlns:p="http://schemas.openxmlformats.org/presentationml/2006/main"><p:cSld><p:spTree><p:nvGrpSpPr><p:cNvPr id="1" name="" /><p:cNvGrpSpPr /><p:nvPr /></p:nvGrpSpPr><p:grpSpPr><a:xfrm><a:off x="0" y="0" /><a:ext cx="0" cy="0" /><a:chOff x="0" y="0" /><a:chExt cx="0" cy="0" /></a:xfrm></p:grpSpPr><p:sp><p:nvSpPr><p:cNvPr id="2" name="Title 1" /><p:cNvSpPr><a:spLocks noGrp="1" /></p:cNvSpPr><p:nvPr><p:ph type="title" /></p:nvPr></p:nvSpPr><p:spPr /><p:txBody><a:bodyPr /><a:lstStyle /><a:p><a:pPr lvl="0" indent="0" marL="0"><a:buNone /></a:pPr><a:r><a:rPr /><a:t>What loses marks reliably</a:t></a:r></a:p></p:txBody></p:sp><p:graphicFrame><p:nvGraphicFramePr><p:cNvPr id="6" name="Content Placeholder 5" /><p:cNvGraphicFramePr><a:graphicFrameLocks noGrp="1" /></p:cNvGraphicFramePr><p:nvPr><p:ph idx="1" /></p:nvPr></p:nvGraphicFramePr><p:xfrm><a:off x="457200" y="1193800" /><a:ext cx="8229600" cy="3390900" /></p:xfrm><a:graphic><a:graphicData uri="http://schemas.openxmlformats.org/drawingml/2006/table"><a:tbl><a:tblPr firstRow="0" bandRow="1"><a:tableStyleId>{5C22544A-7EE6-4342-B048-85BDC9FD1C3A}</a:tableStyleId></a:tblPr><a:tblGrid><a:gridCol w="4114800" /><a:gridCol w="4114800" /></a:tblGrid><a:tr h="0"><a:tc><a:txBody><a:bodyPr /><a:lstStyle /><a:p><a:pPr lvl="0" indent="0" marL="0"><a:buNone /></a:pPr><a:r><a:rPr /><a:t>Default standard errors on panel data</a:t></a:r></a:p></a:txBody></a:tc><a:tc><a:txBody><a:bodyPr /><a:lstStyle /><a:p><a:pPr lvl="0" indent="0" marL="0"><a:buNone /></a:pPr><a:r><a:rPr /><a:t>intervals far too narrow</a:t></a:r></a:p></a:txBody></a:tc></a:tr><a:tr h="0"><a:tc><a:txBody><a:bodyPr /><a:lstStyle /><a:p><a:pPr lvl="0" indent="0" marL="0"><a:buNone /></a:pPr><a:r><a:rPr /><a:t>“Robust SEs” with no cluster level named</a:t></a:r></a:p></a:txBody></a:tc><a:tc><a:txBody><a:bodyPr /><a:lstStyle /><a:p><a:pPr lvl="0" indent="0" marL="0"><a:buNone /></a:pPr><a:r><a:rPr /><a:t>unreproducible</a:t></a:r></a:p></a:txBody></a:tc></a:tr><a:tr h="0"><a:tc><a:txBody><a:bodyPr /><a:lstStyle /><a:p><a:pPr lvl="0" indent="0" marL="0"><a:buNone /></a:pPr><a:r><a:rPr /><a:t>Reading significance off </a:t></a:r><a14:m><m:oMath xmlns:m="http://schemas.openxmlformats.org/officeDocument/2006/math"><m:r><m:t>n</m:t></m:r><m:r><m:rPr><m:sty m:val="p" /></m:rPr><m:t>=</m:t></m:r><m:r><m:t>3</m:t></m:r><m:r><m:rPr><m:sty m:val="p" /></m:rPr><m:t>,</m:t></m:r><m:r><m:t>150</m:t></m:r></m:oMath></a14:m></a:p></a:txBody></a:tc><a:tc><a:txBody><a:bodyPr /><a:lstStyle /><a:p><a:pPr lvl="0" indent="0" marL="0"><a:buNone /></a:pPr><a:r><a:rPr /><a:t>you have 30 independent units</a:t></a:r></a:p></a:txBody></a:tc></a:tr><a:tr h="0"><a:tc><a:txBody><a:bodyPr /><a:lstStyle /><a:p><a:pPr lvl="0" indent="0" marL="0"><a:buNone /></a:pPr><a:r><a:rPr /><a:t>Controlling for everything</a:t></a:r></a:p></a:txBody></a:tc><a:tc><a:txBody><a:bodyPr /><a:lstStyle /><a:p><a:pPr lvl="0" indent="0" marL="0"><a:buNone /></a:pPr><a:r><a:rPr /><a:t>post-treatment bias; uninterpretable coefficients</a:t></a:r></a:p></a:txBody></a:tc></a:tr><a:tr h="0"><a:tc><a:txBody><a:bodyPr /><a:lstStyle /><a:p><a:pPr lvl="0" indent="0" marL="0"><a:buNone /></a:pPr><a:r><a:rPr /><a:t>A </a:t></a:r><a14:m><m:oMath xmlns:m="http://schemas.openxmlformats.org/officeDocument/2006/math"><m:r><m:t>p</m:t></m:r></m:oMath></a14:m><a:r><a:rPr /><a:t>-value reported as an effect size</a:t></a:r></a:p></a:txBody></a:tc><a:tc><a:txBody><a:bodyPr /><a:lstStyle /><a:p><a:pPr lvl="0" indent="0" marL="0"><a:buNone /></a:pPr><a:r><a:rPr /><a:t>give the magnitude, in units</a:t></a:r></a:p></a:txBody></a:tc></a:tr></a:tbl></a:graphicData></a:graphic></p:graphicFrame></p:spTree></p:cSld></p:sld>
+</file>
+
+<file path=ppt/slides/slide4.xml><?xml version="1.0" encoding="utf-8"?>
+<p:sld xmlns:a="http://schemas.openxmlformats.org/drawingml/2006/main" xmlns:r="http://schemas.openxmlformats.org/officeDocument/2006/relationships" xmlns:p="http://schemas.openxmlformats.org/presentationml/2006/main">
+  <p:cSld>
+    <p:spTree>
+      <p:nvGrpSpPr>
+        <p:cNvPr id="1" name=""/>
+        <p:cNvGrpSpPr/>
+        <p:nvPr/>
+      </p:nvGrpSpPr>
+      <p:grpSpPr>
+        <a:xfrm>
+          <a:off x="0" y="0"/>
+          <a:ext cx="0" cy="0"/>
+          <a:chOff x="0" y="0"/>
+          <a:chExt cx="0" cy="0"/>
+        </a:xfrm>
+      </p:grpSpPr>
+      <p:sp>
+        <p:nvSpPr>
+          <p:cNvPr id="2" name="Title 1"/>
+          <p:cNvSpPr>
+            <a:spLocks noGrp="1"/>
+          </p:cNvSpPr>
+          <p:nvPr>
+            <p:ph type="title"/>
+          </p:nvPr>
+        </p:nvSpPr>
+        <p:spPr/>
+        <p:txBody>
+          <a:bodyPr/>
+          <a:lstStyle/>
+          <a:p>
+            <a:pPr lvl="0" indent="0" marL="0">
+              <a:buNone/>
+            </a:pPr>
+            <a:r>
+              <a:rPr/>
+              <a:t>Learning objectives</a:t>
+            </a:r>
+          </a:p>
+        </p:txBody>
+      </p:sp>
+      <mc:AlternateContent xmlns:mc="http://schemas.openxmlformats.org/markup-compatibility/2006">
+        <mc:Choice xmlns:a14="http://schemas.microsoft.com/office/drawing/2010/main" Requires="a14">
+          <p:sp>
+            <p:nvSpPr>
+              <p:cNvPr id="3" name="Content Placeholder 2"/>
+              <p:cNvSpPr>
+                <a:spLocks noGrp="1"/>
+              </p:cNvSpPr>
+              <p:nvPr>
+                <p:ph idx="1"/>
+              </p:nvPr>
+            </p:nvSpPr>
+            <p:spPr/>
+            <p:txBody>
+              <a:bodyPr/>
+              <a:lstStyle/>
+              <a:p>
+                <a:pPr lvl="0"/>
+                <a:r>
+                  <a:rPr/>
+                  <a:t>Decompose </a:t>
+                </a:r>
+                <a14:m>
+                  <m:oMath xmlns:m="http://schemas.openxmlformats.org/officeDocument/2006/math">
+                    <m:acc>
+                      <m:accPr>
+                        <m:chr m:val="̂"/>
+                      </m:accPr>
+                      <m:e>
+                        <m:r>
+                          <m:t>β</m:t>
+                        </m:r>
+                      </m:e>
+                    </m:acc>
+                  </m:oMath>
+                </a14:m>
+                <a:r>
+                  <a:rPr/>
+                  <a:t> into truth plus noise, and see what each assumption buys</a:t>
+                </a:r>
+              </a:p>
+              <a:p>
+                <a:pPr lvl="0"/>
+                <a:r>
+                  <a:rPr/>
+                  <a:t>Read the </a:t>
+                </a:r>
+                <a:r>
+                  <a:rPr b="1"/>
+                  <a:t>four levers</a:t>
+                </a:r>
+                <a:r>
+                  <a:rPr/>
+                  <a:t> in the variance of a single coefficient</a:t>
+                </a:r>
+              </a:p>
+              <a:p>
+                <a:pPr lvl="0"/>
+                <a:r>
+                  <a:rPr/>
+                  <a:t>State </a:t>
+                </a:r>
+                <a:r>
+                  <a:rPr b="1"/>
+                  <a:t>Gauss–Markov</a:t>
+                </a:r>
+                <a:r>
+                  <a:rPr/>
+                  <a:t> and say precisely where it stops applying</a:t>
+                </a:r>
+              </a:p>
+              <a:p>
+                <a:pPr lvl="0"/>
+                <a:r>
+                  <a:rPr/>
+                  <a:t>Compute classical, </a:t>
+                </a:r>
+                <a:r>
+                  <a:rPr b="1"/>
+                  <a:t>HC1</a:t>
+                </a:r>
+                <a:r>
+                  <a:rPr/>
+                  <a:t> and </a:t>
+                </a:r>
+                <a:r>
+                  <a:rPr b="1"/>
+                  <a:t>cluster-robust</a:t>
+                </a:r>
+                <a:r>
+                  <a:rPr/>
+                  <a:t> standard errors, and choose between them</a:t>
+                </a:r>
+              </a:p>
+              <a:p>
+                <a:pPr lvl="0"/>
+                <a:r>
+                  <a:rPr b="1"/>
+                  <a:t>Sign an omitted-variable bias before estimating</a:t>
+                </a:r>
+                <a:r>
+                  <a:rPr/>
+                  <a:t>, then check the prediction</a:t>
+                </a:r>
+              </a:p>
+            </p:txBody>
+          </p:sp>
+        </mc:Choice>
+      </mc:AlternateContent>
+    </p:spTree>
+  </p:cSld>
+</p:sld>
+</file>
+
+<file path=ppt/slides/slide40.xml><?xml version="1.0" encoding="utf-8"?>
+<p:sld xmlns:a="http://schemas.openxmlformats.org/drawingml/2006/main" xmlns:r="http://schemas.openxmlformats.org/officeDocument/2006/relationships" xmlns:p="http://schemas.openxmlformats.org/presentationml/2006/main">
+  <p:cSld>
+    <p:spTree>
+      <p:nvGrpSpPr>
+        <p:cNvPr id="1" name=""/>
+        <p:cNvGrpSpPr/>
+        <p:nvPr/>
+      </p:nvGrpSpPr>
+      <p:grpSpPr>
+        <a:xfrm>
+          <a:off x="0" y="0"/>
+          <a:ext cx="0" cy="0"/>
+          <a:chOff x="0" y="0"/>
+          <a:chExt cx="0" cy="0"/>
+        </a:xfrm>
+      </p:grpSpPr>
+      <p:sp>
+        <p:nvSpPr>
+          <p:cNvPr id="2" name="Title 1"/>
+          <p:cNvSpPr>
+            <a:spLocks noGrp="1"/>
+          </p:cNvSpPr>
+          <p:nvPr>
+            <p:ph type="title"/>
+          </p:nvPr>
+        </p:nvSpPr>
+        <p:spPr/>
+        <p:txBody>
+          <a:bodyPr/>
+          <a:lstStyle/>
+          <a:p>
+            <a:pPr lvl="0" indent="0" marL="0">
+              <a:buNone/>
+            </a:pPr>
+            <a:r>
+              <a:rPr/>
+              <a:t>In the practice session</a:t>
+            </a:r>
+          </a:p>
+        </p:txBody>
+      </p:sp>
+      <p:sp>
+        <p:nvSpPr>
+          <p:cNvPr id="3" name="Content Placeholder 2"/>
+          <p:cNvSpPr>
+            <a:spLocks noGrp="1"/>
+          </p:cNvSpPr>
+          <p:nvPr>
+            <p:ph idx="1"/>
+          </p:nvPr>
+        </p:nvSpPr>
+        <p:spPr/>
+        <p:txBody>
+          <a:bodyPr/>
+          <a:lstStyle/>
+          <a:p>
+            <a:pPr lvl="0" indent="-342900" marL="342900">
+              <a:buAutoNum type="arabicPeriod"/>
+            </a:pPr>
+            <a:r>
+              <a:rPr/>
+              <a:t>Fit the specification; inspect residuals against fitted values</a:t>
+            </a:r>
+          </a:p>
+          <a:p>
+            <a:pPr lvl="0" indent="-342900" marL="342900">
+              <a:buAutoNum type="arabicPeriod"/>
+            </a:pPr>
+            <a:r>
+              <a:rPr/>
+              <a:t>Compute classical, HC1 and cluster-robust standard errors side by side</a:t>
+            </a:r>
+          </a:p>
+          <a:p>
+            <a:pPr lvl="0" indent="-342900" marL="342900">
+              <a:buAutoNum type="arabicPeriod"/>
+            </a:pPr>
+            <a:r>
+              <a:rPr/>
+              <a:t>Name a confounder, </a:t>
+            </a:r>
+            <a:r>
+              <a:rPr b="1"/>
+              <a:t>sign its bias</a:t>
+            </a:r>
+            <a:r>
+              <a:rPr/>
+              <a:t>, then test the prediction</a:t>
+            </a:r>
+          </a:p>
+          <a:p>
+            <a:pPr lvl="0" indent="-342900" marL="342900">
+              <a:buAutoNum type="arabicPeriod"/>
+            </a:pPr>
+            <a:r>
+              <a:rPr/>
+              <a:t>Report the coefficient with the cluster level and the cluster count</a:t>
+            </a:r>
+          </a:p>
+          <a:p>
+            <a:pPr lvl="0" indent="0" marL="0">
+              <a:buNone/>
+            </a:pPr>
+            <a:r>
+              <a:rPr/>
+              <a:t>Brief: </a:t>
+            </a:r>
+            <a:r>
+              <a:rPr>
+                <a:hlinkClick r:id="rId2"/>
+                <a:latin typeface="Courier"/>
+              </a:rPr>
+              <a:t>02-practice/README.md</a:t>
+            </a:r>
+            <a:r>
+              <a:rPr/>
+              <a:t> · derivations: </a:t>
+            </a:r>
+            <a:r>
+              <a:rPr>
+                <a:hlinkClick r:id="rId3"/>
+                <a:latin typeface="Courier"/>
+              </a:rPr>
+              <a:t>01-lecture/README.md</a:t>
+            </a:r>
+            <a:r>
+              <a:rPr/>
+              <a:t> §3.1–3.5</a:t>
+            </a:r>
+          </a:p>
+        </p:txBody>
+      </p:sp>
+    </p:spTree>
+  </p:cSld>
+</p:sld>
+</file>
+
+<file path=ppt/slides/slide5.xml><?xml version="1.0" encoding="utf-8"?>
+<p:sld xmlns:a="http://schemas.openxmlformats.org/drawingml/2006/main" xmlns:r="http://schemas.openxmlformats.org/officeDocument/2006/relationships" xmlns:p="http://schemas.openxmlformats.org/presentationml/2006/main">
+  <p:cSld>
+    <p:spTree>
+      <p:nvGrpSpPr>
+        <p:cNvPr id="1" name=""/>
+        <p:cNvGrpSpPr/>
+        <p:nvPr/>
+      </p:nvGrpSpPr>
+      <p:grpSpPr>
+        <a:xfrm>
+          <a:off x="0" y="0"/>
+          <a:ext cx="0" cy="0"/>
+          <a:chOff x="0" y="0"/>
+          <a:chExt cx="0" cy="0"/>
+        </a:xfrm>
+      </p:grpSpPr>
+      <p:sp>
+        <p:nvSpPr>
+          <p:cNvPr id="2" name="Title 1"/>
+          <p:cNvSpPr>
+            <a:spLocks noGrp="1"/>
+          </p:cNvSpPr>
+          <p:nvPr>
+            <p:ph type="title"/>
+          </p:nvPr>
+        </p:nvSpPr>
+        <p:spPr>
+          <a:xfrm>
+            <a:off x="722313" y="1850000"/>
+            <a:ext cx="7772400" cy="1300000"/>
+          </a:xfrm>
+        </p:spPr>
+        <p:txBody>
+          <a:bodyPr/>
+          <a:lstStyle/>
+          <a:p>
+            <a:pPr lvl="0" indent="0" marL="0">
+              <a:buNone/>
+            </a:pPr>
+            <a:r>
+              <a:rPr/>
+              <a:t>1 · What this adds</a:t>
+            </a:r>
+          </a:p>
+        </p:txBody>
+      </p:sp>
+    </p:spTree>
+  </p:cSld>
+</p:sld>
+</file>
+
+<file path=ppt/slides/slide6.xml><?xml version="1.0" encoding="utf-8"?>
+<p:sld xmlns:a="http://schemas.openxmlformats.org/drawingml/2006/main" xmlns:r="http://schemas.openxmlformats.org/officeDocument/2006/relationships" xmlns:p="http://schemas.openxmlformats.org/presentationml/2006/main">
+  <p:cSld>
+    <p:spTree>
+      <p:nvGrpSpPr>
+        <p:cNvPr id="1" name=""/>
+        <p:cNvGrpSpPr/>
+        <p:nvPr/>
+      </p:nvGrpSpPr>
+      <p:grpSpPr>
+        <a:xfrm>
+          <a:off x="0" y="0"/>
+          <a:ext cx="0" cy="0"/>
+          <a:chOff x="0" y="0"/>
+          <a:chExt cx="0" cy="0"/>
+        </a:xfrm>
+      </p:grpSpPr>
+      <p:sp>
+        <p:nvSpPr>
+          <p:cNvPr id="2" name="Title 1"/>
+          <p:cNvSpPr>
+            <a:spLocks noGrp="1"/>
+          </p:cNvSpPr>
+          <p:nvPr>
+            <p:ph type="title"/>
+          </p:nvPr>
+        </p:nvSpPr>
+        <p:spPr/>
+        <p:txBody>
+          <a:bodyPr/>
+          <a:lstStyle/>
+          <a:p>
+            <a:pPr lvl="0" indent="0" marL="0">
+              <a:buNone/>
+            </a:pPr>
+            <a:r>
+              <a:rPr/>
+              <a:t>Session 02 gave you a number</a:t>
+            </a:r>
+          </a:p>
+        </p:txBody>
+      </p:sp>
+      <p:sp>
+        <p:nvSpPr>
+          <p:cNvPr id="3" name="Content Placeholder 2"/>
+          <p:cNvSpPr>
+            <a:spLocks noGrp="1"/>
+          </p:cNvSpPr>
+          <p:nvPr>
+            <p:ph idx="1"/>
+          </p:nvPr>
+        </p:nvSpPr>
+        <p:spPr/>
+        <p:txBody>
+          <a:bodyPr/>
+          <a:lstStyle/>
+          <a:p>
+            <a:pPr lvl="0" indent="0" marL="0">
+              <a:buNone/>
+            </a:pPr>
+            <a:r>
+              <a:rPr/>
+              <a:t>You can now fit a line and say exactly what it optimises.</a:t>
+            </a:r>
+          </a:p>
+          <a:p>
+            <a:pPr lvl="0" indent="0" marL="0">
+              <a:buNone/>
+            </a:pPr>
+            <a:r>
+              <a:rPr/>
+              <a:t>What you cannot yet say is whether that number would survive a different sample — and therefore whether it means anything at all.</a:t>
+            </a:r>
+          </a:p>
+        </p:txBody>
+      </p:sp>
+    </p:spTree>
+  </p:cSld>
+</p:sld>
+</file>
+
+<file path=ppt/slides/slide7.xml><?xml version="1.0" encoding="UTF-8"?><p:sld xmlns:a="http://schemas.openxmlformats.org/drawingml/2006/main" xmlns:r="http://schemas.openxmlformats.org/officeDocument/2006/relationships" xmlns:p="http://schemas.openxmlformats.org/presentationml/2006/main"><p:cSld><p:spTree><p:nvGrpSpPr><p:cNvPr id="1" name="" /><p:cNvGrpSpPr /><p:nvPr /></p:nvGrpSpPr><p:grpSpPr><a:xfrm><a:off x="0" y="0" /><a:ext cx="0" cy="0" /><a:chOff x="0" y="0" /><a:chExt cx="0" cy="0" /></a:xfrm></p:grpSpPr><p:sp><p:nvSpPr><p:cNvPr id="2" name="Title 1" /><p:cNvSpPr><a:spLocks noGrp="1" /></p:cNvSpPr><p:nvPr><p:ph type="title" /></p:nvPr></p:nvSpPr><p:spPr /><p:txBody><a:bodyPr /><a:lstStyle /><a:p><a:pPr lvl="0" indent="0" marL="0"><a:buNone /></a:pPr><a:r><a:rPr /><a:t>What today adds</a:t></a:r></a:p></p:txBody></p:sp><p:graphicFrame><p:nvGraphicFramePr><p:cNvPr id="6" name="Content Placeholder 5" /><p:cNvGraphicFramePr><a:graphicFrameLocks noGrp="1" /></p:cNvGraphicFramePr><p:nvPr><p:ph idx="1" /></p:nvPr></p:nvGraphicFramePr><p:xfrm><a:off x="457200" y="1193800" /><a:ext cx="8229600" cy="3390900" /></p:xfrm><a:graphic><a:graphicData uri="http://schemas.openxmlformats.org/drawingml/2006/table"><a:tbl><a:tblPr firstRow="1" bandRow="1"><a:tableStyleId>{5C22544A-7EE6-4342-B048-85BDC9FD1C3A}</a:tableStyleId></a:tblPr><a:tblGrid><a:gridCol w="4114800" /><a:gridCol w="4114800" /></a:tblGrid><a:tr h="0"><a:tc><a:txBody><a:bodyPr /><a:lstStyle /><a:p><a:pPr lvl="0" indent="0" marL="0"><a:buNone /></a:pPr><a:r><a:rPr /><a:t>Session 02</a:t></a:r></a:p></a:txBody><a:tcPr /></a:tc><a:tc><a:txBody><a:bodyPr /><a:lstStyle /><a:p><a:pPr lvl="0" indent="0" marL="0"><a:buNone /></a:pPr><a:r><a:rPr /><a:t>Session 03</a:t></a:r></a:p></a:txBody><a:tcPr /></a:tc></a:tr><a:tr h="0"><a:tc><a:txBody><a:bodyPr /><a:lstStyle /><a:p><a:pPr lvl="0" indent="0" marL="0"><a:buNone /></a:pPr><a14:m><m:oMath xmlns:m="http://schemas.openxmlformats.org/officeDocument/2006/math"><m:acc><m:accPr><m:chr m:val="̂" /></m:accPr><m:e><m:r><m:t>β</m:t></m:r></m:e></m:acc></m:oMath></a14:m></a:p></a:txBody></a:tc><a:tc><a:txBody><a:bodyPr /><a:lstStyle /><a:p><a:pPr lvl="0" indent="0" marL="0"><a:buNone /></a:pPr><a:r><a:rPr /><a:t>a standard error that is actually correct</a:t></a:r></a:p></a:txBody></a:tc></a:tr><a:tr h="0"><a:tc><a:txBody><a:bodyPr /><a:lstStyle /><a:p><a:pPr lvl="0" indent="0" marL="0"><a:buNone /></a:pPr><a:r><a:rPr /><a:t>The projection</a:t></a:r></a:p></a:txBody></a:tc><a:tc><a:txBody><a:bodyPr /><a:lstStyle /><a:p><a:pPr lvl="0" indent="0" marL="0"><a:buNone /></a:pPr><a:r><a:rPr /><a:t>the </a:t></a:r><a:r><a:rPr i="1" /><a:t>sampling distribution</a:t></a:r><a:r><a:rPr /><a:t> of the projection</a:t></a:r></a:p></a:txBody></a:tc></a:tr><a:tr h="0"><a:tc><a:txBody><a:bodyPr /><a:lstStyle /><a:p><a:pPr lvl="0" indent="0" marL="0"><a:buNone /></a:pPr><a:r><a:rPr /><a:t>“Controlling for” as geometry</a:t></a:r></a:p></a:txBody></a:tc><a:tc><a:txBody><a:bodyPr /><a:lstStyle /><a:p><a:pPr lvl="0" indent="0" marL="0"><a:buNone /></a:pPr><a:r><a:rPr /><a:t>what happens when you control for the </a:t></a:r><a:r><a:rPr b="1" /><a:t>wrong</a:t></a:r><a:r><a:rPr /><a:t> things</a:t></a:r></a:p></a:txBody></a:tc></a:tr><a:tr h="0"><a:tc><a:txBody><a:bodyPr /><a:lstStyle /><a:p><a:pPr lvl="0" indent="0" marL="0"><a:buNone /></a:pPr><a:r><a:rPr /><a:t>One dataset</a:t></a:r></a:p></a:txBody></a:tc><a:tc><a:txBody><a:bodyPr /><a:lstStyle /><a:p><a:pPr lvl="0" indent="0" marL="0"><a:buNone /></a:pPr><a:r><a:rPr /><a:t>the thought experiment of many datasets</a:t></a:r></a:p></a:txBody></a:tc></a:tr></a:tbl></a:graphicData></a:graphic></p:graphicFrame></p:spTree></p:cSld></p:sld>
+</file>
+
+<file path=ppt/slides/slide8.xml><?xml version="1.0" encoding="utf-8"?>
+<p:sld xmlns:a="http://schemas.openxmlformats.org/drawingml/2006/main" xmlns:r="http://schemas.openxmlformats.org/officeDocument/2006/relationships" xmlns:p="http://schemas.openxmlformats.org/presentationml/2006/main">
+  <p:cSld>
+    <p:spTree>
+      <p:nvGrpSpPr>
+        <p:cNvPr id="1" name=""/>
+        <p:cNvGrpSpPr/>
+        <p:nvPr/>
+      </p:nvGrpSpPr>
+      <p:grpSpPr>
+        <a:xfrm>
+          <a:off x="0" y="0"/>
+          <a:ext cx="0" cy="0"/>
+          <a:chOff x="0" y="0"/>
+          <a:chExt cx="0" cy="0"/>
+        </a:xfrm>
+      </p:grpSpPr>
+      <p:sp>
+        <p:nvSpPr>
+          <p:cNvPr id="3" name="Content Placeholder 2"/>
+          <p:cNvSpPr>
+            <a:spLocks noGrp="1"/>
+          </p:cNvSpPr>
+          <p:nvPr>
+            <p:ph idx="1"/>
+          </p:nvPr>
+        </p:nvSpPr>
+        <p:spPr/>
+        <p:txBody>
+          <a:bodyPr/>
+          <a:lstStyle/>
+          <a:p>
+            <a:pPr lvl="0" indent="0" marL="0">
+              <a:buNone/>
+            </a:pPr>
+            <a:r>
+              <a:rPr/>
+              <a:t>Session 02 was deterministic linear algebra. </a:t>
+            </a:r>
+            <a:r>
+              <a:rPr b="1"/>
+              <a:t>Session 03 is where randomness enters</a:t>
+            </a:r>
+            <a:r>
+              <a:rPr/>
+              <a:t> — and almost everything that goes wrong in applied work goes wrong here.</a:t>
+            </a:r>
+          </a:p>
+        </p:txBody>
+      </p:sp>
+    </p:spTree>
+  </p:cSld>
+</p:sld>
+</file>
+
+<file path=ppt/slides/slide9.xml><?xml version="1.0" encoding="utf-8"?>
+<p:sld xmlns:a="http://schemas.openxmlformats.org/drawingml/2006/main" xmlns:r="http://schemas.openxmlformats.org/officeDocument/2006/relationships" xmlns:p="http://schemas.openxmlformats.org/presentationml/2006/main">
+  <p:cSld>
+    <p:spTree>
+      <p:nvGrpSpPr>
+        <p:cNvPr id="1" name=""/>
+        <p:cNvGrpSpPr/>
+        <p:nvPr/>
+      </p:nvGrpSpPr>
+      <p:grpSpPr>
+        <a:xfrm>
+          <a:off x="0" y="0"/>
+          <a:ext cx="0" cy="0"/>
+          <a:chOff x="0" y="0"/>
+          <a:chExt cx="0" cy="0"/>
+        </a:xfrm>
+      </p:grpSpPr>
+      <p:sp>
+        <p:nvSpPr>
+          <p:cNvPr id="2" name="Title 1"/>
+          <p:cNvSpPr>
+            <a:spLocks noGrp="1"/>
+          </p:cNvSpPr>
+          <p:nvPr>
+            <p:ph type="title"/>
+          </p:nvPr>
+        </p:nvSpPr>
+        <p:spPr>
+          <a:xfrm>
+            <a:off x="722313" y="1850000"/>
+            <a:ext cx="7772400" cy="1300000"/>
+          </a:xfrm>
+        </p:spPr>
+        <p:txBody>
+          <a:bodyPr/>
+          <a:lstStyle/>
+          <a:p>
+            <a:pPr lvl="0" indent="0" marL="0">
+              <a:buNone/>
+            </a:pPr>
+            <a:r>
+              <a:rPr/>
+              <a:t>2 · The sampling distribution</a:t>
+            </a:r>
+          </a:p>
+        </p:txBody>
+      </p:sp>
     </p:spTree>
   </p:cSld>
 </p:sld>
